--- a/lectures/week02/slides-draft-w2.pptx
+++ b/lectures/week02/slides-draft-w2.pptx
@@ -5768,7 +5768,7 @@
                 </a:solidFill>
                 <a:latin typeface="Arial"/>
               </a:rPr>
-              <a:t>●  Presentation: Chain-of-Thought (Wei et al., 2022) — improvement by prompting alone, and the emergence curve. First student presentation.</a:t>
+              <a:t>●  Presentations (first student week, two papers): Chain-of-Thought (Wei et al., 2022) — prompting-only gains and the emergence curve; Self-Consistency (Wang et al., 2022) — sample-and-vote, the method of this lecture's Part E.</a:t>
             </a:r>
           </a:p>
           <a:p>

--- a/lectures/week02/slides-draft-w2.pptx
+++ b/lectures/week02/slides-draft-w2.pptx
@@ -7,34 +7,34 @@
   <p:sldIdLst>
     <p:sldId id="256" r:id="rId7"/>
     <p:sldId id="257" r:id="rId8"/>
-    <p:sldId id="258" r:id="rId9"/>
-    <p:sldId id="259" r:id="rId10"/>
-    <p:sldId id="260" r:id="rId11"/>
-    <p:sldId id="261" r:id="rId12"/>
-    <p:sldId id="262" r:id="rId13"/>
-    <p:sldId id="263" r:id="rId14"/>
-    <p:sldId id="264" r:id="rId15"/>
-    <p:sldId id="265" r:id="rId16"/>
-    <p:sldId id="266" r:id="rId17"/>
-    <p:sldId id="267" r:id="rId18"/>
-    <p:sldId id="268" r:id="rId19"/>
-    <p:sldId id="269" r:id="rId20"/>
-    <p:sldId id="270" r:id="rId21"/>
-    <p:sldId id="271" r:id="rId22"/>
-    <p:sldId id="272" r:id="rId23"/>
-    <p:sldId id="273" r:id="rId24"/>
-    <p:sldId id="274" r:id="rId25"/>
-    <p:sldId id="275" r:id="rId26"/>
-    <p:sldId id="276" r:id="rId27"/>
-    <p:sldId id="277" r:id="rId28"/>
-    <p:sldId id="278" r:id="rId29"/>
-    <p:sldId id="279" r:id="rId30"/>
-    <p:sldId id="280" r:id="rId31"/>
-    <p:sldId id="281" r:id="rId32"/>
-    <p:sldId id="282" r:id="rId33"/>
-    <p:sldId id="283" r:id="rId34"/>
-    <p:sldId id="284" r:id="rId35"/>
-    <p:sldId id="285" r:id="rId36"/>
+    <p:sldId id="258" r:id="rId10"/>
+    <p:sldId id="259" r:id="rId11"/>
+    <p:sldId id="260" r:id="rId12"/>
+    <p:sldId id="261" r:id="rId13"/>
+    <p:sldId id="262" r:id="rId14"/>
+    <p:sldId id="263" r:id="rId15"/>
+    <p:sldId id="264" r:id="rId16"/>
+    <p:sldId id="265" r:id="rId17"/>
+    <p:sldId id="266" r:id="rId18"/>
+    <p:sldId id="267" r:id="rId19"/>
+    <p:sldId id="268" r:id="rId20"/>
+    <p:sldId id="269" r:id="rId21"/>
+    <p:sldId id="270" r:id="rId22"/>
+    <p:sldId id="271" r:id="rId23"/>
+    <p:sldId id="272" r:id="rId24"/>
+    <p:sldId id="273" r:id="rId25"/>
+    <p:sldId id="274" r:id="rId26"/>
+    <p:sldId id="275" r:id="rId27"/>
+    <p:sldId id="276" r:id="rId28"/>
+    <p:sldId id="277" r:id="rId29"/>
+    <p:sldId id="278" r:id="rId30"/>
+    <p:sldId id="279" r:id="rId31"/>
+    <p:sldId id="280" r:id="rId32"/>
+    <p:sldId id="281" r:id="rId33"/>
+    <p:sldId id="282" r:id="rId34"/>
+    <p:sldId id="283" r:id="rId35"/>
+    <p:sldId id="284" r:id="rId36"/>
+    <p:sldId id="285" r:id="rId37"/>
   </p:sldIdLst>
   <p:sldSz cx="9144000" cy="5143500" type="screen4x3"/>
   <p:notesSz cx="6858000" cy="9144000"/>
@@ -134,6 +134,566 @@
     </a:lvl9pPr>
   </p:defaultTextStyle>
 </p:presentation>
+</file>
+
+<file path=ppt/notesMasters/notesMaster1.xml><?xml version="1.0" encoding="utf-8"?>
+<p:notesMaster xmlns:a="http://schemas.openxmlformats.org/drawingml/2006/main" xmlns:p="http://schemas.openxmlformats.org/presentationml/2006/main" xmlns:r="http://schemas.openxmlformats.org/officeDocument/2006/relationships">
+  <p:cSld>
+    <p:bg>
+      <p:bgRef idx="1001">
+        <a:schemeClr val="bg1"/>
+      </p:bgRef>
+    </p:bg>
+    <p:spTree>
+      <p:nvGrpSpPr>
+        <p:cNvPr id="1" name=""/>
+        <p:cNvGrpSpPr/>
+        <p:nvPr/>
+      </p:nvGrpSpPr>
+      <p:grpSpPr>
+        <a:xfrm>
+          <a:off x="0" y="0"/>
+          <a:ext cx="0" cy="0"/>
+          <a:chOff x="0" y="0"/>
+          <a:chExt cx="0" cy="0"/>
+        </a:xfrm>
+      </p:grpSpPr>
+      <p:sp>
+        <p:nvSpPr>
+          <p:cNvPr id="2" name="Header Placeholder 1"/>
+          <p:cNvSpPr>
+            <a:spLocks noGrp="1"/>
+          </p:cNvSpPr>
+          <p:nvPr>
+            <p:ph type="hdr" sz="quarter"/>
+          </p:nvPr>
+        </p:nvSpPr>
+        <p:spPr>
+          <a:xfrm>
+            <a:off x="0" y="0"/>
+            <a:ext cx="2971800" cy="457200"/>
+          </a:xfrm>
+          <a:prstGeom prst="rect">
+            <a:avLst/>
+          </a:prstGeom>
+        </p:spPr>
+        <p:txBody>
+          <a:bodyPr vert="horz" lIns="91440" tIns="45720" rIns="91440" bIns="45720" rtlCol="0"/>
+          <a:lstStyle>
+            <a:lvl1pPr algn="l">
+              <a:defRPr sz="1200"/>
+            </a:lvl1pPr>
+          </a:lstStyle>
+          <a:p>
+            <a:endParaRPr lang="en-US"/>
+          </a:p>
+        </p:txBody>
+      </p:sp>
+      <p:sp>
+        <p:nvSpPr>
+          <p:cNvPr id="3" name="Date Placeholder 2"/>
+          <p:cNvSpPr>
+            <a:spLocks noGrp="1"/>
+          </p:cNvSpPr>
+          <p:nvPr>
+            <p:ph type="dt" idx="1"/>
+          </p:nvPr>
+        </p:nvSpPr>
+        <p:spPr>
+          <a:xfrm>
+            <a:off x="3884613" y="0"/>
+            <a:ext cx="2971800" cy="457200"/>
+          </a:xfrm>
+          <a:prstGeom prst="rect">
+            <a:avLst/>
+          </a:prstGeom>
+        </p:spPr>
+        <p:txBody>
+          <a:bodyPr vert="horz" lIns="91440" tIns="45720" rIns="91440" bIns="45720" rtlCol="0"/>
+          <a:lstStyle>
+            <a:lvl1pPr algn="r">
+              <a:defRPr sz="1200"/>
+            </a:lvl1pPr>
+          </a:lstStyle>
+          <a:p>
+            <a:fld id="{0F89C1C7-3DCD-1040-A9CF-14679D8B5DDD}" type="datetimeFigureOut">
+              <a:rPr lang="en-US" smtClean="0"/>
+              <a:t>10/17/16</a:t>
+            </a:fld>
+            <a:endParaRPr lang="en-US"/>
+          </a:p>
+        </p:txBody>
+      </p:sp>
+      <p:sp>
+        <p:nvSpPr>
+          <p:cNvPr id="4" name="Slide Image Placeholder 3"/>
+          <p:cNvSpPr>
+            <a:spLocks noGrp="1" noRot="1" noChangeAspect="1"/>
+          </p:cNvSpPr>
+          <p:nvPr>
+            <p:ph type="sldImg" idx="2"/>
+          </p:nvPr>
+        </p:nvSpPr>
+        <p:spPr>
+          <a:xfrm>
+            <a:off x="1143000" y="685800"/>
+            <a:ext cx="4572000" cy="3429000"/>
+          </a:xfrm>
+          <a:prstGeom prst="rect">
+            <a:avLst/>
+          </a:prstGeom>
+          <a:noFill/>
+          <a:ln w="12700">
+            <a:solidFill>
+              <a:prstClr val="black"/>
+            </a:solidFill>
+          </a:ln>
+        </p:spPr>
+        <p:txBody>
+          <a:bodyPr vert="horz" lIns="91440" tIns="45720" rIns="91440" bIns="45720" rtlCol="0" anchor="ctr"/>
+          <a:lstStyle/>
+          <a:p>
+            <a:endParaRPr lang="en-US"/>
+          </a:p>
+        </p:txBody>
+      </p:sp>
+      <p:sp>
+        <p:nvSpPr>
+          <p:cNvPr id="5" name="Notes Placeholder 4"/>
+          <p:cNvSpPr>
+            <a:spLocks noGrp="1"/>
+          </p:cNvSpPr>
+          <p:nvPr>
+            <p:ph type="body" sz="quarter" idx="3"/>
+          </p:nvPr>
+        </p:nvSpPr>
+        <p:spPr>
+          <a:xfrm>
+            <a:off x="685800" y="4343400"/>
+            <a:ext cx="5486400" cy="4114800"/>
+          </a:xfrm>
+          <a:prstGeom prst="rect">
+            <a:avLst/>
+          </a:prstGeom>
+        </p:spPr>
+        <p:txBody>
+          <a:bodyPr vert="horz" lIns="91440" tIns="45720" rIns="91440" bIns="45720" rtlCol="0"/>
+          <a:lstStyle/>
+          <a:p>
+            <a:pPr lvl="0"/>
+            <a:r>
+              <a:rPr lang="en-US" smtClean="0"/>
+              <a:t>Click to edit Master text styles</a:t>
+            </a:r>
+          </a:p>
+          <a:p>
+            <a:pPr lvl="1"/>
+            <a:r>
+              <a:rPr lang="en-US" smtClean="0"/>
+              <a:t>Second level</a:t>
+            </a:r>
+          </a:p>
+          <a:p>
+            <a:pPr lvl="2"/>
+            <a:r>
+              <a:rPr lang="en-US" smtClean="0"/>
+              <a:t>Third level</a:t>
+            </a:r>
+          </a:p>
+          <a:p>
+            <a:pPr lvl="3"/>
+            <a:r>
+              <a:rPr lang="en-US" smtClean="0"/>
+              <a:t>Fourth level</a:t>
+            </a:r>
+          </a:p>
+          <a:p>
+            <a:pPr lvl="4"/>
+            <a:r>
+              <a:rPr lang="en-US" smtClean="0"/>
+              <a:t>Fifth level</a:t>
+            </a:r>
+            <a:endParaRPr lang="en-US"/>
+          </a:p>
+        </p:txBody>
+      </p:sp>
+      <p:sp>
+        <p:nvSpPr>
+          <p:cNvPr id="6" name="Footer Placeholder 5"/>
+          <p:cNvSpPr>
+            <a:spLocks noGrp="1"/>
+          </p:cNvSpPr>
+          <p:nvPr>
+            <p:ph type="ftr" sz="quarter" idx="4"/>
+          </p:nvPr>
+        </p:nvSpPr>
+        <p:spPr>
+          <a:xfrm>
+            <a:off x="0" y="8685213"/>
+            <a:ext cx="2971800" cy="457200"/>
+          </a:xfrm>
+          <a:prstGeom prst="rect">
+            <a:avLst/>
+          </a:prstGeom>
+        </p:spPr>
+        <p:txBody>
+          <a:bodyPr vert="horz" lIns="91440" tIns="45720" rIns="91440" bIns="45720" rtlCol="0" anchor="b"/>
+          <a:lstStyle>
+            <a:lvl1pPr algn="l">
+              <a:defRPr sz="1200"/>
+            </a:lvl1pPr>
+          </a:lstStyle>
+          <a:p>
+            <a:endParaRPr lang="en-US"/>
+          </a:p>
+        </p:txBody>
+      </p:sp>
+      <p:sp>
+        <p:nvSpPr>
+          <p:cNvPr id="7" name="Slide Number Placeholder 6"/>
+          <p:cNvSpPr>
+            <a:spLocks noGrp="1"/>
+          </p:cNvSpPr>
+          <p:nvPr>
+            <p:ph type="sldNum" sz="quarter" idx="5"/>
+          </p:nvPr>
+        </p:nvSpPr>
+        <p:spPr>
+          <a:xfrm>
+            <a:off x="3884613" y="8685213"/>
+            <a:ext cx="2971800" cy="457200"/>
+          </a:xfrm>
+          <a:prstGeom prst="rect">
+            <a:avLst/>
+          </a:prstGeom>
+        </p:spPr>
+        <p:txBody>
+          <a:bodyPr vert="horz" lIns="91440" tIns="45720" rIns="91440" bIns="45720" rtlCol="0" anchor="b"/>
+          <a:lstStyle>
+            <a:lvl1pPr algn="r">
+              <a:defRPr sz="1200"/>
+            </a:lvl1pPr>
+          </a:lstStyle>
+          <a:p>
+            <a:fld id="{BB5E49A5-4136-284D-997B-48E1D791AD67}" type="slidenum">
+              <a:rPr lang="en-US" smtClean="0"/>
+              <a:t>‹#›</a:t>
+            </a:fld>
+            <a:endParaRPr lang="en-US"/>
+          </a:p>
+        </p:txBody>
+      </p:sp>
+    </p:spTree>
+    <p:extLst>
+      <p:ext uri="{BB962C8B-B14F-4D97-AF65-F5344CB8AC3E}">
+        <p14:creationId xmlns:p14="http://schemas.microsoft.com/office/powerpoint/2010/main" val="2623252185"/>
+      </p:ext>
+    </p:extLst>
+  </p:cSld>
+  <p:clrMap bg1="lt1" tx1="dk1" bg2="lt2" tx2="dk2" accent1="accent1" accent2="accent2" accent3="accent3" accent4="accent4" accent5="accent5" accent6="accent6" hlink="hlink" folHlink="folHlink"/>
+  <p:notesStyle>
+    <a:lvl1pPr marL="0" algn="l" defTabSz="457200" rtl="0" eaLnBrk="1" latinLnBrk="0" hangingPunct="1">
+      <a:defRPr sz="1200" kern="1200">
+        <a:solidFill>
+          <a:schemeClr val="tx1"/>
+        </a:solidFill>
+        <a:latin typeface="+mn-lt"/>
+        <a:ea typeface="+mn-ea"/>
+        <a:cs typeface="+mn-cs"/>
+      </a:defRPr>
+    </a:lvl1pPr>
+    <a:lvl2pPr marL="457200" algn="l" defTabSz="457200" rtl="0" eaLnBrk="1" latinLnBrk="0" hangingPunct="1">
+      <a:defRPr sz="1200" kern="1200">
+        <a:solidFill>
+          <a:schemeClr val="tx1"/>
+        </a:solidFill>
+        <a:latin typeface="+mn-lt"/>
+        <a:ea typeface="+mn-ea"/>
+        <a:cs typeface="+mn-cs"/>
+      </a:defRPr>
+    </a:lvl2pPr>
+    <a:lvl3pPr marL="914400" algn="l" defTabSz="457200" rtl="0" eaLnBrk="1" latinLnBrk="0" hangingPunct="1">
+      <a:defRPr sz="1200" kern="1200">
+        <a:solidFill>
+          <a:schemeClr val="tx1"/>
+        </a:solidFill>
+        <a:latin typeface="+mn-lt"/>
+        <a:ea typeface="+mn-ea"/>
+        <a:cs typeface="+mn-cs"/>
+      </a:defRPr>
+    </a:lvl3pPr>
+    <a:lvl4pPr marL="1371600" algn="l" defTabSz="457200" rtl="0" eaLnBrk="1" latinLnBrk="0" hangingPunct="1">
+      <a:defRPr sz="1200" kern="1200">
+        <a:solidFill>
+          <a:schemeClr val="tx1"/>
+        </a:solidFill>
+        <a:latin typeface="+mn-lt"/>
+        <a:ea typeface="+mn-ea"/>
+        <a:cs typeface="+mn-cs"/>
+      </a:defRPr>
+    </a:lvl4pPr>
+    <a:lvl5pPr marL="1828800" algn="l" defTabSz="457200" rtl="0" eaLnBrk="1" latinLnBrk="0" hangingPunct="1">
+      <a:defRPr sz="1200" kern="1200">
+        <a:solidFill>
+          <a:schemeClr val="tx1"/>
+        </a:solidFill>
+        <a:latin typeface="+mn-lt"/>
+        <a:ea typeface="+mn-ea"/>
+        <a:cs typeface="+mn-cs"/>
+      </a:defRPr>
+    </a:lvl5pPr>
+    <a:lvl6pPr marL="2286000" algn="l" defTabSz="457200" rtl="0" eaLnBrk="1" latinLnBrk="0" hangingPunct="1">
+      <a:defRPr sz="1200" kern="1200">
+        <a:solidFill>
+          <a:schemeClr val="tx1"/>
+        </a:solidFill>
+        <a:latin typeface="+mn-lt"/>
+        <a:ea typeface="+mn-ea"/>
+        <a:cs typeface="+mn-cs"/>
+      </a:defRPr>
+    </a:lvl6pPr>
+    <a:lvl7pPr marL="2743200" algn="l" defTabSz="457200" rtl="0" eaLnBrk="1" latinLnBrk="0" hangingPunct="1">
+      <a:defRPr sz="1200" kern="1200">
+        <a:solidFill>
+          <a:schemeClr val="tx1"/>
+        </a:solidFill>
+        <a:latin typeface="+mn-lt"/>
+        <a:ea typeface="+mn-ea"/>
+        <a:cs typeface="+mn-cs"/>
+      </a:defRPr>
+    </a:lvl7pPr>
+    <a:lvl8pPr marL="3200400" algn="l" defTabSz="457200" rtl="0" eaLnBrk="1" latinLnBrk="0" hangingPunct="1">
+      <a:defRPr sz="1200" kern="1200">
+        <a:solidFill>
+          <a:schemeClr val="tx1"/>
+        </a:solidFill>
+        <a:latin typeface="+mn-lt"/>
+        <a:ea typeface="+mn-ea"/>
+        <a:cs typeface="+mn-cs"/>
+      </a:defRPr>
+    </a:lvl8pPr>
+    <a:lvl9pPr marL="3657600" algn="l" defTabSz="457200" rtl="0" eaLnBrk="1" latinLnBrk="0" hangingPunct="1">
+      <a:defRPr sz="1200" kern="1200">
+        <a:solidFill>
+          <a:schemeClr val="tx1"/>
+        </a:solidFill>
+        <a:latin typeface="+mn-lt"/>
+        <a:ea typeface="+mn-ea"/>
+        <a:cs typeface="+mn-cs"/>
+      </a:defRPr>
+    </a:lvl9pPr>
+  </p:notesStyle>
+</p:notesMaster>
+</file>
+
+<file path=ppt/notesSlides/notesSlide1.xml><?xml version="1.0" encoding="utf-8"?>
+<p:notes xmlns:a="http://schemas.openxmlformats.org/drawingml/2006/main" xmlns:p="http://schemas.openxmlformats.org/presentationml/2006/main" xmlns:r="http://schemas.openxmlformats.org/officeDocument/2006/relationships">
+  <p:cSld>
+    <p:spTree>
+      <p:nvGrpSpPr>
+        <p:cNvPr id="1" name=""/>
+        <p:cNvGrpSpPr/>
+        <p:nvPr/>
+      </p:nvGrpSpPr>
+      <p:grpSpPr>
+        <a:xfrm>
+          <a:off x="0" y="0"/>
+          <a:ext cx="0" cy="0"/>
+          <a:chOff x="0" y="0"/>
+          <a:chExt cx="0" cy="0"/>
+        </a:xfrm>
+      </p:grpSpPr>
+      <p:sp>
+        <p:nvSpPr>
+          <p:cNvPr id="2" name="Slide Image Placeholder 1"/>
+          <p:cNvSpPr>
+            <a:spLocks noGrp="1"/>
+          </p:cNvSpPr>
+          <p:nvPr>
+            <p:ph type="sldImg" idx="2"/>
+          </p:nvPr>
+        </p:nvSpPr>
+        <p:spPr/>
+      </p:sp>
+      <p:sp>
+        <p:nvSpPr>
+          <p:cNvPr id="3" name="Notes Placeholder 2"/>
+          <p:cNvSpPr>
+            <a:spLocks noGrp="1"/>
+          </p:cNvSpPr>
+          <p:nvPr>
+            <p:ph type="body" idx="3" sz="quarter"/>
+          </p:nvPr>
+        </p:nvSpPr>
+        <p:spPr/>
+        <p:txBody>
+          <a:bodyPr/>
+          <a:lstStyle/>
+          <a:p>
+            <a:r>
+              <a:t>30 min theory, then two presentations (CoT, Self-Consistency), then the lab.</a:t>
+            </a:r>
+          </a:p>
+        </p:txBody>
+      </p:sp>
+      <p:sp>
+        <p:nvSpPr>
+          <p:cNvPr id="4" name="Slide Number Placeholder 3"/>
+          <p:cNvSpPr>
+            <a:spLocks noGrp="1"/>
+          </p:cNvSpPr>
+          <p:nvPr>
+            <p:ph type="sldNum" idx="5" sz="quarter"/>
+          </p:nvPr>
+        </p:nvSpPr>
+        <p:spPr/>
+      </p:sp>
+    </p:spTree>
+  </p:cSld>
+  <p:clrMapOvr>
+    <a:masterClrMapping/>
+  </p:clrMapOvr>
+</p:notes>
+</file>
+
+<file path=ppt/notesSlides/notesSlide2.xml><?xml version="1.0" encoding="utf-8"?>
+<p:notes xmlns:a="http://schemas.openxmlformats.org/drawingml/2006/main" xmlns:p="http://schemas.openxmlformats.org/presentationml/2006/main" xmlns:r="http://schemas.openxmlformats.org/officeDocument/2006/relationships">
+  <p:cSld>
+    <p:spTree>
+      <p:nvGrpSpPr>
+        <p:cNvPr id="1" name=""/>
+        <p:cNvGrpSpPr/>
+        <p:nvPr/>
+      </p:nvGrpSpPr>
+      <p:grpSpPr>
+        <a:xfrm>
+          <a:off x="0" y="0"/>
+          <a:ext cx="0" cy="0"/>
+          <a:chOff x="0" y="0"/>
+          <a:chExt cx="0" cy="0"/>
+        </a:xfrm>
+      </p:grpSpPr>
+      <p:sp>
+        <p:nvSpPr>
+          <p:cNvPr id="2" name="Slide Image Placeholder 1"/>
+          <p:cNvSpPr>
+            <a:spLocks noGrp="1"/>
+          </p:cNvSpPr>
+          <p:nvPr>
+            <p:ph type="sldImg" idx="2"/>
+          </p:nvPr>
+        </p:nvSpPr>
+        <p:spPr/>
+      </p:sp>
+      <p:sp>
+        <p:nvSpPr>
+          <p:cNvPr id="3" name="Notes Placeholder 2"/>
+          <p:cNvSpPr>
+            <a:spLocks noGrp="1"/>
+          </p:cNvSpPr>
+          <p:nvPr>
+            <p:ph type="body" idx="3" sz="quarter"/>
+          </p:nvPr>
+        </p:nvSpPr>
+        <p:spPr/>
+        <p:txBody>
+          <a:bodyPr/>
+          <a:lstStyle/>
+          <a:p>
+            <a:r>
+              <a:t>Live demo option: run the answer-only vs. worked-solution cells of the lab notebook §2.2 (six two-digit-multiplication problems: 0/6 vs. 6/6 on gpt-4o-mini).</a:t>
+            </a:r>
+          </a:p>
+        </p:txBody>
+      </p:sp>
+      <p:sp>
+        <p:nvSpPr>
+          <p:cNvPr id="4" name="Slide Number Placeholder 3"/>
+          <p:cNvSpPr>
+            <a:spLocks noGrp="1"/>
+          </p:cNvSpPr>
+          <p:nvPr>
+            <p:ph type="sldNum" idx="5" sz="quarter"/>
+          </p:nvPr>
+        </p:nvSpPr>
+        <p:spPr/>
+      </p:sp>
+    </p:spTree>
+  </p:cSld>
+  <p:clrMapOvr>
+    <a:masterClrMapping/>
+  </p:clrMapOvr>
+</p:notes>
+</file>
+
+<file path=ppt/notesSlides/notesSlide3.xml><?xml version="1.0" encoding="utf-8"?>
+<p:notes xmlns:a="http://schemas.openxmlformats.org/drawingml/2006/main" xmlns:p="http://schemas.openxmlformats.org/presentationml/2006/main" xmlns:r="http://schemas.openxmlformats.org/officeDocument/2006/relationships">
+  <p:cSld>
+    <p:spTree>
+      <p:nvGrpSpPr>
+        <p:cNvPr id="1" name=""/>
+        <p:cNvGrpSpPr/>
+        <p:nvPr/>
+      </p:nvGrpSpPr>
+      <p:grpSpPr>
+        <a:xfrm>
+          <a:off x="0" y="0"/>
+          <a:ext cx="0" cy="0"/>
+          <a:chOff x="0" y="0"/>
+          <a:chExt cx="0" cy="0"/>
+        </a:xfrm>
+      </p:grpSpPr>
+      <p:sp>
+        <p:nvSpPr>
+          <p:cNvPr id="2" name="Slide Image Placeholder 1"/>
+          <p:cNvSpPr>
+            <a:spLocks noGrp="1"/>
+          </p:cNvSpPr>
+          <p:nvPr>
+            <p:ph type="sldImg" idx="2"/>
+          </p:nvPr>
+        </p:nvSpPr>
+        <p:spPr/>
+      </p:sp>
+      <p:sp>
+        <p:nvSpPr>
+          <p:cNvPr id="3" name="Notes Placeholder 2"/>
+          <p:cNvSpPr>
+            <a:spLocks noGrp="1"/>
+          </p:cNvSpPr>
+          <p:nvPr>
+            <p:ph type="body" idx="3" sz="quarter"/>
+          </p:nvPr>
+        </p:nvSpPr>
+        <p:spPr/>
+        <p:txBody>
+          <a:bodyPr/>
+          <a:lstStyle/>
+          <a:p>
+            <a:r>
+              <a:t>Timing: slides 3–12 ≈ 10 min, 13–20 ≈ 10 min, 21–30 ≈ 10 min. Slide 12 is the one to keep even if time runs short: it is what makes the Week 03 hand-off (tools fix hallucination, prompting does not) land.</a:t>
+            </a:r>
+          </a:p>
+        </p:txBody>
+      </p:sp>
+      <p:sp>
+        <p:nvSpPr>
+          <p:cNvPr id="4" name="Slide Number Placeholder 3"/>
+          <p:cNvSpPr>
+            <a:spLocks noGrp="1"/>
+          </p:cNvSpPr>
+          <p:nvPr>
+            <p:ph type="sldNum" idx="5" sz="quarter"/>
+          </p:nvPr>
+        </p:nvSpPr>
+        <p:spPr/>
+      </p:sp>
+    </p:spTree>
+  </p:cSld>
+  <p:clrMapOvr>
+    <a:masterClrMapping/>
+  </p:clrMapOvr>
+</p:notes>
 </file>
 
 <file path=ppt/slideLayouts/slideLayout1.xml><?xml version="1.0" encoding="utf-8"?>
@@ -3141,7 +3701,7 @@
           <a:p>
             <a:pPr algn="ctr"/>
             <a:r>
-              <a:rPr sz="4400">
+              <a:rPr sz="4400" b="0">
                 <a:solidFill>
                   <a:srgbClr val="000000"/>
                 </a:solidFill>
@@ -3151,13 +3711,9 @@
             </a:r>
           </a:p>
           <a:p>
-            <a:pPr algn="ctr">
-              <a:spcBef>
-                <a:spcPts val="1000"/>
-              </a:spcBef>
-            </a:pPr>
-            <a:r>
-              <a:rPr sz="2000">
+            <a:pPr algn="ctr"/>
+            <a:r>
+              <a:rPr sz="2000" b="0">
                 <a:solidFill>
                   <a:srgbClr val="888888"/>
                 </a:solidFill>
@@ -3209,7 +3765,7 @@
           <a:lstStyle/>
           <a:p>
             <a:r>
-              <a:rPr sz="2400">
+              <a:rPr sz="2400" b="0">
                 <a:solidFill>
                   <a:srgbClr val="000000"/>
                 </a:solidFill>
@@ -3236,8 +3792,8 @@
         </p:blipFill>
         <p:spPr>
           <a:xfrm>
-            <a:off x="560069" y="960120"/>
-            <a:ext cx="8023860" cy="3566160"/>
+            <a:off x="1486864" y="987552"/>
+            <a:ext cx="6170271" cy="2743200"/>
           </a:xfrm>
           <a:prstGeom prst="rect">
             <a:avLst/>
@@ -3252,8 +3808,8 @@
         </p:nvSpPr>
         <p:spPr>
           <a:xfrm>
-            <a:off x="548640" y="4599432"/>
-            <a:ext cx="8046720" cy="365760"/>
+            <a:off x="502920" y="3867912"/>
+            <a:ext cx="8229600" cy="822960"/>
           </a:xfrm>
           <a:prstGeom prst="rect">
             <a:avLst/>
@@ -3266,15 +3822,19 @@
           </a:bodyPr>
           <a:lstStyle/>
           <a:p>
-            <a:pPr algn="ctr"/>
-            <a:r>
-              <a:rPr sz="1100">
+            <a:pPr algn="ctr">
+              <a:spcAft>
+                <a:spcPts val="600"/>
+              </a:spcAft>
+            </a:pPr>
+            <a:r>
+              <a:rPr sz="1400" b="0">
                 <a:solidFill>
                   <a:srgbClr val="888888"/>
                 </a:solidFill>
                 <a:latin typeface="Arial"/>
               </a:rPr>
-              <a:t>Course figure (notes Fig. 2.1) — in A one prediction must carry both calculations; in B the written "3" is read back from the text.</a:t>
+              <a:t>In A, nothing stores the intermediate value, so one prediction must carry both calculations. In B, the written "3" is read back from the text and each step advances alone.</a:t>
             </a:r>
           </a:p>
         </p:txBody>
@@ -3320,7 +3880,7 @@
           <a:lstStyle/>
           <a:p>
             <a:r>
-              <a:rPr sz="2400">
+              <a:rPr sz="2400" b="0">
                 <a:solidFill>
                   <a:srgbClr val="000000"/>
                 </a:solidFill>
@@ -3355,65 +3915,65 @@
           <a:p>
             <a:pPr>
               <a:spcAft>
-                <a:spcPts val="800"/>
-              </a:spcAft>
-            </a:pPr>
-            <a:r>
-              <a:rPr sz="1600">
+                <a:spcPts val="600"/>
+              </a:spcAft>
+            </a:pPr>
+            <a:r>
+              <a:rPr sz="1500" b="0">
                 <a:solidFill>
                   <a:srgbClr val="444444"/>
                 </a:solidFill>
                 <a:latin typeface="Arial"/>
               </a:rPr>
-              <a:t>●  Established fact: there is a limit on how many steps one prediction can carry — measured, and failure grows with steps and digits.</a:t>
+              <a:t>●  Established fact: there is a limit on how many steps one prediction can carry. It is measured, and failure grows with steps and digits.</a:t>
             </a:r>
           </a:p>
           <a:p>
             <a:pPr>
               <a:spcAft>
-                <a:spcPts val="800"/>
-              </a:spcAft>
-            </a:pPr>
-            <a:r>
-              <a:rPr sz="1600">
+                <a:spcPts val="600"/>
+              </a:spcAft>
+            </a:pPr>
+            <a:r>
+              <a:rPr sz="1500" b="0">
                 <a:solidFill>
                   <a:srgbClr val="444444"/>
                 </a:solidFill>
                 <a:latin typeface="Arial"/>
               </a:rPr>
-              <a:t>●  The failure shape: prediction emits the most plausible token whether or not the computation finished — so an answer-shaped number assembled from 23 and 6 appears (the 27).</a:t>
+              <a:t>●  The failure shape: prediction emits the most plausible token whether or not the computation finished. Where processing could not complete, an answer-shaped number assembled from 23 and 6 appears — the 27.</a:t>
             </a:r>
           </a:p>
           <a:p>
             <a:pPr>
               <a:spcAft>
-                <a:spcPts val="800"/>
-              </a:spcAft>
-            </a:pPr>
-            <a:r>
-              <a:rPr sz="1600">
+                <a:spcPts val="600"/>
+              </a:spcAft>
+            </a:pPr>
+            <a:r>
+              <a:rPr sz="1500" b="0">
                 <a:solidFill>
                   <a:srgbClr val="444444"/>
                 </a:solidFill>
                 <a:latin typeface="Arial"/>
               </a:rPr>
-              <a:t>●  Open question — why the limit exists: one analysis bounds a single prediction by the model's layer depth (Feng et al., 2023; Merrill &amp; Sabharwal, 2023); another blames the rarity of answer-only solutions in training text. Not mutually exclusive.</a:t>
+              <a:t>●  Open question, why the limit exists: one analysis bounds a single prediction's internal computation by the layer count (Feng et al., 2023; Merrill &amp; Sabharwal, 2023). Another: answer-only solution text is rare in training data. The two are not mutually exclusive.</a:t>
             </a:r>
           </a:p>
           <a:p>
             <a:pPr>
               <a:spcAft>
-                <a:spcPts val="800"/>
-              </a:spcAft>
-            </a:pPr>
-            <a:r>
-              <a:rPr sz="1600">
+                <a:spcPts val="600"/>
+              </a:spcAft>
+            </a:pPr>
+            <a:r>
+              <a:rPr sz="1500" b="0">
                 <a:solidFill>
                   <a:srgbClr val="444444"/>
                 </a:solidFill>
                 <a:latin typeface="Arial"/>
               </a:rPr>
-              <a:t>●  What we actually need: the limit is measured, and giving the model a place to write circumvents it.</a:t>
+              <a:t>●  What follows needs only two facts: the limit is measured, and a place to write intermediate values circumvents it.</a:t>
             </a:r>
           </a:p>
         </p:txBody>
@@ -3444,8 +4004,8 @@
         </p:nvSpPr>
         <p:spPr>
           <a:xfrm>
-            <a:off x="548640" y="1828800"/>
-            <a:ext cx="8046720" cy="1463040"/>
+            <a:off x="384048" y="256032"/>
+            <a:ext cx="8375904" cy="640080"/>
           </a:xfrm>
           <a:prstGeom prst="rect">
             <a:avLst/>
@@ -3453,20 +4013,106 @@
           <a:noFill/>
         </p:spPr>
         <p:txBody>
-          <a:bodyPr wrap="square" anchor="ctr">
+          <a:bodyPr wrap="square">
             <a:spAutoFit/>
           </a:bodyPr>
           <a:lstStyle/>
           <a:p>
-            <a:pPr algn="ctr"/>
-            <a:r>
-              <a:rPr sz="3600">
+            <a:r>
+              <a:rPr sz="2400" b="0">
                 <a:solidFill>
                   <a:srgbClr val="000000"/>
                 </a:solidFill>
                 <a:latin typeface="Arial"/>
               </a:rPr>
-              <a:t>Chain-of-Thought</a:t>
+              <a:t>Hallucination — the same cause, second symptom</a:t>
+            </a:r>
+          </a:p>
+        </p:txBody>
+      </p:sp>
+      <p:sp>
+        <p:nvSpPr>
+          <p:cNvPr id="3" name="TextBox 2"/>
+          <p:cNvSpPr txBox="1"/>
+          <p:nvPr/>
+        </p:nvSpPr>
+        <p:spPr>
+          <a:xfrm>
+            <a:off x="502920" y="987552"/>
+            <a:ext cx="8229600" cy="3931920"/>
+          </a:xfrm>
+          <a:prstGeom prst="rect">
+            <a:avLst/>
+          </a:prstGeom>
+          <a:noFill/>
+        </p:spPr>
+        <p:txBody>
+          <a:bodyPr wrap="square">
+            <a:spAutoFit/>
+          </a:bodyPr>
+          <a:lstStyle/>
+          <a:p>
+            <a:pPr>
+              <a:spcAft>
+                <a:spcPts val="600"/>
+              </a:spcAft>
+            </a:pPr>
+            <a:r>
+              <a:rPr sz="1600" b="0">
+                <a:solidFill>
+                  <a:srgbClr val="444444"/>
+                </a:solidFill>
+                <a:latin typeface="Arial"/>
+              </a:rPr>
+              <a:t>●  Definition: generating content that is not factual but plausible.</a:t>
+            </a:r>
+          </a:p>
+          <a:p>
+            <a:pPr>
+              <a:spcAft>
+                <a:spcPts val="600"/>
+              </a:spcAft>
+            </a:pPr>
+            <a:r>
+              <a:rPr sz="1600" b="0">
+                <a:solidFill>
+                  <a:srgbClr val="444444"/>
+                </a:solidFill>
+                <a:latin typeface="Arial"/>
+              </a:rPr>
+              <a:t>●  The cause: prediction never waits. When the required fact or computation is not available, the most probable continuation is emitted anyway, and that continuation is shaped like an answer.</a:t>
+            </a:r>
+          </a:p>
+          <a:p>
+            <a:pPr>
+              <a:spcAft>
+                <a:spcPts val="600"/>
+              </a:spcAft>
+            </a:pPr>
+            <a:r>
+              <a:rPr sz="1600" b="0">
+                <a:solidFill>
+                  <a:srgbClr val="444444"/>
+                </a:solidFill>
+                <a:latin typeface="Arial"/>
+              </a:rPr>
+              <a:t>●  Two defects, one mechanism: the computation limit (27) and hallucination (a confident false premise) are both "most plausible token, regardless of completion."</a:t>
+            </a:r>
+          </a:p>
+          <a:p>
+            <a:pPr>
+              <a:spcAft>
+                <a:spcPts val="600"/>
+              </a:spcAft>
+            </a:pPr>
+            <a:r>
+              <a:rPr sz="1600" b="0">
+                <a:solidFill>
+                  <a:srgbClr val="444444"/>
+                </a:solidFill>
+                <a:latin typeface="Arial"/>
+              </a:rPr>
+              <a:t>●  Which one prompting can fix: this lecture repairs the computation limit. The hallucination defect returns on slide 19.</a:t>
             </a:r>
           </a:p>
         </p:txBody>
@@ -3497,8 +4143,8 @@
         </p:nvSpPr>
         <p:spPr>
           <a:xfrm>
-            <a:off x="384048" y="256032"/>
-            <a:ext cx="8375904" cy="640080"/>
+            <a:off x="548640" y="1828800"/>
+            <a:ext cx="8046720" cy="1463040"/>
           </a:xfrm>
           <a:prstGeom prst="rect">
             <a:avLst/>
@@ -3506,90 +4152,20 @@
           <a:noFill/>
         </p:spPr>
         <p:txBody>
-          <a:bodyPr wrap="square">
+          <a:bodyPr wrap="square" anchor="ctr">
             <a:spAutoFit/>
           </a:bodyPr>
           <a:lstStyle/>
           <a:p>
-            <a:r>
-              <a:rPr sz="2400">
+            <a:pPr algn="ctr"/>
+            <a:r>
+              <a:rPr sz="3600" b="0">
                 <a:solidFill>
                   <a:srgbClr val="000000"/>
                 </a:solidFill>
                 <a:latin typeface="Arial"/>
               </a:rPr>
-              <a:t>The remedy: give it a place to write</a:t>
-            </a:r>
-          </a:p>
-        </p:txBody>
-      </p:sp>
-      <p:sp>
-        <p:nvSpPr>
-          <p:cNvPr id="3" name="TextBox 2"/>
-          <p:cNvSpPr txBox="1"/>
-          <p:nvPr/>
-        </p:nvSpPr>
-        <p:spPr>
-          <a:xfrm>
-            <a:off x="502920" y="987552"/>
-            <a:ext cx="8229600" cy="3931920"/>
-          </a:xfrm>
-          <a:prstGeom prst="rect">
-            <a:avLst/>
-          </a:prstGeom>
-          <a:noFill/>
-        </p:spPr>
-        <p:txBody>
-          <a:bodyPr wrap="square">
-            <a:spAutoFit/>
-          </a:bodyPr>
-          <a:lstStyle/>
-          <a:p>
-            <a:pPr>
-              <a:spcAft>
-                <a:spcPts val="800"/>
-              </a:spcAft>
-            </a:pPr>
-            <a:r>
-              <a:rPr sz="1600">
-                <a:solidFill>
-                  <a:srgbClr val="444444"/>
-                </a:solidFill>
-                <a:latin typeface="Arial"/>
-              </a:rPr>
-              <a:t>●  The principle: make the model write out the solution instead of jumping to the answer — then each token only reads the written values and advances one step.</a:t>
-            </a:r>
-          </a:p>
-          <a:p>
-            <a:pPr>
-              <a:spcAft>
-                <a:spcPts val="800"/>
-              </a:spcAft>
-            </a:pPr>
-            <a:r>
-              <a:rPr sz="1600">
-                <a:solidFill>
-                  <a:srgbClr val="444444"/>
-                </a:solidFill>
-                <a:latin typeface="Arial"/>
-              </a:rPr>
-              <a:t>●  The analogy: a person solving a hard calculation on paper instead of in their head.</a:t>
-            </a:r>
-          </a:p>
-          <a:p>
-            <a:pPr>
-              <a:spcAft>
-                <a:spcPts val="800"/>
-              </a:spcAft>
-            </a:pPr>
-            <a:r>
-              <a:rPr sz="1600">
-                <a:solidFill>
-                  <a:srgbClr val="444444"/>
-                </a:solidFill>
-                <a:latin typeface="Arial"/>
-              </a:rPr>
-              <a:t>●  The only lever we have: text placed in the prompt. It takes exactly two forms — an instruction, or worked examples.</a:t>
+              <a:t>Chain-of-Thought</a:t>
             </a:r>
           </a:p>
         </p:txBody>
@@ -3635,13 +4211,13 @@
           <a:lstStyle/>
           <a:p>
             <a:r>
-              <a:rPr sz="2400">
+              <a:rPr sz="2400" b="0">
                 <a:solidFill>
                   <a:srgbClr val="000000"/>
                 </a:solidFill>
                 <a:latin typeface="Arial"/>
               </a:rPr>
-              <a:t>Method 1 — Instruction (zero-shot CoT)</a:t>
+              <a:t>The remedy: give the model a place to write</a:t>
             </a:r>
           </a:p>
         </p:txBody>
@@ -3670,95 +4246,49 @@
           <a:p>
             <a:pPr>
               <a:spcAft>
-                <a:spcPts val="800"/>
-              </a:spcAft>
-            </a:pPr>
-            <a:r>
-              <a:rPr sz="1600">
+                <a:spcPts val="600"/>
+              </a:spcAft>
+            </a:pPr>
+            <a:r>
+              <a:rPr sz="1600" b="0">
                 <a:solidFill>
                   <a:srgbClr val="444444"/>
                 </a:solidFill>
                 <a:latin typeface="Arial"/>
               </a:rPr>
-              <a:t>●  The move: append one line after the question demanding a worked solution (Kojima et al., 2022).</a:t>
+              <a:t>●  The principle: make the model write out the solution instead of jumping to the answer. Each token then only reads the written values and advances one step.</a:t>
             </a:r>
           </a:p>
           <a:p>
             <a:pPr>
               <a:spcAft>
-                <a:spcPts val="800"/>
-              </a:spcAft>
-            </a:pPr>
+                <a:spcPts val="600"/>
+              </a:spcAft>
+            </a:pPr>
+            <a:r>
+              <a:rPr sz="1600" b="0">
+                <a:solidFill>
+                  <a:srgbClr val="444444"/>
+                </a:solidFill>
+                <a:latin typeface="Arial"/>
+              </a:rPr>
+              <a:t>●  ELI5: a person solving a hard calculation on paper instead of in their head. The paper is the text.</a:t>
+            </a:r>
           </a:p>
           <a:p>
             <a:pPr>
               <a:spcAft>
-                <a:spcPts val="200"/>
-              </a:spcAft>
-            </a:pPr>
-            <a:r>
-              <a:rPr sz="1250">
-                <a:solidFill>
-                  <a:srgbClr val="333333"/>
-                </a:solidFill>
-                <a:latin typeface="Courier New"/>
-              </a:rPr>
-              <a:t>There are 23 apples. 20 are used and 6 more are bought. How many are there?</a:t>
-            </a:r>
-          </a:p>
-          <a:p>
-            <a:pPr>
-              <a:spcAft>
-                <a:spcPts val="200"/>
-              </a:spcAft>
-            </a:pPr>
-            <a:r>
-              <a:rPr sz="1250">
-                <a:solidFill>
-                  <a:srgbClr val="333333"/>
-                </a:solidFill>
-                <a:latin typeface="Courier New"/>
-              </a:rPr>
-              <a:t>Write the solution step by step, then give the answer on the last line as "ANSWER: &lt;number&gt;".</a:t>
-            </a:r>
-          </a:p>
-          <a:p>
-            <a:pPr>
-              <a:spcAft>
-                <a:spcPts val="800"/>
-              </a:spcAft>
-            </a:pPr>
-          </a:p>
-          <a:p>
-            <a:pPr>
-              <a:spcAft>
-                <a:spcPts val="800"/>
-              </a:spcAft>
-            </a:pPr>
-            <a:r>
-              <a:rPr sz="1600">
+                <a:spcPts val="600"/>
+              </a:spcAft>
+            </a:pPr>
+            <a:r>
+              <a:rPr sz="1600" b="0">
                 <a:solidFill>
                   <a:srgbClr val="444444"/>
                 </a:solidFill>
                 <a:latin typeface="Arial"/>
               </a:rPr>
-              <a:t>●  The output flips to Method B: "23 − 20 = 3. 3 + 6 = 9. ANSWER: 9".</a:t>
-            </a:r>
-          </a:p>
-          <a:p>
-            <a:pPr>
-              <a:spcAft>
-                <a:spcPts val="800"/>
-              </a:spcAft>
-            </a:pPr>
-            <a:r>
-              <a:rPr sz="1600">
-                <a:solidFill>
-                  <a:srgbClr val="444444"/>
-                </a:solidFill>
-                <a:latin typeface="Arial"/>
-              </a:rPr>
-              <a:t>●  The catch: convenient, but it underspecifies — "step by step" fixes neither how fine the steps are nor how the final answer is written.</a:t>
+              <a:t>●  The only lever: text placed in the prompt. It takes exactly two forms — an instruction, or worked examples.</a:t>
             </a:r>
           </a:p>
         </p:txBody>
@@ -3804,13 +4334,13 @@
           <a:lstStyle/>
           <a:p>
             <a:r>
-              <a:rPr sz="2400">
+              <a:rPr sz="2400" b="0">
                 <a:solidFill>
                   <a:srgbClr val="000000"/>
                 </a:solidFill>
                 <a:latin typeface="Arial"/>
               </a:rPr>
-              <a:t>Method 2 — Worked examples (few-shot)</a:t>
+              <a:t>Method 1 — Instruction (zero-shot CoT)</a:t>
             </a:r>
           </a:p>
         </p:txBody>
@@ -3839,143 +4369,81 @@
           <a:p>
             <a:pPr>
               <a:spcAft>
-                <a:spcPts val="800"/>
-              </a:spcAft>
-            </a:pPr>
-            <a:r>
-              <a:rPr sz="1600">
+                <a:spcPts val="600"/>
+              </a:spcAft>
+            </a:pPr>
+            <a:r>
+              <a:rPr sz="1600" b="0">
                 <a:solidFill>
                   <a:srgbClr val="444444"/>
                 </a:solidFill>
                 <a:latin typeface="Arial"/>
               </a:rPr>
-              <a:t>●  The move: prepend worked question-answer pairs before the question.</a:t>
+              <a:t>●  The move: append one line after the question demanding a worked solution (Kojima et al., 2022).</a:t>
             </a:r>
           </a:p>
           <a:p>
             <a:pPr>
               <a:spcAft>
-                <a:spcPts val="800"/>
-              </a:spcAft>
-            </a:pPr>
+                <a:spcPts val="0"/>
+              </a:spcAft>
+            </a:pPr>
+            <a:r>
+              <a:rPr sz="1400" b="0">
+                <a:solidFill>
+                  <a:srgbClr val="1F3A5F"/>
+                </a:solidFill>
+                <a:latin typeface="Courier New"/>
+              </a:rPr>
+              <a:t>      There are 23 apples. 20 are used and 6 more are bought. How many are there?</a:t>
+            </a:r>
           </a:p>
           <a:p>
             <a:pPr>
               <a:spcAft>
-                <a:spcPts val="200"/>
-              </a:spcAft>
-            </a:pPr>
-            <a:r>
-              <a:rPr sz="1250">
-                <a:solidFill>
-                  <a:srgbClr val="333333"/>
+                <a:spcPts val="0"/>
+              </a:spcAft>
+            </a:pPr>
+            <a:r>
+              <a:rPr sz="1400" b="0">
+                <a:solidFill>
+                  <a:srgbClr val="1F3A5F"/>
                 </a:solidFill>
                 <a:latin typeface="Courier New"/>
               </a:rPr>
-              <a:t>Q: Roger has 5 tennis balls. He buys 2 more cans of 3 balls each. How many balls?</a:t>
+              <a:t>      Write the solution step by step, then give the answer on the last line as "ANSWER: &lt;number&gt;".</a:t>
             </a:r>
           </a:p>
           <a:p>
             <a:pPr>
               <a:spcAft>
-                <a:spcPts val="200"/>
-              </a:spcAft>
-            </a:pPr>
-            <a:r>
-              <a:rPr sz="1250">
-                <a:solidFill>
-                  <a:srgbClr val="333333"/>
-                </a:solidFill>
-                <a:latin typeface="Courier New"/>
-              </a:rPr>
-              <a:t>A: He starts with 5. 2 cans of 3 is 3 × 2 = 6. 5 + 6 = 11. ANSWER: 11</a:t>
+                <a:spcPts val="600"/>
+              </a:spcAft>
+            </a:pPr>
+            <a:r>
+              <a:rPr sz="1600" b="0">
+                <a:solidFill>
+                  <a:srgbClr val="444444"/>
+                </a:solidFill>
+                <a:latin typeface="Arial"/>
+              </a:rPr>
+              <a:t>●  The output flips to Method B: "23 − 20 = 3. 3 + 6 = 9. ANSWER: 9".</a:t>
             </a:r>
           </a:p>
           <a:p>
             <a:pPr>
               <a:spcAft>
-                <a:spcPts val="200"/>
-              </a:spcAft>
-            </a:pPr>
-            <a:r>
-              <a:rPr sz="1250">
-                <a:solidFill>
-                  <a:srgbClr val="333333"/>
-                </a:solidFill>
-                <a:latin typeface="Courier New"/>
-              </a:rPr>
-              <a:t/>
-            </a:r>
-          </a:p>
-          <a:p>
-            <a:pPr>
-              <a:spcAft>
-                <a:spcPts val="200"/>
-              </a:spcAft>
-            </a:pPr>
-            <a:r>
-              <a:rPr sz="1250">
-                <a:solidFill>
-                  <a:srgbClr val="333333"/>
-                </a:solidFill>
-                <a:latin typeface="Courier New"/>
-              </a:rPr>
-              <a:t>Q: There are 23 apples. 20 are used and 6 more are bought. How many are there?</a:t>
-            </a:r>
-          </a:p>
-          <a:p>
-            <a:pPr>
-              <a:spcAft>
-                <a:spcPts val="200"/>
-              </a:spcAft>
-            </a:pPr>
-            <a:r>
-              <a:rPr sz="1250">
-                <a:solidFill>
-                  <a:srgbClr val="333333"/>
-                </a:solidFill>
-                <a:latin typeface="Courier New"/>
-              </a:rPr>
-              <a:t>A:</a:t>
-            </a:r>
-          </a:p>
-          <a:p>
-            <a:pPr>
-              <a:spcAft>
-                <a:spcPts val="800"/>
-              </a:spcAft>
-            </a:pPr>
-          </a:p>
-          <a:p>
-            <a:pPr>
-              <a:spcAft>
-                <a:spcPts val="800"/>
-              </a:spcAft>
-            </a:pPr>
-            <a:r>
-              <a:rPr sz="1600">
+                <a:spcPts val="600"/>
+              </a:spcAft>
+            </a:pPr>
+            <a:r>
+              <a:rPr sz="1600" b="0">
                 <a:solidFill>
                   <a:srgbClr val="444444"/>
                 </a:solidFill>
                 <a:latin typeface="Arial"/>
               </a:rPr>
-              <a:t>●  Why it works: in-context learning — examples in the prompt specify the output, with no weight update. Solutions in the examples make the model generate a solution first.</a:t>
-            </a:r>
-          </a:p>
-          <a:p>
-            <a:pPr>
-              <a:spcAft>
-                <a:spcPts val="800"/>
-              </a:spcAft>
-            </a:pPr>
-            <a:r>
-              <a:rPr sz="1600">
-                <a:solidFill>
-                  <a:srgbClr val="444444"/>
-                </a:solidFill>
-                <a:latin typeface="Arial"/>
-              </a:rPr>
-              <a:t>●  This is the original form: the CoT paper itself uses examples (Wei et al., 2022).</a:t>
+              <a:t>●  The catch: convenient, but it underspecifies. "Step by step" fixes neither how fine the steps are nor how the final answer is written.</a:t>
             </a:r>
           </a:p>
         </p:txBody>
@@ -4021,13 +4489,13 @@
           <a:lstStyle/>
           <a:p>
             <a:r>
-              <a:rPr sz="2400">
+              <a:rPr sz="2400" b="0">
                 <a:solidFill>
                   <a:srgbClr val="000000"/>
                 </a:solidFill>
                 <a:latin typeface="Arial"/>
               </a:rPr>
-              <a:t>What examples fix that instructions cannot</a:t>
+              <a:t>Method 2 — Worked examples (few-shot CoT)</a:t>
             </a:r>
           </a:p>
         </p:txBody>
@@ -4056,49 +4524,129 @@
           <a:p>
             <a:pPr>
               <a:spcAft>
-                <a:spcPts val="800"/>
-              </a:spcAft>
-            </a:pPr>
-            <a:r>
-              <a:rPr sz="1600">
+                <a:spcPts val="600"/>
+              </a:spcAft>
+            </a:pPr>
+            <a:r>
+              <a:rPr sz="1600" b="0">
                 <a:solidFill>
                   <a:srgbClr val="444444"/>
                 </a:solidFill>
                 <a:latin typeface="Arial"/>
               </a:rPr>
-              <a:t>●  The gap: an instruction leaves the granularity of steps and the format of the final answer open; a worked example pins down exactly what the instruction leaves unsaid.</a:t>
+              <a:t>●  The move: prepend worked question–answer pairs before the question.</a:t>
             </a:r>
           </a:p>
           <a:p>
             <a:pPr>
               <a:spcAft>
-                <a:spcPts val="800"/>
-              </a:spcAft>
-            </a:pPr>
-            <a:r>
-              <a:rPr sz="1600">
+                <a:spcPts val="0"/>
+              </a:spcAft>
+            </a:pPr>
+            <a:r>
+              <a:rPr sz="1400" b="0">
+                <a:solidFill>
+                  <a:srgbClr val="1F3A5F"/>
+                </a:solidFill>
+                <a:latin typeface="Courier New"/>
+              </a:rPr>
+              <a:t>      Q: Roger has 5 tennis balls. He buys 2 more cans of 3 balls each. How many balls does he have?</a:t>
+            </a:r>
+          </a:p>
+          <a:p>
+            <a:pPr>
+              <a:spcAft>
+                <a:spcPts val="0"/>
+              </a:spcAft>
+            </a:pPr>
+            <a:r>
+              <a:rPr sz="1400" b="0">
+                <a:solidFill>
+                  <a:srgbClr val="1F3A5F"/>
+                </a:solidFill>
+                <a:latin typeface="Courier New"/>
+              </a:rPr>
+              <a:t>      A: He starts with 5 balls. 2 cans of 3 balls is 3 × 2 = 6. 5 + 6 = 11. ANSWER: 11</a:t>
+            </a:r>
+          </a:p>
+          <a:p>
+            <a:pPr>
+              <a:spcAft>
+                <a:spcPts val="0"/>
+              </a:spcAft>
+            </a:pPr>
+            <a:r>
+              <a:rPr sz="1400" b="0">
+                <a:solidFill>
+                  <a:srgbClr val="1F3A5F"/>
+                </a:solidFill>
+                <a:latin typeface="Courier New"/>
+              </a:rPr>
+              <a:t>      </a:t>
+            </a:r>
+          </a:p>
+          <a:p>
+            <a:pPr>
+              <a:spcAft>
+                <a:spcPts val="0"/>
+              </a:spcAft>
+            </a:pPr>
+            <a:r>
+              <a:rPr sz="1400" b="0">
+                <a:solidFill>
+                  <a:srgbClr val="1F3A5F"/>
+                </a:solidFill>
+                <a:latin typeface="Courier New"/>
+              </a:rPr>
+              <a:t>      Q: There are 23 apples. 20 are used and 6 more are bought. How many are there?</a:t>
+            </a:r>
+          </a:p>
+          <a:p>
+            <a:pPr>
+              <a:spcAft>
+                <a:spcPts val="0"/>
+              </a:spcAft>
+            </a:pPr>
+            <a:r>
+              <a:rPr sz="1400" b="0">
+                <a:solidFill>
+                  <a:srgbClr val="1F3A5F"/>
+                </a:solidFill>
+                <a:latin typeface="Courier New"/>
+              </a:rPr>
+              <a:t>      A:</a:t>
+            </a:r>
+          </a:p>
+          <a:p>
+            <a:pPr>
+              <a:spcAft>
+                <a:spcPts val="600"/>
+              </a:spcAft>
+            </a:pPr>
+            <a:r>
+              <a:rPr sz="1600" b="0">
                 <a:solidFill>
                   <a:srgbClr val="444444"/>
                 </a:solidFill>
                 <a:latin typeface="Arial"/>
               </a:rPr>
-              <a:t>●  The practical rule: instruction for convenience, examples for control of procedure and format.</a:t>
+              <a:t>●  Why it works: in-context learning — examples in the prompt specify the output format and procedure with no weight update. When the examples contain worked solutions, the model generates a solution first.</a:t>
             </a:r>
           </a:p>
           <a:p>
             <a:pPr>
               <a:spcAft>
-                <a:spcPts val="800"/>
-              </a:spcAft>
-            </a:pPr>
-            <a:r>
-              <a:rPr sz="1600">
+                <a:spcPts val="600"/>
+              </a:spcAft>
+            </a:pPr>
+            <a:r>
+              <a:rPr sz="1600" b="0">
                 <a:solidFill>
                   <a:srgbClr val="444444"/>
                 </a:solidFill>
                 <a:latin typeface="Arial"/>
               </a:rPr>
-              <a:t>●  Why the lab measures exemplar writing: writing good worked examples IS the specification skill this week trains.</a:t>
+              <a:t>●  The original form: this is the form the Chain-of-Thought paper uses (Wei et al., 2022).</a:t>
             </a:r>
           </a:p>
         </p:txBody>
@@ -4144,13 +4692,13 @@
           <a:lstStyle/>
           <a:p>
             <a:r>
-              <a:rPr sz="2400">
+              <a:rPr sz="2400" b="0">
                 <a:solidFill>
                   <a:srgbClr val="000000"/>
                 </a:solidFill>
                 <a:latin typeface="Arial"/>
               </a:rPr>
-              <a:t>CoT is emergent</a:t>
+              <a:t>What examples fix that instructions cannot</a:t>
             </a:r>
           </a:p>
         </p:txBody>
@@ -4179,49 +4727,81 @@
           <a:p>
             <a:pPr>
               <a:spcAft>
-                <a:spcPts val="800"/>
-              </a:spcAft>
-            </a:pPr>
-            <a:r>
-              <a:rPr sz="1600">
+                <a:spcPts val="600"/>
+              </a:spcAft>
+            </a:pPr>
+            <a:r>
+              <a:rPr sz="1400" b="0">
                 <a:solidFill>
                   <a:srgbClr val="444444"/>
                 </a:solidFill>
                 <a:latin typeface="Arial"/>
               </a:rPr>
-              <a:t>●  Emergence: a capability absent at small scale that appears above a certain scale.</a:t>
+              <a:t>●  Definition: Chain-of-Thought (CoT) = the family of prompting techniques that induce the model to generate its solution process before the answer.</a:t>
             </a:r>
           </a:p>
           <a:p>
             <a:pPr>
               <a:spcAft>
-                <a:spcPts val="800"/>
-              </a:spcAft>
-            </a:pPr>
-            <a:r>
-              <a:rPr sz="1600">
+                <a:spcPts val="600"/>
+              </a:spcAft>
+            </a:pPr>
+            <a:r>
+              <a:rPr sz="1400" b="0">
                 <a:solidFill>
                   <a:srgbClr val="444444"/>
                 </a:solidFill>
                 <a:latin typeface="Arial"/>
               </a:rPr>
-              <a:t>●  The finding: only in sufficiently large models does generating a solution translate into accuracy — in small models CoT is ineffective or even harmful.</a:t>
+              <a:t>●  Why both forms work: at the moment the final "9" is produced, the text already contains "23 − 20 = 3" and "3 + 6 =". The model finishes by reading written values, not by computing both steps from scratch.</a:t>
             </a:r>
           </a:p>
           <a:p>
             <a:pPr>
               <a:spcAft>
-                <a:spcPts val="800"/>
-              </a:spcAft>
-            </a:pPr>
-            <a:r>
-              <a:rPr sz="1600">
+                <a:spcPts val="600"/>
+              </a:spcAft>
+            </a:pPr>
+            <a:r>
+              <a:rPr sz="1400" b="0">
                 <a:solidFill>
                   <a:srgbClr val="444444"/>
                 </a:solidFill>
                 <a:latin typeface="Arial"/>
               </a:rPr>
-              <a:t>●  Where the numbers are: improvement magnitudes (GSM8K and others) and the scale curves are this week's student presentation (Wei et al., 2022).</a:t>
+              <a:t>●  The division of labor: instruction for convenience, examples for control of procedure and format. A worked example pins down exactly what "solve step by step" leaves open — step granularity, answer line, units.</a:t>
+            </a:r>
+          </a:p>
+          <a:p>
+            <a:pPr>
+              <a:spcAft>
+                <a:spcPts val="600"/>
+              </a:spcAft>
+            </a:pPr>
+            <a:r>
+              <a:rPr sz="1400" b="0">
+                <a:solidFill>
+                  <a:srgbClr val="444444"/>
+                </a:solidFill>
+                <a:latin typeface="Arial"/>
+              </a:rPr>
+              <a:t>●  Emergence: the effect appears only above a model-scale threshold. In small models CoT is ineffective or harmful. The magnitudes (GSM8K) and the scale curve are this week's first presentation.</a:t>
+            </a:r>
+          </a:p>
+          <a:p>
+            <a:pPr>
+              <a:spcAft>
+                <a:spcPts val="600"/>
+              </a:spcAft>
+            </a:pPr>
+            <a:r>
+              <a:rPr sz="1400" b="0">
+                <a:solidFill>
+                  <a:srgbClr val="444444"/>
+                </a:solidFill>
+                <a:latin typeface="Arial"/>
+              </a:rPr>
+              <a:t>●  Why the lab measures exemplar writing: writing a good worked example is the specification skill this week trains (lab §4–5, assignments 8.2 and 8.4).</a:t>
             </a:r>
           </a:p>
         </p:txBody>
@@ -4268,7 +4848,7 @@
           <a:p>
             <a:pPr algn="ctr"/>
             <a:r>
-              <a:rPr sz="3600">
+              <a:rPr sz="3600" b="0">
                 <a:solidFill>
                   <a:srgbClr val="000000"/>
                 </a:solidFill>
@@ -4320,7 +4900,7 @@
           <a:lstStyle/>
           <a:p>
             <a:r>
-              <a:rPr sz="2400">
+              <a:rPr sz="2400" b="0">
                 <a:solidFill>
                   <a:srgbClr val="000000"/>
                 </a:solidFill>
@@ -4355,65 +4935,65 @@
           <a:p>
             <a:pPr>
               <a:spcAft>
-                <a:spcPts val="800"/>
-              </a:spcAft>
-            </a:pPr>
-            <a:r>
-              <a:rPr sz="1600">
+                <a:spcPts val="600"/>
+              </a:spcAft>
+            </a:pPr>
+            <a:r>
+              <a:rPr sz="1500" b="0">
                 <a:solidFill>
                   <a:srgbClr val="444444"/>
                 </a:solidFill>
                 <a:latin typeface="Arial"/>
               </a:rPr>
-              <a:t>●  The question (HotpotQA, from Figure 1 of the ReAct paper, Yao et al., 2022): "Aside from the Apple Remote, what other device can control the program the Apple Remote was originally designed to interact with?"</a:t>
+              <a:t>●  The question (HotpotQA, Figure 1 of the ReAct paper, Yao et al., 2022): "Aside from the Apple Remote, what other device can control the program the Apple Remote was originally designed to interact with?"</a:t>
             </a:r>
           </a:p>
           <a:p>
             <a:pPr>
               <a:spcAft>
-                <a:spcPts val="800"/>
-              </a:spcAft>
-            </a:pPr>
-            <a:r>
-              <a:rPr sz="1600">
+                <a:spcPts val="600"/>
+              </a:spcAft>
+            </a:pPr>
+            <a:r>
+              <a:rPr sz="1500" b="0">
                 <a:solidFill>
                   <a:srgbClr val="444444"/>
                 </a:solidFill>
                 <a:latin typeface="Arial"/>
               </a:rPr>
-              <a:t>●  The CoT run: "The Apple Remote was designed to interact with Apple TV. Apple TV can be controlled by iPhone, iPad, iPod Touch. So the answer is iPhone, iPad, iPod Touch." — wrong.</a:t>
+              <a:t>●  The CoT run: "The Apple Remote was originally designed to interact with Apple TV. Apple TV can be controlled by iPhone, iPad, and iPod Touch. So the answer is iPhone, iPad, and iPod Touch." — wrong.</a:t>
             </a:r>
           </a:p>
           <a:p>
             <a:pPr>
               <a:spcAft>
-                <a:spcPts val="800"/>
-              </a:spcAft>
-            </a:pPr>
-            <a:r>
-              <a:rPr sz="1600">
+                <a:spcPts val="600"/>
+              </a:spcAft>
+            </a:pPr>
+            <a:r>
+              <a:rPr sz="1500" b="0">
                 <a:solidFill>
                   <a:srgbClr val="444444"/>
                 </a:solidFill>
                 <a:latin typeface="Arial"/>
               </a:rPr>
-              <a:t>●  The truth: the Apple Remote was designed for a program called Front Row; the correct answer is the keyboard function keys.</a:t>
+              <a:t>●  What went wrong: the form is impeccable, every step connects. The first premise is false. The program was Front Row, not Apple TV. Correct answer: keyboard function keys.</a:t>
             </a:r>
           </a:p>
           <a:p>
             <a:pPr>
               <a:spcAft>
-                <a:spcPts val="800"/>
-              </a:spcAft>
-            </a:pPr>
-            <a:r>
-              <a:rPr sz="1600">
+                <a:spcPts val="600"/>
+              </a:spcAft>
+            </a:pPr>
+            <a:r>
+              <a:rPr sz="1500" b="0">
                 <a:solidFill>
                   <a:srgbClr val="444444"/>
                 </a:solidFill>
                 <a:latin typeface="Arial"/>
               </a:rPr>
-              <a:t>●  The diagnosis: the step structure is impeccable — the first premise is simply false, and the model reasoned coherently on top of a hallucination.</a:t>
+              <a:t>●  The diagnosis in the paper: reasoning not grounded in the external world → fact hallucination and error propagation.</a:t>
             </a:r>
           </a:p>
         </p:txBody>
@@ -4460,7 +5040,7 @@
           <a:p>
             <a:pPr algn="ctr"/>
             <a:r>
-              <a:rPr sz="4400">
+              <a:rPr sz="4400" b="0">
                 <a:solidFill>
                   <a:srgbClr val="000000"/>
                 </a:solidFill>
@@ -4470,13 +5050,9 @@
             </a:r>
           </a:p>
           <a:p>
-            <a:pPr algn="ctr">
-              <a:spcBef>
-                <a:spcPts val="1000"/>
-              </a:spcBef>
-            </a:pPr>
-            <a:r>
-              <a:rPr sz="2000">
+            <a:pPr algn="ctr"/>
+            <a:r>
+              <a:rPr sz="2000" b="0">
                 <a:solidFill>
                   <a:srgbClr val="888888"/>
                 </a:solidFill>
@@ -4528,7 +5104,7 @@
           <a:lstStyle/>
           <a:p>
             <a:r>
-              <a:rPr sz="2400">
+              <a:rPr sz="2400" b="0">
                 <a:solidFill>
                   <a:srgbClr val="000000"/>
                 </a:solidFill>
@@ -4563,49 +5139,65 @@
           <a:p>
             <a:pPr>
               <a:spcAft>
-                <a:spcPts val="800"/>
-              </a:spcAft>
-            </a:pPr>
-            <a:r>
-              <a:rPr sz="1600">
+                <a:spcPts val="600"/>
+              </a:spcAft>
+            </a:pPr>
+            <a:r>
+              <a:rPr sz="1500" b="0">
                 <a:solidFill>
                   <a:srgbClr val="444444"/>
                 </a:solidFill>
                 <a:latin typeface="Arial"/>
               </a:rPr>
-              <a:t>●  The root: CoT's reasoning draws only on knowledge stored in the parameters — there is no path for checking an external fact.</a:t>
+              <a:t>●  The root: CoT's reasoning draws only on knowledge stored in the parameters. There is no path for checking an external fact.</a:t>
             </a:r>
           </a:p>
           <a:p>
             <a:pPr>
               <a:spcAft>
-                <a:spcPts val="800"/>
-              </a:spcAft>
-            </a:pPr>
-            <a:r>
-              <a:rPr sz="1600">
+                <a:spcPts val="600"/>
+              </a:spcAft>
+            </a:pPr>
+            <a:r>
+              <a:rPr sz="1500" b="0">
                 <a:solidFill>
                   <a:srgbClr val="444444"/>
                 </a:solidFill>
                 <a:latin typeface="Arial"/>
               </a:rPr>
-              <a:t>●  The lesson: coherence of the reasoning structure does not guarantee factuality. "Verify each step" in the prompt just produces more coherent text.</a:t>
+              <a:t>●  The lesson: coherence of the reasoning structure does not guarantee factuality. Adding "verify each step before continuing" produces more coherent text, not a checked fact.</a:t>
             </a:r>
           </a:p>
           <a:p>
             <a:pPr>
               <a:spcAft>
-                <a:spcPts val="800"/>
-              </a:spcAft>
-            </a:pPr>
-            <a:r>
-              <a:rPr sz="1600">
+                <a:spcPts val="600"/>
+              </a:spcAft>
+            </a:pPr>
+            <a:r>
+              <a:rPr sz="1500" b="0">
                 <a:solidFill>
                   <a:srgbClr val="444444"/>
                 </a:solidFill>
                 <a:latin typeface="Arial"/>
               </a:rPr>
-              <a:t>●  The structural fix: a step that checks facts against the world — which requires tools (Week 03) and the agent loop (Week 04). We revisit this exact question there, solved with a search tool.</a:t>
+              <a:t>●  The structural fix: a step that checks facts against the world. That requires tools (Week 03) and the agent loop (Week 04). The same question, solved by a loop with a search tool, is traced in Week 04.</a:t>
+            </a:r>
+          </a:p>
+          <a:p>
+            <a:pPr>
+              <a:spcAft>
+                <a:spcPts val="600"/>
+              </a:spcAft>
+            </a:pPr>
+            <a:r>
+              <a:rPr sz="1500" b="0">
+                <a:solidFill>
+                  <a:srgbClr val="444444"/>
+                </a:solidFill>
+                <a:latin typeface="Arial"/>
+              </a:rPr>
+              <a:t>●  What is still open on the computation side: CoT added predictions inside one response. The other direction is to produce the response itself more than once.</a:t>
             </a:r>
           </a:p>
         </p:txBody>
@@ -4652,7 +5244,7 @@
           <a:p>
             <a:pPr algn="ctr"/>
             <a:r>
-              <a:rPr sz="3600">
+              <a:rPr sz="3600" b="0">
                 <a:solidFill>
                   <a:srgbClr val="000000"/>
                 </a:solidFill>
@@ -4704,7 +5296,7 @@
           <a:lstStyle/>
           <a:p>
             <a:r>
-              <a:rPr sz="2400">
+              <a:rPr sz="2400" b="0">
                 <a:solidFill>
                   <a:srgbClr val="000000"/>
                 </a:solidFill>
@@ -4739,43 +5331,43 @@
           <a:p>
             <a:pPr>
               <a:spcAft>
-                <a:spcPts val="800"/>
-              </a:spcAft>
-            </a:pPr>
-            <a:r>
-              <a:rPr sz="1600">
+                <a:spcPts val="600"/>
+              </a:spcAft>
+            </a:pPr>
+            <a:r>
+              <a:rPr sz="1600" b="0">
                 <a:solidFill>
                   <a:srgbClr val="444444"/>
                 </a:solidFill>
                 <a:latin typeface="Arial"/>
               </a:rPr>
-              <a:t>●  What CoT commits to: a single written path — if any step on it is wrong, the conclusion is wrong, and the model does not know.</a:t>
+              <a:t>●  What CoT commits to: a single written path. If any step on it is wrong the conclusion is wrong, and the model does not know.</a:t>
             </a:r>
           </a:p>
           <a:p>
             <a:pPr>
               <a:spcAft>
-                <a:spcPts val="800"/>
-              </a:spcAft>
-            </a:pPr>
-            <a:r>
-              <a:rPr sz="1600">
+                <a:spcPts val="600"/>
+              </a:spcAft>
+            </a:pPr>
+            <a:r>
+              <a:rPr sz="1600" b="0">
                 <a:solidFill>
                   <a:srgbClr val="444444"/>
                 </a:solidFill>
                 <a:latin typeface="Arial"/>
               </a:rPr>
-              <a:t>●  The stochastic fact: an LLM samples tokens; raise the temperature and ask again, and each run takes a different path to a possibly different answer.</a:t>
+              <a:t>●  The stochastic fact: an LLM samples tokens from a probability distribution. Raise the temperature (the sampling-randomness parameter) and ask again, and each run follows a different solution path to a possibly different answer.</a:t>
             </a:r>
           </a:p>
           <a:p>
             <a:pPr>
               <a:spcAft>
-                <a:spcPts val="800"/>
-              </a:spcAft>
-            </a:pPr>
-            <a:r>
-              <a:rPr sz="1600">
+                <a:spcPts val="600"/>
+              </a:spcAft>
+            </a:pPr>
+            <a:r>
+              <a:rPr sz="1600" b="0">
                 <a:solidFill>
                   <a:srgbClr val="444444"/>
                 </a:solidFill>
@@ -4827,13 +5419,13 @@
           <a:lstStyle/>
           <a:p>
             <a:r>
-              <a:rPr sz="2400">
+              <a:rPr sz="2400" b="0">
                 <a:solidFill>
                   <a:srgbClr val="000000"/>
                 </a:solidFill>
                 <a:latin typeface="Arial"/>
               </a:rPr>
-              <a:t>Majority voting: Self-Consistency</a:t>
+              <a:t>Majority voting — Self-Consistency</a:t>
             </a:r>
           </a:p>
         </p:txBody>
@@ -4862,11 +5454,11 @@
           <a:p>
             <a:pPr>
               <a:spcAft>
-                <a:spcPts val="800"/>
-              </a:spcAft>
-            </a:pPr>
-            <a:r>
-              <a:rPr sz="1600">
+                <a:spcPts val="600"/>
+              </a:spcAft>
+            </a:pPr>
+            <a:r>
+              <a:rPr sz="1500" b="0">
                 <a:solidFill>
                   <a:srgbClr val="444444"/>
                 </a:solidFill>
@@ -4878,33 +5470,49 @@
           <a:p>
             <a:pPr>
               <a:spcAft>
-                <a:spcPts val="800"/>
-              </a:spcAft>
-            </a:pPr>
-            <a:r>
-              <a:rPr sz="1600">
+                <a:spcPts val="600"/>
+              </a:spcAft>
+            </a:pPr>
+            <a:r>
+              <a:rPr sz="1500" b="0">
                 <a:solidFill>
                   <a:srgbClr val="444444"/>
                 </a:solidFill>
                 <a:latin typeface="Arial"/>
               </a:rPr>
-              <a:t>●  Why it works: the true answer probability sums over all reasoning paths — one ask shows only the single most plausible path's term; voting over samples estimates the whole sum.</a:t>
+              <a:t>●  Why it works: the answer probability sums over all reasoning paths, P(a | q) = Σ_r P(a | r, q) P(r | q). One ask shows only the single most plausible path's term. Voting over samples estimates the whole sum.</a:t>
             </a:r>
           </a:p>
           <a:p>
             <a:pPr>
               <a:spcAft>
-                <a:spcPts val="800"/>
-              </a:spcAft>
-            </a:pPr>
-            <a:r>
-              <a:rPr sz="1600">
+                <a:spcPts val="600"/>
+              </a:spcAft>
+            </a:pPr>
+            <a:r>
+              <a:rPr sz="1500" b="0">
                 <a:solidFill>
                   <a:srgbClr val="444444"/>
                 </a:solidFill>
                 <a:latin typeface="Arial"/>
               </a:rPr>
-              <a:t>●  The mechanism in practice: correct answers are reached by different paths converging on the same value; wrong answers scatter, each wrong in its own way.</a:t>
+              <a:t>●  The mechanism in practice: correct answers are reached by different paths converging on one value. Wrong answers scatter, each wrong in its own way. Counting brings the convergent answer to the front.</a:t>
+            </a:r>
+          </a:p>
+          <a:p>
+            <a:pPr>
+              <a:spcAft>
+                <a:spcPts val="600"/>
+              </a:spcAft>
+            </a:pPr>
+            <a:r>
+              <a:rPr sz="1500" b="0">
+                <a:solidFill>
+                  <a:srgbClr val="444444"/>
+                </a:solidFill>
+                <a:latin typeface="Arial"/>
+              </a:rPr>
+              <a:t>●  The numbers: measured gains and the cost of N samples are this week's second presentation.</a:t>
             </a:r>
           </a:p>
         </p:txBody>
@@ -4950,7 +5558,7 @@
           <a:lstStyle/>
           <a:p>
             <a:r>
-              <a:rPr sz="2400">
+              <a:rPr sz="2400" b="0">
                 <a:solidFill>
                   <a:srgbClr val="000000"/>
                 </a:solidFill>
@@ -4977,8 +5585,8 @@
         </p:blipFill>
         <p:spPr>
           <a:xfrm>
-            <a:off x="365760" y="960120"/>
-            <a:ext cx="8412480" cy="3458463"/>
+            <a:off x="1236802" y="987552"/>
+            <a:ext cx="6670395" cy="2743200"/>
           </a:xfrm>
           <a:prstGeom prst="rect">
             <a:avLst/>
@@ -4993,8 +5601,8 @@
         </p:nvSpPr>
         <p:spPr>
           <a:xfrm>
-            <a:off x="548640" y="4491736"/>
-            <a:ext cx="8046720" cy="365760"/>
+            <a:off x="502920" y="3867912"/>
+            <a:ext cx="8229600" cy="822960"/>
           </a:xfrm>
           <a:prstGeom prst="rect">
             <a:avLst/>
@@ -5007,15 +5615,19 @@
           </a:bodyPr>
           <a:lstStyle/>
           <a:p>
-            <a:pPr algn="ctr"/>
-            <a:r>
-              <a:rPr sz="1100">
+            <a:pPr algn="ctr">
+              <a:spcAft>
+                <a:spcPts val="600"/>
+              </a:spcAft>
+            </a:pPr>
+            <a:r>
+              <a:rPr sz="1400" b="0">
                 <a:solidFill>
                   <a:srgbClr val="888888"/>
                 </a:solidFill>
                 <a:latin typeface="Arial"/>
               </a:rPr>
-              <a:t>Course figure (notes Fig. 2.2) — sampled paths: correct ones converge, wrong ones scatter, the vote surfaces the convergent answer.</a:t>
+              <a:t>sampled paths from the same question. Correct paths converge on one value, wrong paths scatter, and the vote surfaces the convergent answer.</a:t>
             </a:r>
           </a:p>
         </p:txBody>
@@ -5061,7 +5673,7 @@
           <a:lstStyle/>
           <a:p>
             <a:r>
-              <a:rPr sz="2400">
+              <a:rPr sz="2400" b="0">
                 <a:solidFill>
                   <a:srgbClr val="000000"/>
                 </a:solidFill>
@@ -5096,11 +5708,11 @@
           <a:p>
             <a:pPr>
               <a:spcAft>
-                <a:spcPts val="800"/>
-              </a:spcAft>
-            </a:pPr>
-            <a:r>
-              <a:rPr sz="1600">
+                <a:spcPts val="600"/>
+              </a:spcAft>
+            </a:pPr>
+            <a:r>
+              <a:rPr sz="1600" b="0">
                 <a:solidFill>
                   <a:srgbClr val="444444"/>
                 </a:solidFill>
@@ -5112,11 +5724,11 @@
           <a:p>
             <a:pPr>
               <a:spcAft>
-                <a:spcPts val="800"/>
-              </a:spcAft>
-            </a:pPr>
-            <a:r>
-              <a:rPr sz="1600">
+                <a:spcPts val="600"/>
+              </a:spcAft>
+            </a:pPr>
+            <a:r>
+              <a:rPr sz="1600" b="0">
                 <a:solidFill>
                   <a:srgbClr val="444444"/>
                 </a:solidFill>
@@ -5128,17 +5740,17 @@
           <a:p>
             <a:pPr>
               <a:spcAft>
-                <a:spcPts val="800"/>
-              </a:spcAft>
-            </a:pPr>
-            <a:r>
-              <a:rPr sz="1600">
+                <a:spcPts val="600"/>
+              </a:spcAft>
+            </a:pPr>
+            <a:r>
+              <a:rPr sz="1600" b="0">
                 <a:solidFill>
                   <a:srgbClr val="444444"/>
                 </a:solidFill>
                 <a:latin typeface="Arial"/>
               </a:rPr>
-              <a:t>●  The replacement: selecting among such outputs needs a scoring device — a verifier. Named on the next slides, built in Week 05.</a:t>
+              <a:t>●  The replacement: selecting among such outputs needs a scoring device — a verifier. Named on the next slide, built in Week 05.</a:t>
             </a:r>
           </a:p>
         </p:txBody>
@@ -5185,7 +5797,7 @@
           <a:p>
             <a:pPr algn="ctr"/>
             <a:r>
-              <a:rPr sz="3600">
+              <a:rPr sz="3600" b="0">
                 <a:solidFill>
                   <a:srgbClr val="000000"/>
                 </a:solidFill>
@@ -5237,7 +5849,7 @@
           <a:lstStyle/>
           <a:p>
             <a:r>
-              <a:rPr sz="2400">
+              <a:rPr sz="2400" b="0">
                 <a:solidFill>
                   <a:srgbClr val="000000"/>
                 </a:solidFill>
@@ -5272,49 +5884,49 @@
           <a:p>
             <a:pPr>
               <a:spcAft>
-                <a:spcPts val="800"/>
-              </a:spcAft>
-            </a:pPr>
-            <a:r>
-              <a:rPr sz="1600">
+                <a:spcPts val="600"/>
+              </a:spcAft>
+            </a:pPr>
+            <a:r>
+              <a:rPr sz="1600" b="0">
                 <a:solidFill>
                   <a:srgbClr val="444444"/>
                 </a:solidFill>
                 <a:latin typeface="Arial"/>
               </a:rPr>
-              <a:t>●  The accounting: CoT lengthens one response (one extra prediction per solution token); self-consistency produces N responses (N× predictions).</a:t>
+              <a:t>●  The accounting: CoT lengthens one response (one extra prediction per solution token). Self-consistency produces N responses (N× predictions).</a:t>
             </a:r>
           </a:p>
           <a:p>
             <a:pPr>
               <a:spcAft>
-                <a:spcPts val="800"/>
-              </a:spcAft>
-            </a:pPr>
-            <a:r>
-              <a:rPr sz="1600">
+                <a:spcPts val="600"/>
+              </a:spcAft>
+            </a:pPr>
+            <a:r>
+              <a:rPr sz="1600" b="0">
                 <a:solidFill>
                   <a:srgbClr val="444444"/>
                 </a:solidFill>
                 <a:latin typeface="Arial"/>
               </a:rPr>
-              <a:t>●  The unit price: one prediction costs roughly the same everywhere — so the number of predictions is the bill.</a:t>
+              <a:t>●  The unit price: one prediction costs roughly the same everywhere, so the number of predictions is the bill.</a:t>
             </a:r>
           </a:p>
           <a:p>
             <a:pPr>
               <a:spcAft>
-                <a:spcPts val="800"/>
-              </a:spcAft>
-            </a:pPr>
-            <a:r>
-              <a:rPr sz="1600">
+                <a:spcPts val="600"/>
+              </a:spcAft>
+            </a:pPr>
+            <a:r>
+              <a:rPr sz="1600" b="0">
                 <a:solidFill>
                   <a:srgbClr val="444444"/>
                 </a:solidFill>
                 <a:latin typeface="Arial"/>
               </a:rPr>
-              <a:t>●  The family name: leave the weights untouched and buy accuracy by spending more predictions at answer time — test-time compute.</a:t>
+              <a:t>●  Definition: test-time compute = leaving the weights untouched and buying accuracy by spending more predictions at answer time. The principle behind every method in the family is inference-time scaling.</a:t>
             </a:r>
           </a:p>
         </p:txBody>
@@ -5360,7 +5972,7 @@
           <a:lstStyle/>
           <a:p>
             <a:r>
-              <a:rPr sz="2400">
+              <a:rPr sz="2400" b="0">
                 <a:solidFill>
                   <a:srgbClr val="000000"/>
                 </a:solidFill>
@@ -5371,16 +5983,232 @@
           </a:p>
         </p:txBody>
       </p:sp>
-      <p:sp>
-        <p:nvSpPr>
-          <p:cNvPr id="3" name="TextBox 2"/>
+      <p:graphicFrame>
+        <p:nvGraphicFramePr>
+          <p:cNvPr id="3" name="Table 2"/>
+          <p:cNvGraphicFramePr>
+            <a:graphicFrameLocks noGrp="1"/>
+          </p:cNvGraphicFramePr>
+          <p:nvPr/>
+        </p:nvGraphicFramePr>
+        <p:xfrm>
+          <a:off x="502920" y="987552"/>
+          <a:ext cx="8229600" cy="1920240"/>
+        </p:xfrm>
+        <a:graphic>
+          <a:graphicData uri="http://schemas.openxmlformats.org/drawingml/2006/table">
+            <a:tbl>
+              <a:tblPr firstRow="1" bandRow="1">
+                <a:tableStyleId>{5C22544A-7EE6-4342-B048-85BDC9FD1C3A}</a:tableStyleId>
+              </a:tblPr>
+              <a:tblGrid>
+                <a:gridCol w="2011680"/>
+                <a:gridCol w="6217920"/>
+              </a:tblGrid>
+              <a:tr h="384048">
+                <a:tc>
+                  <a:txBody>
+                    <a:bodyPr/>
+                    <a:lstStyle/>
+                    <a:p>
+                      <a:r>
+                        <a:rPr sz="1300" b="1">
+                          <a:solidFill>
+                            <a:srgbClr val="000000"/>
+                          </a:solidFill>
+                          <a:latin typeface="Arial"/>
+                        </a:rPr>
+                        <a:t>Method</a:t>
+                      </a:r>
+                    </a:p>
+                  </a:txBody>
+                  <a:tcPr/>
+                </a:tc>
+                <a:tc>
+                  <a:txBody>
+                    <a:bodyPr/>
+                    <a:lstStyle/>
+                    <a:p>
+                      <a:r>
+                        <a:rPr sz="1300" b="1">
+                          <a:solidFill>
+                            <a:srgbClr val="000000"/>
+                          </a:solidFill>
+                          <a:latin typeface="Arial"/>
+                        </a:rPr>
+                        <a:t>How predictions are increased</a:t>
+                      </a:r>
+                    </a:p>
+                  </a:txBody>
+                  <a:tcPr/>
+                </a:tc>
+              </a:tr>
+              <a:tr h="384048">
+                <a:tc>
+                  <a:txBody>
+                    <a:bodyPr/>
+                    <a:lstStyle/>
+                    <a:p>
+                      <a:r>
+                        <a:rPr sz="1300" b="0">
+                          <a:solidFill>
+                            <a:srgbClr val="444444"/>
+                          </a:solidFill>
+                          <a:latin typeface="Arial"/>
+                        </a:rPr>
+                        <a:t>CoT</a:t>
+                      </a:r>
+                    </a:p>
+                  </a:txBody>
+                  <a:tcPr/>
+                </a:tc>
+                <a:tc>
+                  <a:txBody>
+                    <a:bodyPr/>
+                    <a:lstStyle/>
+                    <a:p>
+                      <a:r>
+                        <a:rPr sz="1300" b="0">
+                          <a:solidFill>
+                            <a:srgbClr val="444444"/>
+                          </a:solidFill>
+                          <a:latin typeface="Arial"/>
+                        </a:rPr>
+                        <a:t>one response made longer — predictions added per solution token</a:t>
+                      </a:r>
+                    </a:p>
+                  </a:txBody>
+                  <a:tcPr/>
+                </a:tc>
+              </a:tr>
+              <a:tr h="384048">
+                <a:tc>
+                  <a:txBody>
+                    <a:bodyPr/>
+                    <a:lstStyle/>
+                    <a:p>
+                      <a:r>
+                        <a:rPr sz="1300" b="0">
+                          <a:solidFill>
+                            <a:srgbClr val="444444"/>
+                          </a:solidFill>
+                          <a:latin typeface="Arial"/>
+                        </a:rPr>
+                        <a:t>Self-consistency</a:t>
+                      </a:r>
+                    </a:p>
+                  </a:txBody>
+                  <a:tcPr/>
+                </a:tc>
+                <a:tc>
+                  <a:txBody>
+                    <a:bodyPr/>
+                    <a:lstStyle/>
+                    <a:p>
+                      <a:r>
+                        <a:rPr sz="1300" b="0">
+                          <a:solidFill>
+                            <a:srgbClr val="444444"/>
+                          </a:solidFill>
+                          <a:latin typeface="Arial"/>
+                        </a:rPr>
+                        <a:t>N responses → majority vote over discrete answers</a:t>
+                      </a:r>
+                    </a:p>
+                  </a:txBody>
+                  <a:tcPr/>
+                </a:tc>
+              </a:tr>
+              <a:tr h="384048">
+                <a:tc>
+                  <a:txBody>
+                    <a:bodyPr/>
+                    <a:lstStyle/>
+                    <a:p>
+                      <a:r>
+                        <a:rPr sz="1300" b="0">
+                          <a:solidFill>
+                            <a:srgbClr val="444444"/>
+                          </a:solidFill>
+                          <a:latin typeface="Arial"/>
+                        </a:rPr>
+                        <a:t>Best-of-N</a:t>
+                      </a:r>
+                    </a:p>
+                  </a:txBody>
+                  <a:tcPr/>
+                </a:tc>
+                <a:tc>
+                  <a:txBody>
+                    <a:bodyPr/>
+                    <a:lstStyle/>
+                    <a:p>
+                      <a:r>
+                        <a:rPr sz="1300" b="0">
+                          <a:solidFill>
+                            <a:srgbClr val="444444"/>
+                          </a:solidFill>
+                          <a:latin typeface="Arial"/>
+                        </a:rPr>
+                        <a:t>N responses → a verifier selects the best (replaces the vote when answers are not discrete)</a:t>
+                      </a:r>
+                    </a:p>
+                  </a:txBody>
+                  <a:tcPr/>
+                </a:tc>
+              </a:tr>
+              <a:tr h="384048">
+                <a:tc>
+                  <a:txBody>
+                    <a:bodyPr/>
+                    <a:lstStyle/>
+                    <a:p>
+                      <a:r>
+                        <a:rPr sz="1300" b="0">
+                          <a:solidFill>
+                            <a:srgbClr val="444444"/>
+                          </a:solidFill>
+                          <a:latin typeface="Arial"/>
+                        </a:rPr>
+                        <a:t>Tree search</a:t>
+                      </a:r>
+                    </a:p>
+                  </a:txBody>
+                  <a:tcPr/>
+                </a:tc>
+                <a:tc>
+                  <a:txBody>
+                    <a:bodyPr/>
+                    <a:lstStyle/>
+                    <a:p>
+                      <a:r>
+                        <a:rPr sz="1300" b="0">
+                          <a:solidFill>
+                            <a:srgbClr val="444444"/>
+                          </a:solidFill>
+                          <a:latin typeface="Arial"/>
+                        </a:rPr>
+                        <a:t>branch, evaluate, backtrack (Week 07, planning &amp; search)</a:t>
+                      </a:r>
+                    </a:p>
+                  </a:txBody>
+                  <a:tcPr/>
+                </a:tc>
+              </a:tr>
+            </a:tbl>
+          </a:graphicData>
+        </a:graphic>
+      </p:graphicFrame>
+      <p:sp>
+        <p:nvSpPr>
+          <p:cNvPr id="4" name="TextBox 3"/>
           <p:cNvSpPr txBox="1"/>
           <p:nvPr/>
         </p:nvSpPr>
         <p:spPr>
           <a:xfrm>
-            <a:off x="502920" y="987552"/>
-            <a:ext cx="8229600" cy="3931920"/>
+            <a:off x="502920" y="3136392"/>
+            <a:ext cx="8229600" cy="1783080"/>
           </a:xfrm>
           <a:prstGeom prst="rect">
             <a:avLst/>
@@ -5395,81 +6223,17 @@
           <a:p>
             <a:pPr>
               <a:spcAft>
-                <a:spcPts val="800"/>
-              </a:spcAft>
-            </a:pPr>
-            <a:r>
-              <a:rPr sz="1600">
+                <a:spcPts val="600"/>
+              </a:spcAft>
+            </a:pPr>
+            <a:r>
+              <a:rPr sz="1500" b="0">
                 <a:solidFill>
                   <a:srgbClr val="444444"/>
                 </a:solidFill>
                 <a:latin typeface="Arial"/>
               </a:rPr>
-              <a:t>●  CoT: one response made longer — predictions added per solution token.</a:t>
-            </a:r>
-          </a:p>
-          <a:p>
-            <a:pPr>
-              <a:spcAft>
-                <a:spcPts val="800"/>
-              </a:spcAft>
-            </a:pPr>
-            <a:r>
-              <a:rPr sz="1600">
-                <a:solidFill>
-                  <a:srgbClr val="444444"/>
-                </a:solidFill>
-                <a:latin typeface="Arial"/>
-              </a:rPr>
-              <a:t>●  Self-consistency: N responses, majority vote over discrete answers.</a:t>
-            </a:r>
-          </a:p>
-          <a:p>
-            <a:pPr>
-              <a:spcAft>
-                <a:spcPts val="800"/>
-              </a:spcAft>
-            </a:pPr>
-            <a:r>
-              <a:rPr sz="1600">
-                <a:solidFill>
-                  <a:srgbClr val="444444"/>
-                </a:solidFill>
-                <a:latin typeface="Arial"/>
-              </a:rPr>
-              <a:t>●  Best-of-N: N responses, a verifier selects the best — this is what replaces the vote when answers are not discrete.</a:t>
-            </a:r>
-          </a:p>
-          <a:p>
-            <a:pPr>
-              <a:spcAft>
-                <a:spcPts val="800"/>
-              </a:spcAft>
-            </a:pPr>
-            <a:r>
-              <a:rPr sz="1600">
-                <a:solidFill>
-                  <a:srgbClr val="444444"/>
-                </a:solidFill>
-                <a:latin typeface="Arial"/>
-              </a:rPr>
-              <a:t>●  Tree search: branch, evaluate, backtrack (Week 07, planning &amp; search).</a:t>
-            </a:r>
-          </a:p>
-          <a:p>
-            <a:pPr>
-              <a:spcAft>
-                <a:spcPts val="800"/>
-              </a:spcAft>
-            </a:pPr>
-            <a:r>
-              <a:rPr sz="1600">
-                <a:solidFill>
-                  <a:srgbClr val="444444"/>
-                </a:solidFill>
-                <a:latin typeface="Arial"/>
-              </a:rPr>
-              <a:t>●  The shared principle: exchange inference computation for accuracy — inference-time scaling.</a:t>
+              <a:t>●  The shared principle: exchange inference computation for accuracy. Best-of-N and tree search additionally require a verifier — a device that scores answers against each other.</a:t>
             </a:r>
           </a:p>
         </p:txBody>
@@ -5515,7 +6279,7 @@
           <a:lstStyle/>
           <a:p>
             <a:r>
-              <a:rPr sz="2400">
+              <a:rPr sz="2400" b="0">
                 <a:solidFill>
                   <a:srgbClr val="000000"/>
                 </a:solidFill>
@@ -5550,27 +6314,27 @@
           <a:p>
             <a:pPr>
               <a:spcAft>
-                <a:spcPts val="800"/>
-              </a:spcAft>
-            </a:pPr>
-            <a:r>
-              <a:rPr sz="1600">
+                <a:spcPts val="600"/>
+              </a:spcAft>
+            </a:pPr>
+            <a:r>
+              <a:rPr sz="1600" b="0">
                 <a:solidFill>
                   <a:srgbClr val="444444"/>
                 </a:solidFill>
                 <a:latin typeface="Arial"/>
               </a:rPr>
-              <a:t>●  Thinking modes (OpenAI o-series, Claude extended thinking, Gemini thinking): the written solution of this lecture moved inside the model — and billed by the token.</a:t>
+              <a:t>●  Thinking modes (OpenAI o-series, Claude extended thinking, Gemini thinking): the written solution of this lecture moved inside the model, billed by the token (Week 11).</a:t>
             </a:r>
           </a:p>
           <a:p>
             <a:pPr>
               <a:spcAft>
-                <a:spcPts val="800"/>
-              </a:spcAft>
-            </a:pPr>
-            <a:r>
-              <a:rPr sz="1600">
+                <a:spcPts val="600"/>
+              </a:spcAft>
+            </a:pPr>
+            <a:r>
+              <a:rPr sz="1600" b="0">
                 <a:solidFill>
                   <a:srgbClr val="444444"/>
                 </a:solidFill>
@@ -5582,33 +6346,17 @@
           <a:p>
             <a:pPr>
               <a:spcAft>
-                <a:spcPts val="800"/>
-              </a:spcAft>
-            </a:pPr>
-            <a:r>
-              <a:rPr sz="1600">
+                <a:spcPts val="600"/>
+              </a:spcAft>
+            </a:pPr>
+            <a:r>
+              <a:rPr sz="1600" b="0">
                 <a:solidFill>
                   <a:srgbClr val="444444"/>
                 </a:solidFill>
                 <a:latin typeface="Arial"/>
               </a:rPr>
-              <a:t>●  Not free: N samples multiply cost and latency by N.</a:t>
-            </a:r>
-          </a:p>
-          <a:p>
-            <a:pPr>
-              <a:spcAft>
-                <a:spcPts val="800"/>
-              </a:spcAft>
-            </a:pPr>
-            <a:r>
-              <a:rPr sz="1600">
-                <a:solidFill>
-                  <a:srgbClr val="444444"/>
-                </a:solidFill>
-                <a:latin typeface="Arial"/>
-              </a:rPr>
-              <a:t>●  The real decision in practice: not how big N is, but which questions deserve N &gt; 1 at all (Week 12, inference economics).</a:t>
+              <a:t>●  Not free: N samples multiply cost and latency by N. The practical decision variable is not the size of N but which questions deserve N &gt; 1 (Week 12, routing).</a:t>
             </a:r>
           </a:p>
         </p:txBody>
@@ -5655,7 +6403,7 @@
           <a:p>
             <a:pPr algn="ctr"/>
             <a:r>
-              <a:rPr sz="3600">
+              <a:rPr sz="3600" b="0">
                 <a:solidFill>
                   <a:srgbClr val="000000"/>
                 </a:solidFill>
@@ -5707,7 +6455,7 @@
           <a:lstStyle/>
           <a:p>
             <a:r>
-              <a:rPr sz="2400">
+              <a:rPr sz="2400" b="0">
                 <a:solidFill>
                   <a:srgbClr val="000000"/>
                 </a:solidFill>
@@ -5742,11 +6490,11 @@
           <a:p>
             <a:pPr>
               <a:spcAft>
-                <a:spcPts val="800"/>
-              </a:spcAft>
-            </a:pPr>
-            <a:r>
-              <a:rPr sz="1600">
+                <a:spcPts val="600"/>
+              </a:spcAft>
+            </a:pPr>
+            <a:r>
+              <a:rPr sz="1300" b="0">
                 <a:solidFill>
                   <a:srgbClr val="444444"/>
                 </a:solidFill>
@@ -5758,49 +6506,65 @@
           <a:p>
             <a:pPr>
               <a:spcAft>
-                <a:spcPts val="800"/>
-              </a:spcAft>
-            </a:pPr>
-            <a:r>
-              <a:rPr sz="1600">
+                <a:spcPts val="600"/>
+              </a:spcAft>
+            </a:pPr>
+            <a:r>
+              <a:rPr sz="1300" b="0">
                 <a:solidFill>
                   <a:srgbClr val="444444"/>
                 </a:solidFill>
                 <a:latin typeface="Arial"/>
               </a:rPr>
-              <a:t>●  Presentations (first student week, two papers): Chain-of-Thought (Wei et al., 2022) — prompting-only gains and the emergence curve; Self-Consistency (Wang et al., 2022) — sample-and-vote, the method of this lecture's Part E.</a:t>
+              <a:t>●  Presentations (first student week): Chain-of-Thought (Wei et al., 2022) — prompting-only gains and the emergence curve. Self-Consistency (Wang et al., 2022) — sample-and-vote, its measured gains, the cost of N.</a:t>
             </a:r>
           </a:p>
           <a:p>
             <a:pPr>
               <a:spcAft>
-                <a:spcPts val="800"/>
-              </a:spcAft>
-            </a:pPr>
-            <a:r>
-              <a:rPr sz="1600">
+                <a:spcPts val="600"/>
+              </a:spcAft>
+            </a:pPr>
+            <a:r>
+              <a:rPr sz="1300" b="0">
                 <a:solidFill>
                   <a:srgbClr val="444444"/>
                 </a:solidFill>
                 <a:latin typeface="Arial"/>
               </a:rPr>
-              <a:t>●  Lab: W2_lab_prompting.ipynb — flip answers with step-by-step thinking, take a code-graded eval from baseline to ≥ 11/12 with your own CoT prompt, few-shot email classification 4/4, self-consistency on the hardest item.</a:t>
+              <a:t>●  Lab (W2_lab_prompting.ipynb): answer-only vs. worked solution on the apple problem and six code-graded arithmetic items → the silent-thinking and answer-first controls → a code-graded eval improved from baseline to a format fix to your own CoT prompt (target ≥ 11/12) → few-shot email classification (4/4) → self-consistency on the hardest item → the hallucination limit. Four graded assignments close it.</a:t>
             </a:r>
           </a:p>
           <a:p>
             <a:pPr>
               <a:spcAft>
-                <a:spcPts val="800"/>
-              </a:spcAft>
-            </a:pPr>
-            <a:r>
-              <a:rPr sz="1600">
+                <a:spcPts val="600"/>
+              </a:spcAft>
+            </a:pPr>
+            <a:r>
+              <a:rPr sz="1300" b="0">
                 <a:solidFill>
                   <a:srgbClr val="444444"/>
                 </a:solidFill>
                 <a:latin typeface="Arial"/>
               </a:rPr>
-              <a:t>●  Homework: W2_hw_build_evalset.ipynb — your own eight-item code-graded evalset; show your CoT template beating answer-only on it (≥ 7/8). Due before W3.</a:t>
+              <a:t>●  Homework (W2_hw_build_evalset.ipynb): an eight-item code-graded evalset in your own domain, and a CoT template that beats answer-only on it (≥ 7/8). Due before Week 03.</a:t>
+            </a:r>
+          </a:p>
+          <a:p>
+            <a:pPr>
+              <a:spcAft>
+                <a:spcPts val="600"/>
+              </a:spcAft>
+            </a:pPr>
+            <a:r>
+              <a:rPr sz="1300" b="0">
+                <a:solidFill>
+                  <a:srgbClr val="444444"/>
+                </a:solidFill>
+                <a:latin typeface="Arial"/>
+              </a:rPr>
+              <a:t>●  Next week: tools — the external checking step that this week's failure on slide 19 requires.</a:t>
             </a:r>
           </a:p>
         </p:txBody>
@@ -5846,13 +6610,13 @@
           <a:lstStyle/>
           <a:p>
             <a:r>
-              <a:rPr sz="2400">
+              <a:rPr sz="2400" b="0">
                 <a:solidFill>
                   <a:srgbClr val="000000"/>
                 </a:solidFill>
                 <a:latin typeface="Arial"/>
               </a:rPr>
-              <a:t>Why prompting matters for Agent</a:t>
+              <a:t>Why prompting matters for an agent</a:t>
             </a:r>
           </a:p>
         </p:txBody>
@@ -5881,49 +6645,65 @@
           <a:p>
             <a:pPr>
               <a:spcAft>
-                <a:spcPts val="800"/>
-              </a:spcAft>
-            </a:pPr>
-            <a:r>
-              <a:rPr sz="1600">
+                <a:spcPts val="600"/>
+              </a:spcAft>
+            </a:pPr>
+            <a:r>
+              <a:rPr sz="1600" b="0">
                 <a:solidFill>
                   <a:srgbClr val="444444"/>
                 </a:solidFill>
                 <a:latin typeface="Arial"/>
               </a:rPr>
-              <a:t>●  Recall from Week 01: an agent is a system whose next action is decided by the model's output — every one of those decisions is an act of reasoning.</a:t>
+              <a:t>●  Recall from Week 01: an agent is a system whose next action is decided by the model's output. Every one of those decisions is an act of reasoning.</a:t>
             </a:r>
           </a:p>
           <a:p>
             <a:pPr>
               <a:spcAft>
-                <a:spcPts val="800"/>
-              </a:spcAft>
-            </a:pPr>
-            <a:r>
-              <a:rPr sz="1600">
+                <a:spcPts val="600"/>
+              </a:spcAft>
+            </a:pPr>
+            <a:r>
+              <a:rPr sz="1600" b="0">
                 <a:solidFill>
                   <a:srgbClr val="444444"/>
                 </a:solidFill>
                 <a:latin typeface="Arial"/>
               </a:rPr>
-              <a:t>●  The bound: an agent's accuracy is capped by the accuracy of the model's reasoning at each step. No architecture can be accurate on top of a model that reasons inaccurately.</a:t>
+              <a:t>●  The bound: an agent's accuracy is capped by the accuracy of the model's reasoning at each step. No architecture is accurate on top of a model that reasons inaccurately.</a:t>
             </a:r>
           </a:p>
           <a:p>
             <a:pPr>
               <a:spcAft>
-                <a:spcPts val="800"/>
-              </a:spcAft>
-            </a:pPr>
-            <a:r>
-              <a:rPr sz="1600">
+                <a:spcPts val="600"/>
+              </a:spcAft>
+            </a:pPr>
+            <a:r>
+              <a:rPr sz="1600" b="0">
                 <a:solidFill>
                   <a:srgbClr val="444444"/>
                 </a:solidFill>
                 <a:latin typeface="Arial"/>
               </a:rPr>
-              <a:t>●  This week's question: before building anything around the model, how much can be gotten out of a bare call — by changing only how we ask?</a:t>
+              <a:t>●  Where Week 01 left the deficits: tools, memory, verification, iteration are all repaired by adding something around the model in later weeks.</a:t>
+            </a:r>
+          </a:p>
+          <a:p>
+            <a:pPr>
+              <a:spcAft>
+                <a:spcPts val="600"/>
+              </a:spcAft>
+            </a:pPr>
+            <a:r>
+              <a:rPr sz="1600" b="0">
+                <a:solidFill>
+                  <a:srgbClr val="444444"/>
+                </a:solidFill>
+                <a:latin typeface="Arial"/>
+              </a:rPr>
+              <a:t>●  This week: the one thing that cannot be delegated outward — the quality of a single call. What can be gotten out of a bare call before anything is built around it.</a:t>
             </a:r>
           </a:p>
         </p:txBody>
@@ -5969,7 +6749,7 @@
           <a:lstStyle/>
           <a:p>
             <a:r>
-              <a:rPr sz="2400">
+              <a:rPr sz="2400" b="0">
                 <a:solidFill>
                   <a:srgbClr val="000000"/>
                 </a:solidFill>
@@ -6004,43 +6784,43 @@
           <a:p>
             <a:pPr>
               <a:spcAft>
-                <a:spcPts val="800"/>
-              </a:spcAft>
-            </a:pPr>
-            <a:r>
-              <a:rPr sz="1600">
+                <a:spcPts val="600"/>
+              </a:spcAft>
+            </a:pPr>
+            <a:r>
+              <a:rPr sz="1600" b="0">
                 <a:solidFill>
                   <a:srgbClr val="444444"/>
                 </a:solidFill>
                 <a:latin typeface="Arial"/>
               </a:rPr>
-              <a:t>●  Definition: deriving a conclusion from given premises through intermediate steps — arithmetic word problems, multi-fact narrowing, ordering the steps of a plan.</a:t>
+              <a:t>●  Definition: deriving a conclusion from given premises through intermediate steps — arithmetic word problems, combining several facts to narrow an answer, ordering the steps of a plan.</a:t>
             </a:r>
           </a:p>
           <a:p>
             <a:pPr>
               <a:spcAft>
-                <a:spcPts val="800"/>
-              </a:spcAft>
-            </a:pPr>
-            <a:r>
-              <a:rPr sz="1600">
+                <a:spcPts val="600"/>
+              </a:spcAft>
+            </a:pPr>
+            <a:r>
+              <a:rPr sz="1600" b="0">
                 <a:solidFill>
                   <a:srgbClr val="444444"/>
                 </a:solidFill>
                 <a:latin typeface="Arial"/>
               </a:rPr>
-              <a:t>●  What separates it from recall: "What is the capital of Korea?" has no intermediate steps; reasoning does, and every step must be passed through on the way to the conclusion.</a:t>
+              <a:t>●  What separates it from recall: "What is the capital of Korea?" has no intermediate steps. Reasoning has steps that must be passed through on the way to the conclusion.</a:t>
             </a:r>
           </a:p>
           <a:p>
             <a:pPr>
               <a:spcAft>
-                <a:spcPts val="800"/>
-              </a:spcAft>
-            </a:pPr>
-            <a:r>
-              <a:rPr sz="1600">
+                <a:spcPts val="600"/>
+              </a:spcAft>
+            </a:pPr>
+            <a:r>
+              <a:rPr sz="1600" b="0">
                 <a:solidFill>
                   <a:srgbClr val="444444"/>
                 </a:solidFill>
@@ -6092,7 +6872,7 @@
           <a:lstStyle/>
           <a:p>
             <a:r>
-              <a:rPr sz="2400">
+              <a:rPr sz="2400" b="0">
                 <a:solidFill>
                   <a:srgbClr val="000000"/>
                 </a:solidFill>
@@ -6127,59 +6907,59 @@
           <a:p>
             <a:pPr>
               <a:spcAft>
-                <a:spcPts val="800"/>
-              </a:spcAft>
-            </a:pPr>
-            <a:r>
-              <a:rPr sz="1600">
+                <a:spcPts val="600"/>
+              </a:spcAft>
+            </a:pPr>
+            <a:r>
+              <a:rPr sz="1500" b="0">
                 <a:solidFill>
                   <a:srgbClr val="444444"/>
                 </a:solidFill>
                 <a:latin typeface="Arial"/>
               </a:rPr>
-              <a:t>●  The problem: a cafeteria has 23 apples. They use 20 for lunch and buy 6 more. How many now?</a:t>
+              <a:t>●  The problem: a cafeteria has 23 apples. They use 20 for lunch and buy 6 more. How many apples do they have?</a:t>
             </a:r>
           </a:p>
           <a:p>
             <a:pPr>
               <a:spcAft>
-                <a:spcPts val="400"/>
-              </a:spcAft>
-            </a:pPr>
-            <a:r>
-              <a:rPr sz="1350">
+                <a:spcPts val="600"/>
+              </a:spcAft>
+            </a:pPr>
+            <a:r>
+              <a:rPr sz="1400" b="0">
                 <a:solidFill>
                   <a:srgbClr val="444444"/>
                 </a:solidFill>
                 <a:latin typeface="Arial"/>
               </a:rPr>
-              <a:t>      ○  Method A — demand only the answer: "Answer: 27" (wrong).</a:t>
+              <a:t>      ○  Method A — demand only the answer: "Answer: 27" (wrong)</a:t>
             </a:r>
           </a:p>
           <a:p>
             <a:pPr>
               <a:spcAft>
-                <a:spcPts val="400"/>
-              </a:spcAft>
-            </a:pPr>
-            <a:r>
-              <a:rPr sz="1350">
+                <a:spcPts val="600"/>
+              </a:spcAft>
+            </a:pPr>
+            <a:r>
+              <a:rPr sz="1400" b="0">
                 <a:solidFill>
                   <a:srgbClr val="444444"/>
                 </a:solidFill>
                 <a:latin typeface="Arial"/>
               </a:rPr>
-              <a:t>      ○  Method B — elicit the worked solution: "23 − 20 = 3, 3 + 6 = 9. Answer: 9" (correct).</a:t>
+              <a:t>      ○  Method B — elicit the worked solution: "23 − 20 = 3, 3 + 6 = 9. Answer: 9" (correct)</a:t>
             </a:r>
           </a:p>
           <a:p>
             <a:pPr>
               <a:spcAft>
-                <a:spcPts val="800"/>
-              </a:spcAft>
-            </a:pPr>
-            <a:r>
-              <a:rPr sz="1600">
+                <a:spcPts val="600"/>
+              </a:spcAft>
+            </a:pPr>
+            <a:r>
+              <a:rPr sz="1500" b="0">
                 <a:solidFill>
                   <a:srgbClr val="444444"/>
                 </a:solidFill>
@@ -6191,33 +6971,33 @@
           <a:p>
             <a:pPr>
               <a:spcAft>
-                <a:spcPts val="800"/>
-              </a:spcAft>
-            </a:pPr>
-            <a:r>
-              <a:rPr sz="1600">
+                <a:spcPts val="600"/>
+              </a:spcAft>
+            </a:pPr>
+            <a:r>
+              <a:rPr sz="1500" b="0">
                 <a:solidFill>
                   <a:srgbClr val="444444"/>
                 </a:solidFill>
                 <a:latin typeface="Arial"/>
               </a:rPr>
-              <a:t>●  Today's caveat: current models pass this size by direct answering — but the same failure reappears on any model once steps and digits grow (the lab reproduces it).</a:t>
+              <a:t>●  Today: a large model solves a problem of this size by direct answering, but the same failure reappears once the number of steps and digits grows. The lab reproduces it on harder items.</a:t>
             </a:r>
           </a:p>
           <a:p>
             <a:pPr>
               <a:spcAft>
-                <a:spcPts val="800"/>
-              </a:spcAft>
-            </a:pPr>
-            <a:r>
-              <a:rPr sz="1600">
+                <a:spcPts val="600"/>
+              </a:spcAft>
+            </a:pPr>
+            <a:r>
+              <a:rPr sz="1500" b="0">
                 <a:solidFill>
                   <a:srgbClr val="444444"/>
                 </a:solidFill>
                 <a:latin typeface="Arial"/>
               </a:rPr>
-              <a:t>●  The puzzle: identical weights, different correctness — so the cause is not in the weights but in how the answer is computed.</a:t>
+              <a:t>●  The conclusion: the weights are identical, yet correctness splits. The cause lies in the computational process that produces the answer, not in the weights.</a:t>
             </a:r>
           </a:p>
         </p:txBody>
@@ -6264,7 +7044,7 @@
           <a:p>
             <a:pPr algn="ctr"/>
             <a:r>
-              <a:rPr sz="3600">
+              <a:rPr sz="3600" b="0">
                 <a:solidFill>
                   <a:srgbClr val="000000"/>
                 </a:solidFill>
@@ -6316,13 +7096,13 @@
           <a:lstStyle/>
           <a:p>
             <a:r>
-              <a:rPr sz="2400">
+              <a:rPr sz="2400" b="0">
                 <a:solidFill>
                   <a:srgbClr val="000000"/>
                 </a:solidFill>
                 <a:latin typeface="Arial"/>
               </a:rPr>
-              <a:t>How an LLM computes</a:t>
+              <a:t>How an LLM computes an answer</a:t>
             </a:r>
           </a:p>
         </p:txBody>
@@ -6351,49 +7131,49 @@
           <a:p>
             <a:pPr>
               <a:spcAft>
-                <a:spcPts val="800"/>
-              </a:spcAft>
-            </a:pPr>
-            <a:r>
-              <a:rPr sz="1600">
+                <a:spcPts val="600"/>
+              </a:spcAft>
+            </a:pPr>
+            <a:r>
+              <a:rPr sz="1600" b="0">
                 <a:solidFill>
                   <a:srgbClr val="444444"/>
                 </a:solidFill>
                 <a:latin typeface="Arial"/>
               </a:rPr>
-              <a:t>●  The constraint: an LLM has no workspace outside the text. Producing the next token, it reads only the text so far — no train of thought continues between tokens.</a:t>
+              <a:t>●  The constraint: an LLM has no workspace outside the text. Producing the next token, it reads only the text so far. Between one token and the next, no train of thought continues outside the text.</a:t>
             </a:r>
           </a:p>
           <a:p>
             <a:pPr>
               <a:spcAft>
-                <a:spcPts val="800"/>
-              </a:spcAft>
-            </a:pPr>
-            <a:r>
-              <a:rPr sz="1600">
+                <a:spcPts val="600"/>
+              </a:spcAft>
+            </a:pPr>
+            <a:r>
+              <a:rPr sz="1600" b="0">
                 <a:solidFill>
                   <a:srgbClr val="444444"/>
                 </a:solidFill>
                 <a:latin typeface="Arial"/>
               </a:rPr>
-              <a:t>●  The contrast: a person can pause mid-sentence and carry a value in their head; the only place a model can hold an intermediate result is the text it is writing.</a:t>
+              <a:t>●  The contrast: a person can pause mid-sentence and carry a value in their head. The only place a model can hold an intermediate result is the text it is writing.</a:t>
             </a:r>
           </a:p>
           <a:p>
             <a:pPr>
               <a:spcAft>
-                <a:spcPts val="800"/>
-              </a:spcAft>
-            </a:pPr>
-            <a:r>
-              <a:rPr sz="1600">
+                <a:spcPts val="600"/>
+              </a:spcAft>
+            </a:pPr>
+            <a:r>
+              <a:rPr sz="1600" b="0">
                 <a:solidFill>
                   <a:srgbClr val="444444"/>
                 </a:solidFill>
                 <a:latin typeface="Arial"/>
               </a:rPr>
-              <a:t>●  The consequence: whether intermediate values may be written into the text decides whether multi-step problems are solvable.</a:t>
+              <a:t>●  The consequence: whether intermediate values may be written into the output decides whether they exist at all.</a:t>
             </a:r>
           </a:p>
         </p:txBody>
@@ -6439,13 +7219,13 @@
           <a:lstStyle/>
           <a:p>
             <a:r>
-              <a:rPr sz="2400">
+              <a:rPr sz="2400" b="0">
                 <a:solidFill>
                   <a:srgbClr val="000000"/>
                 </a:solidFill>
                 <a:latin typeface="Arial"/>
               </a:rPr>
-              <a:t>Reading the apple problem with this fact</a:t>
+              <a:t>The apple problem, read with this fact</a:t>
             </a:r>
           </a:p>
         </p:txBody>
@@ -6474,11 +7254,11 @@
           <a:p>
             <a:pPr>
               <a:spcAft>
-                <a:spcPts val="800"/>
-              </a:spcAft>
-            </a:pPr>
-            <a:r>
-              <a:rPr sz="1600">
+                <a:spcPts val="600"/>
+              </a:spcAft>
+            </a:pPr>
+            <a:r>
+              <a:rPr sz="1600" b="0">
                 <a:solidFill>
                   <a:srgbClr val="444444"/>
                 </a:solidFill>
@@ -6490,49 +7270,49 @@
           <a:p>
             <a:pPr>
               <a:spcAft>
-                <a:spcPts val="800"/>
-              </a:spcAft>
-            </a:pPr>
-            <a:r>
-              <a:rPr sz="1600">
+                <a:spcPts val="600"/>
+              </a:spcAft>
+            </a:pPr>
+            <a:r>
+              <a:rPr sz="1600" b="0">
                 <a:solidFill>
                   <a:srgbClr val="444444"/>
                 </a:solidFill>
                 <a:latin typeface="Arial"/>
               </a:rPr>
-              <a:t>●  Method B: the moment "23 − 20 = 3" is written, the 3 is stored in the text — later tokens just read it and advance one step.</a:t>
+              <a:t>●  Method B: the moment "23 − 20 = 3" is written, the 3 is stored in the text. Later tokens only read it and advance one step.</a:t>
             </a:r>
           </a:p>
           <a:p>
             <a:pPr>
               <a:spcAft>
-                <a:spcPts val="800"/>
-              </a:spcAft>
-            </a:pPr>
-            <a:r>
-              <a:rPr sz="1600">
+                <a:spcPts val="600"/>
+              </a:spcAft>
+            </a:pPr>
+            <a:r>
+              <a:rPr sz="1600" b="0">
                 <a:solidFill>
                   <a:srgbClr val="444444"/>
                 </a:solidFill>
                 <a:latin typeface="Arial"/>
               </a:rPr>
-              <a:t>●  Method A: only the answer is allowed, so there is nowhere to write — the single prediction that emits the answer must carry both calculations at once.</a:t>
+              <a:t>●  Method A: only the answer is allowed, so there is nowhere to write. The single prediction that emits the answer digit must carry both calculations at once.</a:t>
             </a:r>
           </a:p>
           <a:p>
             <a:pPr>
               <a:spcAft>
-                <a:spcPts val="800"/>
-              </a:spcAft>
-            </a:pPr>
-            <a:r>
-              <a:rPr sz="1600">
+                <a:spcPts val="600"/>
+              </a:spcAft>
+            </a:pPr>
+            <a:r>
+              <a:rPr sz="1600" b="0">
                 <a:solidFill>
                   <a:srgbClr val="444444"/>
                 </a:solidFill>
                 <a:latin typeface="Arial"/>
               </a:rPr>
-              <a:t>●  The point: B's extra tokens are not decoration; they are the storage sites of intermediate values. A is the condition that forbids storage.</a:t>
+              <a:t>●  The point: B's extra tokens are not decoration. They are the storage site of intermediate values, and A is the condition that forbids that storage.</a:t>
             </a:r>
           </a:p>
         </p:txBody>
@@ -6863,4 +7643,324 @@
   </a:objectDefaults>
   <a:extraClrSchemeLst/>
 </a:theme>
+</file>
+
+<file path=ppt/theme/theme2.xml><?xml version="1.0" encoding="utf-8"?>
+<a:theme xmlns:a="http://schemas.openxmlformats.org/drawingml/2006/main" name="Office Theme">
+  <a:themeElements>
+    <a:clrScheme name="Office">
+      <a:dk1>
+        <a:sysClr val="windowText" lastClr="000000"/>
+      </a:dk1>
+      <a:lt1>
+        <a:sysClr val="window" lastClr="FFFFFF"/>
+      </a:lt1>
+      <a:dk2>
+        <a:srgbClr val="1F497D"/>
+      </a:dk2>
+      <a:lt2>
+        <a:srgbClr val="EEECE1"/>
+      </a:lt2>
+      <a:accent1>
+        <a:srgbClr val="4F81BD"/>
+      </a:accent1>
+      <a:accent2>
+        <a:srgbClr val="C0504D"/>
+      </a:accent2>
+      <a:accent3>
+        <a:srgbClr val="9BBB59"/>
+      </a:accent3>
+      <a:accent4>
+        <a:srgbClr val="8064A2"/>
+      </a:accent4>
+      <a:accent5>
+        <a:srgbClr val="4BACC6"/>
+      </a:accent5>
+      <a:accent6>
+        <a:srgbClr val="F79646"/>
+      </a:accent6>
+      <a:hlink>
+        <a:srgbClr val="0000FF"/>
+      </a:hlink>
+      <a:folHlink>
+        <a:srgbClr val="800080"/>
+      </a:folHlink>
+    </a:clrScheme>
+    <a:fontScheme name="Office">
+      <a:majorFont>
+        <a:latin typeface="Calibri"/>
+        <a:ea typeface=""/>
+        <a:cs typeface=""/>
+        <a:font script="Jpan" typeface="ＭＳ Ｐゴシック"/>
+        <a:font script="Hang" typeface="맑은 고딕"/>
+        <a:font script="Hans" typeface="宋体"/>
+        <a:font script="Hant" typeface="新細明體"/>
+        <a:font script="Arab" typeface="Times New Roman"/>
+        <a:font script="Hebr" typeface="Times New Roman"/>
+        <a:font script="Thai" typeface="Angsana New"/>
+        <a:font script="Ethi" typeface="Nyala"/>
+        <a:font script="Beng" typeface="Vrinda"/>
+        <a:font script="Gujr" typeface="Shruti"/>
+        <a:font script="Khmr" typeface="MoolBoran"/>
+        <a:font script="Knda" typeface="Tunga"/>
+        <a:font script="Guru" typeface="Raavi"/>
+        <a:font script="Cans" typeface="Euphemia"/>
+        <a:font script="Cher" typeface="Plantagenet Cherokee"/>
+        <a:font script="Yiii" typeface="Microsoft Yi Baiti"/>
+        <a:font script="Tibt" typeface="Microsoft Himalaya"/>
+        <a:font script="Thaa" typeface="MV Boli"/>
+        <a:font script="Deva" typeface="Mangal"/>
+        <a:font script="Telu" typeface="Gautami"/>
+        <a:font script="Taml" typeface="Latha"/>
+        <a:font script="Syrc" typeface="Estrangelo Edessa"/>
+        <a:font script="Orya" typeface="Kalinga"/>
+        <a:font script="Mlym" typeface="Kartika"/>
+        <a:font script="Laoo" typeface="DokChampa"/>
+        <a:font script="Sinh" typeface="Iskoola Pota"/>
+        <a:font script="Mong" typeface="Mongolian Baiti"/>
+        <a:font script="Viet" typeface="Times New Roman"/>
+        <a:font script="Uigh" typeface="Microsoft Uighur"/>
+        <a:font script="Geor" typeface="Sylfaen"/>
+      </a:majorFont>
+      <a:minorFont>
+        <a:latin typeface="Calibri"/>
+        <a:ea typeface=""/>
+        <a:cs typeface=""/>
+        <a:font script="Jpan" typeface="ＭＳ Ｐゴシック"/>
+        <a:font script="Hang" typeface="맑은 고딕"/>
+        <a:font script="Hans" typeface="宋体"/>
+        <a:font script="Hant" typeface="新細明體"/>
+        <a:font script="Arab" typeface="Arial"/>
+        <a:font script="Hebr" typeface="Arial"/>
+        <a:font script="Thai" typeface="Cordia New"/>
+        <a:font script="Ethi" typeface="Nyala"/>
+        <a:font script="Beng" typeface="Vrinda"/>
+        <a:font script="Gujr" typeface="Shruti"/>
+        <a:font script="Khmr" typeface="DaunPenh"/>
+        <a:font script="Knda" typeface="Tunga"/>
+        <a:font script="Guru" typeface="Raavi"/>
+        <a:font script="Cans" typeface="Euphemia"/>
+        <a:font script="Cher" typeface="Plantagenet Cherokee"/>
+        <a:font script="Yiii" typeface="Microsoft Yi Baiti"/>
+        <a:font script="Tibt" typeface="Microsoft Himalaya"/>
+        <a:font script="Thaa" typeface="MV Boli"/>
+        <a:font script="Deva" typeface="Mangal"/>
+        <a:font script="Telu" typeface="Gautami"/>
+        <a:font script="Taml" typeface="Latha"/>
+        <a:font script="Syrc" typeface="Estrangelo Edessa"/>
+        <a:font script="Orya" typeface="Kalinga"/>
+        <a:font script="Mlym" typeface="Kartika"/>
+        <a:font script="Laoo" typeface="DokChampa"/>
+        <a:font script="Sinh" typeface="Iskoola Pota"/>
+        <a:font script="Mong" typeface="Mongolian Baiti"/>
+        <a:font script="Viet" typeface="Arial"/>
+        <a:font script="Uigh" typeface="Microsoft Uighur"/>
+        <a:font script="Geor" typeface="Sylfaen"/>
+      </a:minorFont>
+    </a:fontScheme>
+    <a:fmtScheme name="Office">
+      <a:fillStyleLst>
+        <a:solidFill>
+          <a:schemeClr val="phClr"/>
+        </a:solidFill>
+        <a:gradFill rotWithShape="1">
+          <a:gsLst>
+            <a:gs pos="0">
+              <a:schemeClr val="phClr">
+                <a:tint val="50000"/>
+                <a:satMod val="300000"/>
+              </a:schemeClr>
+            </a:gs>
+            <a:gs pos="35000">
+              <a:schemeClr val="phClr">
+                <a:tint val="37000"/>
+                <a:satMod val="300000"/>
+              </a:schemeClr>
+            </a:gs>
+            <a:gs pos="100000">
+              <a:schemeClr val="phClr">
+                <a:tint val="15000"/>
+                <a:satMod val="350000"/>
+              </a:schemeClr>
+            </a:gs>
+          </a:gsLst>
+          <a:lin ang="16200000" scaled="1"/>
+        </a:gradFill>
+        <a:gradFill rotWithShape="1">
+          <a:gsLst>
+            <a:gs pos="0">
+              <a:schemeClr val="phClr">
+                <a:tint val="100000"/>
+                <a:shade val="100000"/>
+                <a:satMod val="130000"/>
+              </a:schemeClr>
+            </a:gs>
+            <a:gs pos="100000">
+              <a:schemeClr val="phClr">
+                <a:tint val="50000"/>
+                <a:shade val="100000"/>
+                <a:satMod val="350000"/>
+              </a:schemeClr>
+            </a:gs>
+          </a:gsLst>
+          <a:lin ang="16200000" scaled="0"/>
+        </a:gradFill>
+      </a:fillStyleLst>
+      <a:lnStyleLst>
+        <a:ln w="9525" cap="flat" cmpd="sng" algn="ctr">
+          <a:solidFill>
+            <a:schemeClr val="phClr">
+              <a:shade val="95000"/>
+              <a:satMod val="105000"/>
+            </a:schemeClr>
+          </a:solidFill>
+          <a:prstDash val="solid"/>
+        </a:ln>
+        <a:ln w="25400" cap="flat" cmpd="sng" algn="ctr">
+          <a:solidFill>
+            <a:schemeClr val="phClr"/>
+          </a:solidFill>
+          <a:prstDash val="solid"/>
+        </a:ln>
+        <a:ln w="38100" cap="flat" cmpd="sng" algn="ctr">
+          <a:solidFill>
+            <a:schemeClr val="phClr"/>
+          </a:solidFill>
+          <a:prstDash val="solid"/>
+        </a:ln>
+      </a:lnStyleLst>
+      <a:effectStyleLst>
+        <a:effectStyle>
+          <a:effectLst>
+            <a:outerShdw blurRad="40000" dist="20000" dir="5400000" rotWithShape="0">
+              <a:srgbClr val="000000">
+                <a:alpha val="38000"/>
+              </a:srgbClr>
+            </a:outerShdw>
+          </a:effectLst>
+        </a:effectStyle>
+        <a:effectStyle>
+          <a:effectLst>
+            <a:outerShdw blurRad="40000" dist="23000" dir="5400000" rotWithShape="0">
+              <a:srgbClr val="000000">
+                <a:alpha val="35000"/>
+              </a:srgbClr>
+            </a:outerShdw>
+          </a:effectLst>
+        </a:effectStyle>
+        <a:effectStyle>
+          <a:effectLst>
+            <a:outerShdw blurRad="40000" dist="23000" dir="5400000" rotWithShape="0">
+              <a:srgbClr val="000000">
+                <a:alpha val="35000"/>
+              </a:srgbClr>
+            </a:outerShdw>
+          </a:effectLst>
+          <a:scene3d>
+            <a:camera prst="orthographicFront">
+              <a:rot lat="0" lon="0" rev="0"/>
+            </a:camera>
+            <a:lightRig rig="threePt" dir="t">
+              <a:rot lat="0" lon="0" rev="1200000"/>
+            </a:lightRig>
+          </a:scene3d>
+          <a:sp3d>
+            <a:bevelT w="63500" h="25400"/>
+          </a:sp3d>
+        </a:effectStyle>
+      </a:effectStyleLst>
+      <a:bgFillStyleLst>
+        <a:solidFill>
+          <a:schemeClr val="phClr"/>
+        </a:solidFill>
+        <a:gradFill rotWithShape="1">
+          <a:gsLst>
+            <a:gs pos="0">
+              <a:schemeClr val="phClr">
+                <a:tint val="40000"/>
+                <a:satMod val="350000"/>
+              </a:schemeClr>
+            </a:gs>
+            <a:gs pos="40000">
+              <a:schemeClr val="phClr">
+                <a:tint val="45000"/>
+                <a:shade val="99000"/>
+                <a:satMod val="350000"/>
+              </a:schemeClr>
+            </a:gs>
+            <a:gs pos="100000">
+              <a:schemeClr val="phClr">
+                <a:shade val="20000"/>
+                <a:satMod val="255000"/>
+              </a:schemeClr>
+            </a:gs>
+          </a:gsLst>
+          <a:path path="circle">
+            <a:fillToRect l="50000" t="-80000" r="50000" b="180000"/>
+          </a:path>
+        </a:gradFill>
+        <a:gradFill rotWithShape="1">
+          <a:gsLst>
+            <a:gs pos="0">
+              <a:schemeClr val="phClr">
+                <a:tint val="80000"/>
+                <a:satMod val="300000"/>
+              </a:schemeClr>
+            </a:gs>
+            <a:gs pos="100000">
+              <a:schemeClr val="phClr">
+                <a:shade val="30000"/>
+                <a:satMod val="200000"/>
+              </a:schemeClr>
+            </a:gs>
+          </a:gsLst>
+          <a:path path="circle">
+            <a:fillToRect l="50000" t="50000" r="50000" b="50000"/>
+          </a:path>
+        </a:gradFill>
+      </a:bgFillStyleLst>
+    </a:fmtScheme>
+  </a:themeElements>
+  <a:objectDefaults>
+    <a:spDef>
+      <a:spPr/>
+      <a:bodyPr/>
+      <a:lstStyle/>
+      <a:style>
+        <a:lnRef idx="1">
+          <a:schemeClr val="accent1"/>
+        </a:lnRef>
+        <a:fillRef idx="3">
+          <a:schemeClr val="accent1"/>
+        </a:fillRef>
+        <a:effectRef idx="2">
+          <a:schemeClr val="accent1"/>
+        </a:effectRef>
+        <a:fontRef idx="minor">
+          <a:schemeClr val="lt1"/>
+        </a:fontRef>
+      </a:style>
+    </a:spDef>
+    <a:lnDef>
+      <a:spPr/>
+      <a:bodyPr/>
+      <a:lstStyle/>
+      <a:style>
+        <a:lnRef idx="2">
+          <a:schemeClr val="accent1"/>
+        </a:lnRef>
+        <a:fillRef idx="0">
+          <a:schemeClr val="accent1"/>
+        </a:fillRef>
+        <a:effectRef idx="1">
+          <a:schemeClr val="accent1"/>
+        </a:effectRef>
+        <a:fontRef idx="minor">
+          <a:schemeClr val="tx1"/>
+        </a:fontRef>
+      </a:style>
+    </a:lnDef>
+  </a:objectDefaults>
+  <a:extraClrSchemeLst/>
+</a:theme>
 </file>
--- a/lectures/week02/slides-draft-w2.pptx
+++ b/lectures/week02/slides-draft-w2.pptx
@@ -601,7 +601,7 @@
           <a:lstStyle/>
           <a:p>
             <a:r>
-              <a:t>Live demo option: run the answer-only vs. worked-solution cells of the lab notebook §2.2 (six two-digit-multiplication problems: 0/6 vs. 6/6 on gpt-4o-mini).</a:t>
+              <a:t>Live demo option: run lab §2.2 (answer-only vs. worked solution).</a:t>
             </a:r>
           </a:p>
         </p:txBody>
@@ -671,7 +671,7 @@
           <a:lstStyle/>
           <a:p>
             <a:r>
-              <a:t>Timing: slides 3–12 ≈ 10 min, 13–20 ≈ 10 min, 21–30 ≈ 10 min. Slide 12 is the one to keep even if time runs short: it is what makes the Week 03 hand-off (tools fix hallucination, prompting does not) land.</a:t>
+              <a:t>Timing: slides 3–12 ≈ 10 min, 13–20 ≈ 10 min, 21–30 ≈ 10 min. Slide 12 must be kept even if time runs short: it sets up the Week 03 hand-off (tools repair hallucination, prompting does not).</a:t>
             </a:r>
           </a:p>
         </p:txBody>
@@ -3834,7 +3834,7 @@
                 </a:solidFill>
                 <a:latin typeface="Arial"/>
               </a:rPr>
-              <a:t>In A, nothing stores the intermediate value, so one prediction must carry both calculations. In B, the written "3" is read back from the text and each step advances alone.</a:t>
+              <a:t>Under A, no token stores the intermediate value, so one prediction must carry both calculations. Under B, the written "3" is read back from the text and each step is one operation.</a:t>
             </a:r>
           </a:p>
         </p:txBody>
@@ -3886,7 +3886,7 @@
                 </a:solidFill>
                 <a:latin typeface="Arial"/>
               </a:rPr>
-              <a:t>The limit, and its open cause</a:t>
+              <a:t>The per-prediction limit</a:t>
             </a:r>
           </a:p>
         </p:txBody>
@@ -3925,7 +3925,7 @@
                 </a:solidFill>
                 <a:latin typeface="Arial"/>
               </a:rPr>
-              <a:t>●  Established fact: there is a limit on how many steps one prediction can carry. It is measured, and failure grows with steps and digits.</a:t>
+              <a:t>●  Empirical fact: the number of sequential operations one prediction can perform is bounded. Failure frequency rises with the number of steps and digits.</a:t>
             </a:r>
           </a:p>
           <a:p>
@@ -3941,7 +3941,7 @@
                 </a:solidFill>
                 <a:latin typeface="Arial"/>
               </a:rPr>
-              <a:t>●  The failure shape: prediction emits the most plausible token whether or not the computation finished. Where processing could not complete, an answer-shaped number assembled from 23 and 6 appears — the 27.</a:t>
+              <a:t>●  Failure form: prediction emits the most probable token whether or not the computation is complete. An incomplete computation yields an answer-shaped number built from the digits in the problem (27 from 23 and 6).</a:t>
             </a:r>
           </a:p>
           <a:p>
@@ -3957,7 +3957,7 @@
                 </a:solidFill>
                 <a:latin typeface="Arial"/>
               </a:rPr>
-              <a:t>●  Open question, why the limit exists: one analysis bounds a single prediction's internal computation by the layer count (Feng et al., 2023; Merrill &amp; Sabharwal, 2023). Another: answer-only solution text is rare in training data. The two are not mutually exclusive.</a:t>
+              <a:t>●  Proposed causes: (i) the depth of computation within one forward pass is bounded by the layer count (Feng et al., 2023; Merrill &amp; Sabharwal, 2023); (ii) answer-only solution text is rare in training data. The two are compatible.</a:t>
             </a:r>
           </a:p>
           <a:p>
@@ -3973,7 +3973,7 @@
                 </a:solidFill>
                 <a:latin typeface="Arial"/>
               </a:rPr>
-              <a:t>●  What follows needs only two facts: the limit is measured, and a place to write intermediate values circumvents it.</a:t>
+              <a:t>●  What the remainder requires: the limit is measured, and writing intermediate values circumvents it.</a:t>
             </a:r>
           </a:p>
         </p:txBody>
@@ -4025,7 +4025,7 @@
                 </a:solidFill>
                 <a:latin typeface="Arial"/>
               </a:rPr>
-              <a:t>Hallucination — the same cause, second symptom</a:t>
+              <a:t>Hallucination</a:t>
             </a:r>
           </a:p>
         </p:txBody>
@@ -4064,7 +4064,7 @@
                 </a:solidFill>
                 <a:latin typeface="Arial"/>
               </a:rPr>
-              <a:t>●  Definition: generating content that is not factual but plausible.</a:t>
+              <a:t>●  Definition: hallucination = generation of content that is plausible but not factual.</a:t>
             </a:r>
           </a:p>
           <a:p>
@@ -4080,7 +4080,7 @@
                 </a:solidFill>
                 <a:latin typeface="Arial"/>
               </a:rPr>
-              <a:t>●  The cause: prediction never waits. When the required fact or computation is not available, the most probable continuation is emitted anyway, and that continuation is shaped like an answer.</a:t>
+              <a:t>●  Mechanism: the same as the computation limit. When the required fact or computation is unavailable, prediction still emits the most probable continuation, and that continuation has the form of an answer.</a:t>
             </a:r>
           </a:p>
           <a:p>
@@ -4096,7 +4096,7 @@
                 </a:solidFill>
                 <a:latin typeface="Arial"/>
               </a:rPr>
-              <a:t>●  Two defects, one mechanism: the computation limit (27) and hallucination (a confident false premise) are both "most plausible token, regardless of completion."</a:t>
+              <a:t>●  Two symptoms, one mechanism: a wrong number (27) and a confident false premise are both "most probable token, regardless of completion."</a:t>
             </a:r>
           </a:p>
           <a:p>
@@ -4112,7 +4112,7 @@
                 </a:solidFill>
                 <a:latin typeface="Arial"/>
               </a:rPr>
-              <a:t>●  Which one prompting can fix: this lecture repairs the computation limit. The hallucination defect returns on slide 19.</a:t>
+              <a:t>●  Scope: prompting repairs the computation limit (next section). It does not repair hallucination (slides 19–20).</a:t>
             </a:r>
           </a:p>
         </p:txBody>
@@ -4217,7 +4217,7 @@
                 </a:solidFill>
                 <a:latin typeface="Arial"/>
               </a:rPr>
-              <a:t>The remedy: give the model a place to write</a:t>
+              <a:t>Chain-of-thought prompting</a:t>
             </a:r>
           </a:p>
         </p:txBody>
@@ -4256,7 +4256,7 @@
                 </a:solidFill>
                 <a:latin typeface="Arial"/>
               </a:rPr>
-              <a:t>●  The principle: make the model write out the solution instead of jumping to the answer. Each token then only reads the written values and advances one step.</a:t>
+              <a:t>●  Definition: chain-of-thought (CoT) prompting = prompting that induces the model to generate its solution process before the final answer (Wei et al., 2022).</a:t>
             </a:r>
           </a:p>
           <a:p>
@@ -4272,7 +4272,7 @@
                 </a:solidFill>
                 <a:latin typeface="Arial"/>
               </a:rPr>
-              <a:t>●  ELI5: a person solving a hard calculation on paper instead of in their head. The paper is the text.</a:t>
+              <a:t>●  Mechanism: each token of the solution reads the values already written and advances one operation; the answer token reads the last intermediate value.</a:t>
             </a:r>
           </a:p>
           <a:p>
@@ -4288,7 +4288,7 @@
                 </a:solidFill>
                 <a:latin typeface="Arial"/>
               </a:rPr>
-              <a:t>●  The only lever: text placed in the prompt. It takes exactly two forms — an instruction, or worked examples.</a:t>
+              <a:t>●  Two forms: an instruction (zero-shot CoT) or worked examples (few-shot CoT). Both are text in the prompt; nothing else changes.</a:t>
             </a:r>
           </a:p>
         </p:txBody>
@@ -4340,7 +4340,7 @@
                 </a:solidFill>
                 <a:latin typeface="Arial"/>
               </a:rPr>
-              <a:t>Method 1 — Instruction (zero-shot CoT)</a:t>
+              <a:t>Form 1 — Instruction (zero-shot CoT)</a:t>
             </a:r>
           </a:p>
         </p:txBody>
@@ -4379,7 +4379,7 @@
                 </a:solidFill>
                 <a:latin typeface="Arial"/>
               </a:rPr>
-              <a:t>●  The move: append one line after the question demanding a worked solution (Kojima et al., 2022).</a:t>
+              <a:t>●  Procedure: append one instruction after the question (Kojima et al., 2022).</a:t>
             </a:r>
           </a:p>
           <a:p>
@@ -4411,7 +4411,39 @@
                 </a:solidFill>
                 <a:latin typeface="Courier New"/>
               </a:rPr>
-              <a:t>      Write the solution step by step, then give the answer on the last line as "ANSWER: &lt;number&gt;".</a:t>
+              <a:t>      Write the solution step by step, then give the answer on the last line as ANSWER: &lt;number&gt;.</a:t>
+            </a:r>
+          </a:p>
+          <a:p>
+            <a:pPr>
+              <a:spcAft>
+                <a:spcPts val="0"/>
+              </a:spcAft>
+            </a:pPr>
+            <a:r>
+              <a:rPr sz="1400" b="0">
+                <a:solidFill>
+                  <a:srgbClr val="1F3A5F"/>
+                </a:solidFill>
+                <a:latin typeface="Courier New"/>
+              </a:rPr>
+              <a:t>      </a:t>
+            </a:r>
+          </a:p>
+          <a:p>
+            <a:pPr>
+              <a:spcAft>
+                <a:spcPts val="0"/>
+              </a:spcAft>
+            </a:pPr>
+            <a:r>
+              <a:rPr sz="1400" b="0">
+                <a:solidFill>
+                  <a:srgbClr val="1F3A5F"/>
+                </a:solidFill>
+                <a:latin typeface="Courier New"/>
+              </a:rPr>
+              <a:t>      Output: 23 − 20 = 3. 3 + 6 = 9. ANSWER: 9</a:t>
             </a:r>
           </a:p>
           <a:p>
@@ -4427,23 +4459,7 @@
                 </a:solidFill>
                 <a:latin typeface="Arial"/>
               </a:rPr>
-              <a:t>●  The output flips to Method B: "23 − 20 = 3. 3 + 6 = 9. ANSWER: 9".</a:t>
-            </a:r>
-          </a:p>
-          <a:p>
-            <a:pPr>
-              <a:spcAft>
-                <a:spcPts val="600"/>
-              </a:spcAft>
-            </a:pPr>
-            <a:r>
-              <a:rPr sz="1600" b="0">
-                <a:solidFill>
-                  <a:srgbClr val="444444"/>
-                </a:solidFill>
-                <a:latin typeface="Arial"/>
-              </a:rPr>
-              <a:t>●  The catch: convenient, but it underspecifies. "Step by step" fixes neither how fine the steps are nor how the final answer is written.</a:t>
+              <a:t>●  Property: the instruction elicits a solution but does not specify its granularity or the format of the final line. "Step by step" admits many layouts.</a:t>
             </a:r>
           </a:p>
         </p:txBody>
@@ -4495,7 +4511,7 @@
                 </a:solidFill>
                 <a:latin typeface="Arial"/>
               </a:rPr>
-              <a:t>Method 2 — Worked examples (few-shot CoT)</a:t>
+              <a:t>Form 2 — Worked examples (few-shot CoT)</a:t>
             </a:r>
           </a:p>
         </p:txBody>
@@ -4528,13 +4544,13 @@
               </a:spcAft>
             </a:pPr>
             <a:r>
-              <a:rPr sz="1600" b="0">
+              <a:rPr sz="1500" b="0">
                 <a:solidFill>
                   <a:srgbClr val="444444"/>
                 </a:solidFill>
                 <a:latin typeface="Arial"/>
               </a:rPr>
-              <a:t>●  The move: prepend worked question–answer pairs before the question.</a:t>
+              <a:t>●  Procedure: prepend question–solution pairs before the question.</a:t>
             </a:r>
           </a:p>
           <a:p>
@@ -4544,7 +4560,7 @@
               </a:spcAft>
             </a:pPr>
             <a:r>
-              <a:rPr sz="1400" b="0">
+              <a:rPr sz="1300" b="0">
                 <a:solidFill>
                   <a:srgbClr val="1F3A5F"/>
                 </a:solidFill>
@@ -4560,7 +4576,7 @@
               </a:spcAft>
             </a:pPr>
             <a:r>
-              <a:rPr sz="1400" b="0">
+              <a:rPr sz="1300" b="0">
                 <a:solidFill>
                   <a:srgbClr val="1F3A5F"/>
                 </a:solidFill>
@@ -4576,7 +4592,7 @@
               </a:spcAft>
             </a:pPr>
             <a:r>
-              <a:rPr sz="1400" b="0">
+              <a:rPr sz="1300" b="0">
                 <a:solidFill>
                   <a:srgbClr val="1F3A5F"/>
                 </a:solidFill>
@@ -4592,7 +4608,7 @@
               </a:spcAft>
             </a:pPr>
             <a:r>
-              <a:rPr sz="1400" b="0">
+              <a:rPr sz="1300" b="0">
                 <a:solidFill>
                   <a:srgbClr val="1F3A5F"/>
                 </a:solidFill>
@@ -4608,7 +4624,7 @@
               </a:spcAft>
             </a:pPr>
             <a:r>
-              <a:rPr sz="1400" b="0">
+              <a:rPr sz="1300" b="0">
                 <a:solidFill>
                   <a:srgbClr val="1F3A5F"/>
                 </a:solidFill>
@@ -4620,17 +4636,49 @@
           <a:p>
             <a:pPr>
               <a:spcAft>
+                <a:spcPts val="0"/>
+              </a:spcAft>
+            </a:pPr>
+            <a:r>
+              <a:rPr sz="1300" b="0">
+                <a:solidFill>
+                  <a:srgbClr val="1F3A5F"/>
+                </a:solidFill>
+                <a:latin typeface="Courier New"/>
+              </a:rPr>
+              <a:t>      </a:t>
+            </a:r>
+          </a:p>
+          <a:p>
+            <a:pPr>
+              <a:spcAft>
+                <a:spcPts val="0"/>
+              </a:spcAft>
+            </a:pPr>
+            <a:r>
+              <a:rPr sz="1300" b="0">
+                <a:solidFill>
+                  <a:srgbClr val="1F3A5F"/>
+                </a:solidFill>
+                <a:latin typeface="Courier New"/>
+              </a:rPr>
+              <a:t>      Output: 23 − 20 = 3. 3 + 6 = 9. ANSWER: 9</a:t>
+            </a:r>
+          </a:p>
+          <a:p>
+            <a:pPr>
+              <a:spcAft>
                 <a:spcPts val="600"/>
               </a:spcAft>
             </a:pPr>
             <a:r>
-              <a:rPr sz="1600" b="0">
+              <a:rPr sz="1500" b="0">
                 <a:solidFill>
                   <a:srgbClr val="444444"/>
                 </a:solidFill>
                 <a:latin typeface="Arial"/>
               </a:rPr>
-              <a:t>●  Why it works: in-context learning — examples in the prompt specify the output format and procedure with no weight update. When the examples contain worked solutions, the model generates a solution first.</a:t>
+              <a:t>●  Definition: in-context learning = the property that examples in the prompt determine the output's format and procedure with no weight update.</a:t>
             </a:r>
           </a:p>
           <a:p>
@@ -4640,13 +4688,13 @@
               </a:spcAft>
             </a:pPr>
             <a:r>
-              <a:rPr sz="1600" b="0">
+              <a:rPr sz="1500" b="0">
                 <a:solidFill>
                   <a:srgbClr val="444444"/>
                 </a:solidFill>
                 <a:latin typeface="Arial"/>
               </a:rPr>
-              <a:t>●  The original form: this is the form the Chain-of-Thought paper uses (Wei et al., 2022).</a:t>
+              <a:t>●  Property: the example fixes what the instruction leaves open: the step granularity, the wording of each step, and the exact final line.</a:t>
             </a:r>
           </a:p>
         </p:txBody>
@@ -4698,7 +4746,7 @@
                 </a:solidFill>
                 <a:latin typeface="Arial"/>
               </a:rPr>
-              <a:t>What examples fix that instructions cannot</a:t>
+              <a:t>Instruction versus example</a:t>
             </a:r>
           </a:p>
         </p:txBody>
@@ -4731,13 +4779,61 @@
               </a:spcAft>
             </a:pPr>
             <a:r>
+              <a:rPr sz="1600" b="0">
+                <a:solidFill>
+                  <a:srgbClr val="444444"/>
+                </a:solidFill>
+                <a:latin typeface="Arial"/>
+              </a:rPr>
+              <a:t>●  Difference: an instruction names the requirement; an example exhibits it. The example therefore pins format and procedure that the instruction underspecifies.</a:t>
+            </a:r>
+          </a:p>
+          <a:p>
+            <a:pPr>
+              <a:spcAft>
+                <a:spcPts val="0"/>
+              </a:spcAft>
+            </a:pPr>
+            <a:r>
               <a:rPr sz="1400" b="0">
                 <a:solidFill>
+                  <a:srgbClr val="1F3A5F"/>
+                </a:solidFill>
+                <a:latin typeface="Courier New"/>
+              </a:rPr>
+              <a:t>      Instruction: "Answer with the date."      → "The final date is March 10th, 2026."</a:t>
+            </a:r>
+          </a:p>
+          <a:p>
+            <a:pPr>
+              <a:spcAft>
+                <a:spcPts val="0"/>
+              </a:spcAft>
+            </a:pPr>
+            <a:r>
+              <a:rPr sz="1400" b="0">
+                <a:solidFill>
+                  <a:srgbClr val="1F3A5F"/>
+                </a:solidFill>
+                <a:latin typeface="Courier New"/>
+              </a:rPr>
+              <a:t>      Example:    "Note: … / DATE: 2026-06-09"  → "DATE: 2026-03-10"</a:t>
+            </a:r>
+          </a:p>
+          <a:p>
+            <a:pPr>
+              <a:spcAft>
+                <a:spcPts val="600"/>
+              </a:spcAft>
+            </a:pPr>
+            <a:r>
+              <a:rPr sz="1600" b="0">
+                <a:solidFill>
                   <a:srgbClr val="444444"/>
                 </a:solidFill>
                 <a:latin typeface="Arial"/>
               </a:rPr>
-              <a:t>●  Definition: Chain-of-Thought (CoT) = the family of prompting techniques that induce the model to generate its solution process before the answer.</a:t>
+              <a:t>●  Emergence: the CoT effect appears only above a model-scale threshold; in small models it is absent or harmful (Wei et al., 2022). Magnitudes and the scale curve: this week's first presentation.</a:t>
             </a:r>
           </a:p>
           <a:p>
@@ -4747,61 +4843,13 @@
               </a:spcAft>
             </a:pPr>
             <a:r>
-              <a:rPr sz="1400" b="0">
+              <a:rPr sz="1600" b="0">
                 <a:solidFill>
                   <a:srgbClr val="444444"/>
                 </a:solidFill>
                 <a:latin typeface="Arial"/>
               </a:rPr>
-              <a:t>●  Why both forms work: at the moment the final "9" is produced, the text already contains "23 − 20 = 3" and "3 + 6 =". The model finishes by reading written values, not by computing both steps from scratch.</a:t>
-            </a:r>
-          </a:p>
-          <a:p>
-            <a:pPr>
-              <a:spcAft>
-                <a:spcPts val="600"/>
-              </a:spcAft>
-            </a:pPr>
-            <a:r>
-              <a:rPr sz="1400" b="0">
-                <a:solidFill>
-                  <a:srgbClr val="444444"/>
-                </a:solidFill>
-                <a:latin typeface="Arial"/>
-              </a:rPr>
-              <a:t>●  The division of labor: instruction for convenience, examples for control of procedure and format. A worked example pins down exactly what "solve step by step" leaves open — step granularity, answer line, units.</a:t>
-            </a:r>
-          </a:p>
-          <a:p>
-            <a:pPr>
-              <a:spcAft>
-                <a:spcPts val="600"/>
-              </a:spcAft>
-            </a:pPr>
-            <a:r>
-              <a:rPr sz="1400" b="0">
-                <a:solidFill>
-                  <a:srgbClr val="444444"/>
-                </a:solidFill>
-                <a:latin typeface="Arial"/>
-              </a:rPr>
-              <a:t>●  Emergence: the effect appears only above a model-scale threshold. In small models CoT is ineffective or harmful. The magnitudes (GSM8K) and the scale curve are this week's first presentation.</a:t>
-            </a:r>
-          </a:p>
-          <a:p>
-            <a:pPr>
-              <a:spcAft>
-                <a:spcPts val="600"/>
-              </a:spcAft>
-            </a:pPr>
-            <a:r>
-              <a:rPr sz="1400" b="0">
-                <a:solidFill>
-                  <a:srgbClr val="444444"/>
-                </a:solidFill>
-                <a:latin typeface="Arial"/>
-              </a:rPr>
-              <a:t>●  Why the lab measures exemplar writing: writing a good worked example is the specification skill this week trains (lab §4–5, assignments 8.2 and 8.4).</a:t>
+              <a:t>●  Lab: assignments 8.1 (instruction), 8.2 and 8.4 (examples) measure both forms on code-graded sets.</a:t>
             </a:r>
           </a:p>
         </p:txBody>
@@ -4854,7 +4902,7 @@
                 </a:solidFill>
                 <a:latin typeface="Arial"/>
               </a:rPr>
-              <a:t>What CoT Cannot Fix</a:t>
+              <a:t>The Limit of Chain-of-Thought</a:t>
             </a:r>
           </a:p>
         </p:txBody>
@@ -4906,7 +4954,7 @@
                 </a:solidFill>
                 <a:latin typeface="Arial"/>
               </a:rPr>
-              <a:t>A flawless solution, a wrong answer</a:t>
+              <a:t>Coherent reasoning on a false premise</a:t>
             </a:r>
           </a:p>
         </p:txBody>
@@ -4939,13 +4987,29 @@
               </a:spcAft>
             </a:pPr>
             <a:r>
-              <a:rPr sz="1500" b="0">
+              <a:rPr sz="1600" b="0">
                 <a:solidFill>
                   <a:srgbClr val="444444"/>
                 </a:solidFill>
                 <a:latin typeface="Arial"/>
               </a:rPr>
-              <a:t>●  The question (HotpotQA, Figure 1 of the ReAct paper, Yao et al., 2022): "Aside from the Apple Remote, what other device can control the program the Apple Remote was originally designed to interact with?"</a:t>
+              <a:t>●  Question (HotpotQA; Figure 1 of Yao et al., 2022): "Aside from the Apple Remote, what other device can control the program the Apple Remote was originally designed to interact with?"</a:t>
+            </a:r>
+          </a:p>
+          <a:p>
+            <a:pPr>
+              <a:spcAft>
+                <a:spcPts val="0"/>
+              </a:spcAft>
+            </a:pPr>
+            <a:r>
+              <a:rPr sz="1400" b="0">
+                <a:solidFill>
+                  <a:srgbClr val="1F3A5F"/>
+                </a:solidFill>
+                <a:latin typeface="Courier New"/>
+              </a:rPr>
+              <a:t>      CoT output: The Apple Remote was originally designed to interact with Apple TV. Apple TV can be controlled by iPhone, iPad, and iPod Touch. So the answer is iPhone, iPad, and iPod Touch.</a:t>
             </a:r>
           </a:p>
           <a:p>
@@ -4955,13 +5019,13 @@
               </a:spcAft>
             </a:pPr>
             <a:r>
-              <a:rPr sz="1500" b="0">
+              <a:rPr sz="1600" b="0">
                 <a:solidFill>
                   <a:srgbClr val="444444"/>
                 </a:solidFill>
                 <a:latin typeface="Arial"/>
               </a:rPr>
-              <a:t>●  The CoT run: "The Apple Remote was originally designed to interact with Apple TV. Apple TV can be controlled by iPhone, iPad, and iPod Touch. So the answer is iPhone, iPad, and iPod Touch." — wrong.</a:t>
+              <a:t>●  Error: the first premise is false. The program was Front Row; the correct answer is keyboard function keys.</a:t>
             </a:r>
           </a:p>
           <a:p>
@@ -4971,29 +5035,13 @@
               </a:spcAft>
             </a:pPr>
             <a:r>
-              <a:rPr sz="1500" b="0">
+              <a:rPr sz="1600" b="0">
                 <a:solidFill>
                   <a:srgbClr val="444444"/>
                 </a:solidFill>
                 <a:latin typeface="Arial"/>
               </a:rPr>
-              <a:t>●  What went wrong: the form is impeccable, every step connects. The first premise is false. The program was Front Row, not Apple TV. Correct answer: keyboard function keys.</a:t>
-            </a:r>
-          </a:p>
-          <a:p>
-            <a:pPr>
-              <a:spcAft>
-                <a:spcPts val="600"/>
-              </a:spcAft>
-            </a:pPr>
-            <a:r>
-              <a:rPr sz="1500" b="0">
-                <a:solidFill>
-                  <a:srgbClr val="444444"/>
-                </a:solidFill>
-                <a:latin typeface="Arial"/>
-              </a:rPr>
-              <a:t>●  The diagnosis in the paper: reasoning not grounded in the external world → fact hallucination and error propagation.</a:t>
+              <a:t>●  Diagnosis (same paper): the reasoning is not grounded in external information, so a hallucinated premise propagates through a valid chain.</a:t>
             </a:r>
           </a:p>
         </p:txBody>
@@ -5110,7 +5158,7 @@
                 </a:solidFill>
                 <a:latin typeface="Arial"/>
               </a:rPr>
-              <a:t>Why no prompt can fix this</a:t>
+              <a:t>Why prompting cannot repair it</a:t>
             </a:r>
           </a:p>
         </p:txBody>
@@ -5149,7 +5197,7 @@
                 </a:solidFill>
                 <a:latin typeface="Arial"/>
               </a:rPr>
-              <a:t>●  The root: CoT's reasoning draws only on knowledge stored in the parameters. There is no path for checking an external fact.</a:t>
+              <a:t>●  Cause: CoT draws only on knowledge stored in the parameters. No prompt gives the model access to an external fact.</a:t>
             </a:r>
           </a:p>
           <a:p>
@@ -5165,7 +5213,39 @@
                 </a:solidFill>
                 <a:latin typeface="Arial"/>
               </a:rPr>
-              <a:t>●  The lesson: coherence of the reasoning structure does not guarantee factuality. Adding "verify each step before continuing" produces more coherent text, not a checked fact.</a:t>
+              <a:t>●  Test: adding "Verify each step before continuing" produces a more elaborate chain on the same false premise.</a:t>
+            </a:r>
+          </a:p>
+          <a:p>
+            <a:pPr>
+              <a:spcAft>
+                <a:spcPts val="0"/>
+              </a:spcAft>
+            </a:pPr>
+            <a:r>
+              <a:rPr sz="1300" b="0">
+                <a:solidFill>
+                  <a:srgbClr val="1F3A5F"/>
+                </a:solidFill>
+                <a:latin typeface="Courier New"/>
+              </a:rPr>
+              <a:t>      Prompt: &lt;question&gt; Verify each step before continuing.</a:t>
+            </a:r>
+          </a:p>
+          <a:p>
+            <a:pPr>
+              <a:spcAft>
+                <a:spcPts val="0"/>
+              </a:spcAft>
+            </a:pPr>
+            <a:r>
+              <a:rPr sz="1300" b="0">
+                <a:solidFill>
+                  <a:srgbClr val="1F3A5F"/>
+                </a:solidFill>
+                <a:latin typeface="Courier New"/>
+              </a:rPr>
+              <a:t>      Output: Step 1: The Apple Remote was designed for Apple TV. Verified. Step 2: …</a:t>
             </a:r>
           </a:p>
           <a:p>
@@ -5181,7 +5261,7 @@
                 </a:solidFill>
                 <a:latin typeface="Arial"/>
               </a:rPr>
-              <a:t>●  The structural fix: a step that checks facts against the world. That requires tools (Week 03) and the agent loop (Week 04). The same question, solved by a loop with a search tool, is traced in Week 04.</a:t>
+              <a:t>●  Repair: a step that checks facts against an external source. This requires tools (Week 03) and the agent loop (Week 04); Week 04 traces this question through a loop with a search tool.</a:t>
             </a:r>
           </a:p>
           <a:p>
@@ -5197,7 +5277,7 @@
                 </a:solidFill>
                 <a:latin typeface="Arial"/>
               </a:rPr>
-              <a:t>●  What is still open on the computation side: CoT added predictions inside one response. The other direction is to produce the response itself more than once.</a:t>
+              <a:t>●  Remaining direction: CoT adds predictions within one response. Predictions can also be added by generating the response more than once.</a:t>
             </a:r>
           </a:p>
         </p:txBody>
@@ -5250,7 +5330,7 @@
                 </a:solidFill>
                 <a:latin typeface="Arial"/>
               </a:rPr>
-              <a:t>Ask More Than Once</a:t>
+              <a:t>Self-Consistency</a:t>
             </a:r>
           </a:p>
         </p:txBody>
@@ -5302,7 +5382,7 @@
                 </a:solidFill>
                 <a:latin typeface="Arial"/>
               </a:rPr>
-              <a:t>One path is one sample</a:t>
+              <a:t>One response as one sample</a:t>
             </a:r>
           </a:p>
         </p:txBody>
@@ -5341,7 +5421,7 @@
                 </a:solidFill>
                 <a:latin typeface="Arial"/>
               </a:rPr>
-              <a:t>●  What CoT commits to: a single written path. If any step on it is wrong the conclusion is wrong, and the model does not know.</a:t>
+              <a:t>●  Sampling: an LLM draws each token from a probability distribution. Temperature = the parameter controlling the randomness of that draw; at temperature 0 the most probable token is taken.</a:t>
             </a:r>
           </a:p>
           <a:p>
@@ -5357,7 +5437,7 @@
                 </a:solidFill>
                 <a:latin typeface="Arial"/>
               </a:rPr>
-              <a:t>●  The stochastic fact: an LLM samples tokens from a probability distribution. Raise the temperature (the sampling-randomness parameter) and ask again, and each run follows a different solution path to a possibly different answer.</a:t>
+              <a:t>●  Consequence: at temperature &gt; 0, repeated runs of the same prompt follow different solution paths and may reach different answers.</a:t>
             </a:r>
           </a:p>
           <a:p>
@@ -5373,7 +5453,23 @@
                 </a:solidFill>
                 <a:latin typeface="Arial"/>
               </a:rPr>
-              <a:t>●  The reframe: one response is one draw from the set of possible paths. A wrong draw does not mean the next draw is wrong.</a:t>
+              <a:t>●  Interpretation: one response is one sample from the set of possible reasoning paths. A wrong sample does not imply that the next sample is wrong.</a:t>
+            </a:r>
+          </a:p>
+          <a:p>
+            <a:pPr>
+              <a:spcAft>
+                <a:spcPts val="0"/>
+              </a:spcAft>
+            </a:pPr>
+            <a:r>
+              <a:rPr sz="1400" b="0">
+                <a:solidFill>
+                  <a:srgbClr val="1F3A5F"/>
+                </a:solidFill>
+                <a:latin typeface="Courier New"/>
+              </a:rPr>
+              <a:t>      Same CoT prompt, temperature 1.0, five runs → final answers: 9, 27, 9, 8, 9</a:t>
             </a:r>
           </a:p>
         </p:txBody>
@@ -5458,13 +5554,13 @@
               </a:spcAft>
             </a:pPr>
             <a:r>
-              <a:rPr sz="1500" b="0">
+              <a:rPr sz="1600" b="0">
                 <a:solidFill>
                   <a:srgbClr val="444444"/>
                 </a:solidFill>
                 <a:latin typeface="Arial"/>
               </a:rPr>
-              <a:t>●  The procedure (Wang et al., 2022): sample N solutions at high temperature, extract each final answer, take the majority vote.</a:t>
+              <a:t>●  Definition: self-consistency = sample N solutions at temperature &gt; 0, extract the final answer of each, and return the majority answer (Wang et al., 2022).</a:t>
             </a:r>
           </a:p>
           <a:p>
@@ -5474,13 +5570,13 @@
               </a:spcAft>
             </a:pPr>
             <a:r>
-              <a:rPr sz="1500" b="0">
+              <a:rPr sz="1600" b="0">
                 <a:solidFill>
                   <a:srgbClr val="444444"/>
                 </a:solidFill>
                 <a:latin typeface="Arial"/>
               </a:rPr>
-              <a:t>●  Why it works: the answer probability sums over all reasoning paths, P(a | q) = Σ_r P(a | r, q) P(r | q). One ask shows only the single most plausible path's term. Voting over samples estimates the whole sum.</a:t>
+              <a:t>●  Justification: P(a | q) = Σ_r P(a | r, q) P(r | q). A single response evaluates one term (one path r). The vote over samples estimates the sum over paths.</a:t>
             </a:r>
           </a:p>
           <a:p>
@@ -5490,13 +5586,13 @@
               </a:spcAft>
             </a:pPr>
             <a:r>
-              <a:rPr sz="1500" b="0">
+              <a:rPr sz="1600" b="0">
                 <a:solidFill>
                   <a:srgbClr val="444444"/>
                 </a:solidFill>
                 <a:latin typeface="Arial"/>
               </a:rPr>
-              <a:t>●  The mechanism in practice: correct answers are reached by different paths converging on one value. Wrong answers scatter, each wrong in its own way. Counting brings the convergent answer to the front.</a:t>
+              <a:t>●  Empirical pattern: correct answers are reached by different paths that converge on one value; wrong answers scatter across distinct values.</a:t>
             </a:r>
           </a:p>
           <a:p>
@@ -5506,13 +5602,13 @@
               </a:spcAft>
             </a:pPr>
             <a:r>
-              <a:rPr sz="1500" b="0">
+              <a:rPr sz="1600" b="0">
                 <a:solidFill>
                   <a:srgbClr val="444444"/>
                 </a:solidFill>
                 <a:latin typeface="Arial"/>
               </a:rPr>
-              <a:t>●  The numbers: measured gains and the cost of N samples are this week's second presentation.</a:t>
+              <a:t>●  Magnitudes and the cost of N: this week's second presentation.</a:t>
             </a:r>
           </a:p>
         </p:txBody>
@@ -5564,7 +5660,7 @@
                 </a:solidFill>
                 <a:latin typeface="Arial"/>
               </a:rPr>
-              <a:t>Self-consistency in one picture</a:t>
+              <a:t>Self-consistency</a:t>
             </a:r>
           </a:p>
         </p:txBody>
@@ -5627,7 +5723,7 @@
                 </a:solidFill>
                 <a:latin typeface="Arial"/>
               </a:rPr>
-              <a:t>sampled paths from the same question. Correct paths converge on one value, wrong paths scatter, and the vote surfaces the convergent answer.</a:t>
+              <a:t>Paths sampled from the same question. Correct paths converge on one value, wrong paths scatter, and the vote returns the convergent value.</a:t>
             </a:r>
           </a:p>
         </p:txBody>
@@ -5679,7 +5775,7 @@
                 </a:solidFill>
                 <a:latin typeface="Arial"/>
               </a:rPr>
-              <a:t>When the vote cannot be tallied</a:t>
+              <a:t>Precondition of the vote</a:t>
             </a:r>
           </a:p>
         </p:txBody>
@@ -5718,7 +5814,7 @@
                 </a:solidFill>
                 <a:latin typeface="Arial"/>
               </a:rPr>
-              <a:t>●  The precondition: answers must be discrete and extractable — a number, a choice, a short string — so that equal answers can be counted.</a:t>
+              <a:t>●  Requirement: the final answer must be discrete and extractable (a number, a choice, a short string) so that equal answers can be counted.</a:t>
             </a:r>
           </a:p>
           <a:p>
@@ -5734,7 +5830,7 @@
                 </a:solidFill>
                 <a:latin typeface="Arial"/>
               </a:rPr>
-              <a:t>●  Where it breaks: free-form prose. No two 200-word abstracts are literally equal, so there is nothing to count.</a:t>
+              <a:t>●  Failure case: free-form text. Two 200-word abstracts are never identical; the vote has nothing to count.</a:t>
             </a:r>
           </a:p>
           <a:p>
@@ -5750,7 +5846,7 @@
                 </a:solidFill>
                 <a:latin typeface="Arial"/>
               </a:rPr>
-              <a:t>●  The replacement: selecting among such outputs needs a scoring device — a verifier. Named on the next slide, built in Week 05.</a:t>
+              <a:t>●  Replacement: selection among non-discrete outputs requires a scoring function, a verifier (Week 05).</a:t>
             </a:r>
           </a:p>
         </p:txBody>
@@ -5855,7 +5951,7 @@
                 </a:solidFill>
                 <a:latin typeface="Arial"/>
               </a:rPr>
-              <a:t>The bill is the number of predictions</a:t>
+              <a:t>Accounting in predictions</a:t>
             </a:r>
           </a:p>
         </p:txBody>
@@ -5894,7 +5990,7 @@
                 </a:solidFill>
                 <a:latin typeface="Arial"/>
               </a:rPr>
-              <a:t>●  The accounting: CoT lengthens one response (one extra prediction per solution token). Self-consistency produces N responses (N× predictions).</a:t>
+              <a:t>●  Count: CoT lengthens one response by one prediction per solution token. Self-consistency multiplies the number of responses by N.</a:t>
             </a:r>
           </a:p>
           <a:p>
@@ -5910,7 +6006,7 @@
                 </a:solidFill>
                 <a:latin typeface="Arial"/>
               </a:rPr>
-              <a:t>●  The unit price: one prediction costs roughly the same everywhere, so the number of predictions is the bill.</a:t>
+              <a:t>●  Cost: the cost of one prediction is approximately constant, so cost is proportional to the number of predictions.</a:t>
             </a:r>
           </a:p>
           <a:p>
@@ -5926,7 +6022,23 @@
                 </a:solidFill>
                 <a:latin typeface="Arial"/>
               </a:rPr>
-              <a:t>●  Definition: test-time compute = leaving the weights untouched and buying accuracy by spending more predictions at answer time. The principle behind every method in the family is inference-time scaling.</a:t>
+              <a:t>●  Definition: test-time compute = accuracy obtained by increasing the number of predictions at inference time, with the weights unchanged. The general principle is inference-time scaling.</a:t>
+            </a:r>
+          </a:p>
+          <a:p>
+            <a:pPr>
+              <a:spcAft>
+                <a:spcPts val="0"/>
+              </a:spcAft>
+            </a:pPr>
+            <a:r>
+              <a:rPr sz="1400" b="0">
+                <a:solidFill>
+                  <a:srgbClr val="1F3A5F"/>
+                </a:solidFill>
+                <a:latin typeface="Courier New"/>
+              </a:rPr>
+              <a:t>      Lab §4.6, one eval item (gpt-4o-mini): answer-only = 1 completion token; chain-of-thought = 75; five CoT samples = 375.</a:t>
             </a:r>
           </a:p>
         </p:txBody>
@@ -5978,7 +6090,7 @@
                 </a:solidFill>
                 <a:latin typeface="Arial"/>
               </a:rPr>
-              <a:t>The method family</a:t>
+              <a:t>Methods</a:t>
             </a:r>
           </a:p>
         </p:txBody>
@@ -6036,7 +6148,7 @@
                           </a:solidFill>
                           <a:latin typeface="Arial"/>
                         </a:rPr>
-                        <a:t>How predictions are increased</a:t>
+                        <a:t>Additional predictions</a:t>
                       </a:r>
                     </a:p>
                   </a:txBody>
@@ -6056,7 +6168,7 @@
                           </a:solidFill>
                           <a:latin typeface="Arial"/>
                         </a:rPr>
-                        <a:t>CoT</a:t>
+                        <a:t>Chain-of-thought</a:t>
                       </a:r>
                     </a:p>
                   </a:txBody>
@@ -6074,7 +6186,7 @@
                           </a:solidFill>
                           <a:latin typeface="Arial"/>
                         </a:rPr>
-                        <a:t>one response made longer — predictions added per solution token</a:t>
+                        <a:t>one longer response: one prediction per solution token</a:t>
                       </a:r>
                     </a:p>
                   </a:txBody>
@@ -6112,7 +6224,7 @@
                           </a:solidFill>
                           <a:latin typeface="Arial"/>
                         </a:rPr>
-                        <a:t>N responses → majority vote over discrete answers</a:t>
+                        <a:t>N responses; majority vote over discrete answers</a:t>
                       </a:r>
                     </a:p>
                   </a:txBody>
@@ -6150,7 +6262,7 @@
                           </a:solidFill>
                           <a:latin typeface="Arial"/>
                         </a:rPr>
-                        <a:t>N responses → a verifier selects the best (replaces the vote when answers are not discrete)</a:t>
+                        <a:t>N responses; a verifier selects one (replaces the vote for non-discrete outputs)</a:t>
                       </a:r>
                     </a:p>
                   </a:txBody>
@@ -6188,7 +6300,7 @@
                           </a:solidFill>
                           <a:latin typeface="Arial"/>
                         </a:rPr>
-                        <a:t>branch, evaluate, backtrack (Week 07, planning &amp; search)</a:t>
+                        <a:t>branch, evaluate, backtrack (Week 07)</a:t>
                       </a:r>
                     </a:p>
                   </a:txBody>
@@ -6233,7 +6345,7 @@
                 </a:solidFill>
                 <a:latin typeface="Arial"/>
               </a:rPr>
-              <a:t>●  The shared principle: exchange inference computation for accuracy. Best-of-N and tree search additionally require a verifier — a device that scores answers against each other.</a:t>
+              <a:t>●  Common principle: inference computation is exchanged for accuracy. Best-of-N and tree search additionally require a verifier.</a:t>
             </a:r>
           </a:p>
         </p:txBody>
@@ -6285,7 +6397,7 @@
                 </a:solidFill>
                 <a:latin typeface="Arial"/>
               </a:rPr>
-              <a:t>Already on the price list</a:t>
+              <a:t>Test-time compute in deployed systems</a:t>
             </a:r>
           </a:p>
         </p:txBody>
@@ -6324,7 +6436,7 @@
                 </a:solidFill>
                 <a:latin typeface="Arial"/>
               </a:rPr>
-              <a:t>●  Thinking modes (OpenAI o-series, Claude extended thinking, Gemini thinking): the written solution of this lecture moved inside the model, billed by the token (Week 11).</a:t>
+              <a:t>●  Reasoning modes (OpenAI o-series, Claude extended thinking, Gemini thinking): the written solution of this chapter generated inside the model and billed per token (Week 11).</a:t>
             </a:r>
           </a:p>
           <a:p>
@@ -6340,7 +6452,7 @@
                 </a:solidFill>
                 <a:latin typeface="Arial"/>
               </a:rPr>
-              <a:t>●  The tiers above (o1 pro, Gemini Deep Think, Grok Heavy): documented by their vendors as exploring several reasoning lines in parallel — the sampling-and-selection of this lecture, sold as a subscription level.</a:t>
+              <a:t>●  Parallel-reasoning tiers (o1 pro, Gemini Deep Think, Grok Heavy): several reasoning lines generated in parallel and selected, the procedure of slides 22–25.</a:t>
             </a:r>
           </a:p>
           <a:p>
@@ -6356,7 +6468,7 @@
                 </a:solidFill>
                 <a:latin typeface="Arial"/>
               </a:rPr>
-              <a:t>●  Not free: N samples multiply cost and latency by N. The practical decision variable is not the size of N but which questions deserve N &gt; 1 (Week 12, routing).</a:t>
+              <a:t>●  Cost: N samples multiply cost and latency by N. The design variable is which queries receive N &gt; 1 (Week 12, routing).</a:t>
             </a:r>
           </a:p>
         </p:txBody>
@@ -6409,7 +6521,7 @@
                 </a:solidFill>
                 <a:latin typeface="Arial"/>
               </a:rPr>
-              <a:t>Same Model, Different Accuracy</a:t>
+              <a:t>Prompt Dependence of Reasoning Accuracy</a:t>
             </a:r>
           </a:p>
         </p:txBody>
@@ -6494,13 +6606,13 @@
               </a:spcAft>
             </a:pPr>
             <a:r>
-              <a:rPr sz="1300" b="0">
+              <a:rPr sz="1400" b="0">
                 <a:solidFill>
                   <a:srgbClr val="444444"/>
                 </a:solidFill>
                 <a:latin typeface="Arial"/>
               </a:rPr>
-              <a:t>●  The arc: same model, different accuracy → no workspace but text → CoT writes the workspace → CoT cannot check facts (tools, Week 03) → sample and vote → test-time compute.</a:t>
+              <a:t>●  Chapter: prompt dependence of accuracy → the text as the only workspace → chain-of-thought → its limit (ungrounded premises) → self-consistency → test-time compute.</a:t>
             </a:r>
           </a:p>
           <a:p>
@@ -6510,13 +6622,13 @@
               </a:spcAft>
             </a:pPr>
             <a:r>
-              <a:rPr sz="1300" b="0">
+              <a:rPr sz="1400" b="0">
                 <a:solidFill>
                   <a:srgbClr val="444444"/>
                 </a:solidFill>
                 <a:latin typeface="Arial"/>
               </a:rPr>
-              <a:t>●  Presentations (first student week): Chain-of-Thought (Wei et al., 2022) — prompting-only gains and the emergence curve. Self-Consistency (Wang et al., 2022) — sample-and-vote, its measured gains, the cost of N.</a:t>
+              <a:t>●  Presentations: Chain-of-Thought (Wei et al., 2022) — accuracy gains from prompting and the emergence curve. Self-Consistency (Wang et al., 2022) — sample-and-vote, measured gains, cost of N.</a:t>
             </a:r>
           </a:p>
           <a:p>
@@ -6526,13 +6638,13 @@
               </a:spcAft>
             </a:pPr>
             <a:r>
-              <a:rPr sz="1300" b="0">
+              <a:rPr sz="1400" b="0">
                 <a:solidFill>
                   <a:srgbClr val="444444"/>
                 </a:solidFill>
                 <a:latin typeface="Arial"/>
               </a:rPr>
-              <a:t>●  Lab (W2_lab_prompting.ipynb): answer-only vs. worked solution on the apple problem and six code-graded arithmetic items → the silent-thinking and answer-first controls → a code-graded eval improved from baseline to a format fix to your own CoT prompt (target ≥ 11/12) → few-shot email classification (4/4) → self-consistency on the hardest item → the hallucination limit. Four graded assignments close it.</a:t>
+              <a:t>●  Lab (W2_lab_prompting.ipynb): answer-only vs. worked solution on code-graded arithmetic → silent-thinking and answer-first controls → a code-graded eval improved from baseline to format fix to your own CoT prompt (≥ 11/12) → few-shot email classification (4/4) → self-consistency on the hardest item → the hallucination limit. Four graded assignments.</a:t>
             </a:r>
           </a:p>
           <a:p>
@@ -6542,13 +6654,13 @@
               </a:spcAft>
             </a:pPr>
             <a:r>
-              <a:rPr sz="1300" b="0">
+              <a:rPr sz="1400" b="0">
                 <a:solidFill>
                   <a:srgbClr val="444444"/>
                 </a:solidFill>
                 <a:latin typeface="Arial"/>
               </a:rPr>
-              <a:t>●  Homework (W2_hw_build_evalset.ipynb): an eight-item code-graded evalset in your own domain, and a CoT template that beats answer-only on it (≥ 7/8). Due before Week 03.</a:t>
+              <a:t>●  Homework (W2_hw_build_evalset.ipynb): an eight-item code-graded evalset in your own domain and a CoT template that beats answer-only on it (≥ 7/8). Due before Week 03.</a:t>
             </a:r>
           </a:p>
           <a:p>
@@ -6558,13 +6670,13 @@
               </a:spcAft>
             </a:pPr>
             <a:r>
-              <a:rPr sz="1300" b="0">
+              <a:rPr sz="1400" b="0">
                 <a:solidFill>
                   <a:srgbClr val="444444"/>
                 </a:solidFill>
                 <a:latin typeface="Arial"/>
               </a:rPr>
-              <a:t>●  Next week: tools — the external checking step that this week's failure on slide 19 requires.</a:t>
+              <a:t>●  Next week: tools, the external checking step required by slide 20.</a:t>
             </a:r>
           </a:p>
         </p:txBody>
@@ -6616,7 +6728,7 @@
                 </a:solidFill>
                 <a:latin typeface="Arial"/>
               </a:rPr>
-              <a:t>Why prompting matters for an agent</a:t>
+              <a:t>Reasoning accuracy and agent accuracy</a:t>
             </a:r>
           </a:p>
         </p:txBody>
@@ -6655,7 +6767,7 @@
                 </a:solidFill>
                 <a:latin typeface="Arial"/>
               </a:rPr>
-              <a:t>●  Recall from Week 01: an agent is a system whose next action is decided by the model's output. Every one of those decisions is an act of reasoning.</a:t>
+              <a:t>●  Recall (Week 01): an agent is a system whose next action is decided by the model's output. Each such decision is an inference from the current state to an action.</a:t>
             </a:r>
           </a:p>
           <a:p>
@@ -6671,7 +6783,7 @@
                 </a:solidFill>
                 <a:latin typeface="Arial"/>
               </a:rPr>
-              <a:t>●  The bound: an agent's accuracy is capped by the accuracy of the model's reasoning at each step. No architecture is accurate on top of a model that reasons inaccurately.</a:t>
+              <a:t>●  Bound: the accuracy of an agent is bounded above by the accuracy of the model's reasoning at each step. Tools, memory, and loops (Weeks 03–05) add components around the model; they do not raise the accuracy of a single call.</a:t>
             </a:r>
           </a:p>
           <a:p>
@@ -6687,23 +6799,7 @@
                 </a:solidFill>
                 <a:latin typeface="Arial"/>
               </a:rPr>
-              <a:t>●  Where Week 01 left the deficits: tools, memory, verification, iteration are all repaired by adding something around the model in later weeks.</a:t>
-            </a:r>
-          </a:p>
-          <a:p>
-            <a:pPr>
-              <a:spcAft>
-                <a:spcPts val="600"/>
-              </a:spcAft>
-            </a:pPr>
-            <a:r>
-              <a:rPr sz="1600" b="0">
-                <a:solidFill>
-                  <a:srgbClr val="444444"/>
-                </a:solidFill>
-                <a:latin typeface="Arial"/>
-              </a:rPr>
-              <a:t>●  This week: the one thing that cannot be delegated outward — the quality of a single call. What can be gotten out of a bare call before anything is built around it.</a:t>
+              <a:t>●  Scope of this chapter: the accuracy of one model call as a function of the prompt.</a:t>
             </a:r>
           </a:p>
         </p:txBody>
@@ -6755,7 +6851,7 @@
                 </a:solidFill>
                 <a:latin typeface="Arial"/>
               </a:rPr>
-              <a:t>What is Reasoning?</a:t>
+              <a:t>Reasoning</a:t>
             </a:r>
           </a:p>
         </p:txBody>
@@ -6794,7 +6890,7 @@
                 </a:solidFill>
                 <a:latin typeface="Arial"/>
               </a:rPr>
-              <a:t>●  Definition: deriving a conclusion from given premises through intermediate steps — arithmetic word problems, combining several facts to narrow an answer, ordering the steps of a plan.</a:t>
+              <a:t>●  Definition: reasoning = deriving a conclusion from given premises through intermediate steps.</a:t>
             </a:r>
           </a:p>
           <a:p>
@@ -6810,7 +6906,7 @@
                 </a:solidFill>
                 <a:latin typeface="Arial"/>
               </a:rPr>
-              <a:t>●  What separates it from recall: "What is the capital of Korea?" has no intermediate steps. Reasoning has steps that must be passed through on the way to the conclusion.</a:t>
+              <a:t>●  Instances: an arithmetic word problem (intermediate results), combining several facts to narrow an answer (intermediate inferences), ordering the steps of a plan (intermediate states).</a:t>
             </a:r>
           </a:p>
           <a:p>
@@ -6826,7 +6922,23 @@
                 </a:solidFill>
                 <a:latin typeface="Arial"/>
               </a:rPr>
-              <a:t>●  The fragility: if any one intermediate step is wrong, the conclusion is wrong.</a:t>
+              <a:t>●  Contrast with recall: "What is the capital of Korea?" has no intermediate step. Reasoning has steps that must be completed before the conclusion.</a:t>
+            </a:r>
+          </a:p>
+          <a:p>
+            <a:pPr>
+              <a:spcAft>
+                <a:spcPts val="600"/>
+              </a:spcAft>
+            </a:pPr>
+            <a:r>
+              <a:rPr sz="1600" b="0">
+                <a:solidFill>
+                  <a:srgbClr val="444444"/>
+                </a:solidFill>
+                <a:latin typeface="Arial"/>
+              </a:rPr>
+              <a:t>●  Error propagation: if any intermediate step is wrong, the conclusion is wrong.</a:t>
             </a:r>
           </a:p>
         </p:txBody>
@@ -6878,7 +6990,7 @@
                 </a:solidFill>
                 <a:latin typeface="Arial"/>
               </a:rPr>
-              <a:t>The observed split</a:t>
+              <a:t>The same model, two prompts</a:t>
             </a:r>
           </a:p>
         </p:txBody>
@@ -6917,7 +7029,87 @@
                 </a:solidFill>
                 <a:latin typeface="Arial"/>
               </a:rPr>
-              <a:t>●  The problem: a cafeteria has 23 apples. They use 20 for lunch and buy 6 more. How many apples do they have?</a:t>
+              <a:t>●  Problem: a cafeteria has 23 apples. They use 20 for lunch and buy 6 more. How many apples do they have?</a:t>
+            </a:r>
+          </a:p>
+          <a:p>
+            <a:pPr>
+              <a:spcAft>
+                <a:spcPts val="0"/>
+              </a:spcAft>
+            </a:pPr>
+            <a:r>
+              <a:rPr sz="1300" b="0">
+                <a:solidFill>
+                  <a:srgbClr val="1F3A5F"/>
+                </a:solidFill>
+                <a:latin typeface="Courier New"/>
+              </a:rPr>
+              <a:t>      Prompt A: &lt;problem&gt; Reply with only the number.</a:t>
+            </a:r>
+          </a:p>
+          <a:p>
+            <a:pPr>
+              <a:spcAft>
+                <a:spcPts val="0"/>
+              </a:spcAft>
+            </a:pPr>
+            <a:r>
+              <a:rPr sz="1300" b="0">
+                <a:solidFill>
+                  <a:srgbClr val="1F3A5F"/>
+                </a:solidFill>
+                <a:latin typeface="Courier New"/>
+              </a:rPr>
+              <a:t>      Output A: 27   (wrong)</a:t>
+            </a:r>
+          </a:p>
+          <a:p>
+            <a:pPr>
+              <a:spcAft>
+                <a:spcPts val="0"/>
+              </a:spcAft>
+            </a:pPr>
+            <a:r>
+              <a:rPr sz="1300" b="0">
+                <a:solidFill>
+                  <a:srgbClr val="1F3A5F"/>
+                </a:solidFill>
+                <a:latin typeface="Courier New"/>
+              </a:rPr>
+              <a:t>      </a:t>
+            </a:r>
+          </a:p>
+          <a:p>
+            <a:pPr>
+              <a:spcAft>
+                <a:spcPts val="0"/>
+              </a:spcAft>
+            </a:pPr>
+            <a:r>
+              <a:rPr sz="1300" b="0">
+                <a:solidFill>
+                  <a:srgbClr val="1F3A5F"/>
+                </a:solidFill>
+                <a:latin typeface="Courier New"/>
+              </a:rPr>
+              <a:t>      Prompt B: &lt;problem&gt; Write the solution step by step, then give the answer on the last line as ANSWER: &lt;number&gt;.</a:t>
+            </a:r>
+          </a:p>
+          <a:p>
+            <a:pPr>
+              <a:spcAft>
+                <a:spcPts val="0"/>
+              </a:spcAft>
+            </a:pPr>
+            <a:r>
+              <a:rPr sz="1300" b="0">
+                <a:solidFill>
+                  <a:srgbClr val="1F3A5F"/>
+                </a:solidFill>
+                <a:latin typeface="Courier New"/>
+              </a:rPr>
+              <a:t>      Output B: 23 − 20 = 3. 3 + 6 = 9. ANSWER: 9   (correct)</a:t>
             </a:r>
           </a:p>
           <a:p>
@@ -6927,13 +7119,13 @@
               </a:spcAft>
             </a:pPr>
             <a:r>
-              <a:rPr sz="1400" b="0">
+              <a:rPr sz="1500" b="0">
                 <a:solidFill>
                   <a:srgbClr val="444444"/>
                 </a:solidFill>
                 <a:latin typeface="Arial"/>
               </a:rPr>
-              <a:t>      ○  Method A — demand only the answer: "Answer: 27" (wrong)</a:t>
+              <a:t>●  Evidence: Figure 1 of Wei et al. (2022), measured on the large models of 2022.</a:t>
             </a:r>
           </a:p>
           <a:p>
@@ -6943,13 +7135,13 @@
               </a:spcAft>
             </a:pPr>
             <a:r>
-              <a:rPr sz="1400" b="0">
+              <a:rPr sz="1500" b="0">
                 <a:solidFill>
                   <a:srgbClr val="444444"/>
                 </a:solidFill>
                 <a:latin typeface="Arial"/>
               </a:rPr>
-              <a:t>      ○  Method B — elicit the worked solution: "23 − 20 = 3, 3 + 6 = 9. Answer: 9" (correct)</a:t>
+              <a:t>●  Current models: a problem of this size is solved under Prompt A as well; the same split reappears when the number of steps and digits grows (lab §2.2: two-digit products, 0/6 under A, 6/6 under B on gpt-4o-mini).</a:t>
             </a:r>
           </a:p>
           <a:p>
@@ -6965,39 +7157,7 @@
                 </a:solidFill>
                 <a:latin typeface="Arial"/>
               </a:rPr>
-              <a:t>●  The source: a measured case from Figure 1 of the Chain-of-Thought paper (Wei et al., 2022), on the large models of that time.</a:t>
-            </a:r>
-          </a:p>
-          <a:p>
-            <a:pPr>
-              <a:spcAft>
-                <a:spcPts val="600"/>
-              </a:spcAft>
-            </a:pPr>
-            <a:r>
-              <a:rPr sz="1500" b="0">
-                <a:solidFill>
-                  <a:srgbClr val="444444"/>
-                </a:solidFill>
-                <a:latin typeface="Arial"/>
-              </a:rPr>
-              <a:t>●  Today: a large model solves a problem of this size by direct answering, but the same failure reappears once the number of steps and digits grows. The lab reproduces it on harder items.</a:t>
-            </a:r>
-          </a:p>
-          <a:p>
-            <a:pPr>
-              <a:spcAft>
-                <a:spcPts val="600"/>
-              </a:spcAft>
-            </a:pPr>
-            <a:r>
-              <a:rPr sz="1500" b="0">
-                <a:solidFill>
-                  <a:srgbClr val="444444"/>
-                </a:solidFill>
-                <a:latin typeface="Arial"/>
-              </a:rPr>
-              <a:t>●  The conclusion: the weights are identical, yet correctness splits. The cause lies in the computational process that produces the answer, not in the weights.</a:t>
+              <a:t>●  Conclusion: the weights are identical in A and B. The difference in correctness is caused by the computation the prompt permits before the answer token.</a:t>
             </a:r>
           </a:p>
         </p:txBody>
@@ -7050,7 +7210,7 @@
                 </a:solidFill>
                 <a:latin typeface="Arial"/>
               </a:rPr>
-              <a:t>A Workspace Made Only of Text</a:t>
+              <a:t>The Text as the Model's Only Workspace</a:t>
             </a:r>
           </a:p>
         </p:txBody>
@@ -7102,7 +7262,7 @@
                 </a:solidFill>
                 <a:latin typeface="Arial"/>
               </a:rPr>
-              <a:t>How an LLM computes an answer</a:t>
+              <a:t>Token prediction and intermediate values</a:t>
             </a:r>
           </a:p>
         </p:txBody>
@@ -7141,7 +7301,7 @@
                 </a:solidFill>
                 <a:latin typeface="Arial"/>
               </a:rPr>
-              <a:t>●  The constraint: an LLM has no workspace outside the text. Producing the next token, it reads only the text so far. Between one token and the next, no train of thought continues outside the text.</a:t>
+              <a:t>●  Mechanism: an LLM generates one token at a time; each prediction reads only the text so far. No state is carried between tokens outside the text.</a:t>
             </a:r>
           </a:p>
           <a:p>
@@ -7157,7 +7317,7 @@
                 </a:solidFill>
                 <a:latin typeface="Arial"/>
               </a:rPr>
-              <a:t>●  The contrast: a person can pause mid-sentence and carry a value in their head. The only place a model can hold an intermediate result is the text it is writing.</a:t>
+              <a:t>●  Consequence: an intermediate value exists for the model only if it has been written into the text.</a:t>
             </a:r>
           </a:p>
           <a:p>
@@ -7173,7 +7333,7 @@
                 </a:solidFill>
                 <a:latin typeface="Arial"/>
               </a:rPr>
-              <a:t>●  The consequence: whether intermediate values may be written into the output decides whether they exist at all.</a:t>
+              <a:t>●  Contrast: a person can hold "3" in working memory while continuing a sentence. The model has no working memory apart from the text it writes.</a:t>
             </a:r>
           </a:p>
         </p:txBody>
@@ -7225,7 +7385,7 @@
                 </a:solidFill>
                 <a:latin typeface="Arial"/>
               </a:rPr>
-              <a:t>The apple problem, read with this fact</a:t>
+              <a:t>The apple problem under this mechanism</a:t>
             </a:r>
           </a:p>
         </p:txBody>
@@ -7264,7 +7424,7 @@
                 </a:solidFill>
                 <a:latin typeface="Arial"/>
               </a:rPr>
-              <a:t>●  What the problem needs: compute 23 − 20 = 3, keep the 3 somewhere, then add 6 to it.</a:t>
+              <a:t>●  Requirement: compute 23 − 20 = 3, retain 3, then compute 3 + 6.</a:t>
             </a:r>
           </a:p>
           <a:p>
@@ -7280,7 +7440,7 @@
                 </a:solidFill>
                 <a:latin typeface="Arial"/>
               </a:rPr>
-              <a:t>●  Method B: the moment "23 − 20 = 3" is written, the 3 is stored in the text. Later tokens only read it and advance one step.</a:t>
+              <a:t>●  Prompt B: once "23 − 20 = 3" is written, the value 3 is in the text. The prediction of "9" reads 3 and 6 and performs one operation.</a:t>
             </a:r>
           </a:p>
           <a:p>
@@ -7296,7 +7456,7 @@
                 </a:solidFill>
                 <a:latin typeface="Arial"/>
               </a:rPr>
-              <a:t>●  Method A: only the answer is allowed, so there is nowhere to write. The single prediction that emits the answer digit must carry both calculations at once.</a:t>
+              <a:t>●  Prompt A: no intermediate text is permitted. The single prediction that emits the answer must perform both operations.</a:t>
             </a:r>
           </a:p>
           <a:p>
@@ -7312,7 +7472,7 @@
                 </a:solidFill>
                 <a:latin typeface="Arial"/>
               </a:rPr>
-              <a:t>●  The point: B's extra tokens are not decoration. They are the storage site of intermediate values, and A is the condition that forbids that storage.</a:t>
+              <a:t>●  Interpretation: the extra tokens of B are the storage of intermediate values. A is the condition in which that storage is forbidden.</a:t>
             </a:r>
           </a:p>
         </p:txBody>

--- a/lectures/week02/slides-draft-w2.pptx
+++ b/lectures/week02/slides-draft-w2.pptx
@@ -601,7 +601,7 @@
           <a:lstStyle/>
           <a:p>
             <a:r>
-              <a:t>Live demo option: run lab §2.2 (answer-only vs. worked solution).</a:t>
+              <a:t>Live demo option: run the answer-only vs. worked-solution comparison in the notebook.</a:t>
             </a:r>
           </a:p>
         </p:txBody>
@@ -671,7 +671,7 @@
           <a:lstStyle/>
           <a:p>
             <a:r>
-              <a:t>Timing: slides 3–12 ≈ 10 min, 13–20 ≈ 10 min, 21–30 ≈ 10 min. Slide 12 must be kept even if time runs short: it sets up the Week 03 hand-off (tools repair hallucination, prompting does not).</a:t>
+              <a:t>Timing: slides 3–12 ≈ 10 min, 13–20 ≈ 10 min, 21–30 ≈ 10 min. Slide 12 must be kept even if time runs short: tools repair hallucination, prompting does not.</a:t>
             </a:r>
           </a:p>
         </p:txBody>
@@ -3957,7 +3957,7 @@
                 </a:solidFill>
                 <a:latin typeface="Arial"/>
               </a:rPr>
-              <a:t>●  Proposed causes: (i) the depth of computation within one forward pass is bounded by the layer count (Feng et al., 2023; Merrill &amp; Sabharwal, 2023); (ii) answer-only solution text is rare in training data. The two are compatible.</a:t>
+              <a:t>●  Proposed causes: (i) the depth of computation within one forward pass is bounded by the number of layers; (ii) answer-only solution text is rare in training data. The two are compatible.</a:t>
             </a:r>
           </a:p>
           <a:p>
@@ -4112,7 +4112,7 @@
                 </a:solidFill>
                 <a:latin typeface="Arial"/>
               </a:rPr>
-              <a:t>●  Scope: prompting repairs the computation limit (next section). It does not repair hallucination (slides 19–20).</a:t>
+              <a:t>●  Scope: prompting repairs the computation limit (next section). It does not repair hallucination (returned to after chain-of-thought).</a:t>
             </a:r>
           </a:p>
         </p:txBody>
@@ -4256,7 +4256,7 @@
                 </a:solidFill>
                 <a:latin typeface="Arial"/>
               </a:rPr>
-              <a:t>●  Definition: chain-of-thought (CoT) prompting = prompting that induces the model to generate its solution process before the final answer (Wei et al., 2022).</a:t>
+              <a:t>●  Definition: chain-of-thought (CoT) prompting = prompting that induces the model to generate its solution process before the final answer.</a:t>
             </a:r>
           </a:p>
           <a:p>
@@ -4379,7 +4379,7 @@
                 </a:solidFill>
                 <a:latin typeface="Arial"/>
               </a:rPr>
-              <a:t>●  Procedure: append one instruction after the question (Kojima et al., 2022).</a:t>
+              <a:t>●  Procedure: append one instruction after the question.</a:t>
             </a:r>
           </a:p>
           <a:p>
@@ -4833,23 +4833,7 @@
                 </a:solidFill>
                 <a:latin typeface="Arial"/>
               </a:rPr>
-              <a:t>●  Emergence: the CoT effect appears only above a model-scale threshold; in small models it is absent or harmful (Wei et al., 2022). Magnitudes and the scale curve: this week's first presentation.</a:t>
-            </a:r>
-          </a:p>
-          <a:p>
-            <a:pPr>
-              <a:spcAft>
-                <a:spcPts val="600"/>
-              </a:spcAft>
-            </a:pPr>
-            <a:r>
-              <a:rPr sz="1600" b="0">
-                <a:solidFill>
-                  <a:srgbClr val="444444"/>
-                </a:solidFill>
-                <a:latin typeface="Arial"/>
-              </a:rPr>
-              <a:t>●  Lab: assignments 8.1 (instruction), 8.2 and 8.4 (examples) measure both forms on code-graded sets.</a:t>
+              <a:t>●  Emergence: the CoT effect appears only above a model-scale threshold; in small models it is absent or harmful.</a:t>
             </a:r>
           </a:p>
         </p:txBody>
@@ -4993,7 +4977,7 @@
                 </a:solidFill>
                 <a:latin typeface="Arial"/>
               </a:rPr>
-              <a:t>●  Question (HotpotQA; Figure 1 of Yao et al., 2022): "Aside from the Apple Remote, what other device can control the program the Apple Remote was originally designed to interact with?"</a:t>
+              <a:t>●  Question: "Aside from the Apple Remote, what other device can control the program the Apple Remote was originally designed to interact with?"</a:t>
             </a:r>
           </a:p>
           <a:p>
@@ -5041,7 +5025,7 @@
                 </a:solidFill>
                 <a:latin typeface="Arial"/>
               </a:rPr>
-              <a:t>●  Diagnosis (same paper): the reasoning is not grounded in external information, so a hallucinated premise propagates through a valid chain.</a:t>
+              <a:t>●  Diagnosis: the reasoning is not grounded in external information, so a hallucinated premise propagates through a valid chain.</a:t>
             </a:r>
           </a:p>
         </p:txBody>
@@ -5261,7 +5245,7 @@
                 </a:solidFill>
                 <a:latin typeface="Arial"/>
               </a:rPr>
-              <a:t>●  Repair: a step that checks facts against an external source. This requires tools (Week 03) and the agent loop (Week 04); Week 04 traces this question through a loop with a search tool.</a:t>
+              <a:t>●  Repair: a step that checks facts against an external source, that is, a tool call (for this question, a search) inserted between the premise and the next step.</a:t>
             </a:r>
           </a:p>
           <a:p>
@@ -5560,7 +5544,7 @@
                 </a:solidFill>
                 <a:latin typeface="Arial"/>
               </a:rPr>
-              <a:t>●  Definition: self-consistency = sample N solutions at temperature &gt; 0, extract the final answer of each, and return the majority answer (Wang et al., 2022).</a:t>
+              <a:t>●  Definition: self-consistency = sample N solutions at temperature &gt; 0, extract the final answer of each, and return the majority answer.</a:t>
             </a:r>
           </a:p>
           <a:p>
@@ -5593,22 +5577,6 @@
                 <a:latin typeface="Arial"/>
               </a:rPr>
               <a:t>●  Empirical pattern: correct answers are reached by different paths that converge on one value; wrong answers scatter across distinct values.</a:t>
-            </a:r>
-          </a:p>
-          <a:p>
-            <a:pPr>
-              <a:spcAft>
-                <a:spcPts val="600"/>
-              </a:spcAft>
-            </a:pPr>
-            <a:r>
-              <a:rPr sz="1600" b="0">
-                <a:solidFill>
-                  <a:srgbClr val="444444"/>
-                </a:solidFill>
-                <a:latin typeface="Arial"/>
-              </a:rPr>
-              <a:t>●  Magnitudes and the cost of N: this week's second presentation.</a:t>
             </a:r>
           </a:p>
         </p:txBody>
@@ -5846,7 +5814,7 @@
                 </a:solidFill>
                 <a:latin typeface="Arial"/>
               </a:rPr>
-              <a:t>●  Replacement: selection among non-discrete outputs requires a scoring function, a verifier (Week 05).</a:t>
+              <a:t>●  Replacement: selection among non-discrete outputs requires a scoring function, a verifier.</a:t>
             </a:r>
           </a:p>
         </p:txBody>
@@ -6038,7 +6006,7 @@
                 </a:solidFill>
                 <a:latin typeface="Courier New"/>
               </a:rPr>
-              <a:t>      Lab §4.6, one eval item (gpt-4o-mini): answer-only = 1 completion token; chain-of-thought = 75; five CoT samples = 375.</a:t>
+              <a:t>      One question, gpt-4o-mini: answer-only = 1 completion token; chain-of-thought = 75; five CoT samples = 375.</a:t>
             </a:r>
           </a:p>
         </p:txBody>
@@ -6300,7 +6268,7 @@
                           </a:solidFill>
                           <a:latin typeface="Arial"/>
                         </a:rPr>
-                        <a:t>branch, evaluate, backtrack (Week 07)</a:t>
+                        <a:t>branch, evaluate, backtrack</a:t>
                       </a:r>
                     </a:p>
                   </a:txBody>
@@ -6436,7 +6404,7 @@
                 </a:solidFill>
                 <a:latin typeface="Arial"/>
               </a:rPr>
-              <a:t>●  Reasoning modes (OpenAI o-series, Claude extended thinking, Gemini thinking): the written solution of this chapter generated inside the model and billed per token (Week 11).</a:t>
+              <a:t>●  Reasoning modes (OpenAI o-series, Claude extended thinking, Gemini thinking): the written solution of this chapter generated inside the model and billed per token.</a:t>
             </a:r>
           </a:p>
           <a:p>
@@ -6452,7 +6420,7 @@
                 </a:solidFill>
                 <a:latin typeface="Arial"/>
               </a:rPr>
-              <a:t>●  Parallel-reasoning tiers (o1 pro, Gemini Deep Think, Grok Heavy): several reasoning lines generated in parallel and selected, the procedure of slides 22–25.</a:t>
+              <a:t>●  Parallel-reasoning tiers (o1 pro, Gemini Deep Think, Grok Heavy): several reasoning lines generated in parallel and one selected, that is, self-consistency or best-of-N.</a:t>
             </a:r>
           </a:p>
           <a:p>
@@ -6468,7 +6436,7 @@
                 </a:solidFill>
                 <a:latin typeface="Arial"/>
               </a:rPr>
-              <a:t>●  Cost: N samples multiply cost and latency by N. The design variable is which queries receive N &gt; 1 (Week 12, routing).</a:t>
+              <a:t>●  Cost: N samples multiply cost and latency by N. The design variable is which queries receive N &gt; 1.</a:t>
             </a:r>
           </a:p>
         </p:txBody>
@@ -6573,7 +6541,7 @@
                 </a:solidFill>
                 <a:latin typeface="Arial"/>
               </a:rPr>
-              <a:t>This week</a:t>
+              <a:t>Summary</a:t>
             </a:r>
           </a:p>
         </p:txBody>
@@ -6612,7 +6580,7 @@
                 </a:solidFill>
                 <a:latin typeface="Arial"/>
               </a:rPr>
-              <a:t>●  Chapter: prompt dependence of accuracy → the text as the only workspace → chain-of-thought → its limit (ungrounded premises) → self-consistency → test-time compute.</a:t>
+              <a:t>●  Observation: the same model answers the same problem correctly or incorrectly depending on whether the prompt permits a written solution before the answer.</a:t>
             </a:r>
           </a:p>
           <a:p>
@@ -6628,7 +6596,7 @@
                 </a:solidFill>
                 <a:latin typeface="Arial"/>
               </a:rPr>
-              <a:t>●  Presentations: Chain-of-Thought (Wei et al., 2022) — accuracy gains from prompting and the emergence curve. Self-Consistency (Wang et al., 2022) — sample-and-vote, measured gains, cost of N.</a:t>
+              <a:t>●  Cause: the model's only workspace is the text it generates; an intermediate value exists only once written. Answer-only prompting forces every operation into one prediction, whose capacity is bounded.</a:t>
             </a:r>
           </a:p>
           <a:p>
@@ -6644,7 +6612,7 @@
                 </a:solidFill>
                 <a:latin typeface="Arial"/>
               </a:rPr>
-              <a:t>●  Lab (W2_lab_prompting.ipynb): answer-only vs. worked solution on code-graded arithmetic → silent-thinking and answer-first controls → a code-graded eval improved from baseline to format fix to your own CoT prompt (≥ 11/12) → few-shot email classification (4/4) → self-consistency on the hardest item → the hallucination limit. Four graded assignments.</a:t>
+              <a:t>●  Chain-of-thought: an instruction or worked examples induce the written solution. Examples additionally fix the granularity and format that an instruction leaves open.</a:t>
             </a:r>
           </a:p>
           <a:p>
@@ -6660,7 +6628,7 @@
                 </a:solidFill>
                 <a:latin typeface="Arial"/>
               </a:rPr>
-              <a:t>●  Homework (W2_hw_build_evalset.ipynb): an eight-item code-graded evalset in your own domain and a CoT template that beats answer-only on it (≥ 7/8). Due before Week 03.</a:t>
+              <a:t>●  Limit: chain-of-thought draws only on parametric knowledge. A false premise propagates through a valid chain; repair requires an external check, not a prompt.</a:t>
             </a:r>
           </a:p>
           <a:p>
@@ -6676,7 +6644,23 @@
                 </a:solidFill>
                 <a:latin typeface="Arial"/>
               </a:rPr>
-              <a:t>●  Next week: tools, the external checking step required by slide 20.</a:t>
+              <a:t>●  Self-consistency: one response is one sampled path. Sampling N paths and taking the majority of discrete answers estimates the answer probability summed over paths.</a:t>
+            </a:r>
+          </a:p>
+          <a:p>
+            <a:pPr>
+              <a:spcAft>
+                <a:spcPts val="600"/>
+              </a:spcAft>
+            </a:pPr>
+            <a:r>
+              <a:rPr sz="1400" b="0">
+                <a:solidFill>
+                  <a:srgbClr val="444444"/>
+                </a:solidFill>
+                <a:latin typeface="Arial"/>
+              </a:rPr>
+              <a:t>●  Test-time compute: chain-of-thought and self-consistency both buy accuracy with additional predictions at inference time, with the weights unchanged.</a:t>
             </a:r>
           </a:p>
         </p:txBody>
@@ -6767,7 +6751,7 @@
                 </a:solidFill>
                 <a:latin typeface="Arial"/>
               </a:rPr>
-              <a:t>●  Recall (Week 01): an agent is a system whose next action is decided by the model's output. Each such decision is an inference from the current state to an action.</a:t>
+              <a:t>●  Premise: an agent is a system whose next action is decided by the model's output. Each such decision is an inference from the current state to an action.</a:t>
             </a:r>
           </a:p>
           <a:p>
@@ -6783,7 +6767,7 @@
                 </a:solidFill>
                 <a:latin typeface="Arial"/>
               </a:rPr>
-              <a:t>●  Bound: the accuracy of an agent is bounded above by the accuracy of the model's reasoning at each step. Tools, memory, and loops (Weeks 03–05) add components around the model; they do not raise the accuracy of a single call.</a:t>
+              <a:t>●  Bound: the accuracy of an agent is bounded above by the accuracy of the model's reasoning at each step. Tools, memory, and loops add components around the model; they do not raise the accuracy of a single call.</a:t>
             </a:r>
           </a:p>
           <a:p>
@@ -7023,7 +7007,7 @@
               </a:spcAft>
             </a:pPr>
             <a:r>
-              <a:rPr sz="1500" b="0">
+              <a:rPr sz="1400" b="0">
                 <a:solidFill>
                   <a:srgbClr val="444444"/>
                 </a:solidFill>
@@ -7039,7 +7023,7 @@
               </a:spcAft>
             </a:pPr>
             <a:r>
-              <a:rPr sz="1300" b="0">
+              <a:rPr sz="1200" b="0">
                 <a:solidFill>
                   <a:srgbClr val="1F3A5F"/>
                 </a:solidFill>
@@ -7055,7 +7039,7 @@
               </a:spcAft>
             </a:pPr>
             <a:r>
-              <a:rPr sz="1300" b="0">
+              <a:rPr sz="1200" b="0">
                 <a:solidFill>
                   <a:srgbClr val="1F3A5F"/>
                 </a:solidFill>
@@ -7071,7 +7055,7 @@
               </a:spcAft>
             </a:pPr>
             <a:r>
-              <a:rPr sz="1300" b="0">
+              <a:rPr sz="1200" b="0">
                 <a:solidFill>
                   <a:srgbClr val="1F3A5F"/>
                 </a:solidFill>
@@ -7087,7 +7071,7 @@
               </a:spcAft>
             </a:pPr>
             <a:r>
-              <a:rPr sz="1300" b="0">
+              <a:rPr sz="1200" b="0">
                 <a:solidFill>
                   <a:srgbClr val="1F3A5F"/>
                 </a:solidFill>
@@ -7103,7 +7087,7 @@
               </a:spcAft>
             </a:pPr>
             <a:r>
-              <a:rPr sz="1300" b="0">
+              <a:rPr sz="1200" b="0">
                 <a:solidFill>
                   <a:srgbClr val="1F3A5F"/>
                 </a:solidFill>
@@ -7119,13 +7103,13 @@
               </a:spcAft>
             </a:pPr>
             <a:r>
-              <a:rPr sz="1500" b="0">
+              <a:rPr sz="1400" b="0">
                 <a:solidFill>
                   <a:srgbClr val="444444"/>
                 </a:solidFill>
                 <a:latin typeface="Arial"/>
               </a:rPr>
-              <a:t>●  Evidence: Figure 1 of Wei et al. (2022), measured on the large models of 2022.</a:t>
+              <a:t>●  Evidence: measured on the large models of 2022; this pair of outputs is the observation that started chain-of-thought research.</a:t>
             </a:r>
           </a:p>
           <a:p>
@@ -7135,13 +7119,13 @@
               </a:spcAft>
             </a:pPr>
             <a:r>
-              <a:rPr sz="1500" b="0">
+              <a:rPr sz="1400" b="0">
                 <a:solidFill>
                   <a:srgbClr val="444444"/>
                 </a:solidFill>
                 <a:latin typeface="Arial"/>
               </a:rPr>
-              <a:t>●  Current models: a problem of this size is solved under Prompt A as well; the same split reappears when the number of steps and digits grows (lab §2.2: two-digit products, 0/6 under A, 6/6 under B on gpt-4o-mini).</a:t>
+              <a:t>●  Current models: a problem of this size is solved under Prompt A as well. The same split reappears when the number of steps and digits grows: on six problems with a two-digit product and two further operations, gpt-4o-mini scores 0/6 under A and 6/6 under B.</a:t>
             </a:r>
           </a:p>
           <a:p>
@@ -7151,7 +7135,7 @@
               </a:spcAft>
             </a:pPr>
             <a:r>
-              <a:rPr sz="1500" b="0">
+              <a:rPr sz="1400" b="0">
                 <a:solidFill>
                   <a:srgbClr val="444444"/>
                 </a:solidFill>

--- a/lectures/week02/slides-draft-w2.pptx
+++ b/lectures/week02/slides-draft-w2.pptx
@@ -3886,7 +3886,7 @@
                 </a:solidFill>
                 <a:latin typeface="Arial"/>
               </a:rPr>
-              <a:t>The per-prediction limit</a:t>
+              <a:t>Capacity of a single prediction</a:t>
             </a:r>
           </a:p>
         </p:txBody>
@@ -3919,13 +3919,13 @@
               </a:spcAft>
             </a:pPr>
             <a:r>
-              <a:rPr sz="1500" b="0">
+              <a:rPr sz="1400" b="0">
                 <a:solidFill>
                   <a:srgbClr val="444444"/>
                 </a:solidFill>
                 <a:latin typeface="Arial"/>
               </a:rPr>
-              <a:t>●  Empirical fact: the number of sequential operations one prediction can perform is bounded. Failure frequency rises with the number of steps and digits.</a:t>
+              <a:t>●  Question: how many operations can one prediction complete when no intermediate value may be written?</a:t>
             </a:r>
           </a:p>
           <a:p>
@@ -3935,13 +3935,45 @@
               </a:spcAft>
             </a:pPr>
             <a:r>
-              <a:rPr sz="1500" b="0">
+              <a:rPr sz="1400" b="0">
                 <a:solidFill>
                   <a:srgbClr val="444444"/>
                 </a:solidFill>
                 <a:latin typeface="Arial"/>
               </a:rPr>
-              <a:t>●  Failure form: prediction emits the most probable token whether or not the computation is complete. An incomplete computation yields an answer-shaped number built from the digits in the problem (27 from 23 and 6).</a:t>
+              <a:t>●  Measurement: the same two prompts on problems of increasing size (gpt-4o-mini).</a:t>
+            </a:r>
+          </a:p>
+          <a:p>
+            <a:pPr>
+              <a:spcAft>
+                <a:spcPts val="0"/>
+              </a:spcAft>
+            </a:pPr>
+            <a:r>
+              <a:rPr sz="1200" b="0">
+                <a:solidFill>
+                  <a:srgbClr val="1F3A5F"/>
+                </a:solidFill>
+                <a:latin typeface="Courier New"/>
+              </a:rPr>
+              <a:t>      23 − 20 + 6                          answer only: correct</a:t>
+            </a:r>
+          </a:p>
+          <a:p>
+            <a:pPr>
+              <a:spcAft>
+                <a:spcPts val="0"/>
+              </a:spcAft>
+            </a:pPr>
+            <a:r>
+              <a:rPr sz="1200" b="0">
+                <a:solidFill>
+                  <a:srgbClr val="1F3A5F"/>
+                </a:solidFill>
+                <a:latin typeface="Courier New"/>
+              </a:rPr>
+              <a:t>      47 × 38 − 519 + 284, six problems     answer only: 0 of 6      written solution first: 6 of 6</a:t>
             </a:r>
           </a:p>
           <a:p>
@@ -3951,29 +3983,45 @@
               </a:spcAft>
             </a:pPr>
             <a:r>
-              <a:rPr sz="1500" b="0">
+              <a:rPr sz="1400" b="0">
                 <a:solidFill>
                   <a:srgbClr val="444444"/>
                 </a:solidFill>
                 <a:latin typeface="Arial"/>
               </a:rPr>
+              <a:t>●  Result: the number of operations one prediction can complete is bounded, and the bound is reached once a multiplication is involved.</a:t>
+            </a:r>
+          </a:p>
+          <a:p>
+            <a:pPr>
+              <a:spcAft>
+                <a:spcPts val="600"/>
+              </a:spcAft>
+            </a:pPr>
+            <a:r>
+              <a:rPr sz="1400" b="0">
+                <a:solidFill>
+                  <a:srgbClr val="444444"/>
+                </a:solidFill>
+                <a:latin typeface="Arial"/>
+              </a:rPr>
+              <a:t>●  Failure form: prediction emits the most probable token whether or not the computation is complete. An unfinished computation therefore returns a number, not a refusal: expected 1551, returned 1516.</a:t>
+            </a:r>
+          </a:p>
+          <a:p>
+            <a:pPr>
+              <a:spcAft>
+                <a:spcPts val="600"/>
+              </a:spcAft>
+            </a:pPr>
+            <a:r>
+              <a:rPr sz="1400" b="0">
+                <a:solidFill>
+                  <a:srgbClr val="444444"/>
+                </a:solidFill>
+                <a:latin typeface="Arial"/>
+              </a:rPr>
               <a:t>●  Proposed causes: (i) the depth of computation within one forward pass is bounded by the number of layers; (ii) answer-only solution text is rare in training data. The two are compatible.</a:t>
-            </a:r>
-          </a:p>
-          <a:p>
-            <a:pPr>
-              <a:spcAft>
-                <a:spcPts val="600"/>
-              </a:spcAft>
-            </a:pPr>
-            <a:r>
-              <a:rPr sz="1500" b="0">
-                <a:solidFill>
-                  <a:srgbClr val="444444"/>
-                </a:solidFill>
-                <a:latin typeface="Arial"/>
-              </a:rPr>
-              <a:t>●  What the remainder requires: the limit is measured, and writing intermediate values circumvents it.</a:t>
             </a:r>
           </a:p>
         </p:txBody>
@@ -4058,7 +4106,7 @@
               </a:spcAft>
             </a:pPr>
             <a:r>
-              <a:rPr sz="1600" b="0">
+              <a:rPr sz="1500" b="0">
                 <a:solidFill>
                   <a:srgbClr val="444444"/>
                 </a:solidFill>
@@ -4074,13 +4122,45 @@
               </a:spcAft>
             </a:pPr>
             <a:r>
-              <a:rPr sz="1600" b="0">
+              <a:rPr sz="1500" b="0">
                 <a:solidFill>
                   <a:srgbClr val="444444"/>
                 </a:solidFill>
                 <a:latin typeface="Arial"/>
               </a:rPr>
-              <a:t>●  Mechanism: the same as the computation limit. When the required fact or computation is unavailable, prediction still emits the most probable continuation, and that continuation has the form of an answer.</a:t>
+              <a:t>●  Mechanism: prediction does not stop when the required computation is unfinished, and it does not stop when the required fact is absent. In both cases the most probable continuation is emitted, and it has the form of an answer.</a:t>
+            </a:r>
+          </a:p>
+          <a:p>
+            <a:pPr>
+              <a:spcAft>
+                <a:spcPts val="0"/>
+              </a:spcAft>
+            </a:pPr>
+            <a:r>
+              <a:rPr sz="1300" b="0">
+                <a:solidFill>
+                  <a:srgbClr val="1F3A5F"/>
+                </a:solidFill>
+                <a:latin typeface="Courier New"/>
+              </a:rPr>
+              <a:t>      unfinished computation → 1516 in place of 1551</a:t>
+            </a:r>
+          </a:p>
+          <a:p>
+            <a:pPr>
+              <a:spcAft>
+                <a:spcPts val="0"/>
+              </a:spcAft>
+            </a:pPr>
+            <a:r>
+              <a:rPr sz="1300" b="0">
+                <a:solidFill>
+                  <a:srgbClr val="1F3A5F"/>
+                </a:solidFill>
+                <a:latin typeface="Courier New"/>
+              </a:rPr>
+              <a:t>      absent fact           → a plausible name in place of "I do not know"</a:t>
             </a:r>
           </a:p>
           <a:p>
@@ -4090,13 +4170,13 @@
               </a:spcAft>
             </a:pPr>
             <a:r>
-              <a:rPr sz="1600" b="0">
+              <a:rPr sz="1500" b="0">
                 <a:solidFill>
                   <a:srgbClr val="444444"/>
                 </a:solidFill>
                 <a:latin typeface="Arial"/>
               </a:rPr>
-              <a:t>●  Two symptoms, one mechanism: a wrong number (27) and a confident false premise are both "most probable token, regardless of completion."</a:t>
+              <a:t>●  Consequence: the output carries no signal of which case produced it. A wrong number and an invented fact are equally fluent and equally confident.</a:t>
             </a:r>
           </a:p>
           <a:p>
@@ -4106,13 +4186,13 @@
               </a:spcAft>
             </a:pPr>
             <a:r>
-              <a:rPr sz="1600" b="0">
+              <a:rPr sz="1500" b="0">
                 <a:solidFill>
                   <a:srgbClr val="444444"/>
                 </a:solidFill>
                 <a:latin typeface="Arial"/>
               </a:rPr>
-              <a:t>●  Scope: prompting repairs the computation limit (next section). It does not repair hallucination (returned to after chain-of-thought).</a:t>
+              <a:t>●  Scope: writing the solution raises the bound on the computation limit, as the next section shows. It gives the model no access to a fact it does not have, so hallucination is untouched by it.</a:t>
             </a:r>
           </a:p>
         </p:txBody>
@@ -4779,7 +4859,7 @@
               </a:spcAft>
             </a:pPr>
             <a:r>
-              <a:rPr sz="1600" b="0">
+              <a:rPr sz="1500" b="0">
                 <a:solidFill>
                   <a:srgbClr val="444444"/>
                 </a:solidFill>
@@ -4795,7 +4875,7 @@
               </a:spcAft>
             </a:pPr>
             <a:r>
-              <a:rPr sz="1400" b="0">
+              <a:rPr sz="1300" b="0">
                 <a:solidFill>
                   <a:srgbClr val="1F3A5F"/>
                 </a:solidFill>
@@ -4811,7 +4891,7 @@
               </a:spcAft>
             </a:pPr>
             <a:r>
-              <a:rPr sz="1400" b="0">
+              <a:rPr sz="1300" b="0">
                 <a:solidFill>
                   <a:srgbClr val="1F3A5F"/>
                 </a:solidFill>
@@ -4827,13 +4907,29 @@
               </a:spcAft>
             </a:pPr>
             <a:r>
-              <a:rPr sz="1600" b="0">
+              <a:rPr sz="1500" b="0">
                 <a:solidFill>
                   <a:srgbClr val="444444"/>
                 </a:solidFill>
                 <a:latin typeface="Arial"/>
               </a:rPr>
               <a:t>●  Emergence: the CoT effect appears only above a model-scale threshold; in small models it is absent or harmful.</a:t>
+            </a:r>
+          </a:p>
+          <a:p>
+            <a:pPr>
+              <a:spcAft>
+                <a:spcPts val="600"/>
+              </a:spcAft>
+            </a:pPr>
+            <a:r>
+              <a:rPr sz="1500" b="0">
+                <a:solidFill>
+                  <a:srgbClr val="444444"/>
+                </a:solidFill>
+                <a:latin typeface="Arial"/>
+              </a:rPr>
+              <a:t>●  Bound: writing the solution moves the per-prediction bound outward, it does not remove it. Each written step is itself one prediction. With three-digit factors in the same six problems, the written solution scores 1 of 6.</a:t>
             </a:r>
           </a:p>
         </p:txBody>

--- a/lectures/week02/slides-draft-w2.pptx
+++ b/lectures/week02/slides-draft-w2.pptx
@@ -34,7 +34,6 @@
     <p:sldId id="282" r:id="rId34"/>
     <p:sldId id="283" r:id="rId35"/>
     <p:sldId id="284" r:id="rId36"/>
-    <p:sldId id="285" r:id="rId37"/>
   </p:sldIdLst>
   <p:sldSz cx="9144000" cy="5143500" type="screen4x3"/>
   <p:notesSz cx="6858000" cy="9144000"/>
@@ -671,7 +670,7 @@
           <a:lstStyle/>
           <a:p>
             <a:r>
-              <a:t>Timing: slides 3–12 ≈ 10 min, 13–20 ≈ 10 min, 21–30 ≈ 10 min. Slide 12 must be kept even if time runs short: tools repair hallucination, prompting does not.</a:t>
+              <a:t>Timing: slides 3–11 ≈ 10 min, 12–19 ≈ 10 min, 20–29 ≈ 10 min. Slide 19 must be kept even if time runs short: tools repair hallucination, prompting does not.</a:t>
             </a:r>
           </a:p>
         </p:txBody>
@@ -3915,6 +3914,38 @@
           <a:p>
             <a:pPr>
               <a:spcAft>
+                <a:spcPts val="0"/>
+              </a:spcAft>
+            </a:pPr>
+            <a:r>
+              <a:rPr sz="1200" b="0">
+                <a:solidFill>
+                  <a:srgbClr val="1F3A5F"/>
+                </a:solidFill>
+                <a:latin typeface="Courier New"/>
+              </a:rPr>
+              <a:t>      23 − 20 + 6, one operation                       answer only: 9, correct</a:t>
+            </a:r>
+          </a:p>
+          <a:p>
+            <a:pPr>
+              <a:spcAft>
+                <a:spcPts val="0"/>
+              </a:spcAft>
+            </a:pPr>
+            <a:r>
+              <a:rPr sz="1200" b="0">
+                <a:solidFill>
+                  <a:srgbClr val="1F3A5F"/>
+                </a:solidFill>
+                <a:latin typeface="Courier New"/>
+              </a:rPr>
+              <a:t>      47 × 38 − 519 + 284, six problems of this form    answer only: 0 of 6 correct (1516, 1407, 4206, 1861, 5008, 5007)</a:t>
+            </a:r>
+          </a:p>
+          <a:p>
+            <a:pPr>
+              <a:spcAft>
                 <a:spcPts val="600"/>
               </a:spcAft>
             </a:pPr>
@@ -3925,7 +3956,7 @@
                 </a:solidFill>
                 <a:latin typeface="Arial"/>
               </a:rPr>
-              <a:t>●  Question: how many operations can one prediction complete when no intermediate value may be written?</a:t>
+              <a:t>●  Result: the number of operations one prediction can complete is bounded. One operation succeeds; a multiplication followed by two further operations does not.</a:t>
             </a:r>
           </a:p>
           <a:p>
@@ -3941,39 +3972,7 @@
                 </a:solidFill>
                 <a:latin typeface="Arial"/>
               </a:rPr>
-              <a:t>●  Measurement: the same two prompts on problems of increasing size (gpt-4o-mini).</a:t>
-            </a:r>
-          </a:p>
-          <a:p>
-            <a:pPr>
-              <a:spcAft>
-                <a:spcPts val="0"/>
-              </a:spcAft>
-            </a:pPr>
-            <a:r>
-              <a:rPr sz="1200" b="0">
-                <a:solidFill>
-                  <a:srgbClr val="1F3A5F"/>
-                </a:solidFill>
-                <a:latin typeface="Courier New"/>
-              </a:rPr>
-              <a:t>      23 − 20 + 6                          answer only: correct</a:t>
-            </a:r>
-          </a:p>
-          <a:p>
-            <a:pPr>
-              <a:spcAft>
-                <a:spcPts val="0"/>
-              </a:spcAft>
-            </a:pPr>
-            <a:r>
-              <a:rPr sz="1200" b="0">
-                <a:solidFill>
-                  <a:srgbClr val="1F3A5F"/>
-                </a:solidFill>
-                <a:latin typeface="Courier New"/>
-              </a:rPr>
-              <a:t>      47 × 38 − 519 + 284, six problems     answer only: 0 of 6      written solution first: 6 of 6</a:t>
+              <a:t>●  Failure form: prediction emits the most probable token whether or not the computation is complete. An unfinished computation returns a number, not a refusal.</a:t>
             </a:r>
           </a:p>
           <a:p>
@@ -3989,7 +3988,7 @@
                 </a:solidFill>
                 <a:latin typeface="Arial"/>
               </a:rPr>
-              <a:t>●  Result: the number of operations one prediction can complete is bounded, and the bound is reached once a multiplication is involved.</a:t>
+              <a:t>●  Proposed causes: (i) the depth of computation within one forward pass is bounded by the number of layers; (ii) answer-only solution text is rare in training data. The two are compatible.</a:t>
             </a:r>
           </a:p>
           <a:p>
@@ -4005,23 +4004,7 @@
                 </a:solidFill>
                 <a:latin typeface="Arial"/>
               </a:rPr>
-              <a:t>●  Failure form: prediction emits the most probable token whether or not the computation is complete. An unfinished computation therefore returns a number, not a refusal: expected 1551, returned 1516.</a:t>
-            </a:r>
-          </a:p>
-          <a:p>
-            <a:pPr>
-              <a:spcAft>
-                <a:spcPts val="600"/>
-              </a:spcAft>
-            </a:pPr>
-            <a:r>
-              <a:rPr sz="1400" b="0">
-                <a:solidFill>
-                  <a:srgbClr val="444444"/>
-                </a:solidFill>
-                <a:latin typeface="Arial"/>
-              </a:rPr>
-              <a:t>●  Proposed causes: (i) the depth of computation within one forward pass is bounded by the number of layers; (ii) answer-only solution text is rare in training data. The two are compatible.</a:t>
+              <a:t>●  Hypothesis: if 1786 and 1267 were written into the text before the answer, each prediction would perform one operation. The next section tests it.</a:t>
             </a:r>
           </a:p>
         </p:txBody>
@@ -4052,8 +4035,8 @@
         </p:nvSpPr>
         <p:spPr>
           <a:xfrm>
-            <a:off x="384048" y="256032"/>
-            <a:ext cx="8375904" cy="640080"/>
+            <a:off x="548640" y="1828800"/>
+            <a:ext cx="8046720" cy="1463040"/>
           </a:xfrm>
           <a:prstGeom prst="rect">
             <a:avLst/>
@@ -4061,138 +4044,20 @@
           <a:noFill/>
         </p:spPr>
         <p:txBody>
-          <a:bodyPr wrap="square">
+          <a:bodyPr wrap="square" anchor="ctr">
             <a:spAutoFit/>
           </a:bodyPr>
           <a:lstStyle/>
           <a:p>
-            <a:r>
-              <a:rPr sz="2400" b="0">
+            <a:pPr algn="ctr"/>
+            <a:r>
+              <a:rPr sz="3600" b="0">
                 <a:solidFill>
                   <a:srgbClr val="000000"/>
                 </a:solidFill>
                 <a:latin typeface="Arial"/>
               </a:rPr>
-              <a:t>Hallucination</a:t>
-            </a:r>
-          </a:p>
-        </p:txBody>
-      </p:sp>
-      <p:sp>
-        <p:nvSpPr>
-          <p:cNvPr id="3" name="TextBox 2"/>
-          <p:cNvSpPr txBox="1"/>
-          <p:nvPr/>
-        </p:nvSpPr>
-        <p:spPr>
-          <a:xfrm>
-            <a:off x="502920" y="987552"/>
-            <a:ext cx="8229600" cy="3931920"/>
-          </a:xfrm>
-          <a:prstGeom prst="rect">
-            <a:avLst/>
-          </a:prstGeom>
-          <a:noFill/>
-        </p:spPr>
-        <p:txBody>
-          <a:bodyPr wrap="square">
-            <a:spAutoFit/>
-          </a:bodyPr>
-          <a:lstStyle/>
-          <a:p>
-            <a:pPr>
-              <a:spcAft>
-                <a:spcPts val="600"/>
-              </a:spcAft>
-            </a:pPr>
-            <a:r>
-              <a:rPr sz="1500" b="0">
-                <a:solidFill>
-                  <a:srgbClr val="444444"/>
-                </a:solidFill>
-                <a:latin typeface="Arial"/>
-              </a:rPr>
-              <a:t>●  Definition: hallucination = generation of content that is plausible but not factual.</a:t>
-            </a:r>
-          </a:p>
-          <a:p>
-            <a:pPr>
-              <a:spcAft>
-                <a:spcPts val="600"/>
-              </a:spcAft>
-            </a:pPr>
-            <a:r>
-              <a:rPr sz="1500" b="0">
-                <a:solidFill>
-                  <a:srgbClr val="444444"/>
-                </a:solidFill>
-                <a:latin typeface="Arial"/>
-              </a:rPr>
-              <a:t>●  Mechanism: prediction does not stop when the required computation is unfinished, and it does not stop when the required fact is absent. In both cases the most probable continuation is emitted, and it has the form of an answer.</a:t>
-            </a:r>
-          </a:p>
-          <a:p>
-            <a:pPr>
-              <a:spcAft>
-                <a:spcPts val="0"/>
-              </a:spcAft>
-            </a:pPr>
-            <a:r>
-              <a:rPr sz="1300" b="0">
-                <a:solidFill>
-                  <a:srgbClr val="1F3A5F"/>
-                </a:solidFill>
-                <a:latin typeface="Courier New"/>
-              </a:rPr>
-              <a:t>      unfinished computation → 1516 in place of 1551</a:t>
-            </a:r>
-          </a:p>
-          <a:p>
-            <a:pPr>
-              <a:spcAft>
-                <a:spcPts val="0"/>
-              </a:spcAft>
-            </a:pPr>
-            <a:r>
-              <a:rPr sz="1300" b="0">
-                <a:solidFill>
-                  <a:srgbClr val="1F3A5F"/>
-                </a:solidFill>
-                <a:latin typeface="Courier New"/>
-              </a:rPr>
-              <a:t>      absent fact           → a plausible name in place of "I do not know"</a:t>
-            </a:r>
-          </a:p>
-          <a:p>
-            <a:pPr>
-              <a:spcAft>
-                <a:spcPts val="600"/>
-              </a:spcAft>
-            </a:pPr>
-            <a:r>
-              <a:rPr sz="1500" b="0">
-                <a:solidFill>
-                  <a:srgbClr val="444444"/>
-                </a:solidFill>
-                <a:latin typeface="Arial"/>
-              </a:rPr>
-              <a:t>●  Consequence: the output carries no signal of which case produced it. A wrong number and an invented fact are equally fluent and equally confident.</a:t>
-            </a:r>
-          </a:p>
-          <a:p>
-            <a:pPr>
-              <a:spcAft>
-                <a:spcPts val="600"/>
-              </a:spcAft>
-            </a:pPr>
-            <a:r>
-              <a:rPr sz="1500" b="0">
-                <a:solidFill>
-                  <a:srgbClr val="444444"/>
-                </a:solidFill>
-                <a:latin typeface="Arial"/>
-              </a:rPr>
-              <a:t>●  Scope: writing the solution raises the bound on the computation limit, as the next section shows. It gives the model no access to a fact it does not have, so hallucination is untouched by it.</a:t>
+              <a:t>Chain-of-Thought</a:t>
             </a:r>
           </a:p>
         </p:txBody>
@@ -4223,8 +4088,8 @@
         </p:nvSpPr>
         <p:spPr>
           <a:xfrm>
-            <a:off x="548640" y="1828800"/>
-            <a:ext cx="8046720" cy="1463040"/>
+            <a:off x="384048" y="256032"/>
+            <a:ext cx="8375904" cy="640080"/>
           </a:xfrm>
           <a:prstGeom prst="rect">
             <a:avLst/>
@@ -4232,20 +4097,90 @@
           <a:noFill/>
         </p:spPr>
         <p:txBody>
-          <a:bodyPr wrap="square" anchor="ctr">
+          <a:bodyPr wrap="square">
             <a:spAutoFit/>
           </a:bodyPr>
           <a:lstStyle/>
           <a:p>
-            <a:pPr algn="ctr"/>
-            <a:r>
-              <a:rPr sz="3600" b="0">
+            <a:r>
+              <a:rPr sz="2400" b="0">
                 <a:solidFill>
                   <a:srgbClr val="000000"/>
                 </a:solidFill>
                 <a:latin typeface="Arial"/>
               </a:rPr>
-              <a:t>Chain-of-Thought</a:t>
+              <a:t>Chain-of-thought prompting</a:t>
+            </a:r>
+          </a:p>
+        </p:txBody>
+      </p:sp>
+      <p:sp>
+        <p:nvSpPr>
+          <p:cNvPr id="3" name="TextBox 2"/>
+          <p:cNvSpPr txBox="1"/>
+          <p:nvPr/>
+        </p:nvSpPr>
+        <p:spPr>
+          <a:xfrm>
+            <a:off x="502920" y="987552"/>
+            <a:ext cx="8229600" cy="3931920"/>
+          </a:xfrm>
+          <a:prstGeom prst="rect">
+            <a:avLst/>
+          </a:prstGeom>
+          <a:noFill/>
+        </p:spPr>
+        <p:txBody>
+          <a:bodyPr wrap="square">
+            <a:spAutoFit/>
+          </a:bodyPr>
+          <a:lstStyle/>
+          <a:p>
+            <a:pPr>
+              <a:spcAft>
+                <a:spcPts val="600"/>
+              </a:spcAft>
+            </a:pPr>
+            <a:r>
+              <a:rPr sz="1600" b="0">
+                <a:solidFill>
+                  <a:srgbClr val="444444"/>
+                </a:solidFill>
+                <a:latin typeface="Arial"/>
+              </a:rPr>
+              <a:t>●  Definition: chain-of-thought (CoT) prompting = prompting that induces the model to generate its solution process before the final answer.</a:t>
+            </a:r>
+          </a:p>
+          <a:p>
+            <a:pPr>
+              <a:spcAft>
+                <a:spcPts val="600"/>
+              </a:spcAft>
+            </a:pPr>
+            <a:r>
+              <a:rPr sz="1600" b="0">
+                <a:solidFill>
+                  <a:srgbClr val="444444"/>
+                </a:solidFill>
+                <a:latin typeface="Arial"/>
+              </a:rPr>
+              <a:t>●  Mechanism: each token of the solution reads the values already written and advances one operation; the answer token reads the last intermediate value.</a:t>
+            </a:r>
+          </a:p>
+          <a:p>
+            <a:pPr>
+              <a:spcAft>
+                <a:spcPts val="600"/>
+              </a:spcAft>
+            </a:pPr>
+            <a:r>
+              <a:rPr sz="1600" b="0">
+                <a:solidFill>
+                  <a:srgbClr val="444444"/>
+                </a:solidFill>
+                <a:latin typeface="Arial"/>
+              </a:rPr>
+              <a:t>●  Two forms: an instruction (zero-shot CoT) or worked examples (few-shot CoT). Both are text in the prompt; nothing else changes.</a:t>
             </a:r>
           </a:p>
         </p:txBody>
@@ -4297,7 +4232,7 @@
                 </a:solidFill>
                 <a:latin typeface="Arial"/>
               </a:rPr>
-              <a:t>Chain-of-thought prompting</a:t>
+              <a:t>Form 1 — Instruction (zero-shot CoT)</a:t>
             </a:r>
           </a:p>
         </p:txBody>
@@ -4336,7 +4271,71 @@
                 </a:solidFill>
                 <a:latin typeface="Arial"/>
               </a:rPr>
-              <a:t>●  Definition: chain-of-thought (CoT) prompting = prompting that induces the model to generate its solution process before the final answer.</a:t>
+              <a:t>●  Procedure: append one instruction after the question.</a:t>
+            </a:r>
+          </a:p>
+          <a:p>
+            <a:pPr>
+              <a:spcAft>
+                <a:spcPts val="0"/>
+              </a:spcAft>
+            </a:pPr>
+            <a:r>
+              <a:rPr sz="1400" b="0">
+                <a:solidFill>
+                  <a:srgbClr val="1F3A5F"/>
+                </a:solidFill>
+                <a:latin typeface="Courier New"/>
+              </a:rPr>
+              <a:t>      There are 23 apples. 20 are used and 6 more are bought. How many are there?</a:t>
+            </a:r>
+          </a:p>
+          <a:p>
+            <a:pPr>
+              <a:spcAft>
+                <a:spcPts val="0"/>
+              </a:spcAft>
+            </a:pPr>
+            <a:r>
+              <a:rPr sz="1400" b="0">
+                <a:solidFill>
+                  <a:srgbClr val="1F3A5F"/>
+                </a:solidFill>
+                <a:latin typeface="Courier New"/>
+              </a:rPr>
+              <a:t>      Write the solution step by step, then give the answer on the last line as ANSWER: &lt;number&gt;.</a:t>
+            </a:r>
+          </a:p>
+          <a:p>
+            <a:pPr>
+              <a:spcAft>
+                <a:spcPts val="0"/>
+              </a:spcAft>
+            </a:pPr>
+            <a:r>
+              <a:rPr sz="1400" b="0">
+                <a:solidFill>
+                  <a:srgbClr val="1F3A5F"/>
+                </a:solidFill>
+                <a:latin typeface="Courier New"/>
+              </a:rPr>
+              <a:t>      </a:t>
+            </a:r>
+          </a:p>
+          <a:p>
+            <a:pPr>
+              <a:spcAft>
+                <a:spcPts val="0"/>
+              </a:spcAft>
+            </a:pPr>
+            <a:r>
+              <a:rPr sz="1400" b="0">
+                <a:solidFill>
+                  <a:srgbClr val="1F3A5F"/>
+                </a:solidFill>
+                <a:latin typeface="Courier New"/>
+              </a:rPr>
+              <a:t>      Output: 23 − 20 = 3. 3 + 6 = 9. ANSWER: 9</a:t>
             </a:r>
           </a:p>
           <a:p>
@@ -4352,23 +4351,7 @@
                 </a:solidFill>
                 <a:latin typeface="Arial"/>
               </a:rPr>
-              <a:t>●  Mechanism: each token of the solution reads the values already written and advances one operation; the answer token reads the last intermediate value.</a:t>
-            </a:r>
-          </a:p>
-          <a:p>
-            <a:pPr>
-              <a:spcAft>
-                <a:spcPts val="600"/>
-              </a:spcAft>
-            </a:pPr>
-            <a:r>
-              <a:rPr sz="1600" b="0">
-                <a:solidFill>
-                  <a:srgbClr val="444444"/>
-                </a:solidFill>
-                <a:latin typeface="Arial"/>
-              </a:rPr>
-              <a:t>●  Two forms: an instruction (zero-shot CoT) or worked examples (few-shot CoT). Both are text in the prompt; nothing else changes.</a:t>
+              <a:t>●  Property: the instruction elicits a solution but does not specify its granularity or the format of the final line. "Step by step" admits many layouts.</a:t>
             </a:r>
           </a:p>
         </p:txBody>
@@ -4420,7 +4403,7 @@
                 </a:solidFill>
                 <a:latin typeface="Arial"/>
               </a:rPr>
-              <a:t>Form 1 — Instruction (zero-shot CoT)</a:t>
+              <a:t>Form 2 — Worked examples (few-shot CoT)</a:t>
             </a:r>
           </a:p>
         </p:txBody>
@@ -4453,13 +4436,13 @@
               </a:spcAft>
             </a:pPr>
             <a:r>
-              <a:rPr sz="1600" b="0">
+              <a:rPr sz="1500" b="0">
                 <a:solidFill>
                   <a:srgbClr val="444444"/>
                 </a:solidFill>
                 <a:latin typeface="Arial"/>
               </a:rPr>
-              <a:t>●  Procedure: append one instruction after the question.</a:t>
+              <a:t>●  Procedure: prepend question–solution pairs before the question.</a:t>
             </a:r>
           </a:p>
           <a:p>
@@ -4469,13 +4452,13 @@
               </a:spcAft>
             </a:pPr>
             <a:r>
-              <a:rPr sz="1400" b="0">
+              <a:rPr sz="1300" b="0">
                 <a:solidFill>
                   <a:srgbClr val="1F3A5F"/>
                 </a:solidFill>
                 <a:latin typeface="Courier New"/>
               </a:rPr>
-              <a:t>      There are 23 apples. 20 are used and 6 more are bought. How many are there?</a:t>
+              <a:t>      Q: Roger has 5 tennis balls. He buys 2 more cans of 3 balls each. How many balls does he have?</a:t>
             </a:r>
           </a:p>
           <a:p>
@@ -4485,13 +4468,13 @@
               </a:spcAft>
             </a:pPr>
             <a:r>
-              <a:rPr sz="1400" b="0">
+              <a:rPr sz="1300" b="0">
                 <a:solidFill>
                   <a:srgbClr val="1F3A5F"/>
                 </a:solidFill>
                 <a:latin typeface="Courier New"/>
               </a:rPr>
-              <a:t>      Write the solution step by step, then give the answer on the last line as ANSWER: &lt;number&gt;.</a:t>
+              <a:t>      A: He starts with 5 balls. 2 cans of 3 balls is 3 × 2 = 6. 5 + 6 = 11. ANSWER: 11</a:t>
             </a:r>
           </a:p>
           <a:p>
@@ -4501,7 +4484,7 @@
               </a:spcAft>
             </a:pPr>
             <a:r>
-              <a:rPr sz="1400" b="0">
+              <a:rPr sz="1300" b="0">
                 <a:solidFill>
                   <a:srgbClr val="1F3A5F"/>
                 </a:solidFill>
@@ -4517,12 +4500,60 @@
               </a:spcAft>
             </a:pPr>
             <a:r>
-              <a:rPr sz="1400" b="0">
+              <a:rPr sz="1300" b="0">
                 <a:solidFill>
                   <a:srgbClr val="1F3A5F"/>
                 </a:solidFill>
                 <a:latin typeface="Courier New"/>
               </a:rPr>
+              <a:t>      Q: There are 23 apples. 20 are used and 6 more are bought. How many are there?</a:t>
+            </a:r>
+          </a:p>
+          <a:p>
+            <a:pPr>
+              <a:spcAft>
+                <a:spcPts val="0"/>
+              </a:spcAft>
+            </a:pPr>
+            <a:r>
+              <a:rPr sz="1300" b="0">
+                <a:solidFill>
+                  <a:srgbClr val="1F3A5F"/>
+                </a:solidFill>
+                <a:latin typeface="Courier New"/>
+              </a:rPr>
+              <a:t>      A:</a:t>
+            </a:r>
+          </a:p>
+          <a:p>
+            <a:pPr>
+              <a:spcAft>
+                <a:spcPts val="0"/>
+              </a:spcAft>
+            </a:pPr>
+            <a:r>
+              <a:rPr sz="1300" b="0">
+                <a:solidFill>
+                  <a:srgbClr val="1F3A5F"/>
+                </a:solidFill>
+                <a:latin typeface="Courier New"/>
+              </a:rPr>
+              <a:t>      </a:t>
+            </a:r>
+          </a:p>
+          <a:p>
+            <a:pPr>
+              <a:spcAft>
+                <a:spcPts val="0"/>
+              </a:spcAft>
+            </a:pPr>
+            <a:r>
+              <a:rPr sz="1300" b="0">
+                <a:solidFill>
+                  <a:srgbClr val="1F3A5F"/>
+                </a:solidFill>
+                <a:latin typeface="Courier New"/>
+              </a:rPr>
               <a:t>      Output: 23 − 20 = 3. 3 + 6 = 9. ANSWER: 9</a:t>
             </a:r>
           </a:p>
@@ -4533,13 +4564,29 @@
               </a:spcAft>
             </a:pPr>
             <a:r>
-              <a:rPr sz="1600" b="0">
+              <a:rPr sz="1500" b="0">
                 <a:solidFill>
                   <a:srgbClr val="444444"/>
                 </a:solidFill>
                 <a:latin typeface="Arial"/>
               </a:rPr>
-              <a:t>●  Property: the instruction elicits a solution but does not specify its granularity or the format of the final line. "Step by step" admits many layouts.</a:t>
+              <a:t>●  Definition: in-context learning = the property that examples in the prompt determine the output's format and procedure with no weight update.</a:t>
+            </a:r>
+          </a:p>
+          <a:p>
+            <a:pPr>
+              <a:spcAft>
+                <a:spcPts val="600"/>
+              </a:spcAft>
+            </a:pPr>
+            <a:r>
+              <a:rPr sz="1500" b="0">
+                <a:solidFill>
+                  <a:srgbClr val="444444"/>
+                </a:solidFill>
+                <a:latin typeface="Arial"/>
+              </a:rPr>
+              <a:t>●  Property: the example fixes what the instruction leaves open: the step granularity, the wording of each step, and the exact final line.</a:t>
             </a:r>
           </a:p>
         </p:txBody>
@@ -4591,7 +4638,7 @@
                 </a:solidFill>
                 <a:latin typeface="Arial"/>
               </a:rPr>
-              <a:t>Form 2 — Worked examples (few-shot CoT)</a:t>
+              <a:t>Instruction versus example</a:t>
             </a:r>
           </a:p>
         </p:txBody>
@@ -4630,7 +4677,7 @@
                 </a:solidFill>
                 <a:latin typeface="Arial"/>
               </a:rPr>
-              <a:t>●  Procedure: prepend question–solution pairs before the question.</a:t>
+              <a:t>●  Difference: an instruction names the requirement; an example exhibits it. The example therefore pins format and procedure that the instruction underspecifies.</a:t>
             </a:r>
           </a:p>
           <a:p>
@@ -4646,7 +4693,7 @@
                 </a:solidFill>
                 <a:latin typeface="Courier New"/>
               </a:rPr>
-              <a:t>      Q: Roger has 5 tennis balls. He buys 2 more cans of 3 balls each. How many balls does he have?</a:t>
+              <a:t>      Instruction: "Answer with the date."      → "The final date is March 10th, 2026."</a:t>
             </a:r>
           </a:p>
           <a:p>
@@ -4662,87 +4709,7 @@
                 </a:solidFill>
                 <a:latin typeface="Courier New"/>
               </a:rPr>
-              <a:t>      A: He starts with 5 balls. 2 cans of 3 balls is 3 × 2 = 6. 5 + 6 = 11. ANSWER: 11</a:t>
-            </a:r>
-          </a:p>
-          <a:p>
-            <a:pPr>
-              <a:spcAft>
-                <a:spcPts val="0"/>
-              </a:spcAft>
-            </a:pPr>
-            <a:r>
-              <a:rPr sz="1300" b="0">
-                <a:solidFill>
-                  <a:srgbClr val="1F3A5F"/>
-                </a:solidFill>
-                <a:latin typeface="Courier New"/>
-              </a:rPr>
-              <a:t>      </a:t>
-            </a:r>
-          </a:p>
-          <a:p>
-            <a:pPr>
-              <a:spcAft>
-                <a:spcPts val="0"/>
-              </a:spcAft>
-            </a:pPr>
-            <a:r>
-              <a:rPr sz="1300" b="0">
-                <a:solidFill>
-                  <a:srgbClr val="1F3A5F"/>
-                </a:solidFill>
-                <a:latin typeface="Courier New"/>
-              </a:rPr>
-              <a:t>      Q: There are 23 apples. 20 are used and 6 more are bought. How many are there?</a:t>
-            </a:r>
-          </a:p>
-          <a:p>
-            <a:pPr>
-              <a:spcAft>
-                <a:spcPts val="0"/>
-              </a:spcAft>
-            </a:pPr>
-            <a:r>
-              <a:rPr sz="1300" b="0">
-                <a:solidFill>
-                  <a:srgbClr val="1F3A5F"/>
-                </a:solidFill>
-                <a:latin typeface="Courier New"/>
-              </a:rPr>
-              <a:t>      A:</a:t>
-            </a:r>
-          </a:p>
-          <a:p>
-            <a:pPr>
-              <a:spcAft>
-                <a:spcPts val="0"/>
-              </a:spcAft>
-            </a:pPr>
-            <a:r>
-              <a:rPr sz="1300" b="0">
-                <a:solidFill>
-                  <a:srgbClr val="1F3A5F"/>
-                </a:solidFill>
-                <a:latin typeface="Courier New"/>
-              </a:rPr>
-              <a:t>      </a:t>
-            </a:r>
-          </a:p>
-          <a:p>
-            <a:pPr>
-              <a:spcAft>
-                <a:spcPts val="0"/>
-              </a:spcAft>
-            </a:pPr>
-            <a:r>
-              <a:rPr sz="1300" b="0">
-                <a:solidFill>
-                  <a:srgbClr val="1F3A5F"/>
-                </a:solidFill>
-                <a:latin typeface="Courier New"/>
-              </a:rPr>
-              <a:t>      Output: 23 − 20 = 3. 3 + 6 = 9. ANSWER: 9</a:t>
+              <a:t>      Example:    "Note: … / DATE: 2026-06-09"  → "DATE: 2026-03-10"</a:t>
             </a:r>
           </a:p>
           <a:p>
@@ -4758,7 +4725,7 @@
                 </a:solidFill>
                 <a:latin typeface="Arial"/>
               </a:rPr>
-              <a:t>●  Definition: in-context learning = the property that examples in the prompt determine the output's format and procedure with no weight update.</a:t>
+              <a:t>●  Emergence: the CoT effect appears only above a model-scale threshold; in small models it is absent or harmful.</a:t>
             </a:r>
           </a:p>
           <a:p>
@@ -4774,7 +4741,7 @@
                 </a:solidFill>
                 <a:latin typeface="Arial"/>
               </a:rPr>
-              <a:t>●  Property: the example fixes what the instruction leaves open: the step granularity, the wording of each step, and the exact final line.</a:t>
+              <a:t>●  Bound: writing the solution moves the per-prediction bound outward, it does not remove it. Each written step is itself one prediction. With three-digit factors in the same six problems, the written solution scores 1 of 6.</a:t>
             </a:r>
           </a:p>
         </p:txBody>
@@ -4805,8 +4772,8 @@
         </p:nvSpPr>
         <p:spPr>
           <a:xfrm>
-            <a:off x="384048" y="256032"/>
-            <a:ext cx="8375904" cy="640080"/>
+            <a:off x="548640" y="1828800"/>
+            <a:ext cx="8046720" cy="1463040"/>
           </a:xfrm>
           <a:prstGeom prst="rect">
             <a:avLst/>
@@ -4814,122 +4781,20 @@
           <a:noFill/>
         </p:spPr>
         <p:txBody>
-          <a:bodyPr wrap="square">
+          <a:bodyPr wrap="square" anchor="ctr">
             <a:spAutoFit/>
           </a:bodyPr>
           <a:lstStyle/>
           <a:p>
-            <a:r>
-              <a:rPr sz="2400" b="0">
+            <a:pPr algn="ctr"/>
+            <a:r>
+              <a:rPr sz="3600" b="0">
                 <a:solidFill>
                   <a:srgbClr val="000000"/>
                 </a:solidFill>
                 <a:latin typeface="Arial"/>
               </a:rPr>
-              <a:t>Instruction versus example</a:t>
-            </a:r>
-          </a:p>
-        </p:txBody>
-      </p:sp>
-      <p:sp>
-        <p:nvSpPr>
-          <p:cNvPr id="3" name="TextBox 2"/>
-          <p:cNvSpPr txBox="1"/>
-          <p:nvPr/>
-        </p:nvSpPr>
-        <p:spPr>
-          <a:xfrm>
-            <a:off x="502920" y="987552"/>
-            <a:ext cx="8229600" cy="3931920"/>
-          </a:xfrm>
-          <a:prstGeom prst="rect">
-            <a:avLst/>
-          </a:prstGeom>
-          <a:noFill/>
-        </p:spPr>
-        <p:txBody>
-          <a:bodyPr wrap="square">
-            <a:spAutoFit/>
-          </a:bodyPr>
-          <a:lstStyle/>
-          <a:p>
-            <a:pPr>
-              <a:spcAft>
-                <a:spcPts val="600"/>
-              </a:spcAft>
-            </a:pPr>
-            <a:r>
-              <a:rPr sz="1500" b="0">
-                <a:solidFill>
-                  <a:srgbClr val="444444"/>
-                </a:solidFill>
-                <a:latin typeface="Arial"/>
-              </a:rPr>
-              <a:t>●  Difference: an instruction names the requirement; an example exhibits it. The example therefore pins format and procedure that the instruction underspecifies.</a:t>
-            </a:r>
-          </a:p>
-          <a:p>
-            <a:pPr>
-              <a:spcAft>
-                <a:spcPts val="0"/>
-              </a:spcAft>
-            </a:pPr>
-            <a:r>
-              <a:rPr sz="1300" b="0">
-                <a:solidFill>
-                  <a:srgbClr val="1F3A5F"/>
-                </a:solidFill>
-                <a:latin typeface="Courier New"/>
-              </a:rPr>
-              <a:t>      Instruction: "Answer with the date."      → "The final date is March 10th, 2026."</a:t>
-            </a:r>
-          </a:p>
-          <a:p>
-            <a:pPr>
-              <a:spcAft>
-                <a:spcPts val="0"/>
-              </a:spcAft>
-            </a:pPr>
-            <a:r>
-              <a:rPr sz="1300" b="0">
-                <a:solidFill>
-                  <a:srgbClr val="1F3A5F"/>
-                </a:solidFill>
-                <a:latin typeface="Courier New"/>
-              </a:rPr>
-              <a:t>      Example:    "Note: … / DATE: 2026-06-09"  → "DATE: 2026-03-10"</a:t>
-            </a:r>
-          </a:p>
-          <a:p>
-            <a:pPr>
-              <a:spcAft>
-                <a:spcPts val="600"/>
-              </a:spcAft>
-            </a:pPr>
-            <a:r>
-              <a:rPr sz="1500" b="0">
-                <a:solidFill>
-                  <a:srgbClr val="444444"/>
-                </a:solidFill>
-                <a:latin typeface="Arial"/>
-              </a:rPr>
-              <a:t>●  Emergence: the CoT effect appears only above a model-scale threshold; in small models it is absent or harmful.</a:t>
-            </a:r>
-          </a:p>
-          <a:p>
-            <a:pPr>
-              <a:spcAft>
-                <a:spcPts val="600"/>
-              </a:spcAft>
-            </a:pPr>
-            <a:r>
-              <a:rPr sz="1500" b="0">
-                <a:solidFill>
-                  <a:srgbClr val="444444"/>
-                </a:solidFill>
-                <a:latin typeface="Arial"/>
-              </a:rPr>
-              <a:t>●  Bound: writing the solution moves the per-prediction bound outward, it does not remove it. Each written step is itself one prediction. With three-digit factors in the same six problems, the written solution scores 1 of 6.</a:t>
+              <a:t>The Limit of Chain-of-Thought</a:t>
             </a:r>
           </a:p>
         </p:txBody>
@@ -4960,8 +4825,8 @@
         </p:nvSpPr>
         <p:spPr>
           <a:xfrm>
-            <a:off x="548640" y="1828800"/>
-            <a:ext cx="8046720" cy="1463040"/>
+            <a:off x="384048" y="256032"/>
+            <a:ext cx="8375904" cy="640080"/>
           </a:xfrm>
           <a:prstGeom prst="rect">
             <a:avLst/>
@@ -4969,20 +4834,122 @@
           <a:noFill/>
         </p:spPr>
         <p:txBody>
-          <a:bodyPr wrap="square" anchor="ctr">
+          <a:bodyPr wrap="square">
             <a:spAutoFit/>
           </a:bodyPr>
           <a:lstStyle/>
           <a:p>
-            <a:pPr algn="ctr"/>
-            <a:r>
-              <a:rPr sz="3600" b="0">
+            <a:r>
+              <a:rPr sz="2400" b="0">
                 <a:solidFill>
                   <a:srgbClr val="000000"/>
                 </a:solidFill>
                 <a:latin typeface="Arial"/>
               </a:rPr>
-              <a:t>The Limit of Chain-of-Thought</a:t>
+              <a:t>Hallucination: coherent reasoning on a false premise</a:t>
+            </a:r>
+          </a:p>
+        </p:txBody>
+      </p:sp>
+      <p:sp>
+        <p:nvSpPr>
+          <p:cNvPr id="3" name="TextBox 2"/>
+          <p:cNvSpPr txBox="1"/>
+          <p:nvPr/>
+        </p:nvSpPr>
+        <p:spPr>
+          <a:xfrm>
+            <a:off x="502920" y="987552"/>
+            <a:ext cx="8229600" cy="3931920"/>
+          </a:xfrm>
+          <a:prstGeom prst="rect">
+            <a:avLst/>
+          </a:prstGeom>
+          <a:noFill/>
+        </p:spPr>
+        <p:txBody>
+          <a:bodyPr wrap="square">
+            <a:spAutoFit/>
+          </a:bodyPr>
+          <a:lstStyle/>
+          <a:p>
+            <a:pPr>
+              <a:spcAft>
+                <a:spcPts val="600"/>
+              </a:spcAft>
+            </a:pPr>
+            <a:r>
+              <a:rPr sz="1500" b="0">
+                <a:solidFill>
+                  <a:srgbClr val="444444"/>
+                </a:solidFill>
+                <a:latin typeface="Arial"/>
+              </a:rPr>
+              <a:t>●  Definition: hallucination = generation of content that is plausible but not factual.</a:t>
+            </a:r>
+          </a:p>
+          <a:p>
+            <a:pPr>
+              <a:spcAft>
+                <a:spcPts val="600"/>
+              </a:spcAft>
+            </a:pPr>
+            <a:r>
+              <a:rPr sz="1500" b="0">
+                <a:solidFill>
+                  <a:srgbClr val="444444"/>
+                </a:solidFill>
+                <a:latin typeface="Arial"/>
+              </a:rPr>
+              <a:t>●  Mechanism: prediction does not stop when a required fact is absent, exactly as it does not stop when a computation is unfinished. The most probable continuation is emitted, and it has the form of an answer.</a:t>
+            </a:r>
+          </a:p>
+          <a:p>
+            <a:pPr>
+              <a:spcAft>
+                <a:spcPts val="600"/>
+              </a:spcAft>
+            </a:pPr>
+            <a:r>
+              <a:rPr sz="1500" b="0">
+                <a:solidFill>
+                  <a:srgbClr val="444444"/>
+                </a:solidFill>
+                <a:latin typeface="Arial"/>
+              </a:rPr>
+              <a:t>●  Question: "Aside from the Apple Remote, what other device can control the program the Apple Remote was originally designed to interact with?"</a:t>
+            </a:r>
+          </a:p>
+          <a:p>
+            <a:pPr>
+              <a:spcAft>
+                <a:spcPts val="0"/>
+              </a:spcAft>
+            </a:pPr>
+            <a:r>
+              <a:rPr sz="1300" b="0">
+                <a:solidFill>
+                  <a:srgbClr val="1F3A5F"/>
+                </a:solidFill>
+                <a:latin typeface="Courier New"/>
+              </a:rPr>
+              <a:t>      CoT output: The Apple Remote was originally designed to interact with Apple TV. Apple TV can be controlled by iPhone, iPad, and iPod Touch. So the answer is iPhone, iPad, and iPod Touch.</a:t>
+            </a:r>
+          </a:p>
+          <a:p>
+            <a:pPr>
+              <a:spcAft>
+                <a:spcPts val="600"/>
+              </a:spcAft>
+            </a:pPr>
+            <a:r>
+              <a:rPr sz="1500" b="0">
+                <a:solidFill>
+                  <a:srgbClr val="444444"/>
+                </a:solidFill>
+                <a:latin typeface="Arial"/>
+              </a:rPr>
+              <a:t>●  Error: the first premise is false. The program was Front Row; the correct answer is keyboard function keys. Every step after the premise is valid.</a:t>
             </a:r>
           </a:p>
         </p:txBody>
@@ -5034,7 +5001,7 @@
                 </a:solidFill>
                 <a:latin typeface="Arial"/>
               </a:rPr>
-              <a:t>Coherent reasoning on a false premise</a:t>
+              <a:t>Why prompting cannot repair it</a:t>
             </a:r>
           </a:p>
         </p:txBody>
@@ -5067,13 +5034,29 @@
               </a:spcAft>
             </a:pPr>
             <a:r>
-              <a:rPr sz="1600" b="0">
+              <a:rPr sz="1500" b="0">
                 <a:solidFill>
                   <a:srgbClr val="444444"/>
                 </a:solidFill>
                 <a:latin typeface="Arial"/>
               </a:rPr>
-              <a:t>●  Question: "Aside from the Apple Remote, what other device can control the program the Apple Remote was originally designed to interact with?"</a:t>
+              <a:t>●  Cause: CoT draws only on knowledge stored in the parameters. No prompt gives the model access to an external fact.</a:t>
+            </a:r>
+          </a:p>
+          <a:p>
+            <a:pPr>
+              <a:spcAft>
+                <a:spcPts val="600"/>
+              </a:spcAft>
+            </a:pPr>
+            <a:r>
+              <a:rPr sz="1500" b="0">
+                <a:solidFill>
+                  <a:srgbClr val="444444"/>
+                </a:solidFill>
+                <a:latin typeface="Arial"/>
+              </a:rPr>
+              <a:t>●  Test: adding "Verify each step before continuing" produces a more elaborate chain on the same false premise.</a:t>
             </a:r>
           </a:p>
           <a:p>
@@ -5083,13 +5066,29 @@
               </a:spcAft>
             </a:pPr>
             <a:r>
-              <a:rPr sz="1400" b="0">
+              <a:rPr sz="1300" b="0">
                 <a:solidFill>
                   <a:srgbClr val="1F3A5F"/>
                 </a:solidFill>
                 <a:latin typeface="Courier New"/>
               </a:rPr>
-              <a:t>      CoT output: The Apple Remote was originally designed to interact with Apple TV. Apple TV can be controlled by iPhone, iPad, and iPod Touch. So the answer is iPhone, iPad, and iPod Touch.</a:t>
+              <a:t>      Prompt: &lt;question&gt; Verify each step before continuing.</a:t>
+            </a:r>
+          </a:p>
+          <a:p>
+            <a:pPr>
+              <a:spcAft>
+                <a:spcPts val="0"/>
+              </a:spcAft>
+            </a:pPr>
+            <a:r>
+              <a:rPr sz="1300" b="0">
+                <a:solidFill>
+                  <a:srgbClr val="1F3A5F"/>
+                </a:solidFill>
+                <a:latin typeface="Courier New"/>
+              </a:rPr>
+              <a:t>      Output: Step 1: The Apple Remote was designed for Apple TV. Verified. Step 2: …</a:t>
             </a:r>
           </a:p>
           <a:p>
@@ -5099,13 +5098,13 @@
               </a:spcAft>
             </a:pPr>
             <a:r>
-              <a:rPr sz="1600" b="0">
+              <a:rPr sz="1500" b="0">
                 <a:solidFill>
                   <a:srgbClr val="444444"/>
                 </a:solidFill>
                 <a:latin typeface="Arial"/>
               </a:rPr>
-              <a:t>●  Error: the first premise is false. The program was Front Row; the correct answer is keyboard function keys.</a:t>
+              <a:t>●  Repair: a step that checks facts against an external source, that is, a tool call (for this question, a search) inserted between the premise and the next step.</a:t>
             </a:r>
           </a:p>
           <a:p>
@@ -5115,13 +5114,13 @@
               </a:spcAft>
             </a:pPr>
             <a:r>
-              <a:rPr sz="1600" b="0">
+              <a:rPr sz="1500" b="0">
                 <a:solidFill>
                   <a:srgbClr val="444444"/>
                 </a:solidFill>
                 <a:latin typeface="Arial"/>
               </a:rPr>
-              <a:t>●  Diagnosis: the reasoning is not grounded in external information, so a hallucinated premise propagates through a valid chain.</a:t>
+              <a:t>●  Remaining direction: CoT adds predictions within one response. Predictions can also be added by generating the response more than once.</a:t>
             </a:r>
           </a:p>
         </p:txBody>
@@ -5217,8 +5216,8 @@
         </p:nvSpPr>
         <p:spPr>
           <a:xfrm>
-            <a:off x="384048" y="256032"/>
-            <a:ext cx="8375904" cy="640080"/>
+            <a:off x="548640" y="1828800"/>
+            <a:ext cx="8046720" cy="1463040"/>
           </a:xfrm>
           <a:prstGeom prst="rect">
             <a:avLst/>
@@ -5226,138 +5225,20 @@
           <a:noFill/>
         </p:spPr>
         <p:txBody>
-          <a:bodyPr wrap="square">
+          <a:bodyPr wrap="square" anchor="ctr">
             <a:spAutoFit/>
           </a:bodyPr>
           <a:lstStyle/>
           <a:p>
-            <a:r>
-              <a:rPr sz="2400" b="0">
+            <a:pPr algn="ctr"/>
+            <a:r>
+              <a:rPr sz="3600" b="0">
                 <a:solidFill>
                   <a:srgbClr val="000000"/>
                 </a:solidFill>
                 <a:latin typeface="Arial"/>
               </a:rPr>
-              <a:t>Why prompting cannot repair it</a:t>
-            </a:r>
-          </a:p>
-        </p:txBody>
-      </p:sp>
-      <p:sp>
-        <p:nvSpPr>
-          <p:cNvPr id="3" name="TextBox 2"/>
-          <p:cNvSpPr txBox="1"/>
-          <p:nvPr/>
-        </p:nvSpPr>
-        <p:spPr>
-          <a:xfrm>
-            <a:off x="502920" y="987552"/>
-            <a:ext cx="8229600" cy="3931920"/>
-          </a:xfrm>
-          <a:prstGeom prst="rect">
-            <a:avLst/>
-          </a:prstGeom>
-          <a:noFill/>
-        </p:spPr>
-        <p:txBody>
-          <a:bodyPr wrap="square">
-            <a:spAutoFit/>
-          </a:bodyPr>
-          <a:lstStyle/>
-          <a:p>
-            <a:pPr>
-              <a:spcAft>
-                <a:spcPts val="600"/>
-              </a:spcAft>
-            </a:pPr>
-            <a:r>
-              <a:rPr sz="1500" b="0">
-                <a:solidFill>
-                  <a:srgbClr val="444444"/>
-                </a:solidFill>
-                <a:latin typeface="Arial"/>
-              </a:rPr>
-              <a:t>●  Cause: CoT draws only on knowledge stored in the parameters. No prompt gives the model access to an external fact.</a:t>
-            </a:r>
-          </a:p>
-          <a:p>
-            <a:pPr>
-              <a:spcAft>
-                <a:spcPts val="600"/>
-              </a:spcAft>
-            </a:pPr>
-            <a:r>
-              <a:rPr sz="1500" b="0">
-                <a:solidFill>
-                  <a:srgbClr val="444444"/>
-                </a:solidFill>
-                <a:latin typeface="Arial"/>
-              </a:rPr>
-              <a:t>●  Test: adding "Verify each step before continuing" produces a more elaborate chain on the same false premise.</a:t>
-            </a:r>
-          </a:p>
-          <a:p>
-            <a:pPr>
-              <a:spcAft>
-                <a:spcPts val="0"/>
-              </a:spcAft>
-            </a:pPr>
-            <a:r>
-              <a:rPr sz="1300" b="0">
-                <a:solidFill>
-                  <a:srgbClr val="1F3A5F"/>
-                </a:solidFill>
-                <a:latin typeface="Courier New"/>
-              </a:rPr>
-              <a:t>      Prompt: &lt;question&gt; Verify each step before continuing.</a:t>
-            </a:r>
-          </a:p>
-          <a:p>
-            <a:pPr>
-              <a:spcAft>
-                <a:spcPts val="0"/>
-              </a:spcAft>
-            </a:pPr>
-            <a:r>
-              <a:rPr sz="1300" b="0">
-                <a:solidFill>
-                  <a:srgbClr val="1F3A5F"/>
-                </a:solidFill>
-                <a:latin typeface="Courier New"/>
-              </a:rPr>
-              <a:t>      Output: Step 1: The Apple Remote was designed for Apple TV. Verified. Step 2: …</a:t>
-            </a:r>
-          </a:p>
-          <a:p>
-            <a:pPr>
-              <a:spcAft>
-                <a:spcPts val="600"/>
-              </a:spcAft>
-            </a:pPr>
-            <a:r>
-              <a:rPr sz="1500" b="0">
-                <a:solidFill>
-                  <a:srgbClr val="444444"/>
-                </a:solidFill>
-                <a:latin typeface="Arial"/>
-              </a:rPr>
-              <a:t>●  Repair: a step that checks facts against an external source, that is, a tool call (for this question, a search) inserted between the premise and the next step.</a:t>
-            </a:r>
-          </a:p>
-          <a:p>
-            <a:pPr>
-              <a:spcAft>
-                <a:spcPts val="600"/>
-              </a:spcAft>
-            </a:pPr>
-            <a:r>
-              <a:rPr sz="1500" b="0">
-                <a:solidFill>
-                  <a:srgbClr val="444444"/>
-                </a:solidFill>
-                <a:latin typeface="Arial"/>
-              </a:rPr>
-              <a:t>●  Remaining direction: CoT adds predictions within one response. Predictions can also be added by generating the response more than once.</a:t>
+              <a:t>Self-Consistency</a:t>
             </a:r>
           </a:p>
         </p:txBody>
@@ -5388,8 +5269,8 @@
         </p:nvSpPr>
         <p:spPr>
           <a:xfrm>
-            <a:off x="548640" y="1828800"/>
-            <a:ext cx="8046720" cy="1463040"/>
+            <a:off x="384048" y="256032"/>
+            <a:ext cx="8375904" cy="640080"/>
           </a:xfrm>
           <a:prstGeom prst="rect">
             <a:avLst/>
@@ -5397,20 +5278,106 @@
           <a:noFill/>
         </p:spPr>
         <p:txBody>
-          <a:bodyPr wrap="square" anchor="ctr">
+          <a:bodyPr wrap="square">
             <a:spAutoFit/>
           </a:bodyPr>
           <a:lstStyle/>
           <a:p>
-            <a:pPr algn="ctr"/>
-            <a:r>
-              <a:rPr sz="3600" b="0">
+            <a:r>
+              <a:rPr sz="2400" b="0">
                 <a:solidFill>
                   <a:srgbClr val="000000"/>
                 </a:solidFill>
                 <a:latin typeface="Arial"/>
               </a:rPr>
-              <a:t>Self-Consistency</a:t>
+              <a:t>One response as one sample</a:t>
+            </a:r>
+          </a:p>
+        </p:txBody>
+      </p:sp>
+      <p:sp>
+        <p:nvSpPr>
+          <p:cNvPr id="3" name="TextBox 2"/>
+          <p:cNvSpPr txBox="1"/>
+          <p:nvPr/>
+        </p:nvSpPr>
+        <p:spPr>
+          <a:xfrm>
+            <a:off x="502920" y="987552"/>
+            <a:ext cx="8229600" cy="3931920"/>
+          </a:xfrm>
+          <a:prstGeom prst="rect">
+            <a:avLst/>
+          </a:prstGeom>
+          <a:noFill/>
+        </p:spPr>
+        <p:txBody>
+          <a:bodyPr wrap="square">
+            <a:spAutoFit/>
+          </a:bodyPr>
+          <a:lstStyle/>
+          <a:p>
+            <a:pPr>
+              <a:spcAft>
+                <a:spcPts val="600"/>
+              </a:spcAft>
+            </a:pPr>
+            <a:r>
+              <a:rPr sz="1600" b="0">
+                <a:solidFill>
+                  <a:srgbClr val="444444"/>
+                </a:solidFill>
+                <a:latin typeface="Arial"/>
+              </a:rPr>
+              <a:t>●  Sampling: an LLM draws each token from a probability distribution. Temperature = the parameter controlling the randomness of that draw; at temperature 0 the most probable token is taken.</a:t>
+            </a:r>
+          </a:p>
+          <a:p>
+            <a:pPr>
+              <a:spcAft>
+                <a:spcPts val="600"/>
+              </a:spcAft>
+            </a:pPr>
+            <a:r>
+              <a:rPr sz="1600" b="0">
+                <a:solidFill>
+                  <a:srgbClr val="444444"/>
+                </a:solidFill>
+                <a:latin typeface="Arial"/>
+              </a:rPr>
+              <a:t>●  Consequence: at temperature &gt; 0, repeated runs of the same prompt follow different solution paths and may reach different answers.</a:t>
+            </a:r>
+          </a:p>
+          <a:p>
+            <a:pPr>
+              <a:spcAft>
+                <a:spcPts val="600"/>
+              </a:spcAft>
+            </a:pPr>
+            <a:r>
+              <a:rPr sz="1600" b="0">
+                <a:solidFill>
+                  <a:srgbClr val="444444"/>
+                </a:solidFill>
+                <a:latin typeface="Arial"/>
+              </a:rPr>
+              <a:t>●  Interpretation: one response is one sample from the set of possible reasoning paths. A wrong sample does not imply that the next sample is wrong.</a:t>
+            </a:r>
+          </a:p>
+          <a:p>
+            <a:pPr>
+              <a:spcAft>
+                <a:spcPts val="0"/>
+              </a:spcAft>
+            </a:pPr>
+            <a:r>
+              <a:rPr sz="1400" b="0">
+                <a:solidFill>
+                  <a:srgbClr val="1F3A5F"/>
+                </a:solidFill>
+                <a:latin typeface="Courier New"/>
+              </a:rPr>
+              <a:t>      Same CoT prompt, temperature 1.0, five runs → final answers: 9, 27, 9, 8, 9</a:t>
             </a:r>
           </a:p>
         </p:txBody>
@@ -5462,7 +5429,7 @@
                 </a:solidFill>
                 <a:latin typeface="Arial"/>
               </a:rPr>
-              <a:t>One response as one sample</a:t>
+              <a:t>Majority voting — Self-Consistency</a:t>
             </a:r>
           </a:p>
         </p:txBody>
@@ -5501,7 +5468,7 @@
                 </a:solidFill>
                 <a:latin typeface="Arial"/>
               </a:rPr>
-              <a:t>●  Sampling: an LLM draws each token from a probability distribution. Temperature = the parameter controlling the randomness of that draw; at temperature 0 the most probable token is taken.</a:t>
+              <a:t>●  Definition: self-consistency = sample N solutions at temperature &gt; 0, extract the final answer of each, and return the majority answer.</a:t>
             </a:r>
           </a:p>
           <a:p>
@@ -5517,7 +5484,7 @@
                 </a:solidFill>
                 <a:latin typeface="Arial"/>
               </a:rPr>
-              <a:t>●  Consequence: at temperature &gt; 0, repeated runs of the same prompt follow different solution paths and may reach different answers.</a:t>
+              <a:t>●  Justification: P(a | q) = Σ_r P(a | r, q) P(r | q). A single response evaluates one term (one path r). The vote over samples estimates the sum over paths.</a:t>
             </a:r>
           </a:p>
           <a:p>
@@ -5533,23 +5500,7 @@
                 </a:solidFill>
                 <a:latin typeface="Arial"/>
               </a:rPr>
-              <a:t>●  Interpretation: one response is one sample from the set of possible reasoning paths. A wrong sample does not imply that the next sample is wrong.</a:t>
-            </a:r>
-          </a:p>
-          <a:p>
-            <a:pPr>
-              <a:spcAft>
-                <a:spcPts val="0"/>
-              </a:spcAft>
-            </a:pPr>
-            <a:r>
-              <a:rPr sz="1400" b="0">
-                <a:solidFill>
-                  <a:srgbClr val="1F3A5F"/>
-                </a:solidFill>
-                <a:latin typeface="Courier New"/>
-              </a:rPr>
-              <a:t>      Same CoT prompt, temperature 1.0, five runs → final answers: 9, 27, 9, 8, 9</a:t>
+              <a:t>●  Empirical pattern: correct answers are reached by different paths that converge on one value; wrong answers scatter across distinct values.</a:t>
             </a:r>
           </a:p>
         </p:txBody>
@@ -5563,129 +5514,6 @@
 </file>
 
 <file path=ppt/slides/slide23.xml><?xml version="1.0" encoding="utf-8"?>
-<p:sld xmlns:a="http://schemas.openxmlformats.org/drawingml/2006/main" xmlns:p="http://schemas.openxmlformats.org/presentationml/2006/main" xmlns:r="http://schemas.openxmlformats.org/officeDocument/2006/relationships">
-  <p:cSld>
-    <p:spTree>
-      <p:nvGrpSpPr>
-        <p:cNvPr id="1" name=""/>
-        <p:cNvGrpSpPr/>
-        <p:nvPr/>
-      </p:nvGrpSpPr>
-      <p:grpSpPr/>
-      <p:sp>
-        <p:nvSpPr>
-          <p:cNvPr id="2" name="TextBox 1"/>
-          <p:cNvSpPr txBox="1"/>
-          <p:nvPr/>
-        </p:nvSpPr>
-        <p:spPr>
-          <a:xfrm>
-            <a:off x="384048" y="256032"/>
-            <a:ext cx="8375904" cy="640080"/>
-          </a:xfrm>
-          <a:prstGeom prst="rect">
-            <a:avLst/>
-          </a:prstGeom>
-          <a:noFill/>
-        </p:spPr>
-        <p:txBody>
-          <a:bodyPr wrap="square">
-            <a:spAutoFit/>
-          </a:bodyPr>
-          <a:lstStyle/>
-          <a:p>
-            <a:r>
-              <a:rPr sz="2400" b="0">
-                <a:solidFill>
-                  <a:srgbClr val="000000"/>
-                </a:solidFill>
-                <a:latin typeface="Arial"/>
-              </a:rPr>
-              <a:t>Majority voting — Self-Consistency</a:t>
-            </a:r>
-          </a:p>
-        </p:txBody>
-      </p:sp>
-      <p:sp>
-        <p:nvSpPr>
-          <p:cNvPr id="3" name="TextBox 2"/>
-          <p:cNvSpPr txBox="1"/>
-          <p:nvPr/>
-        </p:nvSpPr>
-        <p:spPr>
-          <a:xfrm>
-            <a:off x="502920" y="987552"/>
-            <a:ext cx="8229600" cy="3931920"/>
-          </a:xfrm>
-          <a:prstGeom prst="rect">
-            <a:avLst/>
-          </a:prstGeom>
-          <a:noFill/>
-        </p:spPr>
-        <p:txBody>
-          <a:bodyPr wrap="square">
-            <a:spAutoFit/>
-          </a:bodyPr>
-          <a:lstStyle/>
-          <a:p>
-            <a:pPr>
-              <a:spcAft>
-                <a:spcPts val="600"/>
-              </a:spcAft>
-            </a:pPr>
-            <a:r>
-              <a:rPr sz="1600" b="0">
-                <a:solidFill>
-                  <a:srgbClr val="444444"/>
-                </a:solidFill>
-                <a:latin typeface="Arial"/>
-              </a:rPr>
-              <a:t>●  Definition: self-consistency = sample N solutions at temperature &gt; 0, extract the final answer of each, and return the majority answer.</a:t>
-            </a:r>
-          </a:p>
-          <a:p>
-            <a:pPr>
-              <a:spcAft>
-                <a:spcPts val="600"/>
-              </a:spcAft>
-            </a:pPr>
-            <a:r>
-              <a:rPr sz="1600" b="0">
-                <a:solidFill>
-                  <a:srgbClr val="444444"/>
-                </a:solidFill>
-                <a:latin typeface="Arial"/>
-              </a:rPr>
-              <a:t>●  Justification: P(a | q) = Σ_r P(a | r, q) P(r | q). A single response evaluates one term (one path r). The vote over samples estimates the sum over paths.</a:t>
-            </a:r>
-          </a:p>
-          <a:p>
-            <a:pPr>
-              <a:spcAft>
-                <a:spcPts val="600"/>
-              </a:spcAft>
-            </a:pPr>
-            <a:r>
-              <a:rPr sz="1600" b="0">
-                <a:solidFill>
-                  <a:srgbClr val="444444"/>
-                </a:solidFill>
-                <a:latin typeface="Arial"/>
-              </a:rPr>
-              <a:t>●  Empirical pattern: correct answers are reached by different paths that converge on one value; wrong answers scatter across distinct values.</a:t>
-            </a:r>
-          </a:p>
-        </p:txBody>
-      </p:sp>
-    </p:spTree>
-  </p:cSld>
-  <p:clrMapOvr>
-    <a:masterClrMapping/>
-  </p:clrMapOvr>
-</p:sld>
-</file>
-
-<file path=ppt/slides/slide24.xml><?xml version="1.0" encoding="utf-8"?>
 <p:sld xmlns:a="http://schemas.openxmlformats.org/drawingml/2006/main" xmlns:p="http://schemas.openxmlformats.org/presentationml/2006/main" xmlns:r="http://schemas.openxmlformats.org/officeDocument/2006/relationships">
   <p:cSld>
     <p:spTree>
@@ -5800,6 +5628,129 @@
 </p:sld>
 </file>
 
+<file path=ppt/slides/slide24.xml><?xml version="1.0" encoding="utf-8"?>
+<p:sld xmlns:a="http://schemas.openxmlformats.org/drawingml/2006/main" xmlns:p="http://schemas.openxmlformats.org/presentationml/2006/main" xmlns:r="http://schemas.openxmlformats.org/officeDocument/2006/relationships">
+  <p:cSld>
+    <p:spTree>
+      <p:nvGrpSpPr>
+        <p:cNvPr id="1" name=""/>
+        <p:cNvGrpSpPr/>
+        <p:nvPr/>
+      </p:nvGrpSpPr>
+      <p:grpSpPr/>
+      <p:sp>
+        <p:nvSpPr>
+          <p:cNvPr id="2" name="TextBox 1"/>
+          <p:cNvSpPr txBox="1"/>
+          <p:nvPr/>
+        </p:nvSpPr>
+        <p:spPr>
+          <a:xfrm>
+            <a:off x="384048" y="256032"/>
+            <a:ext cx="8375904" cy="640080"/>
+          </a:xfrm>
+          <a:prstGeom prst="rect">
+            <a:avLst/>
+          </a:prstGeom>
+          <a:noFill/>
+        </p:spPr>
+        <p:txBody>
+          <a:bodyPr wrap="square">
+            <a:spAutoFit/>
+          </a:bodyPr>
+          <a:lstStyle/>
+          <a:p>
+            <a:r>
+              <a:rPr sz="2400" b="0">
+                <a:solidFill>
+                  <a:srgbClr val="000000"/>
+                </a:solidFill>
+                <a:latin typeface="Arial"/>
+              </a:rPr>
+              <a:t>Precondition of the vote</a:t>
+            </a:r>
+          </a:p>
+        </p:txBody>
+      </p:sp>
+      <p:sp>
+        <p:nvSpPr>
+          <p:cNvPr id="3" name="TextBox 2"/>
+          <p:cNvSpPr txBox="1"/>
+          <p:nvPr/>
+        </p:nvSpPr>
+        <p:spPr>
+          <a:xfrm>
+            <a:off x="502920" y="987552"/>
+            <a:ext cx="8229600" cy="3931920"/>
+          </a:xfrm>
+          <a:prstGeom prst="rect">
+            <a:avLst/>
+          </a:prstGeom>
+          <a:noFill/>
+        </p:spPr>
+        <p:txBody>
+          <a:bodyPr wrap="square">
+            <a:spAutoFit/>
+          </a:bodyPr>
+          <a:lstStyle/>
+          <a:p>
+            <a:pPr>
+              <a:spcAft>
+                <a:spcPts val="600"/>
+              </a:spcAft>
+            </a:pPr>
+            <a:r>
+              <a:rPr sz="1600" b="0">
+                <a:solidFill>
+                  <a:srgbClr val="444444"/>
+                </a:solidFill>
+                <a:latin typeface="Arial"/>
+              </a:rPr>
+              <a:t>●  Requirement: the final answer must be discrete and extractable (a number, a choice, a short string) so that equal answers can be counted.</a:t>
+            </a:r>
+          </a:p>
+          <a:p>
+            <a:pPr>
+              <a:spcAft>
+                <a:spcPts val="600"/>
+              </a:spcAft>
+            </a:pPr>
+            <a:r>
+              <a:rPr sz="1600" b="0">
+                <a:solidFill>
+                  <a:srgbClr val="444444"/>
+                </a:solidFill>
+                <a:latin typeface="Arial"/>
+              </a:rPr>
+              <a:t>●  Failure case: free-form text. Two 200-word abstracts are never identical; the vote has nothing to count.</a:t>
+            </a:r>
+          </a:p>
+          <a:p>
+            <a:pPr>
+              <a:spcAft>
+                <a:spcPts val="600"/>
+              </a:spcAft>
+            </a:pPr>
+            <a:r>
+              <a:rPr sz="1600" b="0">
+                <a:solidFill>
+                  <a:srgbClr val="444444"/>
+                </a:solidFill>
+                <a:latin typeface="Arial"/>
+              </a:rPr>
+              <a:t>●  Replacement: selection among non-discrete outputs requires a scoring function, a verifier.</a:t>
+            </a:r>
+          </a:p>
+        </p:txBody>
+      </p:sp>
+    </p:spTree>
+  </p:cSld>
+  <p:clrMapOvr>
+    <a:masterClrMapping/>
+  </p:clrMapOvr>
+</p:sld>
+</file>
+
 <file path=ppt/slides/slide25.xml><?xml version="1.0" encoding="utf-8"?>
 <p:sld xmlns:a="http://schemas.openxmlformats.org/drawingml/2006/main" xmlns:p="http://schemas.openxmlformats.org/presentationml/2006/main" xmlns:r="http://schemas.openxmlformats.org/officeDocument/2006/relationships">
   <p:cSld>
@@ -5818,8 +5769,8 @@
         </p:nvSpPr>
         <p:spPr>
           <a:xfrm>
-            <a:off x="384048" y="256032"/>
-            <a:ext cx="8375904" cy="640080"/>
+            <a:off x="548640" y="1828800"/>
+            <a:ext cx="8046720" cy="1463040"/>
           </a:xfrm>
           <a:prstGeom prst="rect">
             <a:avLst/>
@@ -5827,90 +5778,20 @@
           <a:noFill/>
         </p:spPr>
         <p:txBody>
-          <a:bodyPr wrap="square">
+          <a:bodyPr wrap="square" anchor="ctr">
             <a:spAutoFit/>
           </a:bodyPr>
           <a:lstStyle/>
           <a:p>
-            <a:r>
-              <a:rPr sz="2400" b="0">
+            <a:pPr algn="ctr"/>
+            <a:r>
+              <a:rPr sz="3600" b="0">
                 <a:solidFill>
                   <a:srgbClr val="000000"/>
                 </a:solidFill>
                 <a:latin typeface="Arial"/>
               </a:rPr>
-              <a:t>Precondition of the vote</a:t>
-            </a:r>
-          </a:p>
-        </p:txBody>
-      </p:sp>
-      <p:sp>
-        <p:nvSpPr>
-          <p:cNvPr id="3" name="TextBox 2"/>
-          <p:cNvSpPr txBox="1"/>
-          <p:nvPr/>
-        </p:nvSpPr>
-        <p:spPr>
-          <a:xfrm>
-            <a:off x="502920" y="987552"/>
-            <a:ext cx="8229600" cy="3931920"/>
-          </a:xfrm>
-          <a:prstGeom prst="rect">
-            <a:avLst/>
-          </a:prstGeom>
-          <a:noFill/>
-        </p:spPr>
-        <p:txBody>
-          <a:bodyPr wrap="square">
-            <a:spAutoFit/>
-          </a:bodyPr>
-          <a:lstStyle/>
-          <a:p>
-            <a:pPr>
-              <a:spcAft>
-                <a:spcPts val="600"/>
-              </a:spcAft>
-            </a:pPr>
-            <a:r>
-              <a:rPr sz="1600" b="0">
-                <a:solidFill>
-                  <a:srgbClr val="444444"/>
-                </a:solidFill>
-                <a:latin typeface="Arial"/>
-              </a:rPr>
-              <a:t>●  Requirement: the final answer must be discrete and extractable (a number, a choice, a short string) so that equal answers can be counted.</a:t>
-            </a:r>
-          </a:p>
-          <a:p>
-            <a:pPr>
-              <a:spcAft>
-                <a:spcPts val="600"/>
-              </a:spcAft>
-            </a:pPr>
-            <a:r>
-              <a:rPr sz="1600" b="0">
-                <a:solidFill>
-                  <a:srgbClr val="444444"/>
-                </a:solidFill>
-                <a:latin typeface="Arial"/>
-              </a:rPr>
-              <a:t>●  Failure case: free-form text. Two 200-word abstracts are never identical; the vote has nothing to count.</a:t>
-            </a:r>
-          </a:p>
-          <a:p>
-            <a:pPr>
-              <a:spcAft>
-                <a:spcPts val="600"/>
-              </a:spcAft>
-            </a:pPr>
-            <a:r>
-              <a:rPr sz="1600" b="0">
-                <a:solidFill>
-                  <a:srgbClr val="444444"/>
-                </a:solidFill>
-                <a:latin typeface="Arial"/>
-              </a:rPr>
-              <a:t>●  Replacement: selection among non-discrete outputs requires a scoring function, a verifier.</a:t>
+              <a:t>Test-Time Compute</a:t>
             </a:r>
           </a:p>
         </p:txBody>
@@ -5941,59 +5822,6 @@
         </p:nvSpPr>
         <p:spPr>
           <a:xfrm>
-            <a:off x="548640" y="1828800"/>
-            <a:ext cx="8046720" cy="1463040"/>
-          </a:xfrm>
-          <a:prstGeom prst="rect">
-            <a:avLst/>
-          </a:prstGeom>
-          <a:noFill/>
-        </p:spPr>
-        <p:txBody>
-          <a:bodyPr wrap="square" anchor="ctr">
-            <a:spAutoFit/>
-          </a:bodyPr>
-          <a:lstStyle/>
-          <a:p>
-            <a:pPr algn="ctr"/>
-            <a:r>
-              <a:rPr sz="3600" b="0">
-                <a:solidFill>
-                  <a:srgbClr val="000000"/>
-                </a:solidFill>
-                <a:latin typeface="Arial"/>
-              </a:rPr>
-              <a:t>Test-Time Compute</a:t>
-            </a:r>
-          </a:p>
-        </p:txBody>
-      </p:sp>
-    </p:spTree>
-  </p:cSld>
-  <p:clrMapOvr>
-    <a:masterClrMapping/>
-  </p:clrMapOvr>
-</p:sld>
-</file>
-
-<file path=ppt/slides/slide27.xml><?xml version="1.0" encoding="utf-8"?>
-<p:sld xmlns:a="http://schemas.openxmlformats.org/drawingml/2006/main" xmlns:p="http://schemas.openxmlformats.org/presentationml/2006/main" xmlns:r="http://schemas.openxmlformats.org/officeDocument/2006/relationships">
-  <p:cSld>
-    <p:spTree>
-      <p:nvGrpSpPr>
-        <p:cNvPr id="1" name=""/>
-        <p:cNvGrpSpPr/>
-        <p:nvPr/>
-      </p:nvGrpSpPr>
-      <p:grpSpPr/>
-      <p:sp>
-        <p:nvSpPr>
-          <p:cNvPr id="2" name="TextBox 1"/>
-          <p:cNvSpPr txBox="1"/>
-          <p:nvPr/>
-        </p:nvSpPr>
-        <p:spPr>
-          <a:xfrm>
             <a:off x="384048" y="256032"/>
             <a:ext cx="8375904" cy="640080"/>
           </a:xfrm>
@@ -6115,7 +5943,7 @@
 </p:sld>
 </file>
 
-<file path=ppt/slides/slide28.xml><?xml version="1.0" encoding="utf-8"?>
+<file path=ppt/slides/slide27.xml><?xml version="1.0" encoding="utf-8"?>
 <p:sld xmlns:a="http://schemas.openxmlformats.org/drawingml/2006/main" xmlns:p="http://schemas.openxmlformats.org/presentationml/2006/main" xmlns:r="http://schemas.openxmlformats.org/officeDocument/2006/relationships">
   <p:cSld>
     <p:spTree>
@@ -6422,6 +6250,129 @@
 </p:sld>
 </file>
 
+<file path=ppt/slides/slide28.xml><?xml version="1.0" encoding="utf-8"?>
+<p:sld xmlns:a="http://schemas.openxmlformats.org/drawingml/2006/main" xmlns:p="http://schemas.openxmlformats.org/presentationml/2006/main" xmlns:r="http://schemas.openxmlformats.org/officeDocument/2006/relationships">
+  <p:cSld>
+    <p:spTree>
+      <p:nvGrpSpPr>
+        <p:cNvPr id="1" name=""/>
+        <p:cNvGrpSpPr/>
+        <p:nvPr/>
+      </p:nvGrpSpPr>
+      <p:grpSpPr/>
+      <p:sp>
+        <p:nvSpPr>
+          <p:cNvPr id="2" name="TextBox 1"/>
+          <p:cNvSpPr txBox="1"/>
+          <p:nvPr/>
+        </p:nvSpPr>
+        <p:spPr>
+          <a:xfrm>
+            <a:off x="384048" y="256032"/>
+            <a:ext cx="8375904" cy="640080"/>
+          </a:xfrm>
+          <a:prstGeom prst="rect">
+            <a:avLst/>
+          </a:prstGeom>
+          <a:noFill/>
+        </p:spPr>
+        <p:txBody>
+          <a:bodyPr wrap="square">
+            <a:spAutoFit/>
+          </a:bodyPr>
+          <a:lstStyle/>
+          <a:p>
+            <a:r>
+              <a:rPr sz="2400" b="0">
+                <a:solidFill>
+                  <a:srgbClr val="000000"/>
+                </a:solidFill>
+                <a:latin typeface="Arial"/>
+              </a:rPr>
+              <a:t>Test-time compute in deployed systems</a:t>
+            </a:r>
+          </a:p>
+        </p:txBody>
+      </p:sp>
+      <p:sp>
+        <p:nvSpPr>
+          <p:cNvPr id="3" name="TextBox 2"/>
+          <p:cNvSpPr txBox="1"/>
+          <p:nvPr/>
+        </p:nvSpPr>
+        <p:spPr>
+          <a:xfrm>
+            <a:off x="502920" y="987552"/>
+            <a:ext cx="8229600" cy="3931920"/>
+          </a:xfrm>
+          <a:prstGeom prst="rect">
+            <a:avLst/>
+          </a:prstGeom>
+          <a:noFill/>
+        </p:spPr>
+        <p:txBody>
+          <a:bodyPr wrap="square">
+            <a:spAutoFit/>
+          </a:bodyPr>
+          <a:lstStyle/>
+          <a:p>
+            <a:pPr>
+              <a:spcAft>
+                <a:spcPts val="600"/>
+              </a:spcAft>
+            </a:pPr>
+            <a:r>
+              <a:rPr sz="1600" b="0">
+                <a:solidFill>
+                  <a:srgbClr val="444444"/>
+                </a:solidFill>
+                <a:latin typeface="Arial"/>
+              </a:rPr>
+              <a:t>●  Reasoning modes (OpenAI o-series, Claude extended thinking, Gemini thinking): the written solution of this chapter generated inside the model and billed per token.</a:t>
+            </a:r>
+          </a:p>
+          <a:p>
+            <a:pPr>
+              <a:spcAft>
+                <a:spcPts val="600"/>
+              </a:spcAft>
+            </a:pPr>
+            <a:r>
+              <a:rPr sz="1600" b="0">
+                <a:solidFill>
+                  <a:srgbClr val="444444"/>
+                </a:solidFill>
+                <a:latin typeface="Arial"/>
+              </a:rPr>
+              <a:t>●  Parallel-reasoning tiers (o1 pro, Gemini Deep Think, Grok Heavy): several reasoning lines generated in parallel and one selected, that is, self-consistency or best-of-N.</a:t>
+            </a:r>
+          </a:p>
+          <a:p>
+            <a:pPr>
+              <a:spcAft>
+                <a:spcPts val="600"/>
+              </a:spcAft>
+            </a:pPr>
+            <a:r>
+              <a:rPr sz="1600" b="0">
+                <a:solidFill>
+                  <a:srgbClr val="444444"/>
+                </a:solidFill>
+                <a:latin typeface="Arial"/>
+              </a:rPr>
+              <a:t>●  Cost: N samples multiply cost and latency by N. The design variable is which queries receive N &gt; 1.</a:t>
+            </a:r>
+          </a:p>
+        </p:txBody>
+      </p:sp>
+    </p:spTree>
+  </p:cSld>
+  <p:clrMapOvr>
+    <a:masterClrMapping/>
+  </p:clrMapOvr>
+</p:sld>
+</file>
+
 <file path=ppt/slides/slide29.xml><?xml version="1.0" encoding="utf-8"?>
 <p:sld xmlns:a="http://schemas.openxmlformats.org/drawingml/2006/main" xmlns:p="http://schemas.openxmlformats.org/presentationml/2006/main" xmlns:r="http://schemas.openxmlformats.org/officeDocument/2006/relationships">
   <p:cSld>
@@ -6461,7 +6412,7 @@
                 </a:solidFill>
                 <a:latin typeface="Arial"/>
               </a:rPr>
-              <a:t>Test-time compute in deployed systems</a:t>
+              <a:t>Summary</a:t>
             </a:r>
           </a:p>
         </p:txBody>
@@ -6494,13 +6445,13 @@
               </a:spcAft>
             </a:pPr>
             <a:r>
-              <a:rPr sz="1600" b="0">
+              <a:rPr sz="1400" b="0">
                 <a:solidFill>
                   <a:srgbClr val="444444"/>
                 </a:solidFill>
                 <a:latin typeface="Arial"/>
               </a:rPr>
-              <a:t>●  Reasoning modes (OpenAI o-series, Claude extended thinking, Gemini thinking): the written solution of this chapter generated inside the model and billed per token.</a:t>
+              <a:t>●  Observation: the same model answers the same problem correctly or incorrectly depending on whether the prompt permits a written solution before the answer.</a:t>
             </a:r>
           </a:p>
           <a:p>
@@ -6510,13 +6461,13 @@
               </a:spcAft>
             </a:pPr>
             <a:r>
-              <a:rPr sz="1600" b="0">
+              <a:rPr sz="1400" b="0">
                 <a:solidFill>
                   <a:srgbClr val="444444"/>
                 </a:solidFill>
                 <a:latin typeface="Arial"/>
               </a:rPr>
-              <a:t>●  Parallel-reasoning tiers (o1 pro, Gemini Deep Think, Grok Heavy): several reasoning lines generated in parallel and one selected, that is, self-consistency or best-of-N.</a:t>
+              <a:t>●  Cause: the model's only workspace is the text it generates; an intermediate value exists only once written. Answer-only prompting forces every operation into one prediction, whose capacity is bounded.</a:t>
             </a:r>
           </a:p>
           <a:p>
@@ -6526,13 +6477,61 @@
               </a:spcAft>
             </a:pPr>
             <a:r>
-              <a:rPr sz="1600" b="0">
+              <a:rPr sz="1400" b="0">
                 <a:solidFill>
                   <a:srgbClr val="444444"/>
                 </a:solidFill>
                 <a:latin typeface="Arial"/>
               </a:rPr>
-              <a:t>●  Cost: N samples multiply cost and latency by N. The design variable is which queries receive N &gt; 1.</a:t>
+              <a:t>●  Chain-of-thought: an instruction or worked examples induce the written solution. Examples additionally fix the granularity and format that an instruction leaves open.</a:t>
+            </a:r>
+          </a:p>
+          <a:p>
+            <a:pPr>
+              <a:spcAft>
+                <a:spcPts val="600"/>
+              </a:spcAft>
+            </a:pPr>
+            <a:r>
+              <a:rPr sz="1400" b="0">
+                <a:solidFill>
+                  <a:srgbClr val="444444"/>
+                </a:solidFill>
+                <a:latin typeface="Arial"/>
+              </a:rPr>
+              <a:t>●  Limit: chain-of-thought draws only on parametric knowledge. A false premise propagates through a valid chain; repair requires an external check, not a prompt.</a:t>
+            </a:r>
+          </a:p>
+          <a:p>
+            <a:pPr>
+              <a:spcAft>
+                <a:spcPts val="600"/>
+              </a:spcAft>
+            </a:pPr>
+            <a:r>
+              <a:rPr sz="1400" b="0">
+                <a:solidFill>
+                  <a:srgbClr val="444444"/>
+                </a:solidFill>
+                <a:latin typeface="Arial"/>
+              </a:rPr>
+              <a:t>●  Self-consistency: one response is one sampled path. Sampling N paths and taking the majority of discrete answers estimates the answer probability summed over paths.</a:t>
+            </a:r>
+          </a:p>
+          <a:p>
+            <a:pPr>
+              <a:spcAft>
+                <a:spcPts val="600"/>
+              </a:spcAft>
+            </a:pPr>
+            <a:r>
+              <a:rPr sz="1400" b="0">
+                <a:solidFill>
+                  <a:srgbClr val="444444"/>
+                </a:solidFill>
+                <a:latin typeface="Arial"/>
+              </a:rPr>
+              <a:t>●  Test-time compute: chain-of-thought and self-consistency both buy accuracy with additional predictions at inference time, with the weights unchanged.</a:t>
             </a:r>
           </a:p>
         </p:txBody>
@@ -6598,177 +6597,6 @@
 </p:sld>
 </file>
 
-<file path=ppt/slides/slide30.xml><?xml version="1.0" encoding="utf-8"?>
-<p:sld xmlns:a="http://schemas.openxmlformats.org/drawingml/2006/main" xmlns:p="http://schemas.openxmlformats.org/presentationml/2006/main" xmlns:r="http://schemas.openxmlformats.org/officeDocument/2006/relationships">
-  <p:cSld>
-    <p:spTree>
-      <p:nvGrpSpPr>
-        <p:cNvPr id="1" name=""/>
-        <p:cNvGrpSpPr/>
-        <p:nvPr/>
-      </p:nvGrpSpPr>
-      <p:grpSpPr/>
-      <p:sp>
-        <p:nvSpPr>
-          <p:cNvPr id="2" name="TextBox 1"/>
-          <p:cNvSpPr txBox="1"/>
-          <p:nvPr/>
-        </p:nvSpPr>
-        <p:spPr>
-          <a:xfrm>
-            <a:off x="384048" y="256032"/>
-            <a:ext cx="8375904" cy="640080"/>
-          </a:xfrm>
-          <a:prstGeom prst="rect">
-            <a:avLst/>
-          </a:prstGeom>
-          <a:noFill/>
-        </p:spPr>
-        <p:txBody>
-          <a:bodyPr wrap="square">
-            <a:spAutoFit/>
-          </a:bodyPr>
-          <a:lstStyle/>
-          <a:p>
-            <a:r>
-              <a:rPr sz="2400" b="0">
-                <a:solidFill>
-                  <a:srgbClr val="000000"/>
-                </a:solidFill>
-                <a:latin typeface="Arial"/>
-              </a:rPr>
-              <a:t>Summary</a:t>
-            </a:r>
-          </a:p>
-        </p:txBody>
-      </p:sp>
-      <p:sp>
-        <p:nvSpPr>
-          <p:cNvPr id="3" name="TextBox 2"/>
-          <p:cNvSpPr txBox="1"/>
-          <p:nvPr/>
-        </p:nvSpPr>
-        <p:spPr>
-          <a:xfrm>
-            <a:off x="502920" y="987552"/>
-            <a:ext cx="8229600" cy="3931920"/>
-          </a:xfrm>
-          <a:prstGeom prst="rect">
-            <a:avLst/>
-          </a:prstGeom>
-          <a:noFill/>
-        </p:spPr>
-        <p:txBody>
-          <a:bodyPr wrap="square">
-            <a:spAutoFit/>
-          </a:bodyPr>
-          <a:lstStyle/>
-          <a:p>
-            <a:pPr>
-              <a:spcAft>
-                <a:spcPts val="600"/>
-              </a:spcAft>
-            </a:pPr>
-            <a:r>
-              <a:rPr sz="1400" b="0">
-                <a:solidFill>
-                  <a:srgbClr val="444444"/>
-                </a:solidFill>
-                <a:latin typeface="Arial"/>
-              </a:rPr>
-              <a:t>●  Observation: the same model answers the same problem correctly or incorrectly depending on whether the prompt permits a written solution before the answer.</a:t>
-            </a:r>
-          </a:p>
-          <a:p>
-            <a:pPr>
-              <a:spcAft>
-                <a:spcPts val="600"/>
-              </a:spcAft>
-            </a:pPr>
-            <a:r>
-              <a:rPr sz="1400" b="0">
-                <a:solidFill>
-                  <a:srgbClr val="444444"/>
-                </a:solidFill>
-                <a:latin typeface="Arial"/>
-              </a:rPr>
-              <a:t>●  Cause: the model's only workspace is the text it generates; an intermediate value exists only once written. Answer-only prompting forces every operation into one prediction, whose capacity is bounded.</a:t>
-            </a:r>
-          </a:p>
-          <a:p>
-            <a:pPr>
-              <a:spcAft>
-                <a:spcPts val="600"/>
-              </a:spcAft>
-            </a:pPr>
-            <a:r>
-              <a:rPr sz="1400" b="0">
-                <a:solidFill>
-                  <a:srgbClr val="444444"/>
-                </a:solidFill>
-                <a:latin typeface="Arial"/>
-              </a:rPr>
-              <a:t>●  Chain-of-thought: an instruction or worked examples induce the written solution. Examples additionally fix the granularity and format that an instruction leaves open.</a:t>
-            </a:r>
-          </a:p>
-          <a:p>
-            <a:pPr>
-              <a:spcAft>
-                <a:spcPts val="600"/>
-              </a:spcAft>
-            </a:pPr>
-            <a:r>
-              <a:rPr sz="1400" b="0">
-                <a:solidFill>
-                  <a:srgbClr val="444444"/>
-                </a:solidFill>
-                <a:latin typeface="Arial"/>
-              </a:rPr>
-              <a:t>●  Limit: chain-of-thought draws only on parametric knowledge. A false premise propagates through a valid chain; repair requires an external check, not a prompt.</a:t>
-            </a:r>
-          </a:p>
-          <a:p>
-            <a:pPr>
-              <a:spcAft>
-                <a:spcPts val="600"/>
-              </a:spcAft>
-            </a:pPr>
-            <a:r>
-              <a:rPr sz="1400" b="0">
-                <a:solidFill>
-                  <a:srgbClr val="444444"/>
-                </a:solidFill>
-                <a:latin typeface="Arial"/>
-              </a:rPr>
-              <a:t>●  Self-consistency: one response is one sampled path. Sampling N paths and taking the majority of discrete answers estimates the answer probability summed over paths.</a:t>
-            </a:r>
-          </a:p>
-          <a:p>
-            <a:pPr>
-              <a:spcAft>
-                <a:spcPts val="600"/>
-              </a:spcAft>
-            </a:pPr>
-            <a:r>
-              <a:rPr sz="1400" b="0">
-                <a:solidFill>
-                  <a:srgbClr val="444444"/>
-                </a:solidFill>
-                <a:latin typeface="Arial"/>
-              </a:rPr>
-              <a:t>●  Test-time compute: chain-of-thought and self-consistency both buy accuracy with additional predictions at inference time, with the weights unchanged.</a:t>
-            </a:r>
-          </a:p>
-        </p:txBody>
-      </p:sp>
-    </p:spTree>
-  </p:cSld>
-  <p:clrMapOvr>
-    <a:masterClrMapping/>
-  </p:clrMapOvr>
-</p:sld>
-</file>
-
 <file path=ppt/slides/slide4.xml><?xml version="1.0" encoding="utf-8"?>
 <p:sld xmlns:a="http://schemas.openxmlformats.org/drawingml/2006/main" xmlns:p="http://schemas.openxmlformats.org/presentationml/2006/main" xmlns:r="http://schemas.openxmlformats.org/officeDocument/2006/relationships">
   <p:cSld>
@@ -7465,7 +7293,7 @@
                 </a:solidFill>
                 <a:latin typeface="Arial"/>
               </a:rPr>
-              <a:t>The apple problem under this mechanism</a:t>
+              <a:t>Three operations in one prediction</a:t>
             </a:r>
           </a:p>
         </p:txBody>
@@ -7494,6 +7322,38 @@
           <a:p>
             <a:pPr>
               <a:spcAft>
+                <a:spcPts val="0"/>
+              </a:spcAft>
+            </a:pPr>
+            <a:r>
+              <a:rPr sz="1400" b="0">
+                <a:solidFill>
+                  <a:srgbClr val="1F3A5F"/>
+                </a:solidFill>
+                <a:latin typeface="Courier New"/>
+              </a:rPr>
+              <a:t>      Prompt: A warehouse holds 47 crates with 38 items each. 519 items are shipped out and 284 items are returned. How many items are in the warehouse now? Reply with only the number.</a:t>
+            </a:r>
+          </a:p>
+          <a:p>
+            <a:pPr>
+              <a:spcAft>
+                <a:spcPts val="0"/>
+              </a:spcAft>
+            </a:pPr>
+            <a:r>
+              <a:rPr sz="1400" b="0">
+                <a:solidFill>
+                  <a:srgbClr val="1F3A5F"/>
+                </a:solidFill>
+                <a:latin typeface="Courier New"/>
+              </a:rPr>
+              <a:t>      Output: 1516          correct answer: 1551</a:t>
+            </a:r>
+          </a:p>
+          <a:p>
+            <a:pPr>
+              <a:spcAft>
                 <a:spcPts val="600"/>
               </a:spcAft>
             </a:pPr>
@@ -7504,7 +7364,7 @@
                 </a:solidFill>
                 <a:latin typeface="Arial"/>
               </a:rPr>
-              <a:t>●  Requirement: compute 23 − 20 = 3, retain 3, then compute 3 + 6.</a:t>
+              <a:t>●  Required computation: 47 × 38 = 1786; 1786 − 519 = 1267; 1267 + 284 = 1551. Two intermediate values, 1786 and 1267, must be retained between operations.</a:t>
             </a:r>
           </a:p>
           <a:p>
@@ -7520,7 +7380,7 @@
                 </a:solidFill>
                 <a:latin typeface="Arial"/>
               </a:rPr>
-              <a:t>●  Prompt B: once "23 − 20 = 3" is written, the value 3 is in the text. The prediction of "9" reads 3 and 6 and performs one operation.</a:t>
+              <a:t>●  Under this prompt: no token may hold 1786 or 1267, so the single prediction that emits the answer must perform all three operations.</a:t>
             </a:r>
           </a:p>
           <a:p>
@@ -7536,23 +7396,7 @@
                 </a:solidFill>
                 <a:latin typeface="Arial"/>
               </a:rPr>
-              <a:t>●  Prompt A: no intermediate text is permitted. The single prediction that emits the answer must perform both operations.</a:t>
-            </a:r>
-          </a:p>
-          <a:p>
-            <a:pPr>
-              <a:spcAft>
-                <a:spcPts val="600"/>
-              </a:spcAft>
-            </a:pPr>
-            <a:r>
-              <a:rPr sz="1600" b="0">
-                <a:solidFill>
-                  <a:srgbClr val="444444"/>
-                </a:solidFill>
-                <a:latin typeface="Arial"/>
-              </a:rPr>
-              <a:t>●  Interpretation: the extra tokens of B are the storage of intermediate values. A is the condition in which that storage is forbidden.</a:t>
+              <a:t>●  Contrast: the apple problem (23 − 20 + 6) has one intermediate value. The same prompt returns 9, correct.</a:t>
             </a:r>
           </a:p>
         </p:txBody>

--- a/lectures/week02/slides-draft-w2.pptx
+++ b/lectures/week02/slides-draft-w2.pptx
@@ -670,7 +670,7 @@
           <a:lstStyle/>
           <a:p>
             <a:r>
-              <a:t>Timing: slides 3–11 ≈ 10 min, 12–19 ≈ 10 min, 20–29 ≈ 10 min. Slide 19 must be kept even if time runs short: tools repair hallucination, prompting does not.</a:t>
+              <a:t>Timing: slides 3–11 ≈ 10 min, 12–19 ≈ 10 min, 20–29 ≈ 10 min. Slide 18 must be kept even if time runs short: tools repair hallucination, prompting does not.</a:t>
             </a:r>
           </a:p>
         </p:txBody>

--- a/lectures/week02/slides-draft-w2.pptx
+++ b/lectures/week02/slides-draft-w2.pptx
@@ -34,6 +34,7 @@
     <p:sldId id="282" r:id="rId34"/>
     <p:sldId id="283" r:id="rId35"/>
     <p:sldId id="284" r:id="rId36"/>
+    <p:sldId id="285" r:id="rId37"/>
   </p:sldIdLst>
   <p:sldSz cx="9144000" cy="5143500" type="screen4x3"/>
   <p:notesSz cx="6858000" cy="9144000"/>
@@ -670,7 +671,7 @@
           <a:lstStyle/>
           <a:p>
             <a:r>
-              <a:t>Timing: slides 3–11 ≈ 10 min, 12–19 ≈ 10 min, 20–29 ≈ 10 min. Slide 18 must be kept even if time runs short: tools repair hallucination, prompting does not.</a:t>
+              <a:t>Timing: slides 3–11 ≈ 10 min, 12–20 ≈ 10 min, 21–30 ≈ 10 min. Slide 19 must be kept even if time runs short: tools repair hallucination, prompting does not.</a:t>
             </a:r>
           </a:p>
         </p:txBody>
@@ -4403,7 +4404,7 @@
                 </a:solidFill>
                 <a:latin typeface="Arial"/>
               </a:rPr>
-              <a:t>Form 2 — Worked examples (few-shot CoT)</a:t>
+              <a:t>In-context learning</a:t>
             </a:r>
           </a:p>
         </p:txBody>
@@ -4436,13 +4437,29 @@
               </a:spcAft>
             </a:pPr>
             <a:r>
-              <a:rPr sz="1500" b="0">
+              <a:rPr sz="1300" b="0">
                 <a:solidFill>
                   <a:srgbClr val="444444"/>
                 </a:solidFill>
                 <a:latin typeface="Arial"/>
               </a:rPr>
-              <a:t>●  Procedure: prepend question–solution pairs before the question.</a:t>
+              <a:t>●  Definition: in-context learning (ICL) = the model's output follows the pattern exhibited by examples placed in the prompt, with no change to the weights. The examples are read as text at inference time; nothing is retained after the response.</a:t>
+            </a:r>
+          </a:p>
+          <a:p>
+            <a:pPr>
+              <a:spcAft>
+                <a:spcPts val="600"/>
+              </a:spcAft>
+            </a:pPr>
+            <a:r>
+              <a:rPr sz="1300" b="0">
+                <a:solidFill>
+                  <a:srgbClr val="444444"/>
+                </a:solidFill>
+                <a:latin typeface="Arial"/>
+              </a:rPr>
+              <a:t>●  Contrast with fine-tuning: fine-tuning changes the weights and persists across calls. In-context learning changes only the prompt and lasts for one call.</a:t>
             </a:r>
           </a:p>
           <a:p>
@@ -4452,141 +4469,173 @@
               </a:spcAft>
             </a:pPr>
             <a:r>
+              <a:rPr sz="1100" b="0">
+                <a:solidFill>
+                  <a:srgbClr val="1F3A5F"/>
+                </a:solidFill>
+                <a:latin typeface="Courier New"/>
+              </a:rPr>
+              <a:t>      Prompt without an example: Will Santa bring me presents on Christmas?</a:t>
+            </a:r>
+          </a:p>
+          <a:p>
+            <a:pPr>
+              <a:spcAft>
+                <a:spcPts val="0"/>
+              </a:spcAft>
+            </a:pPr>
+            <a:r>
+              <a:rPr sz="1100" b="0">
+                <a:solidFill>
+                  <a:srgbClr val="1F3A5F"/>
+                </a:solidFill>
+                <a:latin typeface="Courier New"/>
+              </a:rPr>
+              <a:t>      Output: Whether Santa brings you presents on Christmas often depends on your beliefs and traditions. If you celebrate Christmas and believe in Santa, many people enjoy the magic of the season …</a:t>
+            </a:r>
+          </a:p>
+          <a:p>
+            <a:pPr>
+              <a:spcAft>
+                <a:spcPts val="0"/>
+              </a:spcAft>
+            </a:pPr>
+            <a:r>
+              <a:rPr sz="1100" b="0">
+                <a:solidFill>
+                  <a:srgbClr val="1F3A5F"/>
+                </a:solidFill>
+                <a:latin typeface="Courier New"/>
+              </a:rPr>
+              <a:t>      </a:t>
+            </a:r>
+          </a:p>
+          <a:p>
+            <a:pPr>
+              <a:spcAft>
+                <a:spcPts val="0"/>
+              </a:spcAft>
+            </a:pPr>
+            <a:r>
+              <a:rPr sz="1100" b="0">
+                <a:solidFill>
+                  <a:srgbClr val="1F3A5F"/>
+                </a:solidFill>
+                <a:latin typeface="Courier New"/>
+              </a:rPr>
+              <a:t>      Prompt with one example:</a:t>
+            </a:r>
+          </a:p>
+          <a:p>
+            <a:pPr>
+              <a:spcAft>
+                <a:spcPts val="0"/>
+              </a:spcAft>
+            </a:pPr>
+            <a:r>
+              <a:rPr sz="1100" b="0">
+                <a:solidFill>
+                  <a:srgbClr val="1F3A5F"/>
+                </a:solidFill>
+                <a:latin typeface="Courier New"/>
+              </a:rPr>
+              <a:t>        Q: Is the tooth fairy real?</a:t>
+            </a:r>
+          </a:p>
+          <a:p>
+            <a:pPr>
+              <a:spcAft>
+                <a:spcPts val="0"/>
+              </a:spcAft>
+            </a:pPr>
+            <a:r>
+              <a:rPr sz="1100" b="0">
+                <a:solidFill>
+                  <a:srgbClr val="1F3A5F"/>
+                </a:solidFill>
+                <a:latin typeface="Courier New"/>
+              </a:rPr>
+              <a:t>        A: Of course, sweetie. Wrap up your tooth and put it under your pillow tonight. There might be something waiting for you in the morning.</a:t>
+            </a:r>
+          </a:p>
+          <a:p>
+            <a:pPr>
+              <a:spcAft>
+                <a:spcPts val="0"/>
+              </a:spcAft>
+            </a:pPr>
+            <a:r>
+              <a:rPr sz="1100" b="0">
+                <a:solidFill>
+                  <a:srgbClr val="1F3A5F"/>
+                </a:solidFill>
+                <a:latin typeface="Courier New"/>
+              </a:rPr>
+              <a:t>        Q: Will Santa bring me presents on Christmas?</a:t>
+            </a:r>
+          </a:p>
+          <a:p>
+            <a:pPr>
+              <a:spcAft>
+                <a:spcPts val="0"/>
+              </a:spcAft>
+            </a:pPr>
+            <a:r>
+              <a:rPr sz="1100" b="0">
+                <a:solidFill>
+                  <a:srgbClr val="1F3A5F"/>
+                </a:solidFill>
+                <a:latin typeface="Courier New"/>
+              </a:rPr>
+              <a:t>      Output: A: Absolutely! If you've been good this year, Santa will definitely have some surprises for you under the tree.</a:t>
+            </a:r>
+          </a:p>
+          <a:p>
+            <a:pPr>
+              <a:spcAft>
+                <a:spcPts val="600"/>
+              </a:spcAft>
+            </a:pPr>
+            <a:r>
               <a:rPr sz="1300" b="0">
                 <a:solidFill>
-                  <a:srgbClr val="1F3A5F"/>
-                </a:solidFill>
-                <a:latin typeface="Courier New"/>
-              </a:rPr>
-              <a:t>      Q: Roger has 5 tennis balls. He buys 2 more cans of 3 balls each. How many balls does he have?</a:t>
-            </a:r>
-          </a:p>
-          <a:p>
-            <a:pPr>
-              <a:spcAft>
-                <a:spcPts val="0"/>
+                  <a:srgbClr val="444444"/>
+                </a:solidFill>
+                <a:latin typeface="Arial"/>
+              </a:rPr>
+              <a:t>●  What an example fixes: format, length, tone, label set, and the procedure of the answer. One example changed all of these; no instruction described any of them.</a:t>
+            </a:r>
+          </a:p>
+          <a:p>
+            <a:pPr>
+              <a:spcAft>
+                <a:spcPts val="600"/>
               </a:spcAft>
             </a:pPr>
             <a:r>
               <a:rPr sz="1300" b="0">
                 <a:solidFill>
-                  <a:srgbClr val="1F3A5F"/>
-                </a:solidFill>
-                <a:latin typeface="Courier New"/>
-              </a:rPr>
-              <a:t>      A: He starts with 5 balls. 2 cans of 3 balls is 3 × 2 = 6. 5 + 6 = 11. ANSWER: 11</a:t>
-            </a:r>
-          </a:p>
-          <a:p>
-            <a:pPr>
-              <a:spcAft>
-                <a:spcPts val="0"/>
+                  <a:srgbClr val="444444"/>
+                </a:solidFill>
+                <a:latin typeface="Arial"/>
+              </a:rPr>
+              <a:t>●  What an example does not fix: knowledge. The model imitates the example's form, including its errors, and learns no new fact from it.</a:t>
+            </a:r>
+          </a:p>
+          <a:p>
+            <a:pPr>
+              <a:spcAft>
+                <a:spcPts val="600"/>
               </a:spcAft>
             </a:pPr>
             <a:r>
               <a:rPr sz="1300" b="0">
                 <a:solidFill>
-                  <a:srgbClr val="1F3A5F"/>
-                </a:solidFill>
-                <a:latin typeface="Courier New"/>
-              </a:rPr>
-              <a:t>      </a:t>
-            </a:r>
-          </a:p>
-          <a:p>
-            <a:pPr>
-              <a:spcAft>
-                <a:spcPts val="0"/>
-              </a:spcAft>
-            </a:pPr>
-            <a:r>
-              <a:rPr sz="1300" b="0">
-                <a:solidFill>
-                  <a:srgbClr val="1F3A5F"/>
-                </a:solidFill>
-                <a:latin typeface="Courier New"/>
-              </a:rPr>
-              <a:t>      Q: There are 23 apples. 20 are used and 6 more are bought. How many are there?</a:t>
-            </a:r>
-          </a:p>
-          <a:p>
-            <a:pPr>
-              <a:spcAft>
-                <a:spcPts val="0"/>
-              </a:spcAft>
-            </a:pPr>
-            <a:r>
-              <a:rPr sz="1300" b="0">
-                <a:solidFill>
-                  <a:srgbClr val="1F3A5F"/>
-                </a:solidFill>
-                <a:latin typeface="Courier New"/>
-              </a:rPr>
-              <a:t>      A:</a:t>
-            </a:r>
-          </a:p>
-          <a:p>
-            <a:pPr>
-              <a:spcAft>
-                <a:spcPts val="0"/>
-              </a:spcAft>
-            </a:pPr>
-            <a:r>
-              <a:rPr sz="1300" b="0">
-                <a:solidFill>
-                  <a:srgbClr val="1F3A5F"/>
-                </a:solidFill>
-                <a:latin typeface="Courier New"/>
-              </a:rPr>
-              <a:t>      </a:t>
-            </a:r>
-          </a:p>
-          <a:p>
-            <a:pPr>
-              <a:spcAft>
-                <a:spcPts val="0"/>
-              </a:spcAft>
-            </a:pPr>
-            <a:r>
-              <a:rPr sz="1300" b="0">
-                <a:solidFill>
-                  <a:srgbClr val="1F3A5F"/>
-                </a:solidFill>
-                <a:latin typeface="Courier New"/>
-              </a:rPr>
-              <a:t>      Output: 23 − 20 = 3. 3 + 6 = 9. ANSWER: 9</a:t>
-            </a:r>
-          </a:p>
-          <a:p>
-            <a:pPr>
-              <a:spcAft>
-                <a:spcPts val="600"/>
-              </a:spcAft>
-            </a:pPr>
-            <a:r>
-              <a:rPr sz="1500" b="0">
-                <a:solidFill>
                   <a:srgbClr val="444444"/>
                 </a:solidFill>
                 <a:latin typeface="Arial"/>
               </a:rPr>
-              <a:t>●  Definition: in-context learning = the property that examples in the prompt determine the output's format and procedure with no weight update.</a:t>
-            </a:r>
-          </a:p>
-          <a:p>
-            <a:pPr>
-              <a:spcAft>
-                <a:spcPts val="600"/>
-              </a:spcAft>
-            </a:pPr>
-            <a:r>
-              <a:rPr sz="1500" b="0">
-                <a:solidFill>
-                  <a:srgbClr val="444444"/>
-                </a:solidFill>
-                <a:latin typeface="Arial"/>
-              </a:rPr>
-              <a:t>●  Property: the example fixes what the instruction leaves open: the step granularity, the wording of each step, and the exact final line.</a:t>
+              <a:t>●  Counting: zero-shot = no examples, one-shot = one, few-shot = several. Few-shot CoT (next slide) is in-context learning applied to the solution process.</a:t>
             </a:r>
           </a:p>
         </p:txBody>
@@ -4638,7 +4687,7 @@
                 </a:solidFill>
                 <a:latin typeface="Arial"/>
               </a:rPr>
-              <a:t>Instruction versus example</a:t>
+              <a:t>Form 2 — Worked examples (few-shot CoT)</a:t>
             </a:r>
           </a:p>
         </p:txBody>
@@ -4671,13 +4720,13 @@
               </a:spcAft>
             </a:pPr>
             <a:r>
-              <a:rPr sz="1500" b="0">
+              <a:rPr sz="1600" b="0">
                 <a:solidFill>
                   <a:srgbClr val="444444"/>
                 </a:solidFill>
                 <a:latin typeface="Arial"/>
               </a:rPr>
-              <a:t>●  Difference: an instruction names the requirement; an example exhibits it. The example therefore pins format and procedure that the instruction underspecifies.</a:t>
+              <a:t>●  Procedure: prepend question–solution pairs before the question.</a:t>
             </a:r>
           </a:p>
           <a:p>
@@ -4687,13 +4736,13 @@
               </a:spcAft>
             </a:pPr>
             <a:r>
-              <a:rPr sz="1300" b="0">
+              <a:rPr sz="1400" b="0">
                 <a:solidFill>
                   <a:srgbClr val="1F3A5F"/>
                 </a:solidFill>
                 <a:latin typeface="Courier New"/>
               </a:rPr>
-              <a:t>      Instruction: "Answer with the date."      → "The final date is March 10th, 2026."</a:t>
+              <a:t>      Q: Roger has 5 tennis balls. He buys 2 more cans of 3 balls each. How many balls does he have?</a:t>
             </a:r>
           </a:p>
           <a:p>
@@ -4703,13 +4752,93 @@
               </a:spcAft>
             </a:pPr>
             <a:r>
-              <a:rPr sz="1300" b="0">
+              <a:rPr sz="1400" b="0">
                 <a:solidFill>
                   <a:srgbClr val="1F3A5F"/>
                 </a:solidFill>
                 <a:latin typeface="Courier New"/>
               </a:rPr>
-              <a:t>      Example:    "Note: … / DATE: 2026-06-09"  → "DATE: 2026-03-10"</a:t>
+              <a:t>      A: He starts with 5 balls. 2 cans of 3 balls is 3 × 2 = 6. 5 + 6 = 11. ANSWER: 11</a:t>
+            </a:r>
+          </a:p>
+          <a:p>
+            <a:pPr>
+              <a:spcAft>
+                <a:spcPts val="0"/>
+              </a:spcAft>
+            </a:pPr>
+            <a:r>
+              <a:rPr sz="1400" b="0">
+                <a:solidFill>
+                  <a:srgbClr val="1F3A5F"/>
+                </a:solidFill>
+                <a:latin typeface="Courier New"/>
+              </a:rPr>
+              <a:t>      </a:t>
+            </a:r>
+          </a:p>
+          <a:p>
+            <a:pPr>
+              <a:spcAft>
+                <a:spcPts val="0"/>
+              </a:spcAft>
+            </a:pPr>
+            <a:r>
+              <a:rPr sz="1400" b="0">
+                <a:solidFill>
+                  <a:srgbClr val="1F3A5F"/>
+                </a:solidFill>
+                <a:latin typeface="Courier New"/>
+              </a:rPr>
+              <a:t>      Q: There are 23 apples. 20 are used and 6 more are bought. How many are there?</a:t>
+            </a:r>
+          </a:p>
+          <a:p>
+            <a:pPr>
+              <a:spcAft>
+                <a:spcPts val="0"/>
+              </a:spcAft>
+            </a:pPr>
+            <a:r>
+              <a:rPr sz="1400" b="0">
+                <a:solidFill>
+                  <a:srgbClr val="1F3A5F"/>
+                </a:solidFill>
+                <a:latin typeface="Courier New"/>
+              </a:rPr>
+              <a:t>      A:</a:t>
+            </a:r>
+          </a:p>
+          <a:p>
+            <a:pPr>
+              <a:spcAft>
+                <a:spcPts val="0"/>
+              </a:spcAft>
+            </a:pPr>
+            <a:r>
+              <a:rPr sz="1400" b="0">
+                <a:solidFill>
+                  <a:srgbClr val="1F3A5F"/>
+                </a:solidFill>
+                <a:latin typeface="Courier New"/>
+              </a:rPr>
+              <a:t>      </a:t>
+            </a:r>
+          </a:p>
+          <a:p>
+            <a:pPr>
+              <a:spcAft>
+                <a:spcPts val="0"/>
+              </a:spcAft>
+            </a:pPr>
+            <a:r>
+              <a:rPr sz="1400" b="0">
+                <a:solidFill>
+                  <a:srgbClr val="1F3A5F"/>
+                </a:solidFill>
+                <a:latin typeface="Courier New"/>
+              </a:rPr>
+              <a:t>      Output: 23 − 20 = 3. 3 + 6 = 9. ANSWER: 9</a:t>
             </a:r>
           </a:p>
           <a:p>
@@ -4719,29 +4848,13 @@
               </a:spcAft>
             </a:pPr>
             <a:r>
-              <a:rPr sz="1500" b="0">
+              <a:rPr sz="1600" b="0">
                 <a:solidFill>
                   <a:srgbClr val="444444"/>
                 </a:solidFill>
                 <a:latin typeface="Arial"/>
               </a:rPr>
-              <a:t>●  Emergence: the CoT effect appears only above a model-scale threshold; in small models it is absent or harmful.</a:t>
-            </a:r>
-          </a:p>
-          <a:p>
-            <a:pPr>
-              <a:spcAft>
-                <a:spcPts val="600"/>
-              </a:spcAft>
-            </a:pPr>
-            <a:r>
-              <a:rPr sz="1500" b="0">
-                <a:solidFill>
-                  <a:srgbClr val="444444"/>
-                </a:solidFill>
-                <a:latin typeface="Arial"/>
-              </a:rPr>
-              <a:t>●  Bound: writing the solution moves the per-prediction bound outward, it does not remove it. Each written step is itself one prediction. With three-digit factors in the same six problems, the written solution scores 1 of 6.</a:t>
+              <a:t>●  Property: the example fixes what the instruction leaves open: the step granularity, the wording of each step, and the exact final line.</a:t>
             </a:r>
           </a:p>
         </p:txBody>
@@ -4772,8 +4885,8 @@
         </p:nvSpPr>
         <p:spPr>
           <a:xfrm>
-            <a:off x="548640" y="1828800"/>
-            <a:ext cx="8046720" cy="1463040"/>
+            <a:off x="384048" y="256032"/>
+            <a:ext cx="8375904" cy="640080"/>
           </a:xfrm>
           <a:prstGeom prst="rect">
             <a:avLst/>
@@ -4781,20 +4894,122 @@
           <a:noFill/>
         </p:spPr>
         <p:txBody>
-          <a:bodyPr wrap="square" anchor="ctr">
+          <a:bodyPr wrap="square">
             <a:spAutoFit/>
           </a:bodyPr>
           <a:lstStyle/>
           <a:p>
-            <a:pPr algn="ctr"/>
-            <a:r>
-              <a:rPr sz="3600" b="0">
+            <a:r>
+              <a:rPr sz="2400" b="0">
                 <a:solidFill>
                   <a:srgbClr val="000000"/>
                 </a:solidFill>
                 <a:latin typeface="Arial"/>
               </a:rPr>
-              <a:t>The Limit of Chain-of-Thought</a:t>
+              <a:t>Instruction versus example</a:t>
+            </a:r>
+          </a:p>
+        </p:txBody>
+      </p:sp>
+      <p:sp>
+        <p:nvSpPr>
+          <p:cNvPr id="3" name="TextBox 2"/>
+          <p:cNvSpPr txBox="1"/>
+          <p:nvPr/>
+        </p:nvSpPr>
+        <p:spPr>
+          <a:xfrm>
+            <a:off x="502920" y="987552"/>
+            <a:ext cx="8229600" cy="3931920"/>
+          </a:xfrm>
+          <a:prstGeom prst="rect">
+            <a:avLst/>
+          </a:prstGeom>
+          <a:noFill/>
+        </p:spPr>
+        <p:txBody>
+          <a:bodyPr wrap="square">
+            <a:spAutoFit/>
+          </a:bodyPr>
+          <a:lstStyle/>
+          <a:p>
+            <a:pPr>
+              <a:spcAft>
+                <a:spcPts val="600"/>
+              </a:spcAft>
+            </a:pPr>
+            <a:r>
+              <a:rPr sz="1500" b="0">
+                <a:solidFill>
+                  <a:srgbClr val="444444"/>
+                </a:solidFill>
+                <a:latin typeface="Arial"/>
+              </a:rPr>
+              <a:t>●  Difference: an instruction names the requirement; an example exhibits it. The example therefore pins format and procedure that the instruction underspecifies.</a:t>
+            </a:r>
+          </a:p>
+          <a:p>
+            <a:pPr>
+              <a:spcAft>
+                <a:spcPts val="0"/>
+              </a:spcAft>
+            </a:pPr>
+            <a:r>
+              <a:rPr sz="1300" b="0">
+                <a:solidFill>
+                  <a:srgbClr val="1F3A5F"/>
+                </a:solidFill>
+                <a:latin typeface="Courier New"/>
+              </a:rPr>
+              <a:t>      Instruction: "Answer with the date."      → "The final date is March 10th, 2026."</a:t>
+            </a:r>
+          </a:p>
+          <a:p>
+            <a:pPr>
+              <a:spcAft>
+                <a:spcPts val="0"/>
+              </a:spcAft>
+            </a:pPr>
+            <a:r>
+              <a:rPr sz="1300" b="0">
+                <a:solidFill>
+                  <a:srgbClr val="1F3A5F"/>
+                </a:solidFill>
+                <a:latin typeface="Courier New"/>
+              </a:rPr>
+              <a:t>      Example:    "Note: … / DATE: 2026-06-09"  → "DATE: 2026-03-10"</a:t>
+            </a:r>
+          </a:p>
+          <a:p>
+            <a:pPr>
+              <a:spcAft>
+                <a:spcPts val="600"/>
+              </a:spcAft>
+            </a:pPr>
+            <a:r>
+              <a:rPr sz="1500" b="0">
+                <a:solidFill>
+                  <a:srgbClr val="444444"/>
+                </a:solidFill>
+                <a:latin typeface="Arial"/>
+              </a:rPr>
+              <a:t>●  Emergence: the CoT effect appears only above a model-scale threshold; in small models it is absent or harmful.</a:t>
+            </a:r>
+          </a:p>
+          <a:p>
+            <a:pPr>
+              <a:spcAft>
+                <a:spcPts val="600"/>
+              </a:spcAft>
+            </a:pPr>
+            <a:r>
+              <a:rPr sz="1500" b="0">
+                <a:solidFill>
+                  <a:srgbClr val="444444"/>
+                </a:solidFill>
+                <a:latin typeface="Arial"/>
+              </a:rPr>
+              <a:t>●  Bound: writing the solution moves the per-prediction bound outward, it does not remove it. Each written step is itself one prediction. With three-digit factors in the same six problems, the written solution scores 1 of 6.</a:t>
             </a:r>
           </a:p>
         </p:txBody>
@@ -4825,8 +5040,8 @@
         </p:nvSpPr>
         <p:spPr>
           <a:xfrm>
-            <a:off x="384048" y="256032"/>
-            <a:ext cx="8375904" cy="640080"/>
+            <a:off x="548640" y="1828800"/>
+            <a:ext cx="8046720" cy="1463040"/>
           </a:xfrm>
           <a:prstGeom prst="rect">
             <a:avLst/>
@@ -4834,122 +5049,20 @@
           <a:noFill/>
         </p:spPr>
         <p:txBody>
-          <a:bodyPr wrap="square">
+          <a:bodyPr wrap="square" anchor="ctr">
             <a:spAutoFit/>
           </a:bodyPr>
           <a:lstStyle/>
           <a:p>
-            <a:r>
-              <a:rPr sz="2400" b="0">
+            <a:pPr algn="ctr"/>
+            <a:r>
+              <a:rPr sz="3600" b="0">
                 <a:solidFill>
                   <a:srgbClr val="000000"/>
                 </a:solidFill>
                 <a:latin typeface="Arial"/>
               </a:rPr>
-              <a:t>Hallucination: coherent reasoning on a false premise</a:t>
-            </a:r>
-          </a:p>
-        </p:txBody>
-      </p:sp>
-      <p:sp>
-        <p:nvSpPr>
-          <p:cNvPr id="3" name="TextBox 2"/>
-          <p:cNvSpPr txBox="1"/>
-          <p:nvPr/>
-        </p:nvSpPr>
-        <p:spPr>
-          <a:xfrm>
-            <a:off x="502920" y="987552"/>
-            <a:ext cx="8229600" cy="3931920"/>
-          </a:xfrm>
-          <a:prstGeom prst="rect">
-            <a:avLst/>
-          </a:prstGeom>
-          <a:noFill/>
-        </p:spPr>
-        <p:txBody>
-          <a:bodyPr wrap="square">
-            <a:spAutoFit/>
-          </a:bodyPr>
-          <a:lstStyle/>
-          <a:p>
-            <a:pPr>
-              <a:spcAft>
-                <a:spcPts val="600"/>
-              </a:spcAft>
-            </a:pPr>
-            <a:r>
-              <a:rPr sz="1500" b="0">
-                <a:solidFill>
-                  <a:srgbClr val="444444"/>
-                </a:solidFill>
-                <a:latin typeface="Arial"/>
-              </a:rPr>
-              <a:t>●  Definition: hallucination = generation of content that is plausible but not factual.</a:t>
-            </a:r>
-          </a:p>
-          <a:p>
-            <a:pPr>
-              <a:spcAft>
-                <a:spcPts val="600"/>
-              </a:spcAft>
-            </a:pPr>
-            <a:r>
-              <a:rPr sz="1500" b="0">
-                <a:solidFill>
-                  <a:srgbClr val="444444"/>
-                </a:solidFill>
-                <a:latin typeface="Arial"/>
-              </a:rPr>
-              <a:t>●  Mechanism: prediction does not stop when a required fact is absent, exactly as it does not stop when a computation is unfinished. The most probable continuation is emitted, and it has the form of an answer.</a:t>
-            </a:r>
-          </a:p>
-          <a:p>
-            <a:pPr>
-              <a:spcAft>
-                <a:spcPts val="600"/>
-              </a:spcAft>
-            </a:pPr>
-            <a:r>
-              <a:rPr sz="1500" b="0">
-                <a:solidFill>
-                  <a:srgbClr val="444444"/>
-                </a:solidFill>
-                <a:latin typeface="Arial"/>
-              </a:rPr>
-              <a:t>●  Question: "Aside from the Apple Remote, what other device can control the program the Apple Remote was originally designed to interact with?"</a:t>
-            </a:r>
-          </a:p>
-          <a:p>
-            <a:pPr>
-              <a:spcAft>
-                <a:spcPts val="0"/>
-              </a:spcAft>
-            </a:pPr>
-            <a:r>
-              <a:rPr sz="1300" b="0">
-                <a:solidFill>
-                  <a:srgbClr val="1F3A5F"/>
-                </a:solidFill>
-                <a:latin typeface="Courier New"/>
-              </a:rPr>
-              <a:t>      CoT output: The Apple Remote was originally designed to interact with Apple TV. Apple TV can be controlled by iPhone, iPad, and iPod Touch. So the answer is iPhone, iPad, and iPod Touch.</a:t>
-            </a:r>
-          </a:p>
-          <a:p>
-            <a:pPr>
-              <a:spcAft>
-                <a:spcPts val="600"/>
-              </a:spcAft>
-            </a:pPr>
-            <a:r>
-              <a:rPr sz="1500" b="0">
-                <a:solidFill>
-                  <a:srgbClr val="444444"/>
-                </a:solidFill>
-                <a:latin typeface="Arial"/>
-              </a:rPr>
-              <a:t>●  Error: the first premise is false. The program was Front Row; the correct answer is keyboard function keys. Every step after the premise is valid.</a:t>
+              <a:t>The Limit of Chain-of-Thought</a:t>
             </a:r>
           </a:p>
         </p:txBody>
@@ -5001,7 +5114,7 @@
                 </a:solidFill>
                 <a:latin typeface="Arial"/>
               </a:rPr>
-              <a:t>Why prompting cannot repair it</a:t>
+              <a:t>Hallucination: coherent reasoning on a false premise</a:t>
             </a:r>
           </a:p>
         </p:txBody>
@@ -5040,7 +5153,7 @@
                 </a:solidFill>
                 <a:latin typeface="Arial"/>
               </a:rPr>
-              <a:t>●  Cause: CoT draws only on knowledge stored in the parameters. No prompt gives the model access to an external fact.</a:t>
+              <a:t>●  Definition: hallucination = generation of content that is plausible but not factual.</a:t>
             </a:r>
           </a:p>
           <a:p>
@@ -5056,7 +5169,23 @@
                 </a:solidFill>
                 <a:latin typeface="Arial"/>
               </a:rPr>
-              <a:t>●  Test: adding "Verify each step before continuing" produces a more elaborate chain on the same false premise.</a:t>
+              <a:t>●  Mechanism: prediction does not stop when a required fact is absent, exactly as it does not stop when a computation is unfinished. The most probable continuation is emitted, and it has the form of an answer.</a:t>
+            </a:r>
+          </a:p>
+          <a:p>
+            <a:pPr>
+              <a:spcAft>
+                <a:spcPts val="600"/>
+              </a:spcAft>
+            </a:pPr>
+            <a:r>
+              <a:rPr sz="1500" b="0">
+                <a:solidFill>
+                  <a:srgbClr val="444444"/>
+                </a:solidFill>
+                <a:latin typeface="Arial"/>
+              </a:rPr>
+              <a:t>●  Question: "Aside from the Apple Remote, what other device can control the program the Apple Remote was originally designed to interact with?"</a:t>
             </a:r>
           </a:p>
           <a:p>
@@ -5072,23 +5201,7 @@
                 </a:solidFill>
                 <a:latin typeface="Courier New"/>
               </a:rPr>
-              <a:t>      Prompt: &lt;question&gt; Verify each step before continuing.</a:t>
-            </a:r>
-          </a:p>
-          <a:p>
-            <a:pPr>
-              <a:spcAft>
-                <a:spcPts val="0"/>
-              </a:spcAft>
-            </a:pPr>
-            <a:r>
-              <a:rPr sz="1300" b="0">
-                <a:solidFill>
-                  <a:srgbClr val="1F3A5F"/>
-                </a:solidFill>
-                <a:latin typeface="Courier New"/>
-              </a:rPr>
-              <a:t>      Output: Step 1: The Apple Remote was designed for Apple TV. Verified. Step 2: …</a:t>
+              <a:t>      CoT output: The Apple Remote was originally designed to interact with Apple TV. Apple TV can be controlled by iPhone, iPad, and iPod Touch. So the answer is iPhone, iPad, and iPod Touch.</a:t>
             </a:r>
           </a:p>
           <a:p>
@@ -5104,23 +5217,7 @@
                 </a:solidFill>
                 <a:latin typeface="Arial"/>
               </a:rPr>
-              <a:t>●  Repair: a step that checks facts against an external source, that is, a tool call (for this question, a search) inserted between the premise and the next step.</a:t>
-            </a:r>
-          </a:p>
-          <a:p>
-            <a:pPr>
-              <a:spcAft>
-                <a:spcPts val="600"/>
-              </a:spcAft>
-            </a:pPr>
-            <a:r>
-              <a:rPr sz="1500" b="0">
-                <a:solidFill>
-                  <a:srgbClr val="444444"/>
-                </a:solidFill>
-                <a:latin typeface="Arial"/>
-              </a:rPr>
-              <a:t>●  Remaining direction: CoT adds predictions within one response. Predictions can also be added by generating the response more than once.</a:t>
+              <a:t>●  Error: the first premise is false. The program was Front Row; the correct answer is keyboard function keys. Every step after the premise is valid.</a:t>
             </a:r>
           </a:p>
         </p:txBody>
@@ -5216,8 +5313,8 @@
         </p:nvSpPr>
         <p:spPr>
           <a:xfrm>
-            <a:off x="548640" y="1828800"/>
-            <a:ext cx="8046720" cy="1463040"/>
+            <a:off x="384048" y="256032"/>
+            <a:ext cx="8375904" cy="640080"/>
           </a:xfrm>
           <a:prstGeom prst="rect">
             <a:avLst/>
@@ -5225,20 +5322,138 @@
           <a:noFill/>
         </p:spPr>
         <p:txBody>
-          <a:bodyPr wrap="square" anchor="ctr">
+          <a:bodyPr wrap="square">
             <a:spAutoFit/>
           </a:bodyPr>
           <a:lstStyle/>
           <a:p>
-            <a:pPr algn="ctr"/>
-            <a:r>
-              <a:rPr sz="3600" b="0">
+            <a:r>
+              <a:rPr sz="2400" b="0">
                 <a:solidFill>
                   <a:srgbClr val="000000"/>
                 </a:solidFill>
                 <a:latin typeface="Arial"/>
               </a:rPr>
-              <a:t>Self-Consistency</a:t>
+              <a:t>Why prompting cannot repair it</a:t>
+            </a:r>
+          </a:p>
+        </p:txBody>
+      </p:sp>
+      <p:sp>
+        <p:nvSpPr>
+          <p:cNvPr id="3" name="TextBox 2"/>
+          <p:cNvSpPr txBox="1"/>
+          <p:nvPr/>
+        </p:nvSpPr>
+        <p:spPr>
+          <a:xfrm>
+            <a:off x="502920" y="987552"/>
+            <a:ext cx="8229600" cy="3931920"/>
+          </a:xfrm>
+          <a:prstGeom prst="rect">
+            <a:avLst/>
+          </a:prstGeom>
+          <a:noFill/>
+        </p:spPr>
+        <p:txBody>
+          <a:bodyPr wrap="square">
+            <a:spAutoFit/>
+          </a:bodyPr>
+          <a:lstStyle/>
+          <a:p>
+            <a:pPr>
+              <a:spcAft>
+                <a:spcPts val="600"/>
+              </a:spcAft>
+            </a:pPr>
+            <a:r>
+              <a:rPr sz="1500" b="0">
+                <a:solidFill>
+                  <a:srgbClr val="444444"/>
+                </a:solidFill>
+                <a:latin typeface="Arial"/>
+              </a:rPr>
+              <a:t>●  Cause: CoT draws only on knowledge stored in the parameters. No prompt gives the model access to an external fact.</a:t>
+            </a:r>
+          </a:p>
+          <a:p>
+            <a:pPr>
+              <a:spcAft>
+                <a:spcPts val="600"/>
+              </a:spcAft>
+            </a:pPr>
+            <a:r>
+              <a:rPr sz="1500" b="0">
+                <a:solidFill>
+                  <a:srgbClr val="444444"/>
+                </a:solidFill>
+                <a:latin typeface="Arial"/>
+              </a:rPr>
+              <a:t>●  Test: adding "Verify each step before continuing" produces a more elaborate chain on the same false premise.</a:t>
+            </a:r>
+          </a:p>
+          <a:p>
+            <a:pPr>
+              <a:spcAft>
+                <a:spcPts val="0"/>
+              </a:spcAft>
+            </a:pPr>
+            <a:r>
+              <a:rPr sz="1300" b="0">
+                <a:solidFill>
+                  <a:srgbClr val="1F3A5F"/>
+                </a:solidFill>
+                <a:latin typeface="Courier New"/>
+              </a:rPr>
+              <a:t>      Prompt: &lt;question&gt; Verify each step before continuing.</a:t>
+            </a:r>
+          </a:p>
+          <a:p>
+            <a:pPr>
+              <a:spcAft>
+                <a:spcPts val="0"/>
+              </a:spcAft>
+            </a:pPr>
+            <a:r>
+              <a:rPr sz="1300" b="0">
+                <a:solidFill>
+                  <a:srgbClr val="1F3A5F"/>
+                </a:solidFill>
+                <a:latin typeface="Courier New"/>
+              </a:rPr>
+              <a:t>      Output: Step 1: The Apple Remote was designed for Apple TV. Verified. Step 2: …</a:t>
+            </a:r>
+          </a:p>
+          <a:p>
+            <a:pPr>
+              <a:spcAft>
+                <a:spcPts val="600"/>
+              </a:spcAft>
+            </a:pPr>
+            <a:r>
+              <a:rPr sz="1500" b="0">
+                <a:solidFill>
+                  <a:srgbClr val="444444"/>
+                </a:solidFill>
+                <a:latin typeface="Arial"/>
+              </a:rPr>
+              <a:t>●  Repair: a step that checks facts against an external source, that is, a tool call (for this question, a search) inserted between the premise and the next step.</a:t>
+            </a:r>
+          </a:p>
+          <a:p>
+            <a:pPr>
+              <a:spcAft>
+                <a:spcPts val="600"/>
+              </a:spcAft>
+            </a:pPr>
+            <a:r>
+              <a:rPr sz="1500" b="0">
+                <a:solidFill>
+                  <a:srgbClr val="444444"/>
+                </a:solidFill>
+                <a:latin typeface="Arial"/>
+              </a:rPr>
+              <a:t>●  Remaining direction: CoT adds predictions within one response. Predictions can also be added by generating the response more than once.</a:t>
             </a:r>
           </a:p>
         </p:txBody>
@@ -5269,8 +5484,8 @@
         </p:nvSpPr>
         <p:spPr>
           <a:xfrm>
-            <a:off x="384048" y="256032"/>
-            <a:ext cx="8375904" cy="640080"/>
+            <a:off x="548640" y="1828800"/>
+            <a:ext cx="8046720" cy="1463040"/>
           </a:xfrm>
           <a:prstGeom prst="rect">
             <a:avLst/>
@@ -5278,106 +5493,20 @@
           <a:noFill/>
         </p:spPr>
         <p:txBody>
-          <a:bodyPr wrap="square">
+          <a:bodyPr wrap="square" anchor="ctr">
             <a:spAutoFit/>
           </a:bodyPr>
           <a:lstStyle/>
           <a:p>
-            <a:r>
-              <a:rPr sz="2400" b="0">
+            <a:pPr algn="ctr"/>
+            <a:r>
+              <a:rPr sz="3600" b="0">
                 <a:solidFill>
                   <a:srgbClr val="000000"/>
                 </a:solidFill>
                 <a:latin typeface="Arial"/>
               </a:rPr>
-              <a:t>One response as one sample</a:t>
-            </a:r>
-          </a:p>
-        </p:txBody>
-      </p:sp>
-      <p:sp>
-        <p:nvSpPr>
-          <p:cNvPr id="3" name="TextBox 2"/>
-          <p:cNvSpPr txBox="1"/>
-          <p:nvPr/>
-        </p:nvSpPr>
-        <p:spPr>
-          <a:xfrm>
-            <a:off x="502920" y="987552"/>
-            <a:ext cx="8229600" cy="3931920"/>
-          </a:xfrm>
-          <a:prstGeom prst="rect">
-            <a:avLst/>
-          </a:prstGeom>
-          <a:noFill/>
-        </p:spPr>
-        <p:txBody>
-          <a:bodyPr wrap="square">
-            <a:spAutoFit/>
-          </a:bodyPr>
-          <a:lstStyle/>
-          <a:p>
-            <a:pPr>
-              <a:spcAft>
-                <a:spcPts val="600"/>
-              </a:spcAft>
-            </a:pPr>
-            <a:r>
-              <a:rPr sz="1600" b="0">
-                <a:solidFill>
-                  <a:srgbClr val="444444"/>
-                </a:solidFill>
-                <a:latin typeface="Arial"/>
-              </a:rPr>
-              <a:t>●  Sampling: an LLM draws each token from a probability distribution. Temperature = the parameter controlling the randomness of that draw; at temperature 0 the most probable token is taken.</a:t>
-            </a:r>
-          </a:p>
-          <a:p>
-            <a:pPr>
-              <a:spcAft>
-                <a:spcPts val="600"/>
-              </a:spcAft>
-            </a:pPr>
-            <a:r>
-              <a:rPr sz="1600" b="0">
-                <a:solidFill>
-                  <a:srgbClr val="444444"/>
-                </a:solidFill>
-                <a:latin typeface="Arial"/>
-              </a:rPr>
-              <a:t>●  Consequence: at temperature &gt; 0, repeated runs of the same prompt follow different solution paths and may reach different answers.</a:t>
-            </a:r>
-          </a:p>
-          <a:p>
-            <a:pPr>
-              <a:spcAft>
-                <a:spcPts val="600"/>
-              </a:spcAft>
-            </a:pPr>
-            <a:r>
-              <a:rPr sz="1600" b="0">
-                <a:solidFill>
-                  <a:srgbClr val="444444"/>
-                </a:solidFill>
-                <a:latin typeface="Arial"/>
-              </a:rPr>
-              <a:t>●  Interpretation: one response is one sample from the set of possible reasoning paths. A wrong sample does not imply that the next sample is wrong.</a:t>
-            </a:r>
-          </a:p>
-          <a:p>
-            <a:pPr>
-              <a:spcAft>
-                <a:spcPts val="0"/>
-              </a:spcAft>
-            </a:pPr>
-            <a:r>
-              <a:rPr sz="1400" b="0">
-                <a:solidFill>
-                  <a:srgbClr val="1F3A5F"/>
-                </a:solidFill>
-                <a:latin typeface="Courier New"/>
-              </a:rPr>
-              <a:t>      Same CoT prompt, temperature 1.0, five runs → final answers: 9, 27, 9, 8, 9</a:t>
+              <a:t>Self-Consistency</a:t>
             </a:r>
           </a:p>
         </p:txBody>
@@ -5429,7 +5558,7 @@
                 </a:solidFill>
                 <a:latin typeface="Arial"/>
               </a:rPr>
-              <a:t>Majority voting — Self-Consistency</a:t>
+              <a:t>One response as one sample</a:t>
             </a:r>
           </a:p>
         </p:txBody>
@@ -5468,7 +5597,7 @@
                 </a:solidFill>
                 <a:latin typeface="Arial"/>
               </a:rPr>
-              <a:t>●  Definition: self-consistency = sample N solutions at temperature &gt; 0, extract the final answer of each, and return the majority answer.</a:t>
+              <a:t>●  Sampling: an LLM draws each token from a probability distribution. Temperature = the parameter controlling the randomness of that draw; at temperature 0 the most probable token is taken.</a:t>
             </a:r>
           </a:p>
           <a:p>
@@ -5484,7 +5613,7 @@
                 </a:solidFill>
                 <a:latin typeface="Arial"/>
               </a:rPr>
-              <a:t>●  Justification: P(a | q) = Σ_r P(a | r, q) P(r | q). A single response evaluates one term (one path r). The vote over samples estimates the sum over paths.</a:t>
+              <a:t>●  Consequence: at temperature &gt; 0, repeated runs of the same prompt follow different solution paths and may reach different answers.</a:t>
             </a:r>
           </a:p>
           <a:p>
@@ -5500,7 +5629,23 @@
                 </a:solidFill>
                 <a:latin typeface="Arial"/>
               </a:rPr>
-              <a:t>●  Empirical pattern: correct answers are reached by different paths that converge on one value; wrong answers scatter across distinct values.</a:t>
+              <a:t>●  Interpretation: one response is one sample from the set of possible reasoning paths. A wrong sample does not imply that the next sample is wrong.</a:t>
+            </a:r>
+          </a:p>
+          <a:p>
+            <a:pPr>
+              <a:spcAft>
+                <a:spcPts val="0"/>
+              </a:spcAft>
+            </a:pPr>
+            <a:r>
+              <a:rPr sz="1400" b="0">
+                <a:solidFill>
+                  <a:srgbClr val="1F3A5F"/>
+                </a:solidFill>
+                <a:latin typeface="Courier New"/>
+              </a:rPr>
+              <a:t>      Same CoT prompt, temperature 1.0, five runs → final answers: 9, 27, 9, 8, 9</a:t>
             </a:r>
           </a:p>
         </p:txBody>
@@ -5514,6 +5659,129 @@
 </file>
 
 <file path=ppt/slides/slide23.xml><?xml version="1.0" encoding="utf-8"?>
+<p:sld xmlns:a="http://schemas.openxmlformats.org/drawingml/2006/main" xmlns:p="http://schemas.openxmlformats.org/presentationml/2006/main" xmlns:r="http://schemas.openxmlformats.org/officeDocument/2006/relationships">
+  <p:cSld>
+    <p:spTree>
+      <p:nvGrpSpPr>
+        <p:cNvPr id="1" name=""/>
+        <p:cNvGrpSpPr/>
+        <p:nvPr/>
+      </p:nvGrpSpPr>
+      <p:grpSpPr/>
+      <p:sp>
+        <p:nvSpPr>
+          <p:cNvPr id="2" name="TextBox 1"/>
+          <p:cNvSpPr txBox="1"/>
+          <p:nvPr/>
+        </p:nvSpPr>
+        <p:spPr>
+          <a:xfrm>
+            <a:off x="384048" y="256032"/>
+            <a:ext cx="8375904" cy="640080"/>
+          </a:xfrm>
+          <a:prstGeom prst="rect">
+            <a:avLst/>
+          </a:prstGeom>
+          <a:noFill/>
+        </p:spPr>
+        <p:txBody>
+          <a:bodyPr wrap="square">
+            <a:spAutoFit/>
+          </a:bodyPr>
+          <a:lstStyle/>
+          <a:p>
+            <a:r>
+              <a:rPr sz="2400" b="0">
+                <a:solidFill>
+                  <a:srgbClr val="000000"/>
+                </a:solidFill>
+                <a:latin typeface="Arial"/>
+              </a:rPr>
+              <a:t>Majority voting — Self-Consistency</a:t>
+            </a:r>
+          </a:p>
+        </p:txBody>
+      </p:sp>
+      <p:sp>
+        <p:nvSpPr>
+          <p:cNvPr id="3" name="TextBox 2"/>
+          <p:cNvSpPr txBox="1"/>
+          <p:nvPr/>
+        </p:nvSpPr>
+        <p:spPr>
+          <a:xfrm>
+            <a:off x="502920" y="987552"/>
+            <a:ext cx="8229600" cy="3931920"/>
+          </a:xfrm>
+          <a:prstGeom prst="rect">
+            <a:avLst/>
+          </a:prstGeom>
+          <a:noFill/>
+        </p:spPr>
+        <p:txBody>
+          <a:bodyPr wrap="square">
+            <a:spAutoFit/>
+          </a:bodyPr>
+          <a:lstStyle/>
+          <a:p>
+            <a:pPr>
+              <a:spcAft>
+                <a:spcPts val="600"/>
+              </a:spcAft>
+            </a:pPr>
+            <a:r>
+              <a:rPr sz="1600" b="0">
+                <a:solidFill>
+                  <a:srgbClr val="444444"/>
+                </a:solidFill>
+                <a:latin typeface="Arial"/>
+              </a:rPr>
+              <a:t>●  Definition: self-consistency = sample N solutions at temperature &gt; 0, extract the final answer of each, and return the majority answer.</a:t>
+            </a:r>
+          </a:p>
+          <a:p>
+            <a:pPr>
+              <a:spcAft>
+                <a:spcPts val="600"/>
+              </a:spcAft>
+            </a:pPr>
+            <a:r>
+              <a:rPr sz="1600" b="0">
+                <a:solidFill>
+                  <a:srgbClr val="444444"/>
+                </a:solidFill>
+                <a:latin typeface="Arial"/>
+              </a:rPr>
+              <a:t>●  Justification: P(a | q) = Σ_r P(a | r, q) P(r | q). A single response evaluates one term (one path r). The vote over samples estimates the sum over paths.</a:t>
+            </a:r>
+          </a:p>
+          <a:p>
+            <a:pPr>
+              <a:spcAft>
+                <a:spcPts val="600"/>
+              </a:spcAft>
+            </a:pPr>
+            <a:r>
+              <a:rPr sz="1600" b="0">
+                <a:solidFill>
+                  <a:srgbClr val="444444"/>
+                </a:solidFill>
+                <a:latin typeface="Arial"/>
+              </a:rPr>
+              <a:t>●  Empirical pattern: correct answers are reached by different paths that converge on one value; wrong answers scatter across distinct values.</a:t>
+            </a:r>
+          </a:p>
+        </p:txBody>
+      </p:sp>
+    </p:spTree>
+  </p:cSld>
+  <p:clrMapOvr>
+    <a:masterClrMapping/>
+  </p:clrMapOvr>
+</p:sld>
+</file>
+
+<file path=ppt/slides/slide24.xml><?xml version="1.0" encoding="utf-8"?>
 <p:sld xmlns:a="http://schemas.openxmlformats.org/drawingml/2006/main" xmlns:p="http://schemas.openxmlformats.org/presentationml/2006/main" xmlns:r="http://schemas.openxmlformats.org/officeDocument/2006/relationships">
   <p:cSld>
     <p:spTree>
@@ -5628,7 +5896,7 @@
 </p:sld>
 </file>
 
-<file path=ppt/slides/slide24.xml><?xml version="1.0" encoding="utf-8"?>
+<file path=ppt/slides/slide25.xml><?xml version="1.0" encoding="utf-8"?>
 <p:sld xmlns:a="http://schemas.openxmlformats.org/drawingml/2006/main" xmlns:p="http://schemas.openxmlformats.org/presentationml/2006/main" xmlns:r="http://schemas.openxmlformats.org/officeDocument/2006/relationships">
   <p:cSld>
     <p:spTree>
@@ -5739,59 +6007,6 @@
                 <a:latin typeface="Arial"/>
               </a:rPr>
               <a:t>●  Replacement: selection among non-discrete outputs requires a scoring function, a verifier.</a:t>
-            </a:r>
-          </a:p>
-        </p:txBody>
-      </p:sp>
-    </p:spTree>
-  </p:cSld>
-  <p:clrMapOvr>
-    <a:masterClrMapping/>
-  </p:clrMapOvr>
-</p:sld>
-</file>
-
-<file path=ppt/slides/slide25.xml><?xml version="1.0" encoding="utf-8"?>
-<p:sld xmlns:a="http://schemas.openxmlformats.org/drawingml/2006/main" xmlns:p="http://schemas.openxmlformats.org/presentationml/2006/main" xmlns:r="http://schemas.openxmlformats.org/officeDocument/2006/relationships">
-  <p:cSld>
-    <p:spTree>
-      <p:nvGrpSpPr>
-        <p:cNvPr id="1" name=""/>
-        <p:cNvGrpSpPr/>
-        <p:nvPr/>
-      </p:nvGrpSpPr>
-      <p:grpSpPr/>
-      <p:sp>
-        <p:nvSpPr>
-          <p:cNvPr id="2" name="TextBox 1"/>
-          <p:cNvSpPr txBox="1"/>
-          <p:nvPr/>
-        </p:nvSpPr>
-        <p:spPr>
-          <a:xfrm>
-            <a:off x="548640" y="1828800"/>
-            <a:ext cx="8046720" cy="1463040"/>
-          </a:xfrm>
-          <a:prstGeom prst="rect">
-            <a:avLst/>
-          </a:prstGeom>
-          <a:noFill/>
-        </p:spPr>
-        <p:txBody>
-          <a:bodyPr wrap="square" anchor="ctr">
-            <a:spAutoFit/>
-          </a:bodyPr>
-          <a:lstStyle/>
-          <a:p>
-            <a:pPr algn="ctr"/>
-            <a:r>
-              <a:rPr sz="3600" b="0">
-                <a:solidFill>
-                  <a:srgbClr val="000000"/>
-                </a:solidFill>
-                <a:latin typeface="Arial"/>
-              </a:rPr>
-              <a:t>Test-Time Compute</a:t>
             </a:r>
           </a:p>
         </p:txBody>
@@ -5822,6 +6037,59 @@
         </p:nvSpPr>
         <p:spPr>
           <a:xfrm>
+            <a:off x="548640" y="1828800"/>
+            <a:ext cx="8046720" cy="1463040"/>
+          </a:xfrm>
+          <a:prstGeom prst="rect">
+            <a:avLst/>
+          </a:prstGeom>
+          <a:noFill/>
+        </p:spPr>
+        <p:txBody>
+          <a:bodyPr wrap="square" anchor="ctr">
+            <a:spAutoFit/>
+          </a:bodyPr>
+          <a:lstStyle/>
+          <a:p>
+            <a:pPr algn="ctr"/>
+            <a:r>
+              <a:rPr sz="3600" b="0">
+                <a:solidFill>
+                  <a:srgbClr val="000000"/>
+                </a:solidFill>
+                <a:latin typeface="Arial"/>
+              </a:rPr>
+              <a:t>Test-Time Compute</a:t>
+            </a:r>
+          </a:p>
+        </p:txBody>
+      </p:sp>
+    </p:spTree>
+  </p:cSld>
+  <p:clrMapOvr>
+    <a:masterClrMapping/>
+  </p:clrMapOvr>
+</p:sld>
+</file>
+
+<file path=ppt/slides/slide27.xml><?xml version="1.0" encoding="utf-8"?>
+<p:sld xmlns:a="http://schemas.openxmlformats.org/drawingml/2006/main" xmlns:p="http://schemas.openxmlformats.org/presentationml/2006/main" xmlns:r="http://schemas.openxmlformats.org/officeDocument/2006/relationships">
+  <p:cSld>
+    <p:spTree>
+      <p:nvGrpSpPr>
+        <p:cNvPr id="1" name=""/>
+        <p:cNvGrpSpPr/>
+        <p:nvPr/>
+      </p:nvGrpSpPr>
+      <p:grpSpPr/>
+      <p:sp>
+        <p:nvSpPr>
+          <p:cNvPr id="2" name="TextBox 1"/>
+          <p:cNvSpPr txBox="1"/>
+          <p:nvPr/>
+        </p:nvSpPr>
+        <p:spPr>
+          <a:xfrm>
             <a:off x="384048" y="256032"/>
             <a:ext cx="8375904" cy="640080"/>
           </a:xfrm>
@@ -5943,7 +6211,7 @@
 </p:sld>
 </file>
 
-<file path=ppt/slides/slide27.xml><?xml version="1.0" encoding="utf-8"?>
+<file path=ppt/slides/slide28.xml><?xml version="1.0" encoding="utf-8"?>
 <p:sld xmlns:a="http://schemas.openxmlformats.org/drawingml/2006/main" xmlns:p="http://schemas.openxmlformats.org/presentationml/2006/main" xmlns:r="http://schemas.openxmlformats.org/officeDocument/2006/relationships">
   <p:cSld>
     <p:spTree>
@@ -6250,7 +6518,7 @@
 </p:sld>
 </file>
 
-<file path=ppt/slides/slide28.xml><?xml version="1.0" encoding="utf-8"?>
+<file path=ppt/slides/slide29.xml><?xml version="1.0" encoding="utf-8"?>
 <p:sld xmlns:a="http://schemas.openxmlformats.org/drawingml/2006/main" xmlns:p="http://schemas.openxmlformats.org/presentationml/2006/main" xmlns:r="http://schemas.openxmlformats.org/officeDocument/2006/relationships">
   <p:cSld>
     <p:spTree>
@@ -6361,177 +6629,6 @@
                 <a:latin typeface="Arial"/>
               </a:rPr>
               <a:t>●  Cost: N samples multiply cost and latency by N. The design variable is which queries receive N &gt; 1.</a:t>
-            </a:r>
-          </a:p>
-        </p:txBody>
-      </p:sp>
-    </p:spTree>
-  </p:cSld>
-  <p:clrMapOvr>
-    <a:masterClrMapping/>
-  </p:clrMapOvr>
-</p:sld>
-</file>
-
-<file path=ppt/slides/slide29.xml><?xml version="1.0" encoding="utf-8"?>
-<p:sld xmlns:a="http://schemas.openxmlformats.org/drawingml/2006/main" xmlns:p="http://schemas.openxmlformats.org/presentationml/2006/main" xmlns:r="http://schemas.openxmlformats.org/officeDocument/2006/relationships">
-  <p:cSld>
-    <p:spTree>
-      <p:nvGrpSpPr>
-        <p:cNvPr id="1" name=""/>
-        <p:cNvGrpSpPr/>
-        <p:nvPr/>
-      </p:nvGrpSpPr>
-      <p:grpSpPr/>
-      <p:sp>
-        <p:nvSpPr>
-          <p:cNvPr id="2" name="TextBox 1"/>
-          <p:cNvSpPr txBox="1"/>
-          <p:nvPr/>
-        </p:nvSpPr>
-        <p:spPr>
-          <a:xfrm>
-            <a:off x="384048" y="256032"/>
-            <a:ext cx="8375904" cy="640080"/>
-          </a:xfrm>
-          <a:prstGeom prst="rect">
-            <a:avLst/>
-          </a:prstGeom>
-          <a:noFill/>
-        </p:spPr>
-        <p:txBody>
-          <a:bodyPr wrap="square">
-            <a:spAutoFit/>
-          </a:bodyPr>
-          <a:lstStyle/>
-          <a:p>
-            <a:r>
-              <a:rPr sz="2400" b="0">
-                <a:solidFill>
-                  <a:srgbClr val="000000"/>
-                </a:solidFill>
-                <a:latin typeface="Arial"/>
-              </a:rPr>
-              <a:t>Summary</a:t>
-            </a:r>
-          </a:p>
-        </p:txBody>
-      </p:sp>
-      <p:sp>
-        <p:nvSpPr>
-          <p:cNvPr id="3" name="TextBox 2"/>
-          <p:cNvSpPr txBox="1"/>
-          <p:nvPr/>
-        </p:nvSpPr>
-        <p:spPr>
-          <a:xfrm>
-            <a:off x="502920" y="987552"/>
-            <a:ext cx="8229600" cy="3931920"/>
-          </a:xfrm>
-          <a:prstGeom prst="rect">
-            <a:avLst/>
-          </a:prstGeom>
-          <a:noFill/>
-        </p:spPr>
-        <p:txBody>
-          <a:bodyPr wrap="square">
-            <a:spAutoFit/>
-          </a:bodyPr>
-          <a:lstStyle/>
-          <a:p>
-            <a:pPr>
-              <a:spcAft>
-                <a:spcPts val="600"/>
-              </a:spcAft>
-            </a:pPr>
-            <a:r>
-              <a:rPr sz="1400" b="0">
-                <a:solidFill>
-                  <a:srgbClr val="444444"/>
-                </a:solidFill>
-                <a:latin typeface="Arial"/>
-              </a:rPr>
-              <a:t>●  Observation: the same model answers the same problem correctly or incorrectly depending on whether the prompt permits a written solution before the answer.</a:t>
-            </a:r>
-          </a:p>
-          <a:p>
-            <a:pPr>
-              <a:spcAft>
-                <a:spcPts val="600"/>
-              </a:spcAft>
-            </a:pPr>
-            <a:r>
-              <a:rPr sz="1400" b="0">
-                <a:solidFill>
-                  <a:srgbClr val="444444"/>
-                </a:solidFill>
-                <a:latin typeface="Arial"/>
-              </a:rPr>
-              <a:t>●  Cause: the model's only workspace is the text it generates; an intermediate value exists only once written. Answer-only prompting forces every operation into one prediction, whose capacity is bounded.</a:t>
-            </a:r>
-          </a:p>
-          <a:p>
-            <a:pPr>
-              <a:spcAft>
-                <a:spcPts val="600"/>
-              </a:spcAft>
-            </a:pPr>
-            <a:r>
-              <a:rPr sz="1400" b="0">
-                <a:solidFill>
-                  <a:srgbClr val="444444"/>
-                </a:solidFill>
-                <a:latin typeface="Arial"/>
-              </a:rPr>
-              <a:t>●  Chain-of-thought: an instruction or worked examples induce the written solution. Examples additionally fix the granularity and format that an instruction leaves open.</a:t>
-            </a:r>
-          </a:p>
-          <a:p>
-            <a:pPr>
-              <a:spcAft>
-                <a:spcPts val="600"/>
-              </a:spcAft>
-            </a:pPr>
-            <a:r>
-              <a:rPr sz="1400" b="0">
-                <a:solidFill>
-                  <a:srgbClr val="444444"/>
-                </a:solidFill>
-                <a:latin typeface="Arial"/>
-              </a:rPr>
-              <a:t>●  Limit: chain-of-thought draws only on parametric knowledge. A false premise propagates through a valid chain; repair requires an external check, not a prompt.</a:t>
-            </a:r>
-          </a:p>
-          <a:p>
-            <a:pPr>
-              <a:spcAft>
-                <a:spcPts val="600"/>
-              </a:spcAft>
-            </a:pPr>
-            <a:r>
-              <a:rPr sz="1400" b="0">
-                <a:solidFill>
-                  <a:srgbClr val="444444"/>
-                </a:solidFill>
-                <a:latin typeface="Arial"/>
-              </a:rPr>
-              <a:t>●  Self-consistency: one response is one sampled path. Sampling N paths and taking the majority of discrete answers estimates the answer probability summed over paths.</a:t>
-            </a:r>
-          </a:p>
-          <a:p>
-            <a:pPr>
-              <a:spcAft>
-                <a:spcPts val="600"/>
-              </a:spcAft>
-            </a:pPr>
-            <a:r>
-              <a:rPr sz="1400" b="0">
-                <a:solidFill>
-                  <a:srgbClr val="444444"/>
-                </a:solidFill>
-                <a:latin typeface="Arial"/>
-              </a:rPr>
-              <a:t>●  Test-time compute: chain-of-thought and self-consistency both buy accuracy with additional predictions at inference time, with the weights unchanged.</a:t>
             </a:r>
           </a:p>
         </p:txBody>
@@ -6585,6 +6682,177 @@
                 <a:latin typeface="Arial"/>
               </a:rPr>
               <a:t>Prompt Dependence of Reasoning Accuracy</a:t>
+            </a:r>
+          </a:p>
+        </p:txBody>
+      </p:sp>
+    </p:spTree>
+  </p:cSld>
+  <p:clrMapOvr>
+    <a:masterClrMapping/>
+  </p:clrMapOvr>
+</p:sld>
+</file>
+
+<file path=ppt/slides/slide30.xml><?xml version="1.0" encoding="utf-8"?>
+<p:sld xmlns:a="http://schemas.openxmlformats.org/drawingml/2006/main" xmlns:p="http://schemas.openxmlformats.org/presentationml/2006/main" xmlns:r="http://schemas.openxmlformats.org/officeDocument/2006/relationships">
+  <p:cSld>
+    <p:spTree>
+      <p:nvGrpSpPr>
+        <p:cNvPr id="1" name=""/>
+        <p:cNvGrpSpPr/>
+        <p:nvPr/>
+      </p:nvGrpSpPr>
+      <p:grpSpPr/>
+      <p:sp>
+        <p:nvSpPr>
+          <p:cNvPr id="2" name="TextBox 1"/>
+          <p:cNvSpPr txBox="1"/>
+          <p:nvPr/>
+        </p:nvSpPr>
+        <p:spPr>
+          <a:xfrm>
+            <a:off x="384048" y="256032"/>
+            <a:ext cx="8375904" cy="640080"/>
+          </a:xfrm>
+          <a:prstGeom prst="rect">
+            <a:avLst/>
+          </a:prstGeom>
+          <a:noFill/>
+        </p:spPr>
+        <p:txBody>
+          <a:bodyPr wrap="square">
+            <a:spAutoFit/>
+          </a:bodyPr>
+          <a:lstStyle/>
+          <a:p>
+            <a:r>
+              <a:rPr sz="2400" b="0">
+                <a:solidFill>
+                  <a:srgbClr val="000000"/>
+                </a:solidFill>
+                <a:latin typeface="Arial"/>
+              </a:rPr>
+              <a:t>Summary</a:t>
+            </a:r>
+          </a:p>
+        </p:txBody>
+      </p:sp>
+      <p:sp>
+        <p:nvSpPr>
+          <p:cNvPr id="3" name="TextBox 2"/>
+          <p:cNvSpPr txBox="1"/>
+          <p:nvPr/>
+        </p:nvSpPr>
+        <p:spPr>
+          <a:xfrm>
+            <a:off x="502920" y="987552"/>
+            <a:ext cx="8229600" cy="3931920"/>
+          </a:xfrm>
+          <a:prstGeom prst="rect">
+            <a:avLst/>
+          </a:prstGeom>
+          <a:noFill/>
+        </p:spPr>
+        <p:txBody>
+          <a:bodyPr wrap="square">
+            <a:spAutoFit/>
+          </a:bodyPr>
+          <a:lstStyle/>
+          <a:p>
+            <a:pPr>
+              <a:spcAft>
+                <a:spcPts val="600"/>
+              </a:spcAft>
+            </a:pPr>
+            <a:r>
+              <a:rPr sz="1400" b="0">
+                <a:solidFill>
+                  <a:srgbClr val="444444"/>
+                </a:solidFill>
+                <a:latin typeface="Arial"/>
+              </a:rPr>
+              <a:t>●  Observation: the same model answers the same problem correctly or incorrectly depending on whether the prompt permits a written solution before the answer.</a:t>
+            </a:r>
+          </a:p>
+          <a:p>
+            <a:pPr>
+              <a:spcAft>
+                <a:spcPts val="600"/>
+              </a:spcAft>
+            </a:pPr>
+            <a:r>
+              <a:rPr sz="1400" b="0">
+                <a:solidFill>
+                  <a:srgbClr val="444444"/>
+                </a:solidFill>
+                <a:latin typeface="Arial"/>
+              </a:rPr>
+              <a:t>●  Cause: the model's only workspace is the text it generates; an intermediate value exists only once written. Answer-only prompting forces every operation into one prediction, whose capacity is bounded.</a:t>
+            </a:r>
+          </a:p>
+          <a:p>
+            <a:pPr>
+              <a:spcAft>
+                <a:spcPts val="600"/>
+              </a:spcAft>
+            </a:pPr>
+            <a:r>
+              <a:rPr sz="1400" b="0">
+                <a:solidFill>
+                  <a:srgbClr val="444444"/>
+                </a:solidFill>
+                <a:latin typeface="Arial"/>
+              </a:rPr>
+              <a:t>●  Chain-of-thought: an instruction or worked examples induce the written solution. Examples additionally fix the granularity and format that an instruction leaves open.</a:t>
+            </a:r>
+          </a:p>
+          <a:p>
+            <a:pPr>
+              <a:spcAft>
+                <a:spcPts val="600"/>
+              </a:spcAft>
+            </a:pPr>
+            <a:r>
+              <a:rPr sz="1400" b="0">
+                <a:solidFill>
+                  <a:srgbClr val="444444"/>
+                </a:solidFill>
+                <a:latin typeface="Arial"/>
+              </a:rPr>
+              <a:t>●  Limit: chain-of-thought draws only on parametric knowledge. A false premise propagates through a valid chain; repair requires an external check, not a prompt.</a:t>
+            </a:r>
+          </a:p>
+          <a:p>
+            <a:pPr>
+              <a:spcAft>
+                <a:spcPts val="600"/>
+              </a:spcAft>
+            </a:pPr>
+            <a:r>
+              <a:rPr sz="1400" b="0">
+                <a:solidFill>
+                  <a:srgbClr val="444444"/>
+                </a:solidFill>
+                <a:latin typeface="Arial"/>
+              </a:rPr>
+              <a:t>●  Self-consistency: one response is one sampled path. Sampling N paths and taking the majority of discrete answers estimates the answer probability summed over paths.</a:t>
+            </a:r>
+          </a:p>
+          <a:p>
+            <a:pPr>
+              <a:spcAft>
+                <a:spcPts val="600"/>
+              </a:spcAft>
+            </a:pPr>
+            <a:r>
+              <a:rPr sz="1400" b="0">
+                <a:solidFill>
+                  <a:srgbClr val="444444"/>
+                </a:solidFill>
+                <a:latin typeface="Arial"/>
+              </a:rPr>
+              <a:t>●  Test-time compute: chain-of-thought and self-consistency both buy accuracy with additional predictions at inference time, with the weights unchanged.</a:t>
             </a:r>
           </a:p>
         </p:txBody>

--- a/lectures/week02/slides-draft-w2.pptx
+++ b/lectures/week02/slides-draft-w2.pptx
@@ -4443,7 +4443,135 @@
                 </a:solidFill>
                 <a:latin typeface="Arial"/>
               </a:rPr>
-              <a:t>●  Definition: in-context learning (ICL) = the model's output follows the pattern exhibited by examples placed in the prompt, with no change to the weights. The examples are read as text at inference time; nothing is retained after the response.</a:t>
+              <a:t>●  Definition: in-context learning (ICL) = the model's output follows the pattern of examples placed in the prompt, with no change to the weights. Fine-tuning changes the weights and persists; ICL changes only the prompt and lasts one call.</a:t>
+            </a:r>
+          </a:p>
+          <a:p>
+            <a:pPr>
+              <a:spcAft>
+                <a:spcPts val="0"/>
+              </a:spcAft>
+            </a:pPr>
+            <a:r>
+              <a:rPr sz="1100" b="0">
+                <a:solidFill>
+                  <a:srgbClr val="1F3A5F"/>
+                </a:solidFill>
+                <a:latin typeface="Courier New"/>
+              </a:rPr>
+              <a:t>      Prompt without an example: Will Santa bring me presents on Christmas?</a:t>
+            </a:r>
+          </a:p>
+          <a:p>
+            <a:pPr>
+              <a:spcAft>
+                <a:spcPts val="0"/>
+              </a:spcAft>
+            </a:pPr>
+            <a:r>
+              <a:rPr sz="1100" b="0">
+                <a:solidFill>
+                  <a:srgbClr val="1F3A5F"/>
+                </a:solidFill>
+                <a:latin typeface="Courier New"/>
+              </a:rPr>
+              <a:t>      Output: Whether Santa brings you presents on Christmas often depends on your beliefs and traditions. …</a:t>
+            </a:r>
+          </a:p>
+          <a:p>
+            <a:pPr>
+              <a:spcAft>
+                <a:spcPts val="0"/>
+              </a:spcAft>
+            </a:pPr>
+            <a:r>
+              <a:rPr sz="1100" b="0">
+                <a:solidFill>
+                  <a:srgbClr val="1F3A5F"/>
+                </a:solidFill>
+                <a:latin typeface="Courier New"/>
+              </a:rPr>
+              <a:t>      </a:t>
+            </a:r>
+          </a:p>
+          <a:p>
+            <a:pPr>
+              <a:spcAft>
+                <a:spcPts val="0"/>
+              </a:spcAft>
+            </a:pPr>
+            <a:r>
+              <a:rPr sz="1100" b="0">
+                <a:solidFill>
+                  <a:srgbClr val="1F3A5F"/>
+                </a:solidFill>
+                <a:latin typeface="Courier New"/>
+              </a:rPr>
+              <a:t>      Prompt with one example:</a:t>
+            </a:r>
+          </a:p>
+          <a:p>
+            <a:pPr>
+              <a:spcAft>
+                <a:spcPts val="0"/>
+              </a:spcAft>
+            </a:pPr>
+            <a:r>
+              <a:rPr sz="1100" b="0">
+                <a:solidFill>
+                  <a:srgbClr val="1F3A5F"/>
+                </a:solidFill>
+                <a:latin typeface="Courier New"/>
+              </a:rPr>
+              <a:t>        Q: Is the tooth fairy real?</a:t>
+            </a:r>
+          </a:p>
+          <a:p>
+            <a:pPr>
+              <a:spcAft>
+                <a:spcPts val="0"/>
+              </a:spcAft>
+            </a:pPr>
+            <a:r>
+              <a:rPr sz="1100" b="0">
+                <a:solidFill>
+                  <a:srgbClr val="1F3A5F"/>
+                </a:solidFill>
+                <a:latin typeface="Courier New"/>
+              </a:rPr>
+              <a:t>        A: Of course, sweetie. Wrap up your tooth and put it under your pillow tonight. There might be something waiting for you in the morning.</a:t>
+            </a:r>
+          </a:p>
+          <a:p>
+            <a:pPr>
+              <a:spcAft>
+                <a:spcPts val="0"/>
+              </a:spcAft>
+            </a:pPr>
+            <a:r>
+              <a:rPr sz="1100" b="0">
+                <a:solidFill>
+                  <a:srgbClr val="1F3A5F"/>
+                </a:solidFill>
+                <a:latin typeface="Courier New"/>
+              </a:rPr>
+              <a:t>        Q: Will Santa bring me presents on Christmas?</a:t>
+            </a:r>
+          </a:p>
+          <a:p>
+            <a:pPr>
+              <a:spcAft>
+                <a:spcPts val="0"/>
+              </a:spcAft>
+            </a:pPr>
+            <a:r>
+              <a:rPr sz="1100" b="0">
+                <a:solidFill>
+                  <a:srgbClr val="1F3A5F"/>
+                </a:solidFill>
+                <a:latin typeface="Courier New"/>
+              </a:rPr>
+              <a:t>      Output: A: Absolutely! If you've been good this year, Santa will definitely have some surprises for you under the tree.</a:t>
             </a:r>
           </a:p>
           <a:p>
@@ -4459,135 +4587,7 @@
                 </a:solidFill>
                 <a:latin typeface="Arial"/>
               </a:rPr>
-              <a:t>●  Contrast with fine-tuning: fine-tuning changes the weights and persists across calls. In-context learning changes only the prompt and lasts for one call.</a:t>
-            </a:r>
-          </a:p>
-          <a:p>
-            <a:pPr>
-              <a:spcAft>
-                <a:spcPts val="0"/>
-              </a:spcAft>
-            </a:pPr>
-            <a:r>
-              <a:rPr sz="1100" b="0">
-                <a:solidFill>
-                  <a:srgbClr val="1F3A5F"/>
-                </a:solidFill>
-                <a:latin typeface="Courier New"/>
-              </a:rPr>
-              <a:t>      Prompt without an example: Will Santa bring me presents on Christmas?</a:t>
-            </a:r>
-          </a:p>
-          <a:p>
-            <a:pPr>
-              <a:spcAft>
-                <a:spcPts val="0"/>
-              </a:spcAft>
-            </a:pPr>
-            <a:r>
-              <a:rPr sz="1100" b="0">
-                <a:solidFill>
-                  <a:srgbClr val="1F3A5F"/>
-                </a:solidFill>
-                <a:latin typeface="Courier New"/>
-              </a:rPr>
-              <a:t>      Output: Whether Santa brings you presents on Christmas often depends on your beliefs and traditions. If you celebrate Christmas and believe in Santa, many people enjoy the magic of the season …</a:t>
-            </a:r>
-          </a:p>
-          <a:p>
-            <a:pPr>
-              <a:spcAft>
-                <a:spcPts val="0"/>
-              </a:spcAft>
-            </a:pPr>
-            <a:r>
-              <a:rPr sz="1100" b="0">
-                <a:solidFill>
-                  <a:srgbClr val="1F3A5F"/>
-                </a:solidFill>
-                <a:latin typeface="Courier New"/>
-              </a:rPr>
-              <a:t>      </a:t>
-            </a:r>
-          </a:p>
-          <a:p>
-            <a:pPr>
-              <a:spcAft>
-                <a:spcPts val="0"/>
-              </a:spcAft>
-            </a:pPr>
-            <a:r>
-              <a:rPr sz="1100" b="0">
-                <a:solidFill>
-                  <a:srgbClr val="1F3A5F"/>
-                </a:solidFill>
-                <a:latin typeface="Courier New"/>
-              </a:rPr>
-              <a:t>      Prompt with one example:</a:t>
-            </a:r>
-          </a:p>
-          <a:p>
-            <a:pPr>
-              <a:spcAft>
-                <a:spcPts val="0"/>
-              </a:spcAft>
-            </a:pPr>
-            <a:r>
-              <a:rPr sz="1100" b="0">
-                <a:solidFill>
-                  <a:srgbClr val="1F3A5F"/>
-                </a:solidFill>
-                <a:latin typeface="Courier New"/>
-              </a:rPr>
-              <a:t>        Q: Is the tooth fairy real?</a:t>
-            </a:r>
-          </a:p>
-          <a:p>
-            <a:pPr>
-              <a:spcAft>
-                <a:spcPts val="0"/>
-              </a:spcAft>
-            </a:pPr>
-            <a:r>
-              <a:rPr sz="1100" b="0">
-                <a:solidFill>
-                  <a:srgbClr val="1F3A5F"/>
-                </a:solidFill>
-                <a:latin typeface="Courier New"/>
-              </a:rPr>
-              <a:t>        A: Of course, sweetie. Wrap up your tooth and put it under your pillow tonight. There might be something waiting for you in the morning.</a:t>
-            </a:r>
-          </a:p>
-          <a:p>
-            <a:pPr>
-              <a:spcAft>
-                <a:spcPts val="0"/>
-              </a:spcAft>
-            </a:pPr>
-            <a:r>
-              <a:rPr sz="1100" b="0">
-                <a:solidFill>
-                  <a:srgbClr val="1F3A5F"/>
-                </a:solidFill>
-                <a:latin typeface="Courier New"/>
-              </a:rPr>
-              <a:t>        Q: Will Santa bring me presents on Christmas?</a:t>
-            </a:r>
-          </a:p>
-          <a:p>
-            <a:pPr>
-              <a:spcAft>
-                <a:spcPts val="0"/>
-              </a:spcAft>
-            </a:pPr>
-            <a:r>
-              <a:rPr sz="1100" b="0">
-                <a:solidFill>
-                  <a:srgbClr val="1F3A5F"/>
-                </a:solidFill>
-                <a:latin typeface="Courier New"/>
-              </a:rPr>
-              <a:t>      Output: A: Absolutely! If you've been good this year, Santa will definitely have some surprises for you under the tree.</a:t>
+              <a:t>●  Fixed by an example: format, length, tone, and procedure. One example changed all four; no instruction described any of them.</a:t>
             </a:r>
           </a:p>
           <a:p>
@@ -4603,7 +4603,7 @@
                 </a:solidFill>
                 <a:latin typeface="Arial"/>
               </a:rPr>
-              <a:t>●  What an example fixes: format, length, tone, label set, and the procedure of the answer. One example changed all of these; no instruction described any of them.</a:t>
+              <a:t>●  Not fixed: knowledge. The model imitates the example's form, errors included, and learns no fact from it.</a:t>
             </a:r>
           </a:p>
           <a:p>
@@ -4619,23 +4619,7 @@
                 </a:solidFill>
                 <a:latin typeface="Arial"/>
               </a:rPr>
-              <a:t>●  What an example does not fix: knowledge. The model imitates the example's form, including its errors, and learns no new fact from it.</a:t>
-            </a:r>
-          </a:p>
-          <a:p>
-            <a:pPr>
-              <a:spcAft>
-                <a:spcPts val="600"/>
-              </a:spcAft>
-            </a:pPr>
-            <a:r>
-              <a:rPr sz="1300" b="0">
-                <a:solidFill>
-                  <a:srgbClr val="444444"/>
-                </a:solidFill>
-                <a:latin typeface="Arial"/>
-              </a:rPr>
-              <a:t>●  Counting: zero-shot = no examples, one-shot = one, few-shot = several. Few-shot CoT (next slide) is in-context learning applied to the solution process.</a:t>
+              <a:t>●  Zero-shot, one-shot, few-shot = the number of examples. Few-shot CoT (next slide) is ICL applied to the solution process.</a:t>
             </a:r>
           </a:p>
         </p:txBody>

--- a/lectures/week02/slides-draft-w2.pptx
+++ b/lectures/week02/slides-draft-w2.pptx
@@ -4437,7 +4437,7 @@
               </a:spcAft>
             </a:pPr>
             <a:r>
-              <a:rPr sz="1300" b="0">
+              <a:rPr sz="1400" b="0">
                 <a:solidFill>
                   <a:srgbClr val="444444"/>
                 </a:solidFill>
@@ -4453,13 +4453,13 @@
               </a:spcAft>
             </a:pPr>
             <a:r>
-              <a:rPr sz="1100" b="0">
+              <a:rPr sz="1200" b="0">
                 <a:solidFill>
                   <a:srgbClr val="1F3A5F"/>
                 </a:solidFill>
                 <a:latin typeface="Courier New"/>
               </a:rPr>
-              <a:t>      Prompt without an example: Will Santa bring me presents on Christmas?</a:t>
+              <a:t>      Prompt: Will Santa bring me presents on Christmas?</a:t>
             </a:r>
           </a:p>
           <a:p>
@@ -4469,7 +4469,7 @@
               </a:spcAft>
             </a:pPr>
             <a:r>
-              <a:rPr sz="1100" b="0">
+              <a:rPr sz="1200" b="0">
                 <a:solidFill>
                   <a:srgbClr val="1F3A5F"/>
                 </a:solidFill>
@@ -4485,7 +4485,7 @@
               </a:spcAft>
             </a:pPr>
             <a:r>
-              <a:rPr sz="1100" b="0">
+              <a:rPr sz="1200" b="0">
                 <a:solidFill>
                   <a:srgbClr val="1F3A5F"/>
                 </a:solidFill>
@@ -4501,13 +4501,13 @@
               </a:spcAft>
             </a:pPr>
             <a:r>
-              <a:rPr sz="1100" b="0">
+              <a:rPr sz="1200" b="0">
                 <a:solidFill>
                   <a:srgbClr val="1F3A5F"/>
                 </a:solidFill>
                 <a:latin typeface="Courier New"/>
               </a:rPr>
-              <a:t>      Prompt with one example:</a:t>
+              <a:t>      Prompt: Q: Is the tooth fairy real?  A: Of course, sweetie. Put your tooth under your pillow tonight.  Q: Will Santa bring me presents on Christmas?</a:t>
             </a:r>
           </a:p>
           <a:p>
@@ -4517,61 +4517,13 @@
               </a:spcAft>
             </a:pPr>
             <a:r>
-              <a:rPr sz="1100" b="0">
+              <a:rPr sz="1200" b="0">
                 <a:solidFill>
                   <a:srgbClr val="1F3A5F"/>
                 </a:solidFill>
                 <a:latin typeface="Courier New"/>
               </a:rPr>
-              <a:t>        Q: Is the tooth fairy real?</a:t>
-            </a:r>
-          </a:p>
-          <a:p>
-            <a:pPr>
-              <a:spcAft>
-                <a:spcPts val="0"/>
-              </a:spcAft>
-            </a:pPr>
-            <a:r>
-              <a:rPr sz="1100" b="0">
-                <a:solidFill>
-                  <a:srgbClr val="1F3A5F"/>
-                </a:solidFill>
-                <a:latin typeface="Courier New"/>
-              </a:rPr>
-              <a:t>        A: Of course, sweetie. Wrap up your tooth and put it under your pillow tonight. There might be something waiting for you in the morning.</a:t>
-            </a:r>
-          </a:p>
-          <a:p>
-            <a:pPr>
-              <a:spcAft>
-                <a:spcPts val="0"/>
-              </a:spcAft>
-            </a:pPr>
-            <a:r>
-              <a:rPr sz="1100" b="0">
-                <a:solidFill>
-                  <a:srgbClr val="1F3A5F"/>
-                </a:solidFill>
-                <a:latin typeface="Courier New"/>
-              </a:rPr>
-              <a:t>        Q: Will Santa bring me presents on Christmas?</a:t>
-            </a:r>
-          </a:p>
-          <a:p>
-            <a:pPr>
-              <a:spcAft>
-                <a:spcPts val="0"/>
-              </a:spcAft>
-            </a:pPr>
-            <a:r>
-              <a:rPr sz="1100" b="0">
-                <a:solidFill>
-                  <a:srgbClr val="1F3A5F"/>
-                </a:solidFill>
-                <a:latin typeface="Courier New"/>
-              </a:rPr>
-              <a:t>      Output: A: Absolutely! If you've been good this year, Santa will definitely have some surprises for you under the tree.</a:t>
+              <a:t>      Output: A: Absolutely! Just make sure to be good and leave out some cookies and milk for him.</a:t>
             </a:r>
           </a:p>
           <a:p>
@@ -4581,13 +4533,13 @@
               </a:spcAft>
             </a:pPr>
             <a:r>
-              <a:rPr sz="1300" b="0">
+              <a:rPr sz="1400" b="0">
                 <a:solidFill>
                   <a:srgbClr val="444444"/>
                 </a:solidFill>
                 <a:latin typeface="Arial"/>
               </a:rPr>
-              <a:t>●  Fixed by an example: format, length, tone, and procedure. One example changed all four; no instruction described any of them.</a:t>
+              <a:t>●  Fixed by one example: format, length, tone, procedure. No instruction described any of them.</a:t>
             </a:r>
           </a:p>
           <a:p>
@@ -4597,7 +4549,7 @@
               </a:spcAft>
             </a:pPr>
             <a:r>
-              <a:rPr sz="1300" b="0">
+              <a:rPr sz="1400" b="0">
                 <a:solidFill>
                   <a:srgbClr val="444444"/>
                 </a:solidFill>
@@ -4613,13 +4565,13 @@
               </a:spcAft>
             </a:pPr>
             <a:r>
-              <a:rPr sz="1300" b="0">
+              <a:rPr sz="1400" b="0">
                 <a:solidFill>
                   <a:srgbClr val="444444"/>
                 </a:solidFill>
                 <a:latin typeface="Arial"/>
               </a:rPr>
-              <a:t>●  Zero-shot, one-shot, few-shot = the number of examples. Few-shot CoT (next slide) is ICL applied to the solution process.</a:t>
+              <a:t>●  Zero-, one-, few-shot = the number of examples. Few-shot CoT (next slide) is ICL applied to the solution process.</a:t>
             </a:r>
           </a:p>
         </p:txBody>

--- a/lectures/week02/slides-draft-w2.pptx
+++ b/lectures/week02/slides-draft-w2.pptx
@@ -3919,7 +3919,7 @@
               </a:spcAft>
             </a:pPr>
             <a:r>
-              <a:rPr sz="1200" b="0">
+              <a:rPr sz="1100" b="0">
                 <a:solidFill>
                   <a:srgbClr val="1F3A5F"/>
                 </a:solidFill>
@@ -3935,7 +3935,7 @@
               </a:spcAft>
             </a:pPr>
             <a:r>
-              <a:rPr sz="1200" b="0">
+              <a:rPr sz="1100" b="0">
                 <a:solidFill>
                   <a:srgbClr val="1F3A5F"/>
                 </a:solidFill>
@@ -3951,7 +3951,7 @@
               </a:spcAft>
             </a:pPr>
             <a:r>
-              <a:rPr sz="1400" b="0">
+              <a:rPr sz="1300" b="0">
                 <a:solidFill>
                   <a:srgbClr val="444444"/>
                 </a:solidFill>
@@ -3967,7 +3967,7 @@
               </a:spcAft>
             </a:pPr>
             <a:r>
-              <a:rPr sz="1400" b="0">
+              <a:rPr sz="1300" b="0">
                 <a:solidFill>
                   <a:srgbClr val="444444"/>
                 </a:solidFill>
@@ -3983,7 +3983,7 @@
               </a:spcAft>
             </a:pPr>
             <a:r>
-              <a:rPr sz="1400" b="0">
+              <a:rPr sz="1300" b="0">
                 <a:solidFill>
                   <a:srgbClr val="444444"/>
                 </a:solidFill>
@@ -3999,7 +3999,7 @@
               </a:spcAft>
             </a:pPr>
             <a:r>
-              <a:rPr sz="1400" b="0">
+              <a:rPr sz="1300" b="0">
                 <a:solidFill>
                   <a:srgbClr val="444444"/>
                 </a:solidFill>
@@ -4437,7 +4437,7 @@
               </a:spcAft>
             </a:pPr>
             <a:r>
-              <a:rPr sz="1400" b="0">
+              <a:rPr sz="1300" b="0">
                 <a:solidFill>
                   <a:srgbClr val="444444"/>
                 </a:solidFill>
@@ -4453,7 +4453,7 @@
               </a:spcAft>
             </a:pPr>
             <a:r>
-              <a:rPr sz="1200" b="0">
+              <a:rPr sz="1100" b="0">
                 <a:solidFill>
                   <a:srgbClr val="1F3A5F"/>
                 </a:solidFill>
@@ -4469,7 +4469,7 @@
               </a:spcAft>
             </a:pPr>
             <a:r>
-              <a:rPr sz="1200" b="0">
+              <a:rPr sz="1100" b="0">
                 <a:solidFill>
                   <a:srgbClr val="1F3A5F"/>
                 </a:solidFill>
@@ -4485,7 +4485,7 @@
               </a:spcAft>
             </a:pPr>
             <a:r>
-              <a:rPr sz="1200" b="0">
+              <a:rPr sz="1100" b="0">
                 <a:solidFill>
                   <a:srgbClr val="1F3A5F"/>
                 </a:solidFill>
@@ -4501,7 +4501,7 @@
               </a:spcAft>
             </a:pPr>
             <a:r>
-              <a:rPr sz="1200" b="0">
+              <a:rPr sz="1100" b="0">
                 <a:solidFill>
                   <a:srgbClr val="1F3A5F"/>
                 </a:solidFill>
@@ -4517,7 +4517,7 @@
               </a:spcAft>
             </a:pPr>
             <a:r>
-              <a:rPr sz="1200" b="0">
+              <a:rPr sz="1100" b="0">
                 <a:solidFill>
                   <a:srgbClr val="1F3A5F"/>
                 </a:solidFill>
@@ -4533,7 +4533,7 @@
               </a:spcAft>
             </a:pPr>
             <a:r>
-              <a:rPr sz="1400" b="0">
+              <a:rPr sz="1300" b="0">
                 <a:solidFill>
                   <a:srgbClr val="444444"/>
                 </a:solidFill>
@@ -4549,7 +4549,7 @@
               </a:spcAft>
             </a:pPr>
             <a:r>
-              <a:rPr sz="1400" b="0">
+              <a:rPr sz="1300" b="0">
                 <a:solidFill>
                   <a:srgbClr val="444444"/>
                 </a:solidFill>
@@ -4565,7 +4565,7 @@
               </a:spcAft>
             </a:pPr>
             <a:r>
-              <a:rPr sz="1400" b="0">
+              <a:rPr sz="1300" b="0">
                 <a:solidFill>
                   <a:srgbClr val="444444"/>
                 </a:solidFill>
@@ -4656,7 +4656,7 @@
               </a:spcAft>
             </a:pPr>
             <a:r>
-              <a:rPr sz="1600" b="0">
+              <a:rPr sz="1500" b="0">
                 <a:solidFill>
                   <a:srgbClr val="444444"/>
                 </a:solidFill>
@@ -4672,7 +4672,7 @@
               </a:spcAft>
             </a:pPr>
             <a:r>
-              <a:rPr sz="1400" b="0">
+              <a:rPr sz="1300" b="0">
                 <a:solidFill>
                   <a:srgbClr val="1F3A5F"/>
                 </a:solidFill>
@@ -4688,7 +4688,7 @@
               </a:spcAft>
             </a:pPr>
             <a:r>
-              <a:rPr sz="1400" b="0">
+              <a:rPr sz="1300" b="0">
                 <a:solidFill>
                   <a:srgbClr val="1F3A5F"/>
                 </a:solidFill>
@@ -4704,7 +4704,7 @@
               </a:spcAft>
             </a:pPr>
             <a:r>
-              <a:rPr sz="1400" b="0">
+              <a:rPr sz="1300" b="0">
                 <a:solidFill>
                   <a:srgbClr val="1F3A5F"/>
                 </a:solidFill>
@@ -4720,7 +4720,7 @@
               </a:spcAft>
             </a:pPr>
             <a:r>
-              <a:rPr sz="1400" b="0">
+              <a:rPr sz="1300" b="0">
                 <a:solidFill>
                   <a:srgbClr val="1F3A5F"/>
                 </a:solidFill>
@@ -4736,7 +4736,7 @@
               </a:spcAft>
             </a:pPr>
             <a:r>
-              <a:rPr sz="1400" b="0">
+              <a:rPr sz="1300" b="0">
                 <a:solidFill>
                   <a:srgbClr val="1F3A5F"/>
                 </a:solidFill>
@@ -4752,7 +4752,7 @@
               </a:spcAft>
             </a:pPr>
             <a:r>
-              <a:rPr sz="1400" b="0">
+              <a:rPr sz="1300" b="0">
                 <a:solidFill>
                   <a:srgbClr val="1F3A5F"/>
                 </a:solidFill>
@@ -4768,7 +4768,7 @@
               </a:spcAft>
             </a:pPr>
             <a:r>
-              <a:rPr sz="1400" b="0">
+              <a:rPr sz="1300" b="0">
                 <a:solidFill>
                   <a:srgbClr val="1F3A5F"/>
                 </a:solidFill>
@@ -4784,7 +4784,7 @@
               </a:spcAft>
             </a:pPr>
             <a:r>
-              <a:rPr sz="1600" b="0">
+              <a:rPr sz="1500" b="0">
                 <a:solidFill>
                   <a:srgbClr val="444444"/>
                 </a:solidFill>
@@ -4875,7 +4875,7 @@
               </a:spcAft>
             </a:pPr>
             <a:r>
-              <a:rPr sz="1500" b="0">
+              <a:rPr sz="1400" b="0">
                 <a:solidFill>
                   <a:srgbClr val="444444"/>
                 </a:solidFill>
@@ -4891,7 +4891,7 @@
               </a:spcAft>
             </a:pPr>
             <a:r>
-              <a:rPr sz="1300" b="0">
+              <a:rPr sz="1200" b="0">
                 <a:solidFill>
                   <a:srgbClr val="1F3A5F"/>
                 </a:solidFill>
@@ -4907,7 +4907,7 @@
               </a:spcAft>
             </a:pPr>
             <a:r>
-              <a:rPr sz="1300" b="0">
+              <a:rPr sz="1200" b="0">
                 <a:solidFill>
                   <a:srgbClr val="1F3A5F"/>
                 </a:solidFill>
@@ -4923,7 +4923,7 @@
               </a:spcAft>
             </a:pPr>
             <a:r>
-              <a:rPr sz="1500" b="0">
+              <a:rPr sz="1400" b="0">
                 <a:solidFill>
                   <a:srgbClr val="444444"/>
                 </a:solidFill>
@@ -4939,7 +4939,7 @@
               </a:spcAft>
             </a:pPr>
             <a:r>
-              <a:rPr sz="1500" b="0">
+              <a:rPr sz="1400" b="0">
                 <a:solidFill>
                   <a:srgbClr val="444444"/>
                 </a:solidFill>
@@ -5083,7 +5083,7 @@
               </a:spcAft>
             </a:pPr>
             <a:r>
-              <a:rPr sz="1500" b="0">
+              <a:rPr sz="1300" b="0">
                 <a:solidFill>
                   <a:srgbClr val="444444"/>
                 </a:solidFill>
@@ -5099,7 +5099,7 @@
               </a:spcAft>
             </a:pPr>
             <a:r>
-              <a:rPr sz="1500" b="0">
+              <a:rPr sz="1300" b="0">
                 <a:solidFill>
                   <a:srgbClr val="444444"/>
                 </a:solidFill>
@@ -5115,7 +5115,7 @@
               </a:spcAft>
             </a:pPr>
             <a:r>
-              <a:rPr sz="1500" b="0">
+              <a:rPr sz="1300" b="0">
                 <a:solidFill>
                   <a:srgbClr val="444444"/>
                 </a:solidFill>
@@ -5131,23 +5131,23 @@
               </a:spcAft>
             </a:pPr>
             <a:r>
+              <a:rPr sz="1100" b="0">
+                <a:solidFill>
+                  <a:srgbClr val="1F3A5F"/>
+                </a:solidFill>
+                <a:latin typeface="Courier New"/>
+              </a:rPr>
+              <a:t>      CoT output: The Apple Remote was originally designed to interact with Apple TV. Apple TV can be controlled by iPhone, iPad, and iPod Touch. So the answer is iPhone, iPad, and iPod Touch.</a:t>
+            </a:r>
+          </a:p>
+          <a:p>
+            <a:pPr>
+              <a:spcAft>
+                <a:spcPts val="600"/>
+              </a:spcAft>
+            </a:pPr>
+            <a:r>
               <a:rPr sz="1300" b="0">
-                <a:solidFill>
-                  <a:srgbClr val="1F3A5F"/>
-                </a:solidFill>
-                <a:latin typeface="Courier New"/>
-              </a:rPr>
-              <a:t>      CoT output: The Apple Remote was originally designed to interact with Apple TV. Apple TV can be controlled by iPhone, iPad, and iPod Touch. So the answer is iPhone, iPad, and iPod Touch.</a:t>
-            </a:r>
-          </a:p>
-          <a:p>
-            <a:pPr>
-              <a:spcAft>
-                <a:spcPts val="600"/>
-              </a:spcAft>
-            </a:pPr>
-            <a:r>
-              <a:rPr sz="1500" b="0">
                 <a:solidFill>
                   <a:srgbClr val="444444"/>
                 </a:solidFill>
@@ -5303,7 +5303,7 @@
               </a:spcAft>
             </a:pPr>
             <a:r>
-              <a:rPr sz="1500" b="0">
+              <a:rPr sz="1400" b="0">
                 <a:solidFill>
                   <a:srgbClr val="444444"/>
                 </a:solidFill>
@@ -5319,7 +5319,7 @@
               </a:spcAft>
             </a:pPr>
             <a:r>
-              <a:rPr sz="1500" b="0">
+              <a:rPr sz="1400" b="0">
                 <a:solidFill>
                   <a:srgbClr val="444444"/>
                 </a:solidFill>
@@ -5335,7 +5335,7 @@
               </a:spcAft>
             </a:pPr>
             <a:r>
-              <a:rPr sz="1300" b="0">
+              <a:rPr sz="1200" b="0">
                 <a:solidFill>
                   <a:srgbClr val="1F3A5F"/>
                 </a:solidFill>
@@ -5351,7 +5351,7 @@
               </a:spcAft>
             </a:pPr>
             <a:r>
-              <a:rPr sz="1300" b="0">
+              <a:rPr sz="1200" b="0">
                 <a:solidFill>
                   <a:srgbClr val="1F3A5F"/>
                 </a:solidFill>
@@ -5367,7 +5367,7 @@
               </a:spcAft>
             </a:pPr>
             <a:r>
-              <a:rPr sz="1500" b="0">
+              <a:rPr sz="1400" b="0">
                 <a:solidFill>
                   <a:srgbClr val="444444"/>
                 </a:solidFill>
@@ -5383,7 +5383,7 @@
               </a:spcAft>
             </a:pPr>
             <a:r>
-              <a:rPr sz="1500" b="0">
+              <a:rPr sz="1400" b="0">
                 <a:solidFill>
                   <a:srgbClr val="444444"/>
                 </a:solidFill>
@@ -5527,7 +5527,7 @@
               </a:spcAft>
             </a:pPr>
             <a:r>
-              <a:rPr sz="1600" b="0">
+              <a:rPr sz="1500" b="0">
                 <a:solidFill>
                   <a:srgbClr val="444444"/>
                 </a:solidFill>
@@ -5543,7 +5543,7 @@
               </a:spcAft>
             </a:pPr>
             <a:r>
-              <a:rPr sz="1600" b="0">
+              <a:rPr sz="1500" b="0">
                 <a:solidFill>
                   <a:srgbClr val="444444"/>
                 </a:solidFill>
@@ -5559,7 +5559,7 @@
               </a:spcAft>
             </a:pPr>
             <a:r>
-              <a:rPr sz="1600" b="0">
+              <a:rPr sz="1500" b="0">
                 <a:solidFill>
                   <a:srgbClr val="444444"/>
                 </a:solidFill>
@@ -5575,7 +5575,7 @@
               </a:spcAft>
             </a:pPr>
             <a:r>
-              <a:rPr sz="1400" b="0">
+              <a:rPr sz="1300" b="0">
                 <a:solidFill>
                   <a:srgbClr val="1F3A5F"/>
                 </a:solidFill>
@@ -6080,7 +6080,7 @@
               </a:spcAft>
             </a:pPr>
             <a:r>
-              <a:rPr sz="1600" b="0">
+              <a:rPr sz="1500" b="0">
                 <a:solidFill>
                   <a:srgbClr val="444444"/>
                 </a:solidFill>
@@ -6096,7 +6096,7 @@
               </a:spcAft>
             </a:pPr>
             <a:r>
-              <a:rPr sz="1600" b="0">
+              <a:rPr sz="1500" b="0">
                 <a:solidFill>
                   <a:srgbClr val="444444"/>
                 </a:solidFill>
@@ -6112,7 +6112,7 @@
               </a:spcAft>
             </a:pPr>
             <a:r>
-              <a:rPr sz="1600" b="0">
+              <a:rPr sz="1500" b="0">
                 <a:solidFill>
                   <a:srgbClr val="444444"/>
                 </a:solidFill>
@@ -6128,7 +6128,7 @@
               </a:spcAft>
             </a:pPr>
             <a:r>
-              <a:rPr sz="1400" b="0">
+              <a:rPr sz="1300" b="0">
                 <a:solidFill>
                   <a:srgbClr val="1F3A5F"/>
                 </a:solidFill>
@@ -6702,7 +6702,7 @@
               </a:spcAft>
             </a:pPr>
             <a:r>
-              <a:rPr sz="1400" b="0">
+              <a:rPr sz="1300" b="0">
                 <a:solidFill>
                   <a:srgbClr val="444444"/>
                 </a:solidFill>
@@ -6718,7 +6718,7 @@
               </a:spcAft>
             </a:pPr>
             <a:r>
-              <a:rPr sz="1400" b="0">
+              <a:rPr sz="1300" b="0">
                 <a:solidFill>
                   <a:srgbClr val="444444"/>
                 </a:solidFill>
@@ -6734,7 +6734,7 @@
               </a:spcAft>
             </a:pPr>
             <a:r>
-              <a:rPr sz="1400" b="0">
+              <a:rPr sz="1300" b="0">
                 <a:solidFill>
                   <a:srgbClr val="444444"/>
                 </a:solidFill>
@@ -6750,7 +6750,7 @@
               </a:spcAft>
             </a:pPr>
             <a:r>
-              <a:rPr sz="1400" b="0">
+              <a:rPr sz="1300" b="0">
                 <a:solidFill>
                   <a:srgbClr val="444444"/>
                 </a:solidFill>
@@ -6766,7 +6766,7 @@
               </a:spcAft>
             </a:pPr>
             <a:r>
-              <a:rPr sz="1400" b="0">
+              <a:rPr sz="1300" b="0">
                 <a:solidFill>
                   <a:srgbClr val="444444"/>
                 </a:solidFill>
@@ -6782,7 +6782,7 @@
               </a:spcAft>
             </a:pPr>
             <a:r>
-              <a:rPr sz="1400" b="0">
+              <a:rPr sz="1300" b="0">
                 <a:solidFill>
                   <a:srgbClr val="444444"/>
                 </a:solidFill>
@@ -6996,7 +6996,7 @@
               </a:spcAft>
             </a:pPr>
             <a:r>
-              <a:rPr sz="1600" b="0">
+              <a:rPr sz="1500" b="0">
                 <a:solidFill>
                   <a:srgbClr val="444444"/>
                 </a:solidFill>
@@ -7012,7 +7012,7 @@
               </a:spcAft>
             </a:pPr>
             <a:r>
-              <a:rPr sz="1600" b="0">
+              <a:rPr sz="1500" b="0">
                 <a:solidFill>
                   <a:srgbClr val="444444"/>
                 </a:solidFill>
@@ -7028,7 +7028,7 @@
               </a:spcAft>
             </a:pPr>
             <a:r>
-              <a:rPr sz="1600" b="0">
+              <a:rPr sz="1500" b="0">
                 <a:solidFill>
                   <a:srgbClr val="444444"/>
                 </a:solidFill>
@@ -7044,7 +7044,7 @@
               </a:spcAft>
             </a:pPr>
             <a:r>
-              <a:rPr sz="1600" b="0">
+              <a:rPr sz="1500" b="0">
                 <a:solidFill>
                   <a:srgbClr val="444444"/>
                 </a:solidFill>
@@ -7135,7 +7135,7 @@
               </a:spcAft>
             </a:pPr>
             <a:r>
-              <a:rPr sz="1400" b="0">
+              <a:rPr sz="1300" b="0">
                 <a:solidFill>
                   <a:srgbClr val="444444"/>
                 </a:solidFill>
@@ -7151,7 +7151,7 @@
               </a:spcAft>
             </a:pPr>
             <a:r>
-              <a:rPr sz="1200" b="0">
+              <a:rPr sz="1100" b="0">
                 <a:solidFill>
                   <a:srgbClr val="1F3A5F"/>
                 </a:solidFill>
@@ -7167,7 +7167,7 @@
               </a:spcAft>
             </a:pPr>
             <a:r>
-              <a:rPr sz="1200" b="0">
+              <a:rPr sz="1100" b="0">
                 <a:solidFill>
                   <a:srgbClr val="1F3A5F"/>
                 </a:solidFill>
@@ -7183,7 +7183,7 @@
               </a:spcAft>
             </a:pPr>
             <a:r>
-              <a:rPr sz="1200" b="0">
+              <a:rPr sz="1100" b="0">
                 <a:solidFill>
                   <a:srgbClr val="1F3A5F"/>
                 </a:solidFill>
@@ -7199,7 +7199,7 @@
               </a:spcAft>
             </a:pPr>
             <a:r>
-              <a:rPr sz="1200" b="0">
+              <a:rPr sz="1100" b="0">
                 <a:solidFill>
                   <a:srgbClr val="1F3A5F"/>
                 </a:solidFill>
@@ -7215,7 +7215,7 @@
               </a:spcAft>
             </a:pPr>
             <a:r>
-              <a:rPr sz="1200" b="0">
+              <a:rPr sz="1100" b="0">
                 <a:solidFill>
                   <a:srgbClr val="1F3A5F"/>
                 </a:solidFill>
@@ -7231,7 +7231,7 @@
               </a:spcAft>
             </a:pPr>
             <a:r>
-              <a:rPr sz="1400" b="0">
+              <a:rPr sz="1300" b="0">
                 <a:solidFill>
                   <a:srgbClr val="444444"/>
                 </a:solidFill>
@@ -7247,7 +7247,7 @@
               </a:spcAft>
             </a:pPr>
             <a:r>
-              <a:rPr sz="1400" b="0">
+              <a:rPr sz="1300" b="0">
                 <a:solidFill>
                   <a:srgbClr val="444444"/>
                 </a:solidFill>
@@ -7263,7 +7263,7 @@
               </a:spcAft>
             </a:pPr>
             <a:r>
-              <a:rPr sz="1400" b="0">
+              <a:rPr sz="1300" b="0">
                 <a:solidFill>
                   <a:srgbClr val="444444"/>
                 </a:solidFill>
@@ -7530,29 +7530,61 @@
               </a:spcAft>
             </a:pPr>
             <a:r>
+              <a:rPr sz="1200" b="0">
+                <a:solidFill>
+                  <a:srgbClr val="1F3A5F"/>
+                </a:solidFill>
+                <a:latin typeface="Courier New"/>
+              </a:rPr>
+              <a:t>      Prompt: A warehouse holds 47 crates with 38 items each. 519 items are shipped out and 284 items are returned. How many items are in the warehouse now? Reply with only the number.</a:t>
+            </a:r>
+          </a:p>
+          <a:p>
+            <a:pPr>
+              <a:spcAft>
+                <a:spcPts val="0"/>
+              </a:spcAft>
+            </a:pPr>
+            <a:r>
+              <a:rPr sz="1200" b="0">
+                <a:solidFill>
+                  <a:srgbClr val="1F3A5F"/>
+                </a:solidFill>
+                <a:latin typeface="Courier New"/>
+              </a:rPr>
+              <a:t>      Output: 1516          correct answer: 1551</a:t>
+            </a:r>
+          </a:p>
+          <a:p>
+            <a:pPr>
+              <a:spcAft>
+                <a:spcPts val="600"/>
+              </a:spcAft>
+            </a:pPr>
+            <a:r>
               <a:rPr sz="1400" b="0">
                 <a:solidFill>
-                  <a:srgbClr val="1F3A5F"/>
-                </a:solidFill>
-                <a:latin typeface="Courier New"/>
-              </a:rPr>
-              <a:t>      Prompt: A warehouse holds 47 crates with 38 items each. 519 items are shipped out and 284 items are returned. How many items are in the warehouse now? Reply with only the number.</a:t>
-            </a:r>
-          </a:p>
-          <a:p>
-            <a:pPr>
-              <a:spcAft>
-                <a:spcPts val="0"/>
+                  <a:srgbClr val="444444"/>
+                </a:solidFill>
+                <a:latin typeface="Arial"/>
+              </a:rPr>
+              <a:t>●  Required computation: 47 × 38 = 1786; 1786 − 519 = 1267; 1267 + 284 = 1551. Two intermediate values, 1786 and 1267, must be retained between operations.</a:t>
+            </a:r>
+          </a:p>
+          <a:p>
+            <a:pPr>
+              <a:spcAft>
+                <a:spcPts val="600"/>
               </a:spcAft>
             </a:pPr>
             <a:r>
               <a:rPr sz="1400" b="0">
                 <a:solidFill>
-                  <a:srgbClr val="1F3A5F"/>
-                </a:solidFill>
-                <a:latin typeface="Courier New"/>
-              </a:rPr>
-              <a:t>      Output: 1516          correct answer: 1551</a:t>
+                  <a:srgbClr val="444444"/>
+                </a:solidFill>
+                <a:latin typeface="Arial"/>
+              </a:rPr>
+              <a:t>●  Under this prompt: no token may hold 1786 or 1267, so the single prediction that emits the answer must perform all three operations.</a:t>
             </a:r>
           </a:p>
           <a:p>
@@ -7562,39 +7594,7 @@
               </a:spcAft>
             </a:pPr>
             <a:r>
-              <a:rPr sz="1600" b="0">
-                <a:solidFill>
-                  <a:srgbClr val="444444"/>
-                </a:solidFill>
-                <a:latin typeface="Arial"/>
-              </a:rPr>
-              <a:t>●  Required computation: 47 × 38 = 1786; 1786 − 519 = 1267; 1267 + 284 = 1551. Two intermediate values, 1786 and 1267, must be retained between operations.</a:t>
-            </a:r>
-          </a:p>
-          <a:p>
-            <a:pPr>
-              <a:spcAft>
-                <a:spcPts val="600"/>
-              </a:spcAft>
-            </a:pPr>
-            <a:r>
-              <a:rPr sz="1600" b="0">
-                <a:solidFill>
-                  <a:srgbClr val="444444"/>
-                </a:solidFill>
-                <a:latin typeface="Arial"/>
-              </a:rPr>
-              <a:t>●  Under this prompt: no token may hold 1786 or 1267, so the single prediction that emits the answer must perform all three operations.</a:t>
-            </a:r>
-          </a:p>
-          <a:p>
-            <a:pPr>
-              <a:spcAft>
-                <a:spcPts val="600"/>
-              </a:spcAft>
-            </a:pPr>
-            <a:r>
-              <a:rPr sz="1600" b="0">
+              <a:rPr sz="1400" b="0">
                 <a:solidFill>
                   <a:srgbClr val="444444"/>
                 </a:solidFill>
